--- a/chapter14/ASE_14_Quality_of_SWE.pptx
+++ b/chapter14/ASE_14_Quality_of_SWE.pptx
@@ -1,49 +1,49 @@
 
 <file path=ppt/presentation.xml><?xml version="1.0" encoding="utf-8"?>
-<p:presentation xmlns:a="http://schemas.openxmlformats.org/drawingml/2006/main" xmlns:r="http://schemas.openxmlformats.org/officeDocument/2006/relationships" xmlns:p="http://schemas.openxmlformats.org/presentationml/2006/main" saveSubsetFonts="1">
+<p:presentation xmlns:a="http://schemas.openxmlformats.org/drawingml/2006/main" xmlns:r="http://schemas.openxmlformats.org/officeDocument/2006/relationships" xmlns:p="http://schemas.openxmlformats.org/presentationml/2006/main">
   <p:sldMasterIdLst>
-    <p:sldMasterId id="2147483684" r:id="rId4"/>
+    <p:sldMasterId id="2147483648" r:id="rId1"/>
   </p:sldMasterIdLst>
   <p:notesMasterIdLst>
-    <p:notesMasterId r:id="rId41"/>
+    <p:notesMasterId r:id="rId13"/>
   </p:notesMasterIdLst>
   <p:sldIdLst>
-    <p:sldId id="256" r:id="rId5"/>
-    <p:sldId id="283" r:id="rId6"/>
-    <p:sldId id="284" r:id="rId7"/>
-    <p:sldId id="285" r:id="rId8"/>
-    <p:sldId id="274" r:id="rId9"/>
-    <p:sldId id="286" r:id="rId10"/>
-    <p:sldId id="287" r:id="rId11"/>
-    <p:sldId id="288" r:id="rId12"/>
-    <p:sldId id="289" r:id="rId13"/>
-    <p:sldId id="290" r:id="rId14"/>
-    <p:sldId id="262" r:id="rId15"/>
-    <p:sldId id="257" r:id="rId16"/>
-    <p:sldId id="258" r:id="rId17"/>
-    <p:sldId id="259" r:id="rId18"/>
-    <p:sldId id="260" r:id="rId19"/>
-    <p:sldId id="261" r:id="rId20"/>
-    <p:sldId id="267" r:id="rId21"/>
-    <p:sldId id="268" r:id="rId22"/>
-    <p:sldId id="272" r:id="rId23"/>
-    <p:sldId id="275" r:id="rId24"/>
-    <p:sldId id="276" r:id="rId25"/>
-    <p:sldId id="277" r:id="rId26"/>
-    <p:sldId id="278" r:id="rId27"/>
-    <p:sldId id="279" r:id="rId28"/>
-    <p:sldId id="280" r:id="rId29"/>
-    <p:sldId id="281" r:id="rId30"/>
-    <p:sldId id="291" r:id="rId31"/>
-    <p:sldId id="292" r:id="rId32"/>
-    <p:sldId id="282" r:id="rId33"/>
-    <p:sldId id="293" r:id="rId34"/>
-    <p:sldId id="294" r:id="rId35"/>
-    <p:sldId id="310" r:id="rId36"/>
-    <p:sldId id="311" r:id="rId37"/>
-    <p:sldId id="312" r:id="rId38"/>
-    <p:sldId id="313" r:id="rId39"/>
-    <p:sldId id="309" r:id="rId40"/>
+    <p:sldId id="256" r:id="rId3"/>
+    <p:sldId id="283" r:id="rId4"/>
+    <p:sldId id="284" r:id="rId5"/>
+    <p:sldId id="285" r:id="rId6"/>
+    <p:sldId id="274" r:id="rId7"/>
+    <p:sldId id="286" r:id="rId8"/>
+    <p:sldId id="287" r:id="rId9"/>
+    <p:sldId id="288" r:id="rId10"/>
+    <p:sldId id="289" r:id="rId11"/>
+    <p:sldId id="290" r:id="rId12"/>
+    <p:sldId id="262" r:id="rId14"/>
+    <p:sldId id="257" r:id="rId15"/>
+    <p:sldId id="258" r:id="rId16"/>
+    <p:sldId id="259" r:id="rId17"/>
+    <p:sldId id="260" r:id="rId18"/>
+    <p:sldId id="261" r:id="rId19"/>
+    <p:sldId id="267" r:id="rId20"/>
+    <p:sldId id="268" r:id="rId21"/>
+    <p:sldId id="272" r:id="rId22"/>
+    <p:sldId id="275" r:id="rId23"/>
+    <p:sldId id="276" r:id="rId24"/>
+    <p:sldId id="277" r:id="rId25"/>
+    <p:sldId id="278" r:id="rId26"/>
+    <p:sldId id="279" r:id="rId27"/>
+    <p:sldId id="280" r:id="rId28"/>
+    <p:sldId id="281" r:id="rId29"/>
+    <p:sldId id="291" r:id="rId30"/>
+    <p:sldId id="292" r:id="rId31"/>
+    <p:sldId id="282" r:id="rId32"/>
+    <p:sldId id="293" r:id="rId33"/>
+    <p:sldId id="294" r:id="rId34"/>
+    <p:sldId id="310" r:id="rId35"/>
+    <p:sldId id="311" r:id="rId36"/>
+    <p:sldId id="312" r:id="rId37"/>
+    <p:sldId id="313" r:id="rId38"/>
+    <p:sldId id="309" r:id="rId39"/>
   </p:sldIdLst>
   <p:sldSz cx="12192000" cy="6858000"/>
   <p:notesSz cx="6858000" cy="9144000"/>
@@ -161,1304 +161,6 @@
 </p:presentation>
 </file>
 
-<file path=ppt/changesInfos/changesInfo1.xml><?xml version="1.0" encoding="utf-8"?>
-<pc:chgInfo xmlns:a="http://schemas.openxmlformats.org/drawingml/2006/main" xmlns:r="http://schemas.openxmlformats.org/officeDocument/2006/relationships" xmlns:ac="http://schemas.microsoft.com/office/drawing/2013/main/command" xmlns:pc="http://schemas.microsoft.com/office/powerpoint/2013/main/command">
-  <pc:docChgLst>
-    <pc:chgData name="Xin Zou" userId="260b9726081dae15" providerId="LiveId" clId="{CD2C1F0B-44A1-4EE0-A9A4-DAABCBE61858}"/>
-    <pc:docChg chg="undo custSel mod addSld delSld modSld modMainMaster">
-      <pc:chgData name="Xin Zou" userId="260b9726081dae15" providerId="LiveId" clId="{CD2C1F0B-44A1-4EE0-A9A4-DAABCBE61858}" dt="2018-10-08T21:52:57.758" v="4404" actId="20577"/>
-      <pc:docMkLst>
-        <pc:docMk/>
-      </pc:docMkLst>
-      <pc:sldChg chg="modSp">
-        <pc:chgData name="Xin Zou" userId="260b9726081dae15" providerId="LiveId" clId="{CD2C1F0B-44A1-4EE0-A9A4-DAABCBE61858}" dt="2018-10-08T00:50:05.495" v="4102" actId="27636"/>
-        <pc:sldMkLst>
-          <pc:docMk/>
-          <pc:sldMk cId="0" sldId="256"/>
-        </pc:sldMkLst>
-        <pc:spChg chg="mod">
-          <ac:chgData name="Xin Zou" userId="260b9726081dae15" providerId="LiveId" clId="{CD2C1F0B-44A1-4EE0-A9A4-DAABCBE61858}" dt="2018-10-08T00:50:05.495" v="4102" actId="27636"/>
-          <ac:spMkLst>
-            <pc:docMk/>
-            <pc:sldMk cId="0" sldId="256"/>
-            <ac:spMk id="3" creationId="{00000000-0000-0000-0000-000000000000}"/>
-          </ac:spMkLst>
-        </pc:spChg>
-      </pc:sldChg>
-      <pc:sldChg chg="modSp">
-        <pc:chgData name="Xin Zou" userId="260b9726081dae15" providerId="LiveId" clId="{CD2C1F0B-44A1-4EE0-A9A4-DAABCBE61858}" dt="2018-10-07T06:54:44.726" v="1" actId="27636"/>
-        <pc:sldMkLst>
-          <pc:docMk/>
-          <pc:sldMk cId="0" sldId="258"/>
-        </pc:sldMkLst>
-        <pc:spChg chg="mod">
-          <ac:chgData name="Xin Zou" userId="260b9726081dae15" providerId="LiveId" clId="{CD2C1F0B-44A1-4EE0-A9A4-DAABCBE61858}" dt="2018-10-07T06:54:44.726" v="1" actId="27636"/>
-          <ac:spMkLst>
-            <pc:docMk/>
-            <pc:sldMk cId="0" sldId="258"/>
-            <ac:spMk id="3" creationId="{00000000-0000-0000-0000-000000000000}"/>
-          </ac:spMkLst>
-        </pc:spChg>
-      </pc:sldChg>
-      <pc:sldChg chg="modSp">
-        <pc:chgData name="Xin Zou" userId="260b9726081dae15" providerId="LiveId" clId="{CD2C1F0B-44A1-4EE0-A9A4-DAABCBE61858}" dt="2018-10-07T06:54:44.758" v="2" actId="27636"/>
-        <pc:sldMkLst>
-          <pc:docMk/>
-          <pc:sldMk cId="0" sldId="259"/>
-        </pc:sldMkLst>
-        <pc:spChg chg="mod">
-          <ac:chgData name="Xin Zou" userId="260b9726081dae15" providerId="LiveId" clId="{CD2C1F0B-44A1-4EE0-A9A4-DAABCBE61858}" dt="2018-10-07T06:54:44.758" v="2" actId="27636"/>
-          <ac:spMkLst>
-            <pc:docMk/>
-            <pc:sldMk cId="0" sldId="259"/>
-            <ac:spMk id="3" creationId="{00000000-0000-0000-0000-000000000000}"/>
-          </ac:spMkLst>
-        </pc:spChg>
-      </pc:sldChg>
-      <pc:sldChg chg="modSp">
-        <pc:chgData name="Xin Zou" userId="260b9726081dae15" providerId="LiveId" clId="{CD2C1F0B-44A1-4EE0-A9A4-DAABCBE61858}" dt="2018-10-07T18:32:42.637" v="1323"/>
-        <pc:sldMkLst>
-          <pc:docMk/>
-          <pc:sldMk cId="0" sldId="262"/>
-        </pc:sldMkLst>
-        <pc:spChg chg="mod">
-          <ac:chgData name="Xin Zou" userId="260b9726081dae15" providerId="LiveId" clId="{CD2C1F0B-44A1-4EE0-A9A4-DAABCBE61858}" dt="2018-10-07T18:32:42.637" v="1323"/>
-          <ac:spMkLst>
-            <pc:docMk/>
-            <pc:sldMk cId="0" sldId="262"/>
-            <ac:spMk id="3" creationId="{00000000-0000-0000-0000-000000000000}"/>
-          </ac:spMkLst>
-        </pc:spChg>
-      </pc:sldChg>
-      <pc:sldChg chg="modSp modAnim">
-        <pc:chgData name="Xin Zou" userId="260b9726081dae15" providerId="LiveId" clId="{CD2C1F0B-44A1-4EE0-A9A4-DAABCBE61858}" dt="2018-10-08T00:49:49.454" v="4097" actId="27636"/>
-        <pc:sldMkLst>
-          <pc:docMk/>
-          <pc:sldMk cId="1635746704" sldId="267"/>
-        </pc:sldMkLst>
-        <pc:spChg chg="mod">
-          <ac:chgData name="Xin Zou" userId="260b9726081dae15" providerId="LiveId" clId="{CD2C1F0B-44A1-4EE0-A9A4-DAABCBE61858}" dt="2018-10-08T00:49:49.454" v="4097" actId="27636"/>
-          <ac:spMkLst>
-            <pc:docMk/>
-            <pc:sldMk cId="1635746704" sldId="267"/>
-            <ac:spMk id="3" creationId="{00000000-0000-0000-0000-000000000000}"/>
-          </ac:spMkLst>
-        </pc:spChg>
-      </pc:sldChg>
-      <pc:sldChg chg="modSp">
-        <pc:chgData name="Xin Zou" userId="260b9726081dae15" providerId="LiveId" clId="{CD2C1F0B-44A1-4EE0-A9A4-DAABCBE61858}" dt="2018-10-08T00:49:49.562" v="4098" actId="27636"/>
-        <pc:sldMkLst>
-          <pc:docMk/>
-          <pc:sldMk cId="459747832" sldId="268"/>
-        </pc:sldMkLst>
-        <pc:spChg chg="mod">
-          <ac:chgData name="Xin Zou" userId="260b9726081dae15" providerId="LiveId" clId="{CD2C1F0B-44A1-4EE0-A9A4-DAABCBE61858}" dt="2018-10-08T00:49:49.562" v="4098" actId="27636"/>
-          <ac:spMkLst>
-            <pc:docMk/>
-            <pc:sldMk cId="459747832" sldId="268"/>
-            <ac:spMk id="3" creationId="{00000000-0000-0000-0000-000000000000}"/>
-          </ac:spMkLst>
-        </pc:spChg>
-      </pc:sldChg>
-      <pc:sldChg chg="modSp">
-        <pc:chgData name="Xin Zou" userId="260b9726081dae15" providerId="LiveId" clId="{CD2C1F0B-44A1-4EE0-A9A4-DAABCBE61858}" dt="2018-10-08T00:49:49.667" v="4099" actId="27636"/>
-        <pc:sldMkLst>
-          <pc:docMk/>
-          <pc:sldMk cId="4191706059" sldId="272"/>
-        </pc:sldMkLst>
-        <pc:spChg chg="mod">
-          <ac:chgData name="Xin Zou" userId="260b9726081dae15" providerId="LiveId" clId="{CD2C1F0B-44A1-4EE0-A9A4-DAABCBE61858}" dt="2018-10-07T18:47:39.387" v="3083"/>
-          <ac:spMkLst>
-            <pc:docMk/>
-            <pc:sldMk cId="4191706059" sldId="272"/>
-            <ac:spMk id="2" creationId="{00000000-0000-0000-0000-000000000000}"/>
-          </ac:spMkLst>
-        </pc:spChg>
-        <pc:spChg chg="mod">
-          <ac:chgData name="Xin Zou" userId="260b9726081dae15" providerId="LiveId" clId="{CD2C1F0B-44A1-4EE0-A9A4-DAABCBE61858}" dt="2018-10-08T00:49:49.667" v="4099" actId="27636"/>
-          <ac:spMkLst>
-            <pc:docMk/>
-            <pc:sldMk cId="4191706059" sldId="272"/>
-            <ac:spMk id="3" creationId="{00000000-0000-0000-0000-000000000000}"/>
-          </ac:spMkLst>
-        </pc:spChg>
-      </pc:sldChg>
-      <pc:sldChg chg="modSp">
-        <pc:chgData name="Xin Zou" userId="260b9726081dae15" providerId="LiveId" clId="{CD2C1F0B-44A1-4EE0-A9A4-DAABCBE61858}" dt="2018-10-07T18:49:39.061" v="3334"/>
-        <pc:sldMkLst>
-          <pc:docMk/>
-          <pc:sldMk cId="1815560686" sldId="275"/>
-        </pc:sldMkLst>
-        <pc:spChg chg="mod">
-          <ac:chgData name="Xin Zou" userId="260b9726081dae15" providerId="LiveId" clId="{CD2C1F0B-44A1-4EE0-A9A4-DAABCBE61858}" dt="2018-10-07T18:49:39.061" v="3334"/>
-          <ac:spMkLst>
-            <pc:docMk/>
-            <pc:sldMk cId="1815560686" sldId="275"/>
-            <ac:spMk id="3" creationId="{00000000-0000-0000-0000-000000000000}"/>
-          </ac:spMkLst>
-        </pc:spChg>
-      </pc:sldChg>
-      <pc:sldChg chg="modSp">
-        <pc:chgData name="Xin Zou" userId="260b9726081dae15" providerId="LiveId" clId="{CD2C1F0B-44A1-4EE0-A9A4-DAABCBE61858}" dt="2018-10-07T06:54:44.156" v="0"/>
-        <pc:sldMkLst>
-          <pc:docMk/>
-          <pc:sldMk cId="3620935438" sldId="276"/>
-        </pc:sldMkLst>
-        <pc:spChg chg="mod">
-          <ac:chgData name="Xin Zou" userId="260b9726081dae15" providerId="LiveId" clId="{CD2C1F0B-44A1-4EE0-A9A4-DAABCBE61858}" dt="2018-10-07T06:54:44.156" v="0"/>
-          <ac:spMkLst>
-            <pc:docMk/>
-            <pc:sldMk cId="3620935438" sldId="276"/>
-            <ac:spMk id="176136" creationId="{00000000-0000-0000-0000-000000000000}"/>
-          </ac:spMkLst>
-        </pc:spChg>
-        <pc:grpChg chg="mod">
-          <ac:chgData name="Xin Zou" userId="260b9726081dae15" providerId="LiveId" clId="{CD2C1F0B-44A1-4EE0-A9A4-DAABCBE61858}" dt="2018-10-07T06:54:44.156" v="0"/>
-          <ac:grpSpMkLst>
-            <pc:docMk/>
-            <pc:sldMk cId="3620935438" sldId="276"/>
-            <ac:grpSpMk id="2" creationId="{00000000-0000-0000-0000-000000000000}"/>
-          </ac:grpSpMkLst>
-        </pc:grpChg>
-        <pc:grpChg chg="mod">
-          <ac:chgData name="Xin Zou" userId="260b9726081dae15" providerId="LiveId" clId="{CD2C1F0B-44A1-4EE0-A9A4-DAABCBE61858}" dt="2018-10-07T06:54:44.156" v="0"/>
-          <ac:grpSpMkLst>
-            <pc:docMk/>
-            <pc:sldMk cId="3620935438" sldId="276"/>
-            <ac:grpSpMk id="3" creationId="{00000000-0000-0000-0000-000000000000}"/>
-          </ac:grpSpMkLst>
-        </pc:grpChg>
-        <pc:picChg chg="mod">
-          <ac:chgData name="Xin Zou" userId="260b9726081dae15" providerId="LiveId" clId="{CD2C1F0B-44A1-4EE0-A9A4-DAABCBE61858}" dt="2018-10-07T06:54:44.156" v="0"/>
-          <ac:picMkLst>
-            <pc:docMk/>
-            <pc:sldMk cId="3620935438" sldId="276"/>
-            <ac:picMk id="176132" creationId="{00000000-0000-0000-0000-000000000000}"/>
-          </ac:picMkLst>
-        </pc:picChg>
-      </pc:sldChg>
-      <pc:sldChg chg="modSp">
-        <pc:chgData name="Xin Zou" userId="260b9726081dae15" providerId="LiveId" clId="{CD2C1F0B-44A1-4EE0-A9A4-DAABCBE61858}" dt="2018-10-07T06:54:44.156" v="0"/>
-        <pc:sldMkLst>
-          <pc:docMk/>
-          <pc:sldMk cId="2417494197" sldId="277"/>
-        </pc:sldMkLst>
-        <pc:spChg chg="mod">
-          <ac:chgData name="Xin Zou" userId="260b9726081dae15" providerId="LiveId" clId="{CD2C1F0B-44A1-4EE0-A9A4-DAABCBE61858}" dt="2018-10-07T06:54:44.156" v="0"/>
-          <ac:spMkLst>
-            <pc:docMk/>
-            <pc:sldMk cId="2417494197" sldId="277"/>
-            <ac:spMk id="177161" creationId="{00000000-0000-0000-0000-000000000000}"/>
-          </ac:spMkLst>
-        </pc:spChg>
-        <pc:grpChg chg="mod">
-          <ac:chgData name="Xin Zou" userId="260b9726081dae15" providerId="LiveId" clId="{CD2C1F0B-44A1-4EE0-A9A4-DAABCBE61858}" dt="2018-10-07T06:54:44.156" v="0"/>
-          <ac:grpSpMkLst>
-            <pc:docMk/>
-            <pc:sldMk cId="2417494197" sldId="277"/>
-            <ac:grpSpMk id="2" creationId="{00000000-0000-0000-0000-000000000000}"/>
-          </ac:grpSpMkLst>
-        </pc:grpChg>
-        <pc:picChg chg="mod">
-          <ac:chgData name="Xin Zou" userId="260b9726081dae15" providerId="LiveId" clId="{CD2C1F0B-44A1-4EE0-A9A4-DAABCBE61858}" dt="2018-10-07T06:54:44.156" v="0"/>
-          <ac:picMkLst>
-            <pc:docMk/>
-            <pc:sldMk cId="2417494197" sldId="277"/>
-            <ac:picMk id="177156" creationId="{00000000-0000-0000-0000-000000000000}"/>
-          </ac:picMkLst>
-        </pc:picChg>
-      </pc:sldChg>
-      <pc:sldChg chg="modSp">
-        <pc:chgData name="Xin Zou" userId="260b9726081dae15" providerId="LiveId" clId="{CD2C1F0B-44A1-4EE0-A9A4-DAABCBE61858}" dt="2018-10-07T06:54:44.156" v="0"/>
-        <pc:sldMkLst>
-          <pc:docMk/>
-          <pc:sldMk cId="2574932862" sldId="278"/>
-        </pc:sldMkLst>
-        <pc:spChg chg="mod">
-          <ac:chgData name="Xin Zou" userId="260b9726081dae15" providerId="LiveId" clId="{CD2C1F0B-44A1-4EE0-A9A4-DAABCBE61858}" dt="2018-10-07T06:54:44.156" v="0"/>
-          <ac:spMkLst>
-            <pc:docMk/>
-            <pc:sldMk cId="2574932862" sldId="278"/>
-            <ac:spMk id="178183" creationId="{00000000-0000-0000-0000-000000000000}"/>
-          </ac:spMkLst>
-        </pc:spChg>
-        <pc:grpChg chg="mod">
-          <ac:chgData name="Xin Zou" userId="260b9726081dae15" providerId="LiveId" clId="{CD2C1F0B-44A1-4EE0-A9A4-DAABCBE61858}" dt="2018-10-07T06:54:44.156" v="0"/>
-          <ac:grpSpMkLst>
-            <pc:docMk/>
-            <pc:sldMk cId="2574932862" sldId="278"/>
-            <ac:grpSpMk id="2" creationId="{00000000-0000-0000-0000-000000000000}"/>
-          </ac:grpSpMkLst>
-        </pc:grpChg>
-        <pc:grpChg chg="mod">
-          <ac:chgData name="Xin Zou" userId="260b9726081dae15" providerId="LiveId" clId="{CD2C1F0B-44A1-4EE0-A9A4-DAABCBE61858}" dt="2018-10-07T06:54:44.156" v="0"/>
-          <ac:grpSpMkLst>
-            <pc:docMk/>
-            <pc:sldMk cId="2574932862" sldId="278"/>
-            <ac:grpSpMk id="3" creationId="{00000000-0000-0000-0000-000000000000}"/>
-          </ac:grpSpMkLst>
-        </pc:grpChg>
-        <pc:picChg chg="mod">
-          <ac:chgData name="Xin Zou" userId="260b9726081dae15" providerId="LiveId" clId="{CD2C1F0B-44A1-4EE0-A9A4-DAABCBE61858}" dt="2018-10-07T06:54:44.156" v="0"/>
-          <ac:picMkLst>
-            <pc:docMk/>
-            <pc:sldMk cId="2574932862" sldId="278"/>
-            <ac:picMk id="178179" creationId="{00000000-0000-0000-0000-000000000000}"/>
-          </ac:picMkLst>
-        </pc:picChg>
-      </pc:sldChg>
-      <pc:sldChg chg="modSp">
-        <pc:chgData name="Xin Zou" userId="260b9726081dae15" providerId="LiveId" clId="{CD2C1F0B-44A1-4EE0-A9A4-DAABCBE61858}" dt="2018-10-08T00:49:49.748" v="4100" actId="27636"/>
-        <pc:sldMkLst>
-          <pc:docMk/>
-          <pc:sldMk cId="3327571046" sldId="279"/>
-        </pc:sldMkLst>
-        <pc:spChg chg="mod">
-          <ac:chgData name="Xin Zou" userId="260b9726081dae15" providerId="LiveId" clId="{CD2C1F0B-44A1-4EE0-A9A4-DAABCBE61858}" dt="2018-10-08T00:49:49.748" v="4100" actId="27636"/>
-          <ac:spMkLst>
-            <pc:docMk/>
-            <pc:sldMk cId="3327571046" sldId="279"/>
-            <ac:spMk id="179206" creationId="{00000000-0000-0000-0000-000000000000}"/>
-          </ac:spMkLst>
-        </pc:spChg>
-        <pc:grpChg chg="mod">
-          <ac:chgData name="Xin Zou" userId="260b9726081dae15" providerId="LiveId" clId="{CD2C1F0B-44A1-4EE0-A9A4-DAABCBE61858}" dt="2018-10-07T06:54:44.156" v="0"/>
-          <ac:grpSpMkLst>
-            <pc:docMk/>
-            <pc:sldMk cId="3327571046" sldId="279"/>
-            <ac:grpSpMk id="2" creationId="{00000000-0000-0000-0000-000000000000}"/>
-          </ac:grpSpMkLst>
-        </pc:grpChg>
-        <pc:picChg chg="mod">
-          <ac:chgData name="Xin Zou" userId="260b9726081dae15" providerId="LiveId" clId="{CD2C1F0B-44A1-4EE0-A9A4-DAABCBE61858}" dt="2018-10-07T06:54:44.156" v="0"/>
-          <ac:picMkLst>
-            <pc:docMk/>
-            <pc:sldMk cId="3327571046" sldId="279"/>
-            <ac:picMk id="179203" creationId="{00000000-0000-0000-0000-000000000000}"/>
-          </ac:picMkLst>
-        </pc:picChg>
-      </pc:sldChg>
-      <pc:sldChg chg="modSp">
-        <pc:chgData name="Xin Zou" userId="260b9726081dae15" providerId="LiveId" clId="{CD2C1F0B-44A1-4EE0-A9A4-DAABCBE61858}" dt="2018-10-08T00:49:49.845" v="4101" actId="27636"/>
-        <pc:sldMkLst>
-          <pc:docMk/>
-          <pc:sldMk cId="2310473041" sldId="280"/>
-        </pc:sldMkLst>
-        <pc:spChg chg="mod">
-          <ac:chgData name="Xin Zou" userId="260b9726081dae15" providerId="LiveId" clId="{CD2C1F0B-44A1-4EE0-A9A4-DAABCBE61858}" dt="2018-10-08T00:49:49.845" v="4101" actId="27636"/>
-          <ac:spMkLst>
-            <pc:docMk/>
-            <pc:sldMk cId="2310473041" sldId="280"/>
-            <ac:spMk id="190471" creationId="{00000000-0000-0000-0000-000000000000}"/>
-          </ac:spMkLst>
-        </pc:spChg>
-        <pc:grpChg chg="mod">
-          <ac:chgData name="Xin Zou" userId="260b9726081dae15" providerId="LiveId" clId="{CD2C1F0B-44A1-4EE0-A9A4-DAABCBE61858}" dt="2018-10-07T06:54:44.156" v="0"/>
-          <ac:grpSpMkLst>
-            <pc:docMk/>
-            <pc:sldMk cId="2310473041" sldId="280"/>
-            <ac:grpSpMk id="2" creationId="{00000000-0000-0000-0000-000000000000}"/>
-          </ac:grpSpMkLst>
-        </pc:grpChg>
-        <pc:grpChg chg="mod">
-          <ac:chgData name="Xin Zou" userId="260b9726081dae15" providerId="LiveId" clId="{CD2C1F0B-44A1-4EE0-A9A4-DAABCBE61858}" dt="2018-10-07T06:54:44.156" v="0"/>
-          <ac:grpSpMkLst>
-            <pc:docMk/>
-            <pc:sldMk cId="2310473041" sldId="280"/>
-            <ac:grpSpMk id="3" creationId="{00000000-0000-0000-0000-000000000000}"/>
-          </ac:grpSpMkLst>
-        </pc:grpChg>
-        <pc:picChg chg="mod">
-          <ac:chgData name="Xin Zou" userId="260b9726081dae15" providerId="LiveId" clId="{CD2C1F0B-44A1-4EE0-A9A4-DAABCBE61858}" dt="2018-10-07T06:54:44.156" v="0"/>
-          <ac:picMkLst>
-            <pc:docMk/>
-            <pc:sldMk cId="2310473041" sldId="280"/>
-            <ac:picMk id="190467" creationId="{00000000-0000-0000-0000-000000000000}"/>
-          </ac:picMkLst>
-        </pc:picChg>
-      </pc:sldChg>
-      <pc:sldChg chg="modSp">
-        <pc:chgData name="Xin Zou" userId="260b9726081dae15" providerId="LiveId" clId="{CD2C1F0B-44A1-4EE0-A9A4-DAABCBE61858}" dt="2018-10-07T06:54:44.156" v="0"/>
-        <pc:sldMkLst>
-          <pc:docMk/>
-          <pc:sldMk cId="1584657354" sldId="281"/>
-        </pc:sldMkLst>
-        <pc:picChg chg="mod">
-          <ac:chgData name="Xin Zou" userId="260b9726081dae15" providerId="LiveId" clId="{CD2C1F0B-44A1-4EE0-A9A4-DAABCBE61858}" dt="2018-10-07T06:54:44.156" v="0"/>
-          <ac:picMkLst>
-            <pc:docMk/>
-            <pc:sldMk cId="1584657354" sldId="281"/>
-            <ac:picMk id="4098" creationId="{00000000-0000-0000-0000-000000000000}"/>
-          </ac:picMkLst>
-        </pc:picChg>
-      </pc:sldChg>
-      <pc:sldChg chg="modSp">
-        <pc:chgData name="Xin Zou" userId="260b9726081dae15" providerId="LiveId" clId="{CD2C1F0B-44A1-4EE0-A9A4-DAABCBE61858}" dt="2018-10-08T00:39:08.550" v="3936" actId="404"/>
-        <pc:sldMkLst>
-          <pc:docMk/>
-          <pc:sldMk cId="855595760" sldId="282"/>
-        </pc:sldMkLst>
-        <pc:spChg chg="mod">
-          <ac:chgData name="Xin Zou" userId="260b9726081dae15" providerId="LiveId" clId="{CD2C1F0B-44A1-4EE0-A9A4-DAABCBE61858}" dt="2018-10-08T00:30:22.063" v="3926"/>
-          <ac:spMkLst>
-            <pc:docMk/>
-            <pc:sldMk cId="855595760" sldId="282"/>
-            <ac:spMk id="2" creationId="{00000000-0000-0000-0000-000000000000}"/>
-          </ac:spMkLst>
-        </pc:spChg>
-        <pc:spChg chg="mod">
-          <ac:chgData name="Xin Zou" userId="260b9726081dae15" providerId="LiveId" clId="{CD2C1F0B-44A1-4EE0-A9A4-DAABCBE61858}" dt="2018-10-08T00:39:08.550" v="3936" actId="404"/>
-          <ac:spMkLst>
-            <pc:docMk/>
-            <pc:sldMk cId="855595760" sldId="282"/>
-            <ac:spMk id="5" creationId="{00000000-0000-0000-0000-000000000000}"/>
-          </ac:spMkLst>
-        </pc:spChg>
-      </pc:sldChg>
-      <pc:sldChg chg="addSp modSp add mod setBg setClrOvrMap">
-        <pc:chgData name="Xin Zou" userId="260b9726081dae15" providerId="LiveId" clId="{CD2C1F0B-44A1-4EE0-A9A4-DAABCBE61858}" dt="2018-10-08T00:50:18.418" v="4103" actId="26606"/>
-        <pc:sldMkLst>
-          <pc:docMk/>
-          <pc:sldMk cId="960325337" sldId="283"/>
-        </pc:sldMkLst>
-        <pc:spChg chg="mod">
-          <ac:chgData name="Xin Zou" userId="260b9726081dae15" providerId="LiveId" clId="{CD2C1F0B-44A1-4EE0-A9A4-DAABCBE61858}" dt="2018-10-08T00:50:18.418" v="4103" actId="26606"/>
-          <ac:spMkLst>
-            <pc:docMk/>
-            <pc:sldMk cId="960325337" sldId="283"/>
-            <ac:spMk id="2" creationId="{75C789EB-8B05-4291-8E79-3D8ED33855E8}"/>
-          </ac:spMkLst>
-        </pc:spChg>
-        <pc:spChg chg="mod">
-          <ac:chgData name="Xin Zou" userId="260b9726081dae15" providerId="LiveId" clId="{CD2C1F0B-44A1-4EE0-A9A4-DAABCBE61858}" dt="2018-10-08T00:50:18.418" v="4103" actId="26606"/>
-          <ac:spMkLst>
-            <pc:docMk/>
-            <pc:sldMk cId="960325337" sldId="283"/>
-            <ac:spMk id="3" creationId="{2D68D149-13E7-4407-AB4F-9FD920F56413}"/>
-          </ac:spMkLst>
-        </pc:spChg>
-        <pc:spChg chg="add">
-          <ac:chgData name="Xin Zou" userId="260b9726081dae15" providerId="LiveId" clId="{CD2C1F0B-44A1-4EE0-A9A4-DAABCBE61858}" dt="2018-10-08T00:50:18.418" v="4103" actId="26606"/>
-          <ac:spMkLst>
-            <pc:docMk/>
-            <pc:sldMk cId="960325337" sldId="283"/>
-            <ac:spMk id="8" creationId="{E47A690B-DE55-4274-B33B-C91FD647EB63}"/>
-          </ac:spMkLst>
-        </pc:spChg>
-        <pc:spChg chg="add">
-          <ac:chgData name="Xin Zou" userId="260b9726081dae15" providerId="LiveId" clId="{CD2C1F0B-44A1-4EE0-A9A4-DAABCBE61858}" dt="2018-10-08T00:50:18.418" v="4103" actId="26606"/>
-          <ac:spMkLst>
-            <pc:docMk/>
-            <pc:sldMk cId="960325337" sldId="283"/>
-            <ac:spMk id="10" creationId="{DC9CD390-6DB5-4AEA-8D13-BC6CEF344F9D}"/>
-          </ac:spMkLst>
-        </pc:spChg>
-        <pc:spChg chg="add">
-          <ac:chgData name="Xin Zou" userId="260b9726081dae15" providerId="LiveId" clId="{CD2C1F0B-44A1-4EE0-A9A4-DAABCBE61858}" dt="2018-10-08T00:50:18.418" v="4103" actId="26606"/>
-          <ac:spMkLst>
-            <pc:docMk/>
-            <pc:sldMk cId="960325337" sldId="283"/>
-            <ac:spMk id="12" creationId="{11FA69C6-0A69-4994-9F32-C4497B8B4CBF}"/>
-          </ac:spMkLst>
-        </pc:spChg>
-      </pc:sldChg>
-      <pc:sldChg chg="modSp add">
-        <pc:chgData name="Xin Zou" userId="260b9726081dae15" providerId="LiveId" clId="{CD2C1F0B-44A1-4EE0-A9A4-DAABCBE61858}" dt="2018-10-07T07:05:23.912" v="418"/>
-        <pc:sldMkLst>
-          <pc:docMk/>
-          <pc:sldMk cId="203105963" sldId="284"/>
-        </pc:sldMkLst>
-        <pc:spChg chg="mod">
-          <ac:chgData name="Xin Zou" userId="260b9726081dae15" providerId="LiveId" clId="{CD2C1F0B-44A1-4EE0-A9A4-DAABCBE61858}" dt="2018-10-07T07:05:23.912" v="418"/>
-          <ac:spMkLst>
-            <pc:docMk/>
-            <pc:sldMk cId="203105963" sldId="284"/>
-            <ac:spMk id="2" creationId="{A5797B4E-6FC6-40D1-9CF6-BB5AE3C2FF4C}"/>
-          </ac:spMkLst>
-        </pc:spChg>
-        <pc:spChg chg="mod">
-          <ac:chgData name="Xin Zou" userId="260b9726081dae15" providerId="LiveId" clId="{CD2C1F0B-44A1-4EE0-A9A4-DAABCBE61858}" dt="2018-10-07T07:04:53.692" v="397" actId="947"/>
-          <ac:spMkLst>
-            <pc:docMk/>
-            <pc:sldMk cId="203105963" sldId="284"/>
-            <ac:spMk id="3" creationId="{D694459C-45E7-46EA-A95A-042DD96652D6}"/>
-          </ac:spMkLst>
-        </pc:spChg>
-      </pc:sldChg>
-      <pc:sldChg chg="modSp add">
-        <pc:chgData name="Xin Zou" userId="260b9726081dae15" providerId="LiveId" clId="{CD2C1F0B-44A1-4EE0-A9A4-DAABCBE61858}" dt="2018-10-08T00:49:48.081" v="4091" actId="27636"/>
-        <pc:sldMkLst>
-          <pc:docMk/>
-          <pc:sldMk cId="4287330810" sldId="285"/>
-        </pc:sldMkLst>
-        <pc:spChg chg="mod">
-          <ac:chgData name="Xin Zou" userId="260b9726081dae15" providerId="LiveId" clId="{CD2C1F0B-44A1-4EE0-A9A4-DAABCBE61858}" dt="2018-10-07T07:05:33.056" v="440"/>
-          <ac:spMkLst>
-            <pc:docMk/>
-            <pc:sldMk cId="4287330810" sldId="285"/>
-            <ac:spMk id="2" creationId="{F054C5AE-4D8C-417D-9AB5-FEC556944A90}"/>
-          </ac:spMkLst>
-        </pc:spChg>
-        <pc:spChg chg="mod">
-          <ac:chgData name="Xin Zou" userId="260b9726081dae15" providerId="LiveId" clId="{CD2C1F0B-44A1-4EE0-A9A4-DAABCBE61858}" dt="2018-10-08T00:49:48.081" v="4091" actId="27636"/>
-          <ac:spMkLst>
-            <pc:docMk/>
-            <pc:sldMk cId="4287330810" sldId="285"/>
-            <ac:spMk id="3" creationId="{A566EDF2-11ED-4F9B-A98E-1CAA103D0918}"/>
-          </ac:spMkLst>
-        </pc:spChg>
-      </pc:sldChg>
-      <pc:sldChg chg="modSp add">
-        <pc:chgData name="Xin Zou" userId="260b9726081dae15" providerId="LiveId" clId="{CD2C1F0B-44A1-4EE0-A9A4-DAABCBE61858}" dt="2018-10-07T07:16:45.079" v="745"/>
-        <pc:sldMkLst>
-          <pc:docMk/>
-          <pc:sldMk cId="1562985331" sldId="286"/>
-        </pc:sldMkLst>
-        <pc:spChg chg="mod">
-          <ac:chgData name="Xin Zou" userId="260b9726081dae15" providerId="LiveId" clId="{CD2C1F0B-44A1-4EE0-A9A4-DAABCBE61858}" dt="2018-10-07T07:16:45.079" v="745"/>
-          <ac:spMkLst>
-            <pc:docMk/>
-            <pc:sldMk cId="1562985331" sldId="286"/>
-            <ac:spMk id="3" creationId="{00000000-0000-0000-0000-000000000000}"/>
-          </ac:spMkLst>
-        </pc:spChg>
-      </pc:sldChg>
-      <pc:sldChg chg="modSp add del">
-        <pc:chgData name="Xin Zou" userId="260b9726081dae15" providerId="LiveId" clId="{CD2C1F0B-44A1-4EE0-A9A4-DAABCBE61858}" dt="2018-10-07T07:11:50.113" v="593" actId="2696"/>
-        <pc:sldMkLst>
-          <pc:docMk/>
-          <pc:sldMk cId="2570708834" sldId="286"/>
-        </pc:sldMkLst>
-        <pc:spChg chg="mod">
-          <ac:chgData name="Xin Zou" userId="260b9726081dae15" providerId="LiveId" clId="{CD2C1F0B-44A1-4EE0-A9A4-DAABCBE61858}" dt="2018-10-07T07:07:36.556" v="592"/>
-          <ac:spMkLst>
-            <pc:docMk/>
-            <pc:sldMk cId="2570708834" sldId="286"/>
-            <ac:spMk id="2" creationId="{83346946-3564-4984-A46C-489C2F55C164}"/>
-          </ac:spMkLst>
-        </pc:spChg>
-      </pc:sldChg>
-      <pc:sldChg chg="addSp delSp modSp add mod setBg">
-        <pc:chgData name="Xin Zou" userId="260b9726081dae15" providerId="LiveId" clId="{CD2C1F0B-44A1-4EE0-A9A4-DAABCBE61858}" dt="2018-10-08T00:50:30.255" v="4104" actId="26606"/>
-        <pc:sldMkLst>
-          <pc:docMk/>
-          <pc:sldMk cId="723054989" sldId="287"/>
-        </pc:sldMkLst>
-        <pc:spChg chg="mod">
-          <ac:chgData name="Xin Zou" userId="260b9726081dae15" providerId="LiveId" clId="{CD2C1F0B-44A1-4EE0-A9A4-DAABCBE61858}" dt="2018-10-08T00:50:30.255" v="4104" actId="26606"/>
-          <ac:spMkLst>
-            <pc:docMk/>
-            <pc:sldMk cId="723054989" sldId="287"/>
-            <ac:spMk id="2" creationId="{00000000-0000-0000-0000-000000000000}"/>
-          </ac:spMkLst>
-        </pc:spChg>
-        <pc:spChg chg="del mod">
-          <ac:chgData name="Xin Zou" userId="260b9726081dae15" providerId="LiveId" clId="{CD2C1F0B-44A1-4EE0-A9A4-DAABCBE61858}" dt="2018-10-08T00:50:30.255" v="4104" actId="26606"/>
-          <ac:spMkLst>
-            <pc:docMk/>
-            <pc:sldMk cId="723054989" sldId="287"/>
-            <ac:spMk id="3" creationId="{00000000-0000-0000-0000-000000000000}"/>
-          </ac:spMkLst>
-        </pc:spChg>
-        <pc:graphicFrameChg chg="add">
-          <ac:chgData name="Xin Zou" userId="260b9726081dae15" providerId="LiveId" clId="{CD2C1F0B-44A1-4EE0-A9A4-DAABCBE61858}" dt="2018-10-08T00:50:30.255" v="4104" actId="26606"/>
-          <ac:graphicFrameMkLst>
-            <pc:docMk/>
-            <pc:sldMk cId="723054989" sldId="287"/>
-            <ac:graphicFrameMk id="5" creationId="{72520377-F72D-4AC9-8120-D1579DF72510}"/>
-          </ac:graphicFrameMkLst>
-        </pc:graphicFrameChg>
-      </pc:sldChg>
-      <pc:sldChg chg="modSp add">
-        <pc:chgData name="Xin Zou" userId="260b9726081dae15" providerId="LiveId" clId="{CD2C1F0B-44A1-4EE0-A9A4-DAABCBE61858}" dt="2018-10-08T00:49:48.762" v="4094" actId="27636"/>
-        <pc:sldMkLst>
-          <pc:docMk/>
-          <pc:sldMk cId="2205629958" sldId="288"/>
-        </pc:sldMkLst>
-        <pc:spChg chg="mod">
-          <ac:chgData name="Xin Zou" userId="260b9726081dae15" providerId="LiveId" clId="{CD2C1F0B-44A1-4EE0-A9A4-DAABCBE61858}" dt="2018-10-08T00:49:48.762" v="4094" actId="27636"/>
-          <ac:spMkLst>
-            <pc:docMk/>
-            <pc:sldMk cId="2205629958" sldId="288"/>
-            <ac:spMk id="2" creationId="{00000000-0000-0000-0000-000000000000}"/>
-          </ac:spMkLst>
-        </pc:spChg>
-        <pc:spChg chg="mod">
-          <ac:chgData name="Xin Zou" userId="260b9726081dae15" providerId="LiveId" clId="{CD2C1F0B-44A1-4EE0-A9A4-DAABCBE61858}" dt="2018-10-07T07:19:53.257" v="871"/>
-          <ac:spMkLst>
-            <pc:docMk/>
-            <pc:sldMk cId="2205629958" sldId="288"/>
-            <ac:spMk id="3" creationId="{00000000-0000-0000-0000-000000000000}"/>
-          </ac:spMkLst>
-        </pc:spChg>
-      </pc:sldChg>
-      <pc:sldChg chg="modSp add">
-        <pc:chgData name="Xin Zou" userId="260b9726081dae15" providerId="LiveId" clId="{CD2C1F0B-44A1-4EE0-A9A4-DAABCBE61858}" dt="2018-10-08T00:49:48.844" v="4095" actId="27636"/>
-        <pc:sldMkLst>
-          <pc:docMk/>
-          <pc:sldMk cId="2538655983" sldId="289"/>
-        </pc:sldMkLst>
-        <pc:spChg chg="mod">
-          <ac:chgData name="Xin Zou" userId="260b9726081dae15" providerId="LiveId" clId="{CD2C1F0B-44A1-4EE0-A9A4-DAABCBE61858}" dt="2018-10-08T00:49:48.844" v="4095" actId="27636"/>
-          <ac:spMkLst>
-            <pc:docMk/>
-            <pc:sldMk cId="2538655983" sldId="289"/>
-            <ac:spMk id="2" creationId="{00000000-0000-0000-0000-000000000000}"/>
-          </ac:spMkLst>
-        </pc:spChg>
-        <pc:spChg chg="mod">
-          <ac:chgData name="Xin Zou" userId="260b9726081dae15" providerId="LiveId" clId="{CD2C1F0B-44A1-4EE0-A9A4-DAABCBE61858}" dt="2018-10-07T07:20:34.100" v="882"/>
-          <ac:spMkLst>
-            <pc:docMk/>
-            <pc:sldMk cId="2538655983" sldId="289"/>
-            <ac:spMk id="3" creationId="{00000000-0000-0000-0000-000000000000}"/>
-          </ac:spMkLst>
-        </pc:spChg>
-      </pc:sldChg>
-      <pc:sldChg chg="modSp add">
-        <pc:chgData name="Xin Zou" userId="260b9726081dae15" providerId="LiveId" clId="{CD2C1F0B-44A1-4EE0-A9A4-DAABCBE61858}" dt="2018-10-08T00:49:48.942" v="4096" actId="27636"/>
-        <pc:sldMkLst>
-          <pc:docMk/>
-          <pc:sldMk cId="3019586189" sldId="290"/>
-        </pc:sldMkLst>
-        <pc:spChg chg="mod">
-          <ac:chgData name="Xin Zou" userId="260b9726081dae15" providerId="LiveId" clId="{CD2C1F0B-44A1-4EE0-A9A4-DAABCBE61858}" dt="2018-10-07T07:20:55.539" v="890" actId="20577"/>
-          <ac:spMkLst>
-            <pc:docMk/>
-            <pc:sldMk cId="3019586189" sldId="290"/>
-            <ac:spMk id="2" creationId="{00000000-0000-0000-0000-000000000000}"/>
-          </ac:spMkLst>
-        </pc:spChg>
-        <pc:spChg chg="mod">
-          <ac:chgData name="Xin Zou" userId="260b9726081dae15" providerId="LiveId" clId="{CD2C1F0B-44A1-4EE0-A9A4-DAABCBE61858}" dt="2018-10-08T00:49:48.942" v="4096" actId="27636"/>
-          <ac:spMkLst>
-            <pc:docMk/>
-            <pc:sldMk cId="3019586189" sldId="290"/>
-            <ac:spMk id="3" creationId="{00000000-0000-0000-0000-000000000000}"/>
-          </ac:spMkLst>
-        </pc:spChg>
-      </pc:sldChg>
-      <pc:sldChg chg="addSp modSp add">
-        <pc:chgData name="Xin Zou" userId="260b9726081dae15" providerId="LiveId" clId="{CD2C1F0B-44A1-4EE0-A9A4-DAABCBE61858}" dt="2018-10-08T00:16:39.552" v="3763" actId="1076"/>
-        <pc:sldMkLst>
-          <pc:docMk/>
-          <pc:sldMk cId="346548858" sldId="291"/>
-        </pc:sldMkLst>
-        <pc:spChg chg="mod">
-          <ac:chgData name="Xin Zou" userId="260b9726081dae15" providerId="LiveId" clId="{CD2C1F0B-44A1-4EE0-A9A4-DAABCBE61858}" dt="2018-10-08T00:12:30.876" v="3364"/>
-          <ac:spMkLst>
-            <pc:docMk/>
-            <pc:sldMk cId="346548858" sldId="291"/>
-            <ac:spMk id="2" creationId="{2978B2DB-C6BE-44CD-975A-AB0CC247D9B6}"/>
-          </ac:spMkLst>
-        </pc:spChg>
-        <pc:spChg chg="add mod">
-          <ac:chgData name="Xin Zou" userId="260b9726081dae15" providerId="LiveId" clId="{CD2C1F0B-44A1-4EE0-A9A4-DAABCBE61858}" dt="2018-10-08T00:14:31.634" v="3610" actId="14100"/>
-          <ac:spMkLst>
-            <pc:docMk/>
-            <pc:sldMk cId="346548858" sldId="291"/>
-            <ac:spMk id="3" creationId="{748F9C23-0DAC-4B53-AF15-2D6EB4B2486E}"/>
-          </ac:spMkLst>
-        </pc:spChg>
-        <pc:spChg chg="add mod">
-          <ac:chgData name="Xin Zou" userId="260b9726081dae15" providerId="LiveId" clId="{CD2C1F0B-44A1-4EE0-A9A4-DAABCBE61858}" dt="2018-10-08T00:16:39.552" v="3763" actId="1076"/>
-          <ac:spMkLst>
-            <pc:docMk/>
-            <pc:sldMk cId="346548858" sldId="291"/>
-            <ac:spMk id="4" creationId="{70F76D8C-BE15-4636-87E4-E45DB4EE8755}"/>
-          </ac:spMkLst>
-        </pc:spChg>
-      </pc:sldChg>
-      <pc:sldChg chg="addSp modSp add">
-        <pc:chgData name="Xin Zou" userId="260b9726081dae15" providerId="LiveId" clId="{CD2C1F0B-44A1-4EE0-A9A4-DAABCBE61858}" dt="2018-10-08T00:22:48.515" v="3821" actId="113"/>
-        <pc:sldMkLst>
-          <pc:docMk/>
-          <pc:sldMk cId="4118284303" sldId="292"/>
-        </pc:sldMkLst>
-        <pc:spChg chg="mod">
-          <ac:chgData name="Xin Zou" userId="260b9726081dae15" providerId="LiveId" clId="{CD2C1F0B-44A1-4EE0-A9A4-DAABCBE61858}" dt="2018-10-08T00:21:23.990" v="3781" actId="20577"/>
-          <ac:spMkLst>
-            <pc:docMk/>
-            <pc:sldMk cId="4118284303" sldId="292"/>
-            <ac:spMk id="2" creationId="{499D8888-FAB4-458A-80F2-385D00C040D2}"/>
-          </ac:spMkLst>
-        </pc:spChg>
-        <pc:spChg chg="add mod">
-          <ac:chgData name="Xin Zou" userId="260b9726081dae15" providerId="LiveId" clId="{CD2C1F0B-44A1-4EE0-A9A4-DAABCBE61858}" dt="2018-10-08T00:22:48.515" v="3821" actId="113"/>
-          <ac:spMkLst>
-            <pc:docMk/>
-            <pc:sldMk cId="4118284303" sldId="292"/>
-            <ac:spMk id="3" creationId="{E6A22111-0AE8-4C34-BC1B-79E0AB7742FA}"/>
-          </ac:spMkLst>
-        </pc:spChg>
-      </pc:sldChg>
-      <pc:sldChg chg="add del">
-        <pc:chgData name="Xin Zou" userId="260b9726081dae15" providerId="LiveId" clId="{CD2C1F0B-44A1-4EE0-A9A4-DAABCBE61858}" dt="2018-10-08T00:23:15.032" v="3837" actId="2696"/>
-        <pc:sldMkLst>
-          <pc:docMk/>
-          <pc:sldMk cId="446989266" sldId="293"/>
-        </pc:sldMkLst>
-      </pc:sldChg>
-      <pc:sldChg chg="addSp modSp add">
-        <pc:chgData name="Xin Zou" userId="260b9726081dae15" providerId="LiveId" clId="{CD2C1F0B-44A1-4EE0-A9A4-DAABCBE61858}" dt="2018-10-08T00:46:34.477" v="3993" actId="113"/>
-        <pc:sldMkLst>
-          <pc:docMk/>
-          <pc:sldMk cId="2787191295" sldId="293"/>
-        </pc:sldMkLst>
-        <pc:spChg chg="mod">
-          <ac:chgData name="Xin Zou" userId="260b9726081dae15" providerId="LiveId" clId="{CD2C1F0B-44A1-4EE0-A9A4-DAABCBE61858}" dt="2018-10-08T00:46:26.683" v="3991" actId="20577"/>
-          <ac:spMkLst>
-            <pc:docMk/>
-            <pc:sldMk cId="2787191295" sldId="293"/>
-            <ac:spMk id="2" creationId="{BACF6B7B-E333-4EB6-996E-E6AF9531748F}"/>
-          </ac:spMkLst>
-        </pc:spChg>
-        <pc:spChg chg="add mod">
-          <ac:chgData name="Xin Zou" userId="260b9726081dae15" providerId="LiveId" clId="{CD2C1F0B-44A1-4EE0-A9A4-DAABCBE61858}" dt="2018-10-08T00:46:34.477" v="3993" actId="113"/>
-          <ac:spMkLst>
-            <pc:docMk/>
-            <pc:sldMk cId="2787191295" sldId="293"/>
-            <ac:spMk id="3" creationId="{010EFF0E-0F66-436B-B477-1773326F825C}"/>
-          </ac:spMkLst>
-        </pc:spChg>
-      </pc:sldChg>
-      <pc:sldChg chg="addSp modSp add">
-        <pc:chgData name="Xin Zou" userId="260b9726081dae15" providerId="LiveId" clId="{CD2C1F0B-44A1-4EE0-A9A4-DAABCBE61858}" dt="2018-10-08T00:48:28.265" v="4084" actId="20577"/>
-        <pc:sldMkLst>
-          <pc:docMk/>
-          <pc:sldMk cId="644457787" sldId="294"/>
-        </pc:sldMkLst>
-        <pc:spChg chg="mod">
-          <ac:chgData name="Xin Zou" userId="260b9726081dae15" providerId="LiveId" clId="{CD2C1F0B-44A1-4EE0-A9A4-DAABCBE61858}" dt="2018-10-08T00:47:42.638" v="4005" actId="20577"/>
-          <ac:spMkLst>
-            <pc:docMk/>
-            <pc:sldMk cId="644457787" sldId="294"/>
-            <ac:spMk id="2" creationId="{0460539A-825E-4F57-B66C-B4D02019EA99}"/>
-          </ac:spMkLst>
-        </pc:spChg>
-        <pc:spChg chg="add mod">
-          <ac:chgData name="Xin Zou" userId="260b9726081dae15" providerId="LiveId" clId="{CD2C1F0B-44A1-4EE0-A9A4-DAABCBE61858}" dt="2018-10-08T00:48:28.265" v="4084" actId="20577"/>
-          <ac:spMkLst>
-            <pc:docMk/>
-            <pc:sldMk cId="644457787" sldId="294"/>
-            <ac:spMk id="3" creationId="{75E38640-ED9D-418D-82BD-68A08D295924}"/>
-          </ac:spMkLst>
-        </pc:spChg>
-      </pc:sldChg>
-      <pc:sldChg chg="add del">
-        <pc:chgData name="Xin Zou" userId="260b9726081dae15" providerId="LiveId" clId="{CD2C1F0B-44A1-4EE0-A9A4-DAABCBE61858}" dt="2018-10-08T00:49:31.617" v="4087"/>
-        <pc:sldMkLst>
-          <pc:docMk/>
-          <pc:sldMk cId="2535163443" sldId="309"/>
-        </pc:sldMkLst>
-      </pc:sldChg>
-      <pc:sldChg chg="addSp modSp add">
-        <pc:chgData name="Xin Zou" userId="260b9726081dae15" providerId="LiveId" clId="{CD2C1F0B-44A1-4EE0-A9A4-DAABCBE61858}" dt="2018-10-08T20:58:03.481" v="4190"/>
-        <pc:sldMkLst>
-          <pc:docMk/>
-          <pc:sldMk cId="1101824339" sldId="310"/>
-        </pc:sldMkLst>
-        <pc:spChg chg="mod">
-          <ac:chgData name="Xin Zou" userId="260b9726081dae15" providerId="LiveId" clId="{CD2C1F0B-44A1-4EE0-A9A4-DAABCBE61858}" dt="2018-10-08T20:58:03.481" v="4190"/>
-          <ac:spMkLst>
-            <pc:docMk/>
-            <pc:sldMk cId="1101824339" sldId="310"/>
-            <ac:spMk id="2" creationId="{A237A3B6-10D0-4FA7-8B78-9DF91DE112BE}"/>
-          </ac:spMkLst>
-        </pc:spChg>
-        <pc:spChg chg="add mod">
-          <ac:chgData name="Xin Zou" userId="260b9726081dae15" providerId="LiveId" clId="{CD2C1F0B-44A1-4EE0-A9A4-DAABCBE61858}" dt="2018-10-08T20:57:28.969" v="4107" actId="14100"/>
-          <ac:spMkLst>
-            <pc:docMk/>
-            <pc:sldMk cId="1101824339" sldId="310"/>
-            <ac:spMk id="3" creationId="{397AB9B0-1AE6-4271-AA7A-921FD50C3DE8}"/>
-          </ac:spMkLst>
-        </pc:spChg>
-      </pc:sldChg>
-      <pc:sldChg chg="addSp modSp add">
-        <pc:chgData name="Xin Zou" userId="260b9726081dae15" providerId="LiveId" clId="{CD2C1F0B-44A1-4EE0-A9A4-DAABCBE61858}" dt="2018-10-08T21:04:13.220" v="4282" actId="404"/>
-        <pc:sldMkLst>
-          <pc:docMk/>
-          <pc:sldMk cId="3157467698" sldId="311"/>
-        </pc:sldMkLst>
-        <pc:spChg chg="mod">
-          <ac:chgData name="Xin Zou" userId="260b9726081dae15" providerId="LiveId" clId="{CD2C1F0B-44A1-4EE0-A9A4-DAABCBE61858}" dt="2018-10-08T20:58:10.497" v="4200"/>
-          <ac:spMkLst>
-            <pc:docMk/>
-            <pc:sldMk cId="3157467698" sldId="311"/>
-            <ac:spMk id="2" creationId="{6196BBCF-D597-4EB3-ADA6-12E7B647833A}"/>
-          </ac:spMkLst>
-        </pc:spChg>
-        <pc:spChg chg="add mod">
-          <ac:chgData name="Xin Zou" userId="260b9726081dae15" providerId="LiveId" clId="{CD2C1F0B-44A1-4EE0-A9A4-DAABCBE61858}" dt="2018-10-08T21:04:13.220" v="4282" actId="404"/>
-          <ac:spMkLst>
-            <pc:docMk/>
-            <pc:sldMk cId="3157467698" sldId="311"/>
-            <ac:spMk id="3" creationId="{A069E756-950A-4BE8-B0A1-AEC5F7261758}"/>
-          </ac:spMkLst>
-        </pc:spChg>
-        <pc:picChg chg="add mod">
-          <ac:chgData name="Xin Zou" userId="260b9726081dae15" providerId="LiveId" clId="{CD2C1F0B-44A1-4EE0-A9A4-DAABCBE61858}" dt="2018-10-08T21:03:49.997" v="4280" actId="14100"/>
-          <ac:picMkLst>
-            <pc:docMk/>
-            <pc:sldMk cId="3157467698" sldId="311"/>
-            <ac:picMk id="4" creationId="{F25FD6C3-D603-4D0E-8D80-FA28D57D496E}"/>
-          </ac:picMkLst>
-        </pc:picChg>
-      </pc:sldChg>
-      <pc:sldChg chg="addSp modSp add">
-        <pc:chgData name="Xin Zou" userId="260b9726081dae15" providerId="LiveId" clId="{CD2C1F0B-44A1-4EE0-A9A4-DAABCBE61858}" dt="2018-10-08T21:01:38.479" v="4262" actId="20577"/>
-        <pc:sldMkLst>
-          <pc:docMk/>
-          <pc:sldMk cId="2709888784" sldId="312"/>
-        </pc:sldMkLst>
-        <pc:spChg chg="mod">
-          <ac:chgData name="Xin Zou" userId="260b9726081dae15" providerId="LiveId" clId="{CD2C1F0B-44A1-4EE0-A9A4-DAABCBE61858}" dt="2018-10-08T21:00:38.663" v="4250"/>
-          <ac:spMkLst>
-            <pc:docMk/>
-            <pc:sldMk cId="2709888784" sldId="312"/>
-            <ac:spMk id="2" creationId="{736BCFA2-56D0-4A83-9417-4E72101680CE}"/>
-          </ac:spMkLst>
-        </pc:spChg>
-        <pc:spChg chg="add mod">
-          <ac:chgData name="Xin Zou" userId="260b9726081dae15" providerId="LiveId" clId="{CD2C1F0B-44A1-4EE0-A9A4-DAABCBE61858}" dt="2018-10-08T21:01:38.479" v="4262" actId="20577"/>
-          <ac:spMkLst>
-            <pc:docMk/>
-            <pc:sldMk cId="2709888784" sldId="312"/>
-            <ac:spMk id="3" creationId="{3D40BC5F-469A-4A34-874A-5DEB547301B0}"/>
-          </ac:spMkLst>
-        </pc:spChg>
-      </pc:sldChg>
-      <pc:sldChg chg="addSp modSp add">
-        <pc:chgData name="Xin Zou" userId="260b9726081dae15" providerId="LiveId" clId="{CD2C1F0B-44A1-4EE0-A9A4-DAABCBE61858}" dt="2018-10-08T21:52:57.758" v="4404" actId="20577"/>
-        <pc:sldMkLst>
-          <pc:docMk/>
-          <pc:sldMk cId="1937573180" sldId="313"/>
-        </pc:sldMkLst>
-        <pc:spChg chg="mod">
-          <ac:chgData name="Xin Zou" userId="260b9726081dae15" providerId="LiveId" clId="{CD2C1F0B-44A1-4EE0-A9A4-DAABCBE61858}" dt="2018-10-08T21:51:54.499" v="4304"/>
-          <ac:spMkLst>
-            <pc:docMk/>
-            <pc:sldMk cId="1937573180" sldId="313"/>
-            <ac:spMk id="2" creationId="{5F7D260E-D0B1-44D5-BE5C-3E4D9AC1DCF8}"/>
-          </ac:spMkLst>
-        </pc:spChg>
-        <pc:spChg chg="add mod">
-          <ac:chgData name="Xin Zou" userId="260b9726081dae15" providerId="LiveId" clId="{CD2C1F0B-44A1-4EE0-A9A4-DAABCBE61858}" dt="2018-10-08T21:52:57.758" v="4404" actId="20577"/>
-          <ac:spMkLst>
-            <pc:docMk/>
-            <pc:sldMk cId="1937573180" sldId="313"/>
-            <ac:spMk id="3" creationId="{56732DA4-A750-4659-92AE-4E3E74EC3080}"/>
-          </ac:spMkLst>
-        </pc:spChg>
-      </pc:sldChg>
-      <pc:sldMasterChg chg="modSp modSldLayout">
-        <pc:chgData name="Xin Zou" userId="260b9726081dae15" providerId="LiveId" clId="{CD2C1F0B-44A1-4EE0-A9A4-DAABCBE61858}" dt="2018-10-07T06:54:44.156" v="0"/>
-        <pc:sldMasterMkLst>
-          <pc:docMk/>
-          <pc:sldMasterMk cId="0" sldId="2147483672"/>
-        </pc:sldMasterMkLst>
-        <pc:spChg chg="mod">
-          <ac:chgData name="Xin Zou" userId="260b9726081dae15" providerId="LiveId" clId="{CD2C1F0B-44A1-4EE0-A9A4-DAABCBE61858}" dt="2018-10-07T06:54:44.156" v="0"/>
-          <ac:spMkLst>
-            <pc:docMk/>
-            <pc:sldMasterMk cId="0" sldId="2147483672"/>
-            <ac:spMk id="2" creationId="{00000000-0000-0000-0000-000000000000}"/>
-          </ac:spMkLst>
-        </pc:spChg>
-        <pc:spChg chg="mod">
-          <ac:chgData name="Xin Zou" userId="260b9726081dae15" providerId="LiveId" clId="{CD2C1F0B-44A1-4EE0-A9A4-DAABCBE61858}" dt="2018-10-07T06:54:44.156" v="0"/>
-          <ac:spMkLst>
-            <pc:docMk/>
-            <pc:sldMasterMk cId="0" sldId="2147483672"/>
-            <ac:spMk id="3" creationId="{00000000-0000-0000-0000-000000000000}"/>
-          </ac:spMkLst>
-        </pc:spChg>
-        <pc:spChg chg="mod">
-          <ac:chgData name="Xin Zou" userId="260b9726081dae15" providerId="LiveId" clId="{CD2C1F0B-44A1-4EE0-A9A4-DAABCBE61858}" dt="2018-10-07T06:54:44.156" v="0"/>
-          <ac:spMkLst>
-            <pc:docMk/>
-            <pc:sldMasterMk cId="0" sldId="2147483672"/>
-            <ac:spMk id="4" creationId="{00000000-0000-0000-0000-000000000000}"/>
-          </ac:spMkLst>
-        </pc:spChg>
-        <pc:spChg chg="mod">
-          <ac:chgData name="Xin Zou" userId="260b9726081dae15" providerId="LiveId" clId="{CD2C1F0B-44A1-4EE0-A9A4-DAABCBE61858}" dt="2018-10-07T06:54:44.156" v="0"/>
-          <ac:spMkLst>
-            <pc:docMk/>
-            <pc:sldMasterMk cId="0" sldId="2147483672"/>
-            <ac:spMk id="5" creationId="{00000000-0000-0000-0000-000000000000}"/>
-          </ac:spMkLst>
-        </pc:spChg>
-        <pc:spChg chg="mod">
-          <ac:chgData name="Xin Zou" userId="260b9726081dae15" providerId="LiveId" clId="{CD2C1F0B-44A1-4EE0-A9A4-DAABCBE61858}" dt="2018-10-07T06:54:44.156" v="0"/>
-          <ac:spMkLst>
-            <pc:docMk/>
-            <pc:sldMasterMk cId="0" sldId="2147483672"/>
-            <ac:spMk id="6" creationId="{00000000-0000-0000-0000-000000000000}"/>
-          </ac:spMkLst>
-        </pc:spChg>
-        <pc:spChg chg="mod">
-          <ac:chgData name="Xin Zou" userId="260b9726081dae15" providerId="LiveId" clId="{CD2C1F0B-44A1-4EE0-A9A4-DAABCBE61858}" dt="2018-10-07T06:54:44.156" v="0"/>
-          <ac:spMkLst>
-            <pc:docMk/>
-            <pc:sldMasterMk cId="0" sldId="2147483672"/>
-            <ac:spMk id="7" creationId="{00000000-0000-0000-0000-000000000000}"/>
-          </ac:spMkLst>
-        </pc:spChg>
-        <pc:spChg chg="mod">
-          <ac:chgData name="Xin Zou" userId="260b9726081dae15" providerId="LiveId" clId="{CD2C1F0B-44A1-4EE0-A9A4-DAABCBE61858}" dt="2018-10-07T06:54:44.156" v="0"/>
-          <ac:spMkLst>
-            <pc:docMk/>
-            <pc:sldMasterMk cId="0" sldId="2147483672"/>
-            <ac:spMk id="10" creationId="{00000000-0000-0000-0000-000000000000}"/>
-          </ac:spMkLst>
-        </pc:spChg>
-        <pc:sldLayoutChg chg="modSp">
-          <pc:chgData name="Xin Zou" userId="260b9726081dae15" providerId="LiveId" clId="{CD2C1F0B-44A1-4EE0-A9A4-DAABCBE61858}" dt="2018-10-07T06:54:44.156" v="0"/>
-          <pc:sldLayoutMkLst>
-            <pc:docMk/>
-            <pc:sldMasterMk cId="0" sldId="2147483672"/>
-            <pc:sldLayoutMk cId="0" sldId="2147483673"/>
-          </pc:sldLayoutMkLst>
-          <pc:spChg chg="mod">
-            <ac:chgData name="Xin Zou" userId="260b9726081dae15" providerId="LiveId" clId="{CD2C1F0B-44A1-4EE0-A9A4-DAABCBE61858}" dt="2018-10-07T06:54:44.156" v="0"/>
-            <ac:spMkLst>
-              <pc:docMk/>
-              <pc:sldMasterMk cId="0" sldId="2147483672"/>
-              <pc:sldLayoutMk cId="0" sldId="2147483673"/>
-              <ac:spMk id="2" creationId="{00000000-0000-0000-0000-000000000000}"/>
-            </ac:spMkLst>
-          </pc:spChg>
-          <pc:spChg chg="mod">
-            <ac:chgData name="Xin Zou" userId="260b9726081dae15" providerId="LiveId" clId="{CD2C1F0B-44A1-4EE0-A9A4-DAABCBE61858}" dt="2018-10-07T06:54:44.156" v="0"/>
-            <ac:spMkLst>
-              <pc:docMk/>
-              <pc:sldMasterMk cId="0" sldId="2147483672"/>
-              <pc:sldLayoutMk cId="0" sldId="2147483673"/>
-              <ac:spMk id="3" creationId="{00000000-0000-0000-0000-000000000000}"/>
-            </ac:spMkLst>
-          </pc:spChg>
-          <pc:spChg chg="mod">
-            <ac:chgData name="Xin Zou" userId="260b9726081dae15" providerId="LiveId" clId="{CD2C1F0B-44A1-4EE0-A9A4-DAABCBE61858}" dt="2018-10-07T06:54:44.156" v="0"/>
-            <ac:spMkLst>
-              <pc:docMk/>
-              <pc:sldMasterMk cId="0" sldId="2147483672"/>
-              <pc:sldLayoutMk cId="0" sldId="2147483673"/>
-              <ac:spMk id="9" creationId="{00000000-0000-0000-0000-000000000000}"/>
-            </ac:spMkLst>
-          </pc:spChg>
-          <pc:spChg chg="mod">
-            <ac:chgData name="Xin Zou" userId="260b9726081dae15" providerId="LiveId" clId="{CD2C1F0B-44A1-4EE0-A9A4-DAABCBE61858}" dt="2018-10-07T06:54:44.156" v="0"/>
-            <ac:spMkLst>
-              <pc:docMk/>
-              <pc:sldMasterMk cId="0" sldId="2147483672"/>
-              <pc:sldLayoutMk cId="0" sldId="2147483673"/>
-              <ac:spMk id="10" creationId="{00000000-0000-0000-0000-000000000000}"/>
-            </ac:spMkLst>
-          </pc:spChg>
-        </pc:sldLayoutChg>
-        <pc:sldLayoutChg chg="modSp">
-          <pc:chgData name="Xin Zou" userId="260b9726081dae15" providerId="LiveId" clId="{CD2C1F0B-44A1-4EE0-A9A4-DAABCBE61858}" dt="2018-10-07T06:54:44.156" v="0"/>
-          <pc:sldLayoutMkLst>
-            <pc:docMk/>
-            <pc:sldMasterMk cId="0" sldId="2147483672"/>
-            <pc:sldLayoutMk cId="0" sldId="2147483674"/>
-          </pc:sldLayoutMkLst>
-          <pc:spChg chg="mod">
-            <ac:chgData name="Xin Zou" userId="260b9726081dae15" providerId="LiveId" clId="{CD2C1F0B-44A1-4EE0-A9A4-DAABCBE61858}" dt="2018-10-07T06:54:44.156" v="0"/>
-            <ac:spMkLst>
-              <pc:docMk/>
-              <pc:sldMasterMk cId="0" sldId="2147483672"/>
-              <pc:sldLayoutMk cId="0" sldId="2147483674"/>
-              <ac:spMk id="2" creationId="{00000000-0000-0000-0000-000000000000}"/>
-            </ac:spMkLst>
-          </pc:spChg>
-        </pc:sldLayoutChg>
-        <pc:sldLayoutChg chg="modSp">
-          <pc:chgData name="Xin Zou" userId="260b9726081dae15" providerId="LiveId" clId="{CD2C1F0B-44A1-4EE0-A9A4-DAABCBE61858}" dt="2018-10-07T06:54:44.156" v="0"/>
-          <pc:sldLayoutMkLst>
-            <pc:docMk/>
-            <pc:sldMasterMk cId="0" sldId="2147483672"/>
-            <pc:sldLayoutMk cId="0" sldId="2147483675"/>
-          </pc:sldLayoutMkLst>
-          <pc:spChg chg="mod">
-            <ac:chgData name="Xin Zou" userId="260b9726081dae15" providerId="LiveId" clId="{CD2C1F0B-44A1-4EE0-A9A4-DAABCBE61858}" dt="2018-10-07T06:54:44.156" v="0"/>
-            <ac:spMkLst>
-              <pc:docMk/>
-              <pc:sldMasterMk cId="0" sldId="2147483672"/>
-              <pc:sldLayoutMk cId="0" sldId="2147483675"/>
-              <ac:spMk id="2" creationId="{00000000-0000-0000-0000-000000000000}"/>
-            </ac:spMkLst>
-          </pc:spChg>
-          <pc:spChg chg="mod">
-            <ac:chgData name="Xin Zou" userId="260b9726081dae15" providerId="LiveId" clId="{CD2C1F0B-44A1-4EE0-A9A4-DAABCBE61858}" dt="2018-10-07T06:54:44.156" v="0"/>
-            <ac:spMkLst>
-              <pc:docMk/>
-              <pc:sldMasterMk cId="0" sldId="2147483672"/>
-              <pc:sldLayoutMk cId="0" sldId="2147483675"/>
-              <ac:spMk id="3" creationId="{00000000-0000-0000-0000-000000000000}"/>
-            </ac:spMkLst>
-          </pc:spChg>
-          <pc:spChg chg="mod">
-            <ac:chgData name="Xin Zou" userId="260b9726081dae15" providerId="LiveId" clId="{CD2C1F0B-44A1-4EE0-A9A4-DAABCBE61858}" dt="2018-10-07T06:54:44.156" v="0"/>
-            <ac:spMkLst>
-              <pc:docMk/>
-              <pc:sldMasterMk cId="0" sldId="2147483672"/>
-              <pc:sldLayoutMk cId="0" sldId="2147483675"/>
-              <ac:spMk id="9" creationId="{00000000-0000-0000-0000-000000000000}"/>
-            </ac:spMkLst>
-          </pc:spChg>
-          <pc:spChg chg="mod">
-            <ac:chgData name="Xin Zou" userId="260b9726081dae15" providerId="LiveId" clId="{CD2C1F0B-44A1-4EE0-A9A4-DAABCBE61858}" dt="2018-10-07T06:54:44.156" v="0"/>
-            <ac:spMkLst>
-              <pc:docMk/>
-              <pc:sldMasterMk cId="0" sldId="2147483672"/>
-              <pc:sldLayoutMk cId="0" sldId="2147483675"/>
-              <ac:spMk id="12" creationId="{00000000-0000-0000-0000-000000000000}"/>
-            </ac:spMkLst>
-          </pc:spChg>
-        </pc:sldLayoutChg>
-        <pc:sldLayoutChg chg="modSp">
-          <pc:chgData name="Xin Zou" userId="260b9726081dae15" providerId="LiveId" clId="{CD2C1F0B-44A1-4EE0-A9A4-DAABCBE61858}" dt="2018-10-07T06:54:44.156" v="0"/>
-          <pc:sldLayoutMkLst>
-            <pc:docMk/>
-            <pc:sldMasterMk cId="0" sldId="2147483672"/>
-            <pc:sldLayoutMk cId="0" sldId="2147483676"/>
-          </pc:sldLayoutMkLst>
-          <pc:spChg chg="mod">
-            <ac:chgData name="Xin Zou" userId="260b9726081dae15" providerId="LiveId" clId="{CD2C1F0B-44A1-4EE0-A9A4-DAABCBE61858}" dt="2018-10-07T06:54:44.156" v="0"/>
-            <ac:spMkLst>
-              <pc:docMk/>
-              <pc:sldMasterMk cId="0" sldId="2147483672"/>
-              <pc:sldLayoutMk cId="0" sldId="2147483676"/>
-              <ac:spMk id="3" creationId="{00000000-0000-0000-0000-000000000000}"/>
-            </ac:spMkLst>
-          </pc:spChg>
-          <pc:spChg chg="mod">
-            <ac:chgData name="Xin Zou" userId="260b9726081dae15" providerId="LiveId" clId="{CD2C1F0B-44A1-4EE0-A9A4-DAABCBE61858}" dt="2018-10-07T06:54:44.156" v="0"/>
-            <ac:spMkLst>
-              <pc:docMk/>
-              <pc:sldMasterMk cId="0" sldId="2147483672"/>
-              <pc:sldLayoutMk cId="0" sldId="2147483676"/>
-              <ac:spMk id="4" creationId="{00000000-0000-0000-0000-000000000000}"/>
-            </ac:spMkLst>
-          </pc:spChg>
-        </pc:sldLayoutChg>
-        <pc:sldLayoutChg chg="modSp">
-          <pc:chgData name="Xin Zou" userId="260b9726081dae15" providerId="LiveId" clId="{CD2C1F0B-44A1-4EE0-A9A4-DAABCBE61858}" dt="2018-10-07T06:54:44.156" v="0"/>
-          <pc:sldLayoutMkLst>
-            <pc:docMk/>
-            <pc:sldMasterMk cId="0" sldId="2147483672"/>
-            <pc:sldLayoutMk cId="0" sldId="2147483677"/>
-          </pc:sldLayoutMkLst>
-          <pc:spChg chg="mod">
-            <ac:chgData name="Xin Zou" userId="260b9726081dae15" providerId="LiveId" clId="{CD2C1F0B-44A1-4EE0-A9A4-DAABCBE61858}" dt="2018-10-07T06:54:44.156" v="0"/>
-            <ac:spMkLst>
-              <pc:docMk/>
-              <pc:sldMasterMk cId="0" sldId="2147483672"/>
-              <pc:sldLayoutMk cId="0" sldId="2147483677"/>
-              <ac:spMk id="3" creationId="{00000000-0000-0000-0000-000000000000}"/>
-            </ac:spMkLst>
-          </pc:spChg>
-          <pc:spChg chg="mod">
-            <ac:chgData name="Xin Zou" userId="260b9726081dae15" providerId="LiveId" clId="{CD2C1F0B-44A1-4EE0-A9A4-DAABCBE61858}" dt="2018-10-07T06:54:44.156" v="0"/>
-            <ac:spMkLst>
-              <pc:docMk/>
-              <pc:sldMasterMk cId="0" sldId="2147483672"/>
-              <pc:sldLayoutMk cId="0" sldId="2147483677"/>
-              <ac:spMk id="4" creationId="{00000000-0000-0000-0000-000000000000}"/>
-            </ac:spMkLst>
-          </pc:spChg>
-          <pc:spChg chg="mod">
-            <ac:chgData name="Xin Zou" userId="260b9726081dae15" providerId="LiveId" clId="{CD2C1F0B-44A1-4EE0-A9A4-DAABCBE61858}" dt="2018-10-07T06:54:44.156" v="0"/>
-            <ac:spMkLst>
-              <pc:docMk/>
-              <pc:sldMasterMk cId="0" sldId="2147483672"/>
-              <pc:sldLayoutMk cId="0" sldId="2147483677"/>
-              <ac:spMk id="5" creationId="{00000000-0000-0000-0000-000000000000}"/>
-            </ac:spMkLst>
-          </pc:spChg>
-          <pc:spChg chg="mod">
-            <ac:chgData name="Xin Zou" userId="260b9726081dae15" providerId="LiveId" clId="{CD2C1F0B-44A1-4EE0-A9A4-DAABCBE61858}" dt="2018-10-07T06:54:44.156" v="0"/>
-            <ac:spMkLst>
-              <pc:docMk/>
-              <pc:sldMasterMk cId="0" sldId="2147483672"/>
-              <pc:sldLayoutMk cId="0" sldId="2147483677"/>
-              <ac:spMk id="6" creationId="{00000000-0000-0000-0000-000000000000}"/>
-            </ac:spMkLst>
-          </pc:spChg>
-        </pc:sldLayoutChg>
-        <pc:sldLayoutChg chg="modSp">
-          <pc:chgData name="Xin Zou" userId="260b9726081dae15" providerId="LiveId" clId="{CD2C1F0B-44A1-4EE0-A9A4-DAABCBE61858}" dt="2018-10-07T06:54:44.156" v="0"/>
-          <pc:sldLayoutMkLst>
-            <pc:docMk/>
-            <pc:sldMasterMk cId="0" sldId="2147483672"/>
-            <pc:sldLayoutMk cId="0" sldId="2147483680"/>
-          </pc:sldLayoutMkLst>
-          <pc:spChg chg="mod">
-            <ac:chgData name="Xin Zou" userId="260b9726081dae15" providerId="LiveId" clId="{CD2C1F0B-44A1-4EE0-A9A4-DAABCBE61858}" dt="2018-10-07T06:54:44.156" v="0"/>
-            <ac:spMkLst>
-              <pc:docMk/>
-              <pc:sldMasterMk cId="0" sldId="2147483672"/>
-              <pc:sldLayoutMk cId="0" sldId="2147483680"/>
-              <ac:spMk id="2" creationId="{00000000-0000-0000-0000-000000000000}"/>
-            </ac:spMkLst>
-          </pc:spChg>
-          <pc:spChg chg="mod">
-            <ac:chgData name="Xin Zou" userId="260b9726081dae15" providerId="LiveId" clId="{CD2C1F0B-44A1-4EE0-A9A4-DAABCBE61858}" dt="2018-10-07T06:54:44.156" v="0"/>
-            <ac:spMkLst>
-              <pc:docMk/>
-              <pc:sldMasterMk cId="0" sldId="2147483672"/>
-              <pc:sldLayoutMk cId="0" sldId="2147483680"/>
-              <ac:spMk id="3" creationId="{00000000-0000-0000-0000-000000000000}"/>
-            </ac:spMkLst>
-          </pc:spChg>
-          <pc:spChg chg="mod">
-            <ac:chgData name="Xin Zou" userId="260b9726081dae15" providerId="LiveId" clId="{CD2C1F0B-44A1-4EE0-A9A4-DAABCBE61858}" dt="2018-10-07T06:54:44.156" v="0"/>
-            <ac:spMkLst>
-              <pc:docMk/>
-              <pc:sldMasterMk cId="0" sldId="2147483672"/>
-              <pc:sldLayoutMk cId="0" sldId="2147483680"/>
-              <ac:spMk id="4" creationId="{00000000-0000-0000-0000-000000000000}"/>
-            </ac:spMkLst>
-          </pc:spChg>
-          <pc:spChg chg="mod">
-            <ac:chgData name="Xin Zou" userId="260b9726081dae15" providerId="LiveId" clId="{CD2C1F0B-44A1-4EE0-A9A4-DAABCBE61858}" dt="2018-10-07T06:54:44.156" v="0"/>
-            <ac:spMkLst>
-              <pc:docMk/>
-              <pc:sldMasterMk cId="0" sldId="2147483672"/>
-              <pc:sldLayoutMk cId="0" sldId="2147483680"/>
-              <ac:spMk id="9" creationId="{00000000-0000-0000-0000-000000000000}"/>
-            </ac:spMkLst>
-          </pc:spChg>
-          <pc:spChg chg="mod">
-            <ac:chgData name="Xin Zou" userId="260b9726081dae15" providerId="LiveId" clId="{CD2C1F0B-44A1-4EE0-A9A4-DAABCBE61858}" dt="2018-10-07T06:54:44.156" v="0"/>
-            <ac:spMkLst>
-              <pc:docMk/>
-              <pc:sldMasterMk cId="0" sldId="2147483672"/>
-              <pc:sldLayoutMk cId="0" sldId="2147483680"/>
-              <ac:spMk id="12" creationId="{00000000-0000-0000-0000-000000000000}"/>
-            </ac:spMkLst>
-          </pc:spChg>
-        </pc:sldLayoutChg>
-        <pc:sldLayoutChg chg="modSp">
-          <pc:chgData name="Xin Zou" userId="260b9726081dae15" providerId="LiveId" clId="{CD2C1F0B-44A1-4EE0-A9A4-DAABCBE61858}" dt="2018-10-07T06:54:44.156" v="0"/>
-          <pc:sldLayoutMkLst>
-            <pc:docMk/>
-            <pc:sldMasterMk cId="0" sldId="2147483672"/>
-            <pc:sldLayoutMk cId="0" sldId="2147483681"/>
-          </pc:sldLayoutMkLst>
-          <pc:spChg chg="mod">
-            <ac:chgData name="Xin Zou" userId="260b9726081dae15" providerId="LiveId" clId="{CD2C1F0B-44A1-4EE0-A9A4-DAABCBE61858}" dt="2018-10-07T06:54:44.156" v="0"/>
-            <ac:spMkLst>
-              <pc:docMk/>
-              <pc:sldMasterMk cId="0" sldId="2147483672"/>
-              <pc:sldLayoutMk cId="0" sldId="2147483681"/>
-              <ac:spMk id="2" creationId="{00000000-0000-0000-0000-000000000000}"/>
-            </ac:spMkLst>
-          </pc:spChg>
-          <pc:spChg chg="mod">
-            <ac:chgData name="Xin Zou" userId="260b9726081dae15" providerId="LiveId" clId="{CD2C1F0B-44A1-4EE0-A9A4-DAABCBE61858}" dt="2018-10-07T06:54:44.156" v="0"/>
-            <ac:spMkLst>
-              <pc:docMk/>
-              <pc:sldMasterMk cId="0" sldId="2147483672"/>
-              <pc:sldLayoutMk cId="0" sldId="2147483681"/>
-              <ac:spMk id="3" creationId="{00000000-0000-0000-0000-000000000000}"/>
-            </ac:spMkLst>
-          </pc:spChg>
-          <pc:spChg chg="mod">
-            <ac:chgData name="Xin Zou" userId="260b9726081dae15" providerId="LiveId" clId="{CD2C1F0B-44A1-4EE0-A9A4-DAABCBE61858}" dt="2018-10-07T06:54:44.156" v="0"/>
-            <ac:spMkLst>
-              <pc:docMk/>
-              <pc:sldMasterMk cId="0" sldId="2147483672"/>
-              <pc:sldLayoutMk cId="0" sldId="2147483681"/>
-              <ac:spMk id="4" creationId="{00000000-0000-0000-0000-000000000000}"/>
-            </ac:spMkLst>
-          </pc:spChg>
-          <pc:spChg chg="mod">
-            <ac:chgData name="Xin Zou" userId="260b9726081dae15" providerId="LiveId" clId="{CD2C1F0B-44A1-4EE0-A9A4-DAABCBE61858}" dt="2018-10-07T06:54:44.156" v="0"/>
-            <ac:spMkLst>
-              <pc:docMk/>
-              <pc:sldMasterMk cId="0" sldId="2147483672"/>
-              <pc:sldLayoutMk cId="0" sldId="2147483681"/>
-              <ac:spMk id="5" creationId="{00000000-0000-0000-0000-000000000000}"/>
-            </ac:spMkLst>
-          </pc:spChg>
-          <pc:spChg chg="mod">
-            <ac:chgData name="Xin Zou" userId="260b9726081dae15" providerId="LiveId" clId="{CD2C1F0B-44A1-4EE0-A9A4-DAABCBE61858}" dt="2018-10-07T06:54:44.156" v="0"/>
-            <ac:spMkLst>
-              <pc:docMk/>
-              <pc:sldMasterMk cId="0" sldId="2147483672"/>
-              <pc:sldLayoutMk cId="0" sldId="2147483681"/>
-              <ac:spMk id="6" creationId="{00000000-0000-0000-0000-000000000000}"/>
-            </ac:spMkLst>
-          </pc:spChg>
-          <pc:spChg chg="mod">
-            <ac:chgData name="Xin Zou" userId="260b9726081dae15" providerId="LiveId" clId="{CD2C1F0B-44A1-4EE0-A9A4-DAABCBE61858}" dt="2018-10-07T06:54:44.156" v="0"/>
-            <ac:spMkLst>
-              <pc:docMk/>
-              <pc:sldMasterMk cId="0" sldId="2147483672"/>
-              <pc:sldLayoutMk cId="0" sldId="2147483681"/>
-              <ac:spMk id="7" creationId="{00000000-0000-0000-0000-000000000000}"/>
-            </ac:spMkLst>
-          </pc:spChg>
-          <pc:spChg chg="mod">
-            <ac:chgData name="Xin Zou" userId="260b9726081dae15" providerId="LiveId" clId="{CD2C1F0B-44A1-4EE0-A9A4-DAABCBE61858}" dt="2018-10-07T06:54:44.156" v="0"/>
-            <ac:spMkLst>
-              <pc:docMk/>
-              <pc:sldMasterMk cId="0" sldId="2147483672"/>
-              <pc:sldLayoutMk cId="0" sldId="2147483681"/>
-              <ac:spMk id="9" creationId="{00000000-0000-0000-0000-000000000000}"/>
-            </ac:spMkLst>
-          </pc:spChg>
-          <pc:spChg chg="mod">
-            <ac:chgData name="Xin Zou" userId="260b9726081dae15" providerId="LiveId" clId="{CD2C1F0B-44A1-4EE0-A9A4-DAABCBE61858}" dt="2018-10-07T06:54:44.156" v="0"/>
-            <ac:spMkLst>
-              <pc:docMk/>
-              <pc:sldMasterMk cId="0" sldId="2147483672"/>
-              <pc:sldLayoutMk cId="0" sldId="2147483681"/>
-              <ac:spMk id="11" creationId="{00000000-0000-0000-0000-000000000000}"/>
-            </ac:spMkLst>
-          </pc:spChg>
-        </pc:sldLayoutChg>
-        <pc:sldLayoutChg chg="modSp">
-          <pc:chgData name="Xin Zou" userId="260b9726081dae15" providerId="LiveId" clId="{CD2C1F0B-44A1-4EE0-A9A4-DAABCBE61858}" dt="2018-10-07T06:54:44.156" v="0"/>
-          <pc:sldLayoutMkLst>
-            <pc:docMk/>
-            <pc:sldMasterMk cId="0" sldId="2147483672"/>
-            <pc:sldLayoutMk cId="0" sldId="2147483683"/>
-          </pc:sldLayoutMkLst>
-          <pc:spChg chg="mod">
-            <ac:chgData name="Xin Zou" userId="260b9726081dae15" providerId="LiveId" clId="{CD2C1F0B-44A1-4EE0-A9A4-DAABCBE61858}" dt="2018-10-07T06:54:44.156" v="0"/>
-            <ac:spMkLst>
-              <pc:docMk/>
-              <pc:sldMasterMk cId="0" sldId="2147483672"/>
-              <pc:sldLayoutMk cId="0" sldId="2147483683"/>
-              <ac:spMk id="2" creationId="{00000000-0000-0000-0000-000000000000}"/>
-            </ac:spMkLst>
-          </pc:spChg>
-          <pc:spChg chg="mod">
-            <ac:chgData name="Xin Zou" userId="260b9726081dae15" providerId="LiveId" clId="{CD2C1F0B-44A1-4EE0-A9A4-DAABCBE61858}" dt="2018-10-07T06:54:44.156" v="0"/>
-            <ac:spMkLst>
-              <pc:docMk/>
-              <pc:sldMasterMk cId="0" sldId="2147483672"/>
-              <pc:sldLayoutMk cId="0" sldId="2147483683"/>
-              <ac:spMk id="3" creationId="{00000000-0000-0000-0000-000000000000}"/>
-            </ac:spMkLst>
-          </pc:spChg>
-          <pc:spChg chg="mod">
-            <ac:chgData name="Xin Zou" userId="260b9726081dae15" providerId="LiveId" clId="{CD2C1F0B-44A1-4EE0-A9A4-DAABCBE61858}" dt="2018-10-07T06:54:44.156" v="0"/>
-            <ac:spMkLst>
-              <pc:docMk/>
-              <pc:sldMasterMk cId="0" sldId="2147483672"/>
-              <pc:sldLayoutMk cId="0" sldId="2147483683"/>
-              <ac:spMk id="5" creationId="{00000000-0000-0000-0000-000000000000}"/>
-            </ac:spMkLst>
-          </pc:spChg>
-          <pc:spChg chg="mod">
-            <ac:chgData name="Xin Zou" userId="260b9726081dae15" providerId="LiveId" clId="{CD2C1F0B-44A1-4EE0-A9A4-DAABCBE61858}" dt="2018-10-07T06:54:44.156" v="0"/>
-            <ac:spMkLst>
-              <pc:docMk/>
-              <pc:sldMasterMk cId="0" sldId="2147483672"/>
-              <pc:sldLayoutMk cId="0" sldId="2147483683"/>
-              <ac:spMk id="8" creationId="{00000000-0000-0000-0000-000000000000}"/>
-            </ac:spMkLst>
-          </pc:spChg>
-          <pc:spChg chg="mod">
-            <ac:chgData name="Xin Zou" userId="260b9726081dae15" providerId="LiveId" clId="{CD2C1F0B-44A1-4EE0-A9A4-DAABCBE61858}" dt="2018-10-07T06:54:44.156" v="0"/>
-            <ac:spMkLst>
-              <pc:docMk/>
-              <pc:sldMasterMk cId="0" sldId="2147483672"/>
-              <pc:sldLayoutMk cId="0" sldId="2147483683"/>
-              <ac:spMk id="9" creationId="{00000000-0000-0000-0000-000000000000}"/>
-            </ac:spMkLst>
-          </pc:spChg>
-        </pc:sldLayoutChg>
-      </pc:sldMasterChg>
-    </pc:docChg>
-  </pc:docChgLst>
-  <pc:docChgLst>
-    <pc:chgData name="Xin Zou" userId="260b9726081dae15" providerId="LiveId" clId="{6F68B3C8-9AC0-4D10-B9DD-CEE5CD47962B}"/>
-    <pc:docChg chg="custSel modSld">
-      <pc:chgData name="Xin Zou" userId="260b9726081dae15" providerId="LiveId" clId="{6F68B3C8-9AC0-4D10-B9DD-CEE5CD47962B}" dt="2018-11-29T01:57:24.515" v="9" actId="20577"/>
-      <pc:docMkLst>
-        <pc:docMk/>
-      </pc:docMkLst>
-      <pc:sldChg chg="modSp">
-        <pc:chgData name="Xin Zou" userId="260b9726081dae15" providerId="LiveId" clId="{6F68B3C8-9AC0-4D10-B9DD-CEE5CD47962B}" dt="2018-11-29T01:56:17.282" v="1" actId="27636"/>
-        <pc:sldMkLst>
-          <pc:docMk/>
-          <pc:sldMk cId="1635746704" sldId="267"/>
-        </pc:sldMkLst>
-        <pc:spChg chg="mod">
-          <ac:chgData name="Xin Zou" userId="260b9726081dae15" providerId="LiveId" clId="{6F68B3C8-9AC0-4D10-B9DD-CEE5CD47962B}" dt="2018-11-29T01:56:17.282" v="1" actId="27636"/>
-          <ac:spMkLst>
-            <pc:docMk/>
-            <pc:sldMk cId="1635746704" sldId="267"/>
-            <ac:spMk id="3" creationId="{00000000-0000-0000-0000-000000000000}"/>
-          </ac:spMkLst>
-        </pc:spChg>
-      </pc:sldChg>
-      <pc:sldChg chg="modSp">
-        <pc:chgData name="Xin Zou" userId="260b9726081dae15" providerId="LiveId" clId="{6F68B3C8-9AC0-4D10-B9DD-CEE5CD47962B}" dt="2018-11-29T01:56:58.913" v="2" actId="14100"/>
-        <pc:sldMkLst>
-          <pc:docMk/>
-          <pc:sldMk cId="2709888784" sldId="312"/>
-        </pc:sldMkLst>
-        <pc:spChg chg="mod">
-          <ac:chgData name="Xin Zou" userId="260b9726081dae15" providerId="LiveId" clId="{6F68B3C8-9AC0-4D10-B9DD-CEE5CD47962B}" dt="2018-11-29T01:56:58.913" v="2" actId="14100"/>
-          <ac:spMkLst>
-            <pc:docMk/>
-            <pc:sldMk cId="2709888784" sldId="312"/>
-            <ac:spMk id="3" creationId="{3D40BC5F-469A-4A34-874A-5DEB547301B0}"/>
-          </ac:spMkLst>
-        </pc:spChg>
-      </pc:sldChg>
-      <pc:sldChg chg="modSp">
-        <pc:chgData name="Xin Zou" userId="260b9726081dae15" providerId="LiveId" clId="{6F68B3C8-9AC0-4D10-B9DD-CEE5CD47962B}" dt="2018-11-29T01:57:24.515" v="9" actId="20577"/>
-        <pc:sldMkLst>
-          <pc:docMk/>
-          <pc:sldMk cId="1937573180" sldId="313"/>
-        </pc:sldMkLst>
-        <pc:spChg chg="mod">
-          <ac:chgData name="Xin Zou" userId="260b9726081dae15" providerId="LiveId" clId="{6F68B3C8-9AC0-4D10-B9DD-CEE5CD47962B}" dt="2018-11-29T01:57:24.515" v="9" actId="20577"/>
-          <ac:spMkLst>
-            <pc:docMk/>
-            <pc:sldMk cId="1937573180" sldId="313"/>
-            <ac:spMk id="3" creationId="{56732DA4-A750-4659-92AE-4E3E74EC3080}"/>
-          </ac:spMkLst>
-        </pc:spChg>
-      </pc:sldChg>
-    </pc:docChg>
-  </pc:docChgLst>
-  <pc:docChgLst>
-    <pc:chgData name="Xin Zou" userId="260b9726081dae15" providerId="LiveId" clId="{810CAE31-4E14-4DD0-86EF-F1FF1129690F}"/>
-    <pc:docChg chg="custSel modSld">
-      <pc:chgData name="Xin Zou" userId="260b9726081dae15" providerId="LiveId" clId="{810CAE31-4E14-4DD0-86EF-F1FF1129690F}" dt="2019-09-04T07:53:02.525" v="2" actId="27636"/>
-      <pc:docMkLst>
-        <pc:docMk/>
-      </pc:docMkLst>
-      <pc:sldChg chg="modSp">
-        <pc:chgData name="Xin Zou" userId="260b9726081dae15" providerId="LiveId" clId="{810CAE31-4E14-4DD0-86EF-F1FF1129690F}" dt="2019-09-04T07:53:02.525" v="2" actId="27636"/>
-        <pc:sldMkLst>
-          <pc:docMk/>
-          <pc:sldMk cId="4287330810" sldId="285"/>
-        </pc:sldMkLst>
-        <pc:spChg chg="mod">
-          <ac:chgData name="Xin Zou" userId="260b9726081dae15" providerId="LiveId" clId="{810CAE31-4E14-4DD0-86EF-F1FF1129690F}" dt="2019-09-04T07:53:02.525" v="2" actId="27636"/>
-          <ac:spMkLst>
-            <pc:docMk/>
-            <pc:sldMk cId="4287330810" sldId="285"/>
-            <ac:spMk id="3" creationId="{A566EDF2-11ED-4F9B-A98E-1CAA103D0918}"/>
-          </ac:spMkLst>
-        </pc:spChg>
-      </pc:sldChg>
-    </pc:docChg>
-  </pc:docChgLst>
-</pc:chgInfo>
-</file>
-
 <file path=ppt/diagrams/colors1.xml><?xml version="1.0" encoding="utf-8"?>
 <dgm:colorsDef xmlns:dgm="http://schemas.openxmlformats.org/drawingml/2006/diagram" xmlns:a="http://schemas.openxmlformats.org/drawingml/2006/main" uniqueId="urn:microsoft.com/office/officeart/2005/8/colors/accent2_2">
   <dgm:title val=""/>
@@ -1466,117 +168,39 @@
   <dgm:catLst>
     <dgm:cat type="accent2" pri="11200"/>
   </dgm:catLst>
-  <dgm:styleLbl name="node0">
+  <dgm:styleLbl name="alignAcc1">
     <dgm:fillClrLst meth="repeat">
-      <a:schemeClr val="accent2"/>
-    </dgm:fillClrLst>
-    <dgm:linClrLst meth="repeat">
-      <a:schemeClr val="lt1"/>
-    </dgm:linClrLst>
-    <dgm:effectClrLst/>
-    <dgm:txLinClrLst/>
-    <dgm:txFillClrLst/>
-    <dgm:txEffectClrLst/>
-  </dgm:styleLbl>
-  <dgm:styleLbl name="node1">
-    <dgm:fillClrLst meth="repeat">
-      <a:schemeClr val="accent2"/>
-    </dgm:fillClrLst>
-    <dgm:linClrLst meth="repeat">
-      <a:schemeClr val="lt1"/>
-    </dgm:linClrLst>
-    <dgm:effectClrLst/>
-    <dgm:txLinClrLst/>
-    <dgm:txFillClrLst/>
-    <dgm:txEffectClrLst/>
-  </dgm:styleLbl>
-  <dgm:styleLbl name="alignNode1">
-    <dgm:fillClrLst meth="repeat">
-      <a:schemeClr val="accent2"/>
+      <a:schemeClr val="lt1">
+        <a:alpha val="90000"/>
+      </a:schemeClr>
     </dgm:fillClrLst>
     <dgm:linClrLst meth="repeat">
       <a:schemeClr val="accent2"/>
     </dgm:linClrLst>
     <dgm:effectClrLst/>
     <dgm:txLinClrLst/>
-    <dgm:txFillClrLst/>
+    <dgm:txFillClrLst meth="repeat">
+      <a:schemeClr val="dk1"/>
+    </dgm:txFillClrLst>
     <dgm:txEffectClrLst/>
   </dgm:styleLbl>
-  <dgm:styleLbl name="lnNode1">
-    <dgm:fillClrLst meth="repeat">
-      <a:schemeClr val="accent2"/>
-    </dgm:fillClrLst>
-    <dgm:linClrLst meth="repeat">
-      <a:schemeClr val="lt1"/>
-    </dgm:linClrLst>
-    <dgm:effectClrLst/>
-    <dgm:txLinClrLst/>
-    <dgm:txFillClrLst/>
-    <dgm:txEffectClrLst/>
-  </dgm:styleLbl>
-  <dgm:styleLbl name="vennNode1">
+  <dgm:styleLbl name="alignAccFollowNode1">
     <dgm:fillClrLst meth="repeat">
       <a:schemeClr val="accent2">
-        <a:alpha val="50000"/>
+        <a:alpha val="90000"/>
+        <a:tint val="40000"/>
       </a:schemeClr>
     </dgm:fillClrLst>
     <dgm:linClrLst meth="repeat">
-      <a:schemeClr val="lt1"/>
-    </dgm:linClrLst>
-    <dgm:effectClrLst/>
-    <dgm:txLinClrLst/>
-    <dgm:txFillClrLst/>
-    <dgm:txEffectClrLst/>
-  </dgm:styleLbl>
-  <dgm:styleLbl name="node2">
-    <dgm:fillClrLst meth="repeat">
-      <a:schemeClr val="accent2"/>
-    </dgm:fillClrLst>
-    <dgm:linClrLst meth="repeat">
-      <a:schemeClr val="lt1"/>
-    </dgm:linClrLst>
-    <dgm:effectClrLst/>
-    <dgm:txLinClrLst/>
-    <dgm:txFillClrLst/>
-    <dgm:txEffectClrLst/>
-  </dgm:styleLbl>
-  <dgm:styleLbl name="node3">
-    <dgm:fillClrLst meth="repeat">
-      <a:schemeClr val="accent2"/>
-    </dgm:fillClrLst>
-    <dgm:linClrLst meth="repeat">
-      <a:schemeClr val="lt1"/>
-    </dgm:linClrLst>
-    <dgm:effectClrLst/>
-    <dgm:txLinClrLst/>
-    <dgm:txFillClrLst/>
-    <dgm:txEffectClrLst/>
-  </dgm:styleLbl>
-  <dgm:styleLbl name="node4">
-    <dgm:fillClrLst meth="repeat">
-      <a:schemeClr val="accent2"/>
-    </dgm:fillClrLst>
-    <dgm:linClrLst meth="repeat">
-      <a:schemeClr val="lt1"/>
-    </dgm:linClrLst>
-    <dgm:effectClrLst/>
-    <dgm:txLinClrLst/>
-    <dgm:txFillClrLst/>
-    <dgm:txEffectClrLst/>
-  </dgm:styleLbl>
-  <dgm:styleLbl name="fgImgPlace1">
-    <dgm:fillClrLst meth="repeat">
       <a:schemeClr val="accent2">
-        <a:tint val="50000"/>
+        <a:alpha val="90000"/>
+        <a:tint val="40000"/>
       </a:schemeClr>
-    </dgm:fillClrLst>
-    <dgm:linClrLst meth="repeat">
-      <a:schemeClr val="lt1"/>
     </dgm:linClrLst>
     <dgm:effectClrLst/>
     <dgm:txLinClrLst/>
     <dgm:txFillClrLst meth="repeat">
-      <a:schemeClr val="lt1"/>
+      <a:schemeClr val="dk1"/>
     </dgm:txFillClrLst>
     <dgm:txEffectClrLst/>
   </dgm:styleLbl>
@@ -1596,71 +220,7 @@
     </dgm:txFillClrLst>
     <dgm:txEffectClrLst/>
   </dgm:styleLbl>
-  <dgm:styleLbl name="bgImgPlace1">
-    <dgm:fillClrLst meth="repeat">
-      <a:schemeClr val="accent2">
-        <a:tint val="50000"/>
-      </a:schemeClr>
-    </dgm:fillClrLst>
-    <dgm:linClrLst meth="repeat">
-      <a:schemeClr val="lt1"/>
-    </dgm:linClrLst>
-    <dgm:effectClrLst/>
-    <dgm:txLinClrLst/>
-    <dgm:txFillClrLst meth="repeat">
-      <a:schemeClr val="lt1"/>
-    </dgm:txFillClrLst>
-    <dgm:txEffectClrLst/>
-  </dgm:styleLbl>
-  <dgm:styleLbl name="sibTrans2D1">
-    <dgm:fillClrLst meth="repeat">
-      <a:schemeClr val="accent2">
-        <a:tint val="60000"/>
-      </a:schemeClr>
-    </dgm:fillClrLst>
-    <dgm:linClrLst meth="repeat">
-      <a:schemeClr val="accent2">
-        <a:tint val="60000"/>
-      </a:schemeClr>
-    </dgm:linClrLst>
-    <dgm:effectClrLst/>
-    <dgm:txLinClrLst/>
-    <dgm:txFillClrLst/>
-    <dgm:txEffectClrLst/>
-  </dgm:styleLbl>
-  <dgm:styleLbl name="fgSibTrans2D1">
-    <dgm:fillClrLst meth="repeat">
-      <a:schemeClr val="accent2">
-        <a:tint val="60000"/>
-      </a:schemeClr>
-    </dgm:fillClrLst>
-    <dgm:linClrLst meth="repeat">
-      <a:schemeClr val="accent2">
-        <a:tint val="60000"/>
-      </a:schemeClr>
-    </dgm:linClrLst>
-    <dgm:effectClrLst/>
-    <dgm:txLinClrLst/>
-    <dgm:txFillClrLst/>
-    <dgm:txEffectClrLst/>
-  </dgm:styleLbl>
-  <dgm:styleLbl name="bgSibTrans2D1">
-    <dgm:fillClrLst meth="repeat">
-      <a:schemeClr val="accent2">
-        <a:tint val="60000"/>
-      </a:schemeClr>
-    </dgm:fillClrLst>
-    <dgm:linClrLst meth="repeat">
-      <a:schemeClr val="accent2">
-        <a:tint val="60000"/>
-      </a:schemeClr>
-    </dgm:linClrLst>
-    <dgm:effectClrLst/>
-    <dgm:txLinClrLst/>
-    <dgm:txFillClrLst/>
-    <dgm:txEffectClrLst/>
-  </dgm:styleLbl>
-  <dgm:styleLbl name="sibTrans1D1">
+  <dgm:styleLbl name="alignNode1">
     <dgm:fillClrLst meth="repeat">
       <a:schemeClr val="accent2"/>
     </dgm:fillClrLst>
@@ -1669,25 +229,7 @@
     </dgm:linClrLst>
     <dgm:effectClrLst/>
     <dgm:txLinClrLst/>
-    <dgm:txFillClrLst meth="repeat">
-      <a:schemeClr val="tx1"/>
-    </dgm:txFillClrLst>
-    <dgm:txEffectClrLst/>
-  </dgm:styleLbl>
-  <dgm:styleLbl name="callout">
-    <dgm:fillClrLst meth="repeat">
-      <a:schemeClr val="accent2"/>
-    </dgm:fillClrLst>
-    <dgm:linClrLst meth="repeat">
-      <a:schemeClr val="accent2">
-        <a:tint val="50000"/>
-      </a:schemeClr>
-    </dgm:linClrLst>
-    <dgm:effectClrLst/>
-    <dgm:txLinClrLst/>
-    <dgm:txFillClrLst meth="repeat">
-      <a:schemeClr val="tx1"/>
-    </dgm:txFillClrLst>
+    <dgm:txFillClrLst/>
     <dgm:txEffectClrLst/>
   </dgm:styleLbl>
   <dgm:styleLbl name="asst0">
@@ -1750,7 +292,75 @@
     <dgm:txFillClrLst/>
     <dgm:txEffectClrLst/>
   </dgm:styleLbl>
-  <dgm:styleLbl name="parChTrans2D1">
+  <dgm:styleLbl name="bgAcc1">
+    <dgm:fillClrLst meth="repeat">
+      <a:schemeClr val="lt1">
+        <a:alpha val="90000"/>
+      </a:schemeClr>
+    </dgm:fillClrLst>
+    <dgm:linClrLst meth="repeat">
+      <a:schemeClr val="accent2"/>
+    </dgm:linClrLst>
+    <dgm:effectClrLst/>
+    <dgm:txLinClrLst/>
+    <dgm:txFillClrLst meth="repeat">
+      <a:schemeClr val="dk1"/>
+    </dgm:txFillClrLst>
+    <dgm:txEffectClrLst/>
+  </dgm:styleLbl>
+  <dgm:styleLbl name="bgAccFollowNode1">
+    <dgm:fillClrLst meth="repeat">
+      <a:schemeClr val="accent2">
+        <a:alpha val="90000"/>
+        <a:tint val="40000"/>
+      </a:schemeClr>
+    </dgm:fillClrLst>
+    <dgm:linClrLst meth="repeat">
+      <a:schemeClr val="accent2">
+        <a:alpha val="90000"/>
+        <a:tint val="40000"/>
+      </a:schemeClr>
+    </dgm:linClrLst>
+    <dgm:effectClrLst/>
+    <dgm:txLinClrLst/>
+    <dgm:txFillClrLst meth="repeat">
+      <a:schemeClr val="dk1"/>
+    </dgm:txFillClrLst>
+    <dgm:txEffectClrLst/>
+  </dgm:styleLbl>
+  <dgm:styleLbl name="bgImgPlace1">
+    <dgm:fillClrLst meth="repeat">
+      <a:schemeClr val="accent2">
+        <a:tint val="50000"/>
+      </a:schemeClr>
+    </dgm:fillClrLst>
+    <dgm:linClrLst meth="repeat">
+      <a:schemeClr val="lt1"/>
+    </dgm:linClrLst>
+    <dgm:effectClrLst/>
+    <dgm:txLinClrLst/>
+    <dgm:txFillClrLst meth="repeat">
+      <a:schemeClr val="lt1"/>
+    </dgm:txFillClrLst>
+    <dgm:txEffectClrLst/>
+  </dgm:styleLbl>
+  <dgm:styleLbl name="bgShp">
+    <dgm:fillClrLst meth="repeat">
+      <a:schemeClr val="accent2">
+        <a:tint val="40000"/>
+      </a:schemeClr>
+    </dgm:fillClrLst>
+    <dgm:linClrLst meth="repeat">
+      <a:schemeClr val="accent2"/>
+    </dgm:linClrLst>
+    <dgm:effectClrLst/>
+    <dgm:txLinClrLst/>
+    <dgm:txFillClrLst meth="repeat">
+      <a:schemeClr val="dk1"/>
+    </dgm:txFillClrLst>
+    <dgm:txEffectClrLst/>
+  </dgm:styleLbl>
+  <dgm:styleLbl name="bgSibTrans2D1">
     <dgm:fillClrLst meth="repeat">
       <a:schemeClr val="accent2">
         <a:tint val="60000"/>
@@ -1763,14 +373,46 @@
     </dgm:linClrLst>
     <dgm:effectClrLst/>
     <dgm:txLinClrLst/>
+    <dgm:txFillClrLst/>
+    <dgm:txEffectClrLst/>
+  </dgm:styleLbl>
+  <dgm:styleLbl name="callout">
+    <dgm:fillClrLst meth="repeat">
+      <a:schemeClr val="accent2"/>
+    </dgm:fillClrLst>
+    <dgm:linClrLst meth="repeat">
+      <a:schemeClr val="accent2">
+        <a:tint val="50000"/>
+      </a:schemeClr>
+    </dgm:linClrLst>
+    <dgm:effectClrLst/>
+    <dgm:txLinClrLst/>
     <dgm:txFillClrLst meth="repeat">
-      <a:schemeClr val="lt1"/>
+      <a:schemeClr val="tx1"/>
     </dgm:txFillClrLst>
     <dgm:txEffectClrLst/>
   </dgm:styleLbl>
-  <dgm:styleLbl name="parChTrans2D2">
+  <dgm:styleLbl name="conFgAcc1">
     <dgm:fillClrLst meth="repeat">
+      <a:schemeClr val="lt1">
+        <a:alpha val="90000"/>
+      </a:schemeClr>
+    </dgm:fillClrLst>
+    <dgm:linClrLst meth="repeat">
       <a:schemeClr val="accent2"/>
+    </dgm:linClrLst>
+    <dgm:effectClrLst/>
+    <dgm:txLinClrLst/>
+    <dgm:txFillClrLst meth="repeat">
+      <a:schemeClr val="dk1"/>
+    </dgm:txFillClrLst>
+    <dgm:txEffectClrLst/>
+  </dgm:styleLbl>
+  <dgm:styleLbl name="dkBgShp">
+    <dgm:fillClrLst meth="repeat">
+      <a:schemeClr val="accent2">
+        <a:shade val="80000"/>
+      </a:schemeClr>
     </dgm:fillClrLst>
     <dgm:linClrLst meth="repeat">
       <a:schemeClr val="accent2"/>
@@ -1782,12 +424,114 @@
     </dgm:txFillClrLst>
     <dgm:txEffectClrLst/>
   </dgm:styleLbl>
-  <dgm:styleLbl name="parChTrans2D3">
+  <dgm:styleLbl name="fgAcc0">
     <dgm:fillClrLst meth="repeat">
-      <a:schemeClr val="accent2"/>
+      <a:schemeClr val="lt1">
+        <a:alpha val="90000"/>
+      </a:schemeClr>
     </dgm:fillClrLst>
     <dgm:linClrLst meth="repeat">
       <a:schemeClr val="accent2"/>
+    </dgm:linClrLst>
+    <dgm:effectClrLst/>
+    <dgm:txLinClrLst/>
+    <dgm:txFillClrLst meth="repeat">
+      <a:schemeClr val="dk1"/>
+    </dgm:txFillClrLst>
+    <dgm:txEffectClrLst/>
+  </dgm:styleLbl>
+  <dgm:styleLbl name="fgAcc1">
+    <dgm:fillClrLst meth="repeat">
+      <a:schemeClr val="lt1">
+        <a:alpha val="90000"/>
+      </a:schemeClr>
+    </dgm:fillClrLst>
+    <dgm:linClrLst meth="repeat">
+      <a:schemeClr val="accent2"/>
+    </dgm:linClrLst>
+    <dgm:effectClrLst/>
+    <dgm:txLinClrLst/>
+    <dgm:txFillClrLst meth="repeat">
+      <a:schemeClr val="dk1"/>
+    </dgm:txFillClrLst>
+    <dgm:txEffectClrLst/>
+  </dgm:styleLbl>
+  <dgm:styleLbl name="fgAcc2">
+    <dgm:fillClrLst meth="repeat">
+      <a:schemeClr val="lt1">
+        <a:alpha val="90000"/>
+      </a:schemeClr>
+    </dgm:fillClrLst>
+    <dgm:linClrLst meth="repeat">
+      <a:schemeClr val="accent2"/>
+    </dgm:linClrLst>
+    <dgm:effectClrLst/>
+    <dgm:txLinClrLst/>
+    <dgm:txFillClrLst meth="repeat">
+      <a:schemeClr val="dk1"/>
+    </dgm:txFillClrLst>
+    <dgm:txEffectClrLst/>
+  </dgm:styleLbl>
+  <dgm:styleLbl name="fgAcc3">
+    <dgm:fillClrLst meth="repeat">
+      <a:schemeClr val="lt1">
+        <a:alpha val="90000"/>
+      </a:schemeClr>
+    </dgm:fillClrLst>
+    <dgm:linClrLst meth="repeat">
+      <a:schemeClr val="accent2"/>
+    </dgm:linClrLst>
+    <dgm:effectClrLst/>
+    <dgm:txLinClrLst/>
+    <dgm:txFillClrLst meth="repeat">
+      <a:schemeClr val="dk1"/>
+    </dgm:txFillClrLst>
+    <dgm:txEffectClrLst/>
+  </dgm:styleLbl>
+  <dgm:styleLbl name="fgAcc4">
+    <dgm:fillClrLst meth="repeat">
+      <a:schemeClr val="lt1">
+        <a:alpha val="90000"/>
+      </a:schemeClr>
+    </dgm:fillClrLst>
+    <dgm:linClrLst meth="repeat">
+      <a:schemeClr val="accent2"/>
+    </dgm:linClrLst>
+    <dgm:effectClrLst/>
+    <dgm:txLinClrLst/>
+    <dgm:txFillClrLst meth="repeat">
+      <a:schemeClr val="dk1"/>
+    </dgm:txFillClrLst>
+    <dgm:txEffectClrLst/>
+  </dgm:styleLbl>
+  <dgm:styleLbl name="fgAccFollowNode1">
+    <dgm:fillClrLst meth="repeat">
+      <a:schemeClr val="accent2">
+        <a:alpha val="90000"/>
+        <a:tint val="40000"/>
+      </a:schemeClr>
+    </dgm:fillClrLst>
+    <dgm:linClrLst meth="repeat">
+      <a:schemeClr val="accent2">
+        <a:alpha val="90000"/>
+        <a:tint val="40000"/>
+      </a:schemeClr>
+    </dgm:linClrLst>
+    <dgm:effectClrLst/>
+    <dgm:txLinClrLst/>
+    <dgm:txFillClrLst meth="repeat">
+      <a:schemeClr val="dk1"/>
+    </dgm:txFillClrLst>
+    <dgm:txEffectClrLst/>
+  </dgm:styleLbl>
+  <dgm:styleLbl name="fgImgPlace1">
+    <dgm:fillClrLst meth="repeat">
+      <a:schemeClr val="accent2">
+        <a:tint val="50000"/>
+      </a:schemeClr>
+    </dgm:fillClrLst>
+    <dgm:linClrLst meth="repeat">
+      <a:schemeClr val="lt1"/>
     </dgm:linClrLst>
     <dgm:effectClrLst/>
     <dgm:txLinClrLst/>
@@ -1796,18 +540,108 @@
     </dgm:txFillClrLst>
     <dgm:txEffectClrLst/>
   </dgm:styleLbl>
-  <dgm:styleLbl name="parChTrans2D4">
+  <dgm:styleLbl name="fgShp">
+    <dgm:fillClrLst meth="repeat">
+      <a:schemeClr val="accent2">
+        <a:tint val="60000"/>
+      </a:schemeClr>
+    </dgm:fillClrLst>
+    <dgm:linClrLst meth="repeat">
+      <a:schemeClr val="lt1"/>
+    </dgm:linClrLst>
+    <dgm:effectClrLst/>
+    <dgm:txLinClrLst/>
+    <dgm:txFillClrLst meth="repeat">
+      <a:schemeClr val="dk1"/>
+    </dgm:txFillClrLst>
+    <dgm:txEffectClrLst/>
+  </dgm:styleLbl>
+  <dgm:styleLbl name="fgSibTrans2D1">
+    <dgm:fillClrLst meth="repeat">
+      <a:schemeClr val="accent2">
+        <a:tint val="60000"/>
+      </a:schemeClr>
+    </dgm:fillClrLst>
+    <dgm:linClrLst meth="repeat">
+      <a:schemeClr val="accent2">
+        <a:tint val="60000"/>
+      </a:schemeClr>
+    </dgm:linClrLst>
+    <dgm:effectClrLst/>
+    <dgm:txLinClrLst/>
+    <dgm:txFillClrLst/>
+    <dgm:txEffectClrLst/>
+  </dgm:styleLbl>
+  <dgm:styleLbl name="lnNode1">
     <dgm:fillClrLst meth="repeat">
       <a:schemeClr val="accent2"/>
     </dgm:fillClrLst>
     <dgm:linClrLst meth="repeat">
-      <a:schemeClr val="accent2"/>
+      <a:schemeClr val="lt1"/>
     </dgm:linClrLst>
     <dgm:effectClrLst/>
     <dgm:txLinClrLst/>
-    <dgm:txFillClrLst meth="repeat">
+    <dgm:txFillClrLst/>
+    <dgm:txEffectClrLst/>
+  </dgm:styleLbl>
+  <dgm:styleLbl name="node0">
+    <dgm:fillClrLst meth="repeat">
+      <a:schemeClr val="accent2"/>
+    </dgm:fillClrLst>
+    <dgm:linClrLst meth="repeat">
       <a:schemeClr val="lt1"/>
-    </dgm:txFillClrLst>
+    </dgm:linClrLst>
+    <dgm:effectClrLst/>
+    <dgm:txLinClrLst/>
+    <dgm:txFillClrLst/>
+    <dgm:txEffectClrLst/>
+  </dgm:styleLbl>
+  <dgm:styleLbl name="node1">
+    <dgm:fillClrLst meth="repeat">
+      <a:schemeClr val="accent2"/>
+    </dgm:fillClrLst>
+    <dgm:linClrLst meth="repeat">
+      <a:schemeClr val="lt1"/>
+    </dgm:linClrLst>
+    <dgm:effectClrLst/>
+    <dgm:txLinClrLst/>
+    <dgm:txFillClrLst/>
+    <dgm:txEffectClrLst/>
+  </dgm:styleLbl>
+  <dgm:styleLbl name="node2">
+    <dgm:fillClrLst meth="repeat">
+      <a:schemeClr val="accent2"/>
+    </dgm:fillClrLst>
+    <dgm:linClrLst meth="repeat">
+      <a:schemeClr val="lt1"/>
+    </dgm:linClrLst>
+    <dgm:effectClrLst/>
+    <dgm:txLinClrLst/>
+    <dgm:txFillClrLst/>
+    <dgm:txEffectClrLst/>
+  </dgm:styleLbl>
+  <dgm:styleLbl name="node3">
+    <dgm:fillClrLst meth="repeat">
+      <a:schemeClr val="accent2"/>
+    </dgm:fillClrLst>
+    <dgm:linClrLst meth="repeat">
+      <a:schemeClr val="lt1"/>
+    </dgm:linClrLst>
+    <dgm:effectClrLst/>
+    <dgm:txLinClrLst/>
+    <dgm:txFillClrLst/>
+    <dgm:txEffectClrLst/>
+  </dgm:styleLbl>
+  <dgm:styleLbl name="node4">
+    <dgm:fillClrLst meth="repeat">
+      <a:schemeClr val="accent2"/>
+    </dgm:fillClrLst>
+    <dgm:linClrLst meth="repeat">
+      <a:schemeClr val="lt1"/>
+    </dgm:linClrLst>
+    <dgm:effectClrLst/>
+    <dgm:txLinClrLst/>
+    <dgm:txFillClrLst/>
     <dgm:txEffectClrLst/>
   </dgm:styleLbl>
   <dgm:styleLbl name="parChTrans1D1">
@@ -1874,11 +708,27 @@
     </dgm:txFillClrLst>
     <dgm:txEffectClrLst/>
   </dgm:styleLbl>
-  <dgm:styleLbl name="fgAcc1">
+  <dgm:styleLbl name="parChTrans2D1">
     <dgm:fillClrLst meth="repeat">
-      <a:schemeClr val="lt1">
-        <a:alpha val="90000"/>
+      <a:schemeClr val="accent2">
+        <a:tint val="60000"/>
       </a:schemeClr>
+    </dgm:fillClrLst>
+    <dgm:linClrLst meth="repeat">
+      <a:schemeClr val="accent2">
+        <a:tint val="60000"/>
+      </a:schemeClr>
+    </dgm:linClrLst>
+    <dgm:effectClrLst/>
+    <dgm:txLinClrLst/>
+    <dgm:txFillClrLst meth="repeat">
+      <a:schemeClr val="lt1"/>
+    </dgm:txFillClrLst>
+    <dgm:txEffectClrLst/>
+  </dgm:styleLbl>
+  <dgm:styleLbl name="parChTrans2D2">
+    <dgm:fillClrLst meth="repeat">
+      <a:schemeClr val="accent2"/>
     </dgm:fillClrLst>
     <dgm:linClrLst meth="repeat">
       <a:schemeClr val="accent2"/>
@@ -1886,15 +736,13 @@
     <dgm:effectClrLst/>
     <dgm:txLinClrLst/>
     <dgm:txFillClrLst meth="repeat">
-      <a:schemeClr val="dk1"/>
+      <a:schemeClr val="lt1"/>
     </dgm:txFillClrLst>
     <dgm:txEffectClrLst/>
   </dgm:styleLbl>
-  <dgm:styleLbl name="conFgAcc1">
+  <dgm:styleLbl name="parChTrans2D3">
     <dgm:fillClrLst meth="repeat">
-      <a:schemeClr val="lt1">
-        <a:alpha val="90000"/>
-      </a:schemeClr>
+      <a:schemeClr val="accent2"/>
     </dgm:fillClrLst>
     <dgm:linClrLst meth="repeat">
       <a:schemeClr val="accent2"/>
@@ -1902,15 +750,13 @@
     <dgm:effectClrLst/>
     <dgm:txLinClrLst/>
     <dgm:txFillClrLst meth="repeat">
-      <a:schemeClr val="dk1"/>
+      <a:schemeClr val="lt1"/>
     </dgm:txFillClrLst>
     <dgm:txEffectClrLst/>
   </dgm:styleLbl>
-  <dgm:styleLbl name="alignAcc1">
+  <dgm:styleLbl name="parChTrans2D4">
     <dgm:fillClrLst meth="repeat">
-      <a:schemeClr val="lt1">
-        <a:alpha val="90000"/>
-      </a:schemeClr>
+      <a:schemeClr val="accent2"/>
     </dgm:fillClrLst>
     <dgm:linClrLst meth="repeat">
       <a:schemeClr val="accent2"/>
@@ -1918,15 +764,31 @@
     <dgm:effectClrLst/>
     <dgm:txLinClrLst/>
     <dgm:txFillClrLst meth="repeat">
-      <a:schemeClr val="dk1"/>
+      <a:schemeClr val="lt1"/>
     </dgm:txFillClrLst>
     <dgm:txEffectClrLst/>
   </dgm:styleLbl>
-  <dgm:styleLbl name="trAlignAcc1">
+  <dgm:styleLbl name="revTx">
     <dgm:fillClrLst meth="repeat">
       <a:schemeClr val="lt1">
-        <a:alpha val="40000"/>
+        <a:alpha val="0"/>
       </a:schemeClr>
+    </dgm:fillClrLst>
+    <dgm:linClrLst meth="repeat">
+      <a:schemeClr val="dk1">
+        <a:alpha val="0"/>
+      </a:schemeClr>
+    </dgm:linClrLst>
+    <dgm:effectClrLst/>
+    <dgm:txLinClrLst/>
+    <dgm:txFillClrLst meth="repeat">
+      <a:schemeClr val="tx1"/>
+    </dgm:txFillClrLst>
+    <dgm:txEffectClrLst/>
+  </dgm:styleLbl>
+  <dgm:styleLbl name="sibTrans1D1">
+    <dgm:fillClrLst meth="repeat">
+      <a:schemeClr val="accent2"/>
     </dgm:fillClrLst>
     <dgm:linClrLst meth="repeat">
       <a:schemeClr val="accent2"/>
@@ -1934,38 +796,24 @@
     <dgm:effectClrLst/>
     <dgm:txLinClrLst/>
     <dgm:txFillClrLst meth="repeat">
-      <a:schemeClr val="dk1"/>
+      <a:schemeClr val="tx1"/>
     </dgm:txFillClrLst>
     <dgm:txEffectClrLst/>
   </dgm:styleLbl>
-  <dgm:styleLbl name="bgAcc1">
+  <dgm:styleLbl name="sibTrans2D1">
     <dgm:fillClrLst meth="repeat">
-      <a:schemeClr val="lt1">
-        <a:alpha val="90000"/>
+      <a:schemeClr val="accent2">
+        <a:tint val="60000"/>
       </a:schemeClr>
     </dgm:fillClrLst>
     <dgm:linClrLst meth="repeat">
-      <a:schemeClr val="accent2"/>
+      <a:schemeClr val="accent2">
+        <a:tint val="60000"/>
+      </a:schemeClr>
     </dgm:linClrLst>
     <dgm:effectClrLst/>
     <dgm:txLinClrLst/>
-    <dgm:txFillClrLst meth="repeat">
-      <a:schemeClr val="dk1"/>
-    </dgm:txFillClrLst>
-    <dgm:txEffectClrLst/>
-  </dgm:styleLbl>
-  <dgm:styleLbl name="solidFgAcc1">
-    <dgm:fillClrLst meth="repeat">
-      <a:schemeClr val="lt1"/>
-    </dgm:fillClrLst>
-    <dgm:linClrLst meth="repeat">
-      <a:schemeClr val="accent2"/>
-    </dgm:linClrLst>
-    <dgm:effectClrLst/>
-    <dgm:txLinClrLst/>
-    <dgm:txFillClrLst meth="repeat">
-      <a:schemeClr val="dk1"/>
-    </dgm:txFillClrLst>
+    <dgm:txFillClrLst/>
     <dgm:txEffectClrLst/>
   </dgm:styleLbl>
   <dgm:styleLbl name="solidAlignAcc1">
@@ -1996,71 +844,9 @@
     </dgm:txFillClrLst>
     <dgm:txEffectClrLst/>
   </dgm:styleLbl>
-  <dgm:styleLbl name="fgAccFollowNode1">
+  <dgm:styleLbl name="solidFgAcc1">
     <dgm:fillClrLst meth="repeat">
-      <a:schemeClr val="accent2">
-        <a:alpha val="90000"/>
-        <a:tint val="40000"/>
-      </a:schemeClr>
-    </dgm:fillClrLst>
-    <dgm:linClrLst meth="repeat">
-      <a:schemeClr val="accent2">
-        <a:alpha val="90000"/>
-        <a:tint val="40000"/>
-      </a:schemeClr>
-    </dgm:linClrLst>
-    <dgm:effectClrLst/>
-    <dgm:txLinClrLst/>
-    <dgm:txFillClrLst meth="repeat">
-      <a:schemeClr val="dk1"/>
-    </dgm:txFillClrLst>
-    <dgm:txEffectClrLst/>
-  </dgm:styleLbl>
-  <dgm:styleLbl name="alignAccFollowNode1">
-    <dgm:fillClrLst meth="repeat">
-      <a:schemeClr val="accent2">
-        <a:alpha val="90000"/>
-        <a:tint val="40000"/>
-      </a:schemeClr>
-    </dgm:fillClrLst>
-    <dgm:linClrLst meth="repeat">
-      <a:schemeClr val="accent2">
-        <a:alpha val="90000"/>
-        <a:tint val="40000"/>
-      </a:schemeClr>
-    </dgm:linClrLst>
-    <dgm:effectClrLst/>
-    <dgm:txLinClrLst/>
-    <dgm:txFillClrLst meth="repeat">
-      <a:schemeClr val="dk1"/>
-    </dgm:txFillClrLst>
-    <dgm:txEffectClrLst/>
-  </dgm:styleLbl>
-  <dgm:styleLbl name="bgAccFollowNode1">
-    <dgm:fillClrLst meth="repeat">
-      <a:schemeClr val="accent2">
-        <a:alpha val="90000"/>
-        <a:tint val="40000"/>
-      </a:schemeClr>
-    </dgm:fillClrLst>
-    <dgm:linClrLst meth="repeat">
-      <a:schemeClr val="accent2">
-        <a:alpha val="90000"/>
-        <a:tint val="40000"/>
-      </a:schemeClr>
-    </dgm:linClrLst>
-    <dgm:effectClrLst/>
-    <dgm:txLinClrLst/>
-    <dgm:txFillClrLst meth="repeat">
-      <a:schemeClr val="dk1"/>
-    </dgm:txFillClrLst>
-    <dgm:txEffectClrLst/>
-  </dgm:styleLbl>
-  <dgm:styleLbl name="fgAcc0">
-    <dgm:fillClrLst meth="repeat">
-      <a:schemeClr val="lt1">
-        <a:alpha val="90000"/>
-      </a:schemeClr>
+      <a:schemeClr val="lt1"/>
     </dgm:fillClrLst>
     <dgm:linClrLst meth="repeat">
       <a:schemeClr val="accent2"/>
@@ -2072,10 +858,10 @@
     </dgm:txFillClrLst>
     <dgm:txEffectClrLst/>
   </dgm:styleLbl>
-  <dgm:styleLbl name="fgAcc2">
+  <dgm:styleLbl name="trAlignAcc1">
     <dgm:fillClrLst meth="repeat">
       <a:schemeClr val="lt1">
-        <a:alpha val="90000"/>
+        <a:alpha val="40000"/>
       </a:schemeClr>
     </dgm:fillClrLst>
     <dgm:linClrLst meth="repeat">
@@ -2085,70 +871,6 @@
     <dgm:txLinClrLst/>
     <dgm:txFillClrLst meth="repeat">
       <a:schemeClr val="dk1"/>
-    </dgm:txFillClrLst>
-    <dgm:txEffectClrLst/>
-  </dgm:styleLbl>
-  <dgm:styleLbl name="fgAcc3">
-    <dgm:fillClrLst meth="repeat">
-      <a:schemeClr val="lt1">
-        <a:alpha val="90000"/>
-      </a:schemeClr>
-    </dgm:fillClrLst>
-    <dgm:linClrLst meth="repeat">
-      <a:schemeClr val="accent2"/>
-    </dgm:linClrLst>
-    <dgm:effectClrLst/>
-    <dgm:txLinClrLst/>
-    <dgm:txFillClrLst meth="repeat">
-      <a:schemeClr val="dk1"/>
-    </dgm:txFillClrLst>
-    <dgm:txEffectClrLst/>
-  </dgm:styleLbl>
-  <dgm:styleLbl name="fgAcc4">
-    <dgm:fillClrLst meth="repeat">
-      <a:schemeClr val="lt1">
-        <a:alpha val="90000"/>
-      </a:schemeClr>
-    </dgm:fillClrLst>
-    <dgm:linClrLst meth="repeat">
-      <a:schemeClr val="accent2"/>
-    </dgm:linClrLst>
-    <dgm:effectClrLst/>
-    <dgm:txLinClrLst/>
-    <dgm:txFillClrLst meth="repeat">
-      <a:schemeClr val="dk1"/>
-    </dgm:txFillClrLst>
-    <dgm:txEffectClrLst/>
-  </dgm:styleLbl>
-  <dgm:styleLbl name="bgShp">
-    <dgm:fillClrLst meth="repeat">
-      <a:schemeClr val="accent2">
-        <a:tint val="40000"/>
-      </a:schemeClr>
-    </dgm:fillClrLst>
-    <dgm:linClrLst meth="repeat">
-      <a:schemeClr val="accent2"/>
-    </dgm:linClrLst>
-    <dgm:effectClrLst/>
-    <dgm:txLinClrLst/>
-    <dgm:txFillClrLst meth="repeat">
-      <a:schemeClr val="dk1"/>
-    </dgm:txFillClrLst>
-    <dgm:txEffectClrLst/>
-  </dgm:styleLbl>
-  <dgm:styleLbl name="dkBgShp">
-    <dgm:fillClrLst meth="repeat">
-      <a:schemeClr val="accent2">
-        <a:shade val="80000"/>
-      </a:schemeClr>
-    </dgm:fillClrLst>
-    <dgm:linClrLst meth="repeat">
-      <a:schemeClr val="accent2"/>
-    </dgm:linClrLst>
-    <dgm:effectClrLst/>
-    <dgm:txLinClrLst/>
-    <dgm:txFillClrLst meth="repeat">
-      <a:schemeClr val="lt1"/>
     </dgm:txFillClrLst>
     <dgm:txEffectClrLst/>
   </dgm:styleLbl>
@@ -2169,10 +891,10 @@
     </dgm:txFillClrLst>
     <dgm:txEffectClrLst/>
   </dgm:styleLbl>
-  <dgm:styleLbl name="fgShp">
+  <dgm:styleLbl name="vennNode1">
     <dgm:fillClrLst meth="repeat">
       <a:schemeClr val="accent2">
-        <a:tint val="60000"/>
+        <a:alpha val="50000"/>
       </a:schemeClr>
     </dgm:fillClrLst>
     <dgm:linClrLst meth="repeat">
@@ -2180,27 +902,7 @@
     </dgm:linClrLst>
     <dgm:effectClrLst/>
     <dgm:txLinClrLst/>
-    <dgm:txFillClrLst meth="repeat">
-      <a:schemeClr val="dk1"/>
-    </dgm:txFillClrLst>
-    <dgm:txEffectClrLst/>
-  </dgm:styleLbl>
-  <dgm:styleLbl name="revTx">
-    <dgm:fillClrLst meth="repeat">
-      <a:schemeClr val="lt1">
-        <a:alpha val="0"/>
-      </a:schemeClr>
-    </dgm:fillClrLst>
-    <dgm:linClrLst meth="repeat">
-      <a:schemeClr val="dk1">
-        <a:alpha val="0"/>
-      </a:schemeClr>
-    </dgm:linClrLst>
-    <dgm:effectClrLst/>
-    <dgm:txLinClrLst/>
-    <dgm:txFillClrLst meth="repeat">
-      <a:schemeClr val="tx1"/>
-    </dgm:txFillClrLst>
+    <dgm:txFillClrLst/>
     <dgm:txEffectClrLst/>
   </dgm:styleLbl>
 </dgm:colorsDef>
@@ -2235,7 +937,7 @@
         </a:p>
       </dgm:t>
     </dgm:pt>
-    <dgm:pt modelId="{BDCFCE1C-EBA8-4D64-8050-958FA986857D}" type="parTrans" cxnId="{13DF62CB-A27A-49E9-AA34-3237A73F9BB4}">
+    <dgm:pt modelId="{BDCFCE1C-EBA8-4D64-8050-958FA986857D}" cxnId="{13DF62CB-A27A-49E9-AA34-3237A73F9BB4}" type="parTrans">
       <dgm:prSet/>
       <dgm:spPr/>
       <dgm:t>
@@ -2246,7 +948,7 @@
         </a:p>
       </dgm:t>
     </dgm:pt>
-    <dgm:pt modelId="{24200F54-EB59-4BE4-9182-1180C4061138}" type="sibTrans" cxnId="{13DF62CB-A27A-49E9-AA34-3237A73F9BB4}">
+    <dgm:pt modelId="{24200F54-EB59-4BE4-9182-1180C4061138}" cxnId="{13DF62CB-A27A-49E9-AA34-3237A73F9BB4}" type="sibTrans">
       <dgm:prSet phldrT="1" phldr="0"/>
       <dgm:spPr/>
       <dgm:t>
@@ -2275,7 +977,7 @@
         </a:p>
       </dgm:t>
     </dgm:pt>
-    <dgm:pt modelId="{8EA5390A-14D7-4A3A-A79F-9BF6B65B6E4C}" type="parTrans" cxnId="{97DF4368-8754-4504-B14F-44D5A48CABB8}">
+    <dgm:pt modelId="{8EA5390A-14D7-4A3A-A79F-9BF6B65B6E4C}" cxnId="{97DF4368-8754-4504-B14F-44D5A48CABB8}" type="parTrans">
       <dgm:prSet/>
       <dgm:spPr/>
       <dgm:t>
@@ -2286,7 +988,7 @@
         </a:p>
       </dgm:t>
     </dgm:pt>
-    <dgm:pt modelId="{7568A405-B42D-4F36-80F1-EF7DC619F17B}" type="sibTrans" cxnId="{97DF4368-8754-4504-B14F-44D5A48CABB8}">
+    <dgm:pt modelId="{7568A405-B42D-4F36-80F1-EF7DC619F17B}" cxnId="{97DF4368-8754-4504-B14F-44D5A48CABB8}" type="sibTrans">
       <dgm:prSet phldrT="2" phldr="0"/>
       <dgm:spPr/>
       <dgm:t>
@@ -2315,7 +1017,7 @@
         </a:p>
       </dgm:t>
     </dgm:pt>
-    <dgm:pt modelId="{3BDE90B7-5381-4249-B7D9-461C6E3642FB}" type="parTrans" cxnId="{7FDE580F-5A39-44F8-9FEA-696F0AC6D29D}">
+    <dgm:pt modelId="{3BDE90B7-5381-4249-B7D9-461C6E3642FB}" cxnId="{7FDE580F-5A39-44F8-9FEA-696F0AC6D29D}" type="parTrans">
       <dgm:prSet/>
       <dgm:spPr/>
       <dgm:t>
@@ -2326,7 +1028,7 @@
         </a:p>
       </dgm:t>
     </dgm:pt>
-    <dgm:pt modelId="{E5DEF4ED-38A3-47AE-957D-7AD5E259A333}" type="sibTrans" cxnId="{7FDE580F-5A39-44F8-9FEA-696F0AC6D29D}">
+    <dgm:pt modelId="{E5DEF4ED-38A3-47AE-957D-7AD5E259A333}" cxnId="{7FDE580F-5A39-44F8-9FEA-696F0AC6D29D}" type="sibTrans">
       <dgm:prSet phldrT="3" phldr="0"/>
       <dgm:spPr/>
       <dgm:t>
@@ -2355,7 +1057,7 @@
         </a:p>
       </dgm:t>
     </dgm:pt>
-    <dgm:pt modelId="{8AC09D0B-CAFB-4A48-ABCC-B6CCF9AC30CD}" type="parTrans" cxnId="{F6B2A906-AA7D-4EEE-884A-86938CAB72C3}">
+    <dgm:pt modelId="{8AC09D0B-CAFB-4A48-ABCC-B6CCF9AC30CD}" cxnId="{F6B2A906-AA7D-4EEE-884A-86938CAB72C3}" type="parTrans">
       <dgm:prSet/>
       <dgm:spPr/>
       <dgm:t>
@@ -2366,7 +1068,7 @@
         </a:p>
       </dgm:t>
     </dgm:pt>
-    <dgm:pt modelId="{1D3DFDF9-098F-4E11-BC81-B9C9D07C3807}" type="sibTrans" cxnId="{F6B2A906-AA7D-4EEE-884A-86938CAB72C3}">
+    <dgm:pt modelId="{1D3DFDF9-098F-4E11-BC81-B9C9D07C3807}" cxnId="{F6B2A906-AA7D-4EEE-884A-86938CAB72C3}" type="sibTrans">
       <dgm:prSet phldrT="4" phldr="0"/>
       <dgm:spPr/>
       <dgm:t>
@@ -2395,7 +1097,7 @@
         </a:p>
       </dgm:t>
     </dgm:pt>
-    <dgm:pt modelId="{7FF03A7F-902F-4452-93E9-26188F5751E4}" type="parTrans" cxnId="{185644E7-0FEB-4420-9F04-AC6344A7896B}">
+    <dgm:pt modelId="{7FF03A7F-902F-4452-93E9-26188F5751E4}" cxnId="{185644E7-0FEB-4420-9F04-AC6344A7896B}" type="parTrans">
       <dgm:prSet/>
       <dgm:spPr/>
       <dgm:t>
@@ -2406,7 +1108,7 @@
         </a:p>
       </dgm:t>
     </dgm:pt>
-    <dgm:pt modelId="{34F82D9A-0730-45E5-B225-90E3702CCCA2}" type="sibTrans" cxnId="{185644E7-0FEB-4420-9F04-AC6344A7896B}">
+    <dgm:pt modelId="{34F82D9A-0730-45E5-B225-90E3702CCCA2}" cxnId="{185644E7-0FEB-4420-9F04-AC6344A7896B}" type="sibTrans">
       <dgm:prSet phldrT="5" phldr="0"/>
       <dgm:spPr/>
       <dgm:t>
@@ -2677,58 +1379,804 @@
   <dgm:whole/>
   <dgm:extLst>
     <a:ext uri="http://schemas.microsoft.com/office/drawing/2008/diagram">
-      <dsp:dataModelExt xmlns:dsp="http://schemas.microsoft.com/office/drawing/2008/diagram" relId="rId7" minVer="http://schemas.openxmlformats.org/drawingml/2006/diagram"/>
+      <dsp:dataModelExt xmlns:dsp="http://schemas.microsoft.com/office/drawing/2008/diagram" relId="rId6" minVer="http://schemas.openxmlformats.org/drawingml/2006/diagram"/>
     </a:ext>
   </dgm:extLst>
 </dgm:dataModel>
 </file>
 
 <file path=ppt/diagrams/drawing1.xml><?xml version="1.0" encoding="utf-8"?>
-<dsp:drawing xmlns:dgm="http://schemas.openxmlformats.org/drawingml/2006/diagram" xmlns:dsp="http://schemas.microsoft.com/office/drawing/2008/diagram" xmlns:a="http://schemas.openxmlformats.org/drawingml/2006/main">
+<dsp:drawing xmlns:dgm="http://schemas.openxmlformats.org/drawingml/2006/diagram" xmlns:dsp="http://schemas.microsoft.com/office/drawing/2008/diagram" xmlns:a="http://schemas.openxmlformats.org/drawingml/2006/main" xmlns:r="http://schemas.openxmlformats.org/officeDocument/2006/relationships">
   <dsp:spTree>
     <dsp:nvGrpSpPr>
-      <dsp:cNvPr id="0" name=""/>
+      <dsp:cNvPr id="2" name="组合 1"/>
       <dsp:cNvGrpSpPr/>
     </dsp:nvGrpSpPr>
-    <dsp:grpSpPr/>
+    <dsp:grpSpPr>
+      <a:xfrm>
+        <a:off x="0" y="0"/>
+        <a:ext cx="10233025" cy="4351338"/>
+        <a:chOff x="0" y="0"/>
+        <a:chExt cx="10233025" cy="4351338"/>
+      </a:xfrm>
+    </dsp:grpSpPr>
     <dsp:sp modelId="{8C39DC9E-8F90-46F2-91F8-5C5AAD6FAEF8}">
       <dsp:nvSpPr>
-        <dsp:cNvPr id="0" name=""/>
+        <dsp:cNvPr id="3" name="矩形 2"/>
         <dsp:cNvSpPr/>
       </dsp:nvSpPr>
-      <dsp:spPr>
+      <dsp:spPr bwMode="white">
         <a:xfrm>
-          <a:off x="3497" y="850072"/>
-          <a:ext cx="1893709" cy="2651192"/>
+          <a:off x="0" y="0"/>
+          <a:ext cx="1895005" cy="4351338"/>
         </a:xfrm>
         <a:prstGeom prst="rect">
           <a:avLst/>
         </a:prstGeom>
-        <a:solidFill>
+      </dsp:spPr>
+      <dsp:style>
+        <a:lnRef idx="1">
           <a:schemeClr val="accent2">
             <a:alpha val="90000"/>
             <a:tint val="40000"/>
-            <a:hueOff val="0"/>
-            <a:satOff val="0"/>
-            <a:lumOff val="0"/>
-            <a:alphaOff val="0"/>
           </a:schemeClr>
-        </a:solidFill>
-        <a:ln w="6350" cap="flat" cmpd="sng" algn="ctr">
-          <a:solidFill>
-            <a:schemeClr val="accent2">
-              <a:alpha val="90000"/>
-              <a:tint val="40000"/>
-              <a:hueOff val="0"/>
-              <a:satOff val="0"/>
-              <a:lumOff val="0"/>
-              <a:alphaOff val="0"/>
-            </a:schemeClr>
-          </a:solidFill>
-          <a:prstDash val="solid"/>
-          <a:miter lim="800000"/>
+        </a:lnRef>
+        <a:fillRef idx="1">
+          <a:schemeClr val="accent2">
+            <a:alpha val="90000"/>
+            <a:tint val="40000"/>
+          </a:schemeClr>
+        </a:fillRef>
+        <a:effectRef idx="0">
+          <a:scrgbClr r="0" g="0" b="0"/>
+        </a:effectRef>
+        <a:fontRef idx="minor"/>
+      </dsp:style>
+      <dsp:txXfrm>
+        <a:off x="0" y="0"/>
+        <a:ext cx="1895005" cy="4351338"/>
+      </dsp:txXfrm>
+    </dsp:sp>
+    <dsp:sp modelId="{F553EF73-2994-4BFC-8B6D-3CC54E34C390}">
+      <dsp:nvSpPr>
+        <dsp:cNvPr id="4" name="椭圆 3"/>
+        <dsp:cNvSpPr/>
+      </dsp:nvSpPr>
+      <dsp:spPr bwMode="white">
+        <a:xfrm>
+          <a:off x="294802" y="435134"/>
+          <a:ext cx="1305401" cy="1305401"/>
+        </a:xfrm>
+        <a:prstGeom prst="ellipse">
+          <a:avLst/>
+        </a:prstGeom>
+      </dsp:spPr>
+      <dsp:style>
+        <a:lnRef idx="1">
+          <a:schemeClr val="accent2"/>
+        </a:lnRef>
+        <a:fillRef idx="2">
+          <a:schemeClr val="accent2"/>
+        </a:fillRef>
+        <a:effectRef idx="1">
+          <a:scrgbClr r="0" g="0" b="0"/>
+        </a:effectRef>
+        <a:fontRef idx="minor">
+          <a:schemeClr val="dk1"/>
+        </a:fontRef>
+      </dsp:style>
+      <dsp:txBody>
+        <a:bodyPr lIns="101774" tIns="12700" rIns="101774" bIns="12700" anchor="ctr"/>
+        <a:lstStyle>
+          <a:lvl1pPr algn="ctr">
+            <a:defRPr sz="5800"/>
+          </a:lvl1pPr>
+          <a:lvl2pPr marL="285750" indent="-285750" algn="ctr">
+            <a:defRPr sz="4500"/>
+          </a:lvl2pPr>
+          <a:lvl3pPr marL="571500" indent="-285750" algn="ctr">
+            <a:defRPr sz="4500"/>
+          </a:lvl3pPr>
+          <a:lvl4pPr marL="857250" indent="-285750" algn="ctr">
+            <a:defRPr sz="4500"/>
+          </a:lvl4pPr>
+          <a:lvl5pPr marL="1143000" indent="-285750" algn="ctr">
+            <a:defRPr sz="4500"/>
+          </a:lvl5pPr>
+          <a:lvl6pPr marL="1428750" indent="-285750" algn="ctr">
+            <a:defRPr sz="4500"/>
+          </a:lvl6pPr>
+          <a:lvl7pPr marL="1714500" indent="-285750" algn="ctr">
+            <a:defRPr sz="4500"/>
+          </a:lvl7pPr>
+          <a:lvl8pPr marL="2000250" indent="-285750" algn="ctr">
+            <a:defRPr sz="4500"/>
+          </a:lvl8pPr>
+          <a:lvl9pPr marL="2286000" indent="-285750" algn="ctr">
+            <a:defRPr sz="4500"/>
+          </a:lvl9pPr>
+        </a:lstStyle>
+        <a:p>
+          <a:pPr lvl="0">
+            <a:lnSpc>
+              <a:spcPct val="100000"/>
+            </a:lnSpc>
+            <a:spcBef>
+              <a:spcPct val="0"/>
+            </a:spcBef>
+            <a:spcAft>
+              <a:spcPct val="35000"/>
+            </a:spcAft>
+          </a:pPr>
+          <a:r>
+            <a:rPr lang="en-US"/>
+            <a:t>1</a:t>
+          </a:r>
+        </a:p>
+      </dsp:txBody>
+      <dsp:txXfrm>
+        <a:off x="294802" y="435134"/>
+        <a:ext cx="1305401" cy="1305401"/>
+      </dsp:txXfrm>
+    </dsp:sp>
+    <dsp:sp modelId="{075F4793-1F07-459B-84C7-864430D3B41E}">
+      <dsp:nvSpPr>
+        <dsp:cNvPr id="5" name="矩形 4"/>
+        <dsp:cNvSpPr/>
+      </dsp:nvSpPr>
+      <dsp:spPr bwMode="white">
+        <a:xfrm>
+          <a:off x="0" y="4351266"/>
+          <a:ext cx="1895005" cy="72"/>
+        </a:xfrm>
+        <a:prstGeom prst="rect">
+          <a:avLst/>
+        </a:prstGeom>
+      </dsp:spPr>
+      <dsp:style>
+        <a:lnRef idx="1">
+          <a:schemeClr val="accent2"/>
+        </a:lnRef>
+        <a:fillRef idx="2">
+          <a:schemeClr val="accent2"/>
+        </a:fillRef>
+        <a:effectRef idx="1">
+          <a:scrgbClr r="0" g="0" b="0"/>
+        </a:effectRef>
+        <a:fontRef idx="minor">
+          <a:schemeClr val="dk1"/>
+        </a:fontRef>
+      </dsp:style>
+      <dsp:txXfrm>
+        <a:off x="0" y="4351266"/>
+        <a:ext cx="1895005" cy="72"/>
+      </dsp:txXfrm>
+    </dsp:sp>
+    <dsp:sp modelId="{5CEF349B-89D7-4F83-BC13-01C636C3A8D1}">
+      <dsp:nvSpPr>
+        <dsp:cNvPr id="7" name="矩形 6"/>
+        <dsp:cNvSpPr/>
+      </dsp:nvSpPr>
+      <dsp:spPr bwMode="white">
+        <a:xfrm>
+          <a:off x="2084505" y="0"/>
+          <a:ext cx="1895005" cy="4351338"/>
+        </a:xfrm>
+        <a:prstGeom prst="rect">
+          <a:avLst/>
+        </a:prstGeom>
+      </dsp:spPr>
+      <dsp:style>
+        <a:lnRef idx="1">
+          <a:schemeClr val="accent2">
+            <a:alpha val="90000"/>
+            <a:tint val="40000"/>
+          </a:schemeClr>
+        </a:lnRef>
+        <a:fillRef idx="1">
+          <a:schemeClr val="accent2">
+            <a:alpha val="90000"/>
+            <a:tint val="40000"/>
+          </a:schemeClr>
+        </a:fillRef>
+        <a:effectRef idx="0">
+          <a:scrgbClr r="0" g="0" b="0"/>
+        </a:effectRef>
+        <a:fontRef idx="minor"/>
+      </dsp:style>
+      <dsp:txXfrm>
+        <a:off x="2084505" y="0"/>
+        <a:ext cx="1895005" cy="4351338"/>
+      </dsp:txXfrm>
+    </dsp:sp>
+    <dsp:sp modelId="{10DE1E3A-8945-4DC5-88AD-CBD59DB5CA8B}">
+      <dsp:nvSpPr>
+        <dsp:cNvPr id="8" name="椭圆 7"/>
+        <dsp:cNvSpPr/>
+      </dsp:nvSpPr>
+      <dsp:spPr bwMode="white">
+        <a:xfrm>
+          <a:off x="2379307" y="435134"/>
+          <a:ext cx="1305401" cy="1305401"/>
+        </a:xfrm>
+        <a:prstGeom prst="ellipse">
+          <a:avLst/>
+        </a:prstGeom>
+      </dsp:spPr>
+      <dsp:style>
+        <a:lnRef idx="1">
+          <a:schemeClr val="accent2"/>
+        </a:lnRef>
+        <a:fillRef idx="2">
+          <a:schemeClr val="accent2"/>
+        </a:fillRef>
+        <a:effectRef idx="1">
+          <a:scrgbClr r="0" g="0" b="0"/>
+        </a:effectRef>
+        <a:fontRef idx="minor">
+          <a:schemeClr val="dk1"/>
+        </a:fontRef>
+      </dsp:style>
+      <dsp:txBody>
+        <a:bodyPr lIns="101774" tIns="12700" rIns="101774" bIns="12700" anchor="ctr"/>
+        <a:lstStyle>
+          <a:lvl1pPr algn="ctr">
+            <a:defRPr sz="5800"/>
+          </a:lvl1pPr>
+          <a:lvl2pPr marL="285750" indent="-285750" algn="ctr">
+            <a:defRPr sz="4500"/>
+          </a:lvl2pPr>
+          <a:lvl3pPr marL="571500" indent="-285750" algn="ctr">
+            <a:defRPr sz="4500"/>
+          </a:lvl3pPr>
+          <a:lvl4pPr marL="857250" indent="-285750" algn="ctr">
+            <a:defRPr sz="4500"/>
+          </a:lvl4pPr>
+          <a:lvl5pPr marL="1143000" indent="-285750" algn="ctr">
+            <a:defRPr sz="4500"/>
+          </a:lvl5pPr>
+          <a:lvl6pPr marL="1428750" indent="-285750" algn="ctr">
+            <a:defRPr sz="4500"/>
+          </a:lvl6pPr>
+          <a:lvl7pPr marL="1714500" indent="-285750" algn="ctr">
+            <a:defRPr sz="4500"/>
+          </a:lvl7pPr>
+          <a:lvl8pPr marL="2000250" indent="-285750" algn="ctr">
+            <a:defRPr sz="4500"/>
+          </a:lvl8pPr>
+          <a:lvl9pPr marL="2286000" indent="-285750" algn="ctr">
+            <a:defRPr sz="4500"/>
+          </a:lvl9pPr>
+        </a:lstStyle>
+        <a:p>
+          <a:pPr lvl="0">
+            <a:lnSpc>
+              <a:spcPct val="100000"/>
+            </a:lnSpc>
+            <a:spcBef>
+              <a:spcPct val="0"/>
+            </a:spcBef>
+            <a:spcAft>
+              <a:spcPct val="35000"/>
+            </a:spcAft>
+          </a:pPr>
+          <a:r>
+            <a:rPr lang="en-US"/>
+            <a:t>2</a:t>
+          </a:r>
+        </a:p>
+      </dsp:txBody>
+      <dsp:txXfrm>
+        <a:off x="2379307" y="435134"/>
+        <a:ext cx="1305401" cy="1305401"/>
+      </dsp:txXfrm>
+    </dsp:sp>
+    <dsp:sp modelId="{7C6EE781-5EBE-4667-9A3C-7725612F57E7}">
+      <dsp:nvSpPr>
+        <dsp:cNvPr id="9" name="矩形 8"/>
+        <dsp:cNvSpPr/>
+      </dsp:nvSpPr>
+      <dsp:spPr bwMode="white">
+        <a:xfrm>
+          <a:off x="2084505" y="4351266"/>
+          <a:ext cx="1895005" cy="72"/>
+        </a:xfrm>
+        <a:prstGeom prst="rect">
+          <a:avLst/>
+        </a:prstGeom>
+      </dsp:spPr>
+      <dsp:style>
+        <a:lnRef idx="1">
+          <a:schemeClr val="accent2"/>
+        </a:lnRef>
+        <a:fillRef idx="2">
+          <a:schemeClr val="accent2"/>
+        </a:fillRef>
+        <a:effectRef idx="1">
+          <a:scrgbClr r="0" g="0" b="0"/>
+        </a:effectRef>
+        <a:fontRef idx="minor">
+          <a:schemeClr val="dk1"/>
+        </a:fontRef>
+      </dsp:style>
+      <dsp:txXfrm>
+        <a:off x="2084505" y="4351266"/>
+        <a:ext cx="1895005" cy="72"/>
+      </dsp:txXfrm>
+    </dsp:sp>
+    <dsp:sp modelId="{D27F21C9-AB92-4366-81A9-32988F462417}">
+      <dsp:nvSpPr>
+        <dsp:cNvPr id="11" name="矩形 10"/>
+        <dsp:cNvSpPr/>
+      </dsp:nvSpPr>
+      <dsp:spPr bwMode="white">
+        <a:xfrm>
+          <a:off x="4169010" y="0"/>
+          <a:ext cx="1895005" cy="4351338"/>
+        </a:xfrm>
+        <a:prstGeom prst="rect">
+          <a:avLst/>
+        </a:prstGeom>
+      </dsp:spPr>
+      <dsp:style>
+        <a:lnRef idx="1">
+          <a:schemeClr val="accent2">
+            <a:alpha val="90000"/>
+            <a:tint val="40000"/>
+          </a:schemeClr>
+        </a:lnRef>
+        <a:fillRef idx="1">
+          <a:schemeClr val="accent2">
+            <a:alpha val="90000"/>
+            <a:tint val="40000"/>
+          </a:schemeClr>
+        </a:fillRef>
+        <a:effectRef idx="0">
+          <a:scrgbClr r="0" g="0" b="0"/>
+        </a:effectRef>
+        <a:fontRef idx="minor"/>
+      </dsp:style>
+      <dsp:txXfrm>
+        <a:off x="4169010" y="0"/>
+        <a:ext cx="1895005" cy="4351338"/>
+      </dsp:txXfrm>
+    </dsp:sp>
+    <dsp:sp modelId="{48724E40-318F-4AE7-AA0C-683A4C5715FD}">
+      <dsp:nvSpPr>
+        <dsp:cNvPr id="12" name="椭圆 11"/>
+        <dsp:cNvSpPr/>
+      </dsp:nvSpPr>
+      <dsp:spPr bwMode="white">
+        <a:xfrm>
+          <a:off x="4463812" y="435134"/>
+          <a:ext cx="1305401" cy="1305401"/>
+        </a:xfrm>
+        <a:prstGeom prst="ellipse">
+          <a:avLst/>
+        </a:prstGeom>
+      </dsp:spPr>
+      <dsp:style>
+        <a:lnRef idx="1">
+          <a:schemeClr val="accent2"/>
+        </a:lnRef>
+        <a:fillRef idx="2">
+          <a:schemeClr val="accent2"/>
+        </a:fillRef>
+        <a:effectRef idx="1">
+          <a:scrgbClr r="0" g="0" b="0"/>
+        </a:effectRef>
+        <a:fontRef idx="minor">
+          <a:schemeClr val="dk1"/>
+        </a:fontRef>
+      </dsp:style>
+      <dsp:txBody>
+        <a:bodyPr lIns="101774" tIns="12700" rIns="101774" bIns="12700" anchor="ctr"/>
+        <a:lstStyle>
+          <a:lvl1pPr algn="ctr">
+            <a:defRPr sz="5800"/>
+          </a:lvl1pPr>
+          <a:lvl2pPr marL="285750" indent="-285750" algn="ctr">
+            <a:defRPr sz="4500"/>
+          </a:lvl2pPr>
+          <a:lvl3pPr marL="571500" indent="-285750" algn="ctr">
+            <a:defRPr sz="4500"/>
+          </a:lvl3pPr>
+          <a:lvl4pPr marL="857250" indent="-285750" algn="ctr">
+            <a:defRPr sz="4500"/>
+          </a:lvl4pPr>
+          <a:lvl5pPr marL="1143000" indent="-285750" algn="ctr">
+            <a:defRPr sz="4500"/>
+          </a:lvl5pPr>
+          <a:lvl6pPr marL="1428750" indent="-285750" algn="ctr">
+            <a:defRPr sz="4500"/>
+          </a:lvl6pPr>
+          <a:lvl7pPr marL="1714500" indent="-285750" algn="ctr">
+            <a:defRPr sz="4500"/>
+          </a:lvl7pPr>
+          <a:lvl8pPr marL="2000250" indent="-285750" algn="ctr">
+            <a:defRPr sz="4500"/>
+          </a:lvl8pPr>
+          <a:lvl9pPr marL="2286000" indent="-285750" algn="ctr">
+            <a:defRPr sz="4500"/>
+          </a:lvl9pPr>
+        </a:lstStyle>
+        <a:p>
+          <a:pPr lvl="0">
+            <a:lnSpc>
+              <a:spcPct val="100000"/>
+            </a:lnSpc>
+            <a:spcBef>
+              <a:spcPct val="0"/>
+            </a:spcBef>
+            <a:spcAft>
+              <a:spcPct val="35000"/>
+            </a:spcAft>
+          </a:pPr>
+          <a:r>
+            <a:rPr lang="en-US"/>
+            <a:t>3</a:t>
+          </a:r>
+        </a:p>
+      </dsp:txBody>
+      <dsp:txXfrm>
+        <a:off x="4463812" y="435134"/>
+        <a:ext cx="1305401" cy="1305401"/>
+      </dsp:txXfrm>
+    </dsp:sp>
+    <dsp:sp modelId="{AED0B5CB-0669-48E5-BEEC-8C00007DF797}">
+      <dsp:nvSpPr>
+        <dsp:cNvPr id="13" name="矩形 12"/>
+        <dsp:cNvSpPr/>
+      </dsp:nvSpPr>
+      <dsp:spPr bwMode="white">
+        <a:xfrm>
+          <a:off x="4169010" y="4351266"/>
+          <a:ext cx="1895005" cy="72"/>
+        </a:xfrm>
+        <a:prstGeom prst="rect">
+          <a:avLst/>
+        </a:prstGeom>
+      </dsp:spPr>
+      <dsp:style>
+        <a:lnRef idx="1">
+          <a:schemeClr val="accent2"/>
+        </a:lnRef>
+        <a:fillRef idx="2">
+          <a:schemeClr val="accent2"/>
+        </a:fillRef>
+        <a:effectRef idx="1">
+          <a:scrgbClr r="0" g="0" b="0"/>
+        </a:effectRef>
+        <a:fontRef idx="minor">
+          <a:schemeClr val="dk1"/>
+        </a:fontRef>
+      </dsp:style>
+      <dsp:txXfrm>
+        <a:off x="4169010" y="4351266"/>
+        <a:ext cx="1895005" cy="72"/>
+      </dsp:txXfrm>
+    </dsp:sp>
+    <dsp:sp modelId="{4F15DF7D-A377-4429-8C7A-01DBD92C7747}">
+      <dsp:nvSpPr>
+        <dsp:cNvPr id="15" name="矩形 14"/>
+        <dsp:cNvSpPr/>
+      </dsp:nvSpPr>
+      <dsp:spPr bwMode="white">
+        <a:xfrm>
+          <a:off x="6253515" y="0"/>
+          <a:ext cx="1895005" cy="4351338"/>
+        </a:xfrm>
+        <a:prstGeom prst="rect">
+          <a:avLst/>
+        </a:prstGeom>
+      </dsp:spPr>
+      <dsp:style>
+        <a:lnRef idx="1">
+          <a:schemeClr val="accent2">
+            <a:alpha val="90000"/>
+            <a:tint val="40000"/>
+          </a:schemeClr>
+        </a:lnRef>
+        <a:fillRef idx="1">
+          <a:schemeClr val="accent2">
+            <a:alpha val="90000"/>
+            <a:tint val="40000"/>
+          </a:schemeClr>
+        </a:fillRef>
+        <a:effectRef idx="0">
+          <a:scrgbClr r="0" g="0" b="0"/>
+        </a:effectRef>
+        <a:fontRef idx="minor"/>
+      </dsp:style>
+      <dsp:txXfrm>
+        <a:off x="6253515" y="0"/>
+        <a:ext cx="1895005" cy="4351338"/>
+      </dsp:txXfrm>
+    </dsp:sp>
+    <dsp:sp modelId="{DFAE1B6A-7037-4C51-BD64-1204E7C9B5FF}">
+      <dsp:nvSpPr>
+        <dsp:cNvPr id="16" name="椭圆 15"/>
+        <dsp:cNvSpPr/>
+      </dsp:nvSpPr>
+      <dsp:spPr bwMode="white">
+        <a:xfrm>
+          <a:off x="6548317" y="435134"/>
+          <a:ext cx="1305401" cy="1305401"/>
+        </a:xfrm>
+        <a:prstGeom prst="ellipse">
+          <a:avLst/>
+        </a:prstGeom>
+      </dsp:spPr>
+      <dsp:style>
+        <a:lnRef idx="1">
+          <a:schemeClr val="accent2"/>
+        </a:lnRef>
+        <a:fillRef idx="2">
+          <a:schemeClr val="accent2"/>
+        </a:fillRef>
+        <a:effectRef idx="1">
+          <a:scrgbClr r="0" g="0" b="0"/>
+        </a:effectRef>
+        <a:fontRef idx="minor">
+          <a:schemeClr val="dk1"/>
+        </a:fontRef>
+      </dsp:style>
+      <dsp:txBody>
+        <a:bodyPr lIns="101774" tIns="12700" rIns="101774" bIns="12700" anchor="ctr"/>
+        <a:lstStyle>
+          <a:lvl1pPr algn="ctr">
+            <a:defRPr sz="5800"/>
+          </a:lvl1pPr>
+          <a:lvl2pPr marL="285750" indent="-285750" algn="ctr">
+            <a:defRPr sz="4500"/>
+          </a:lvl2pPr>
+          <a:lvl3pPr marL="571500" indent="-285750" algn="ctr">
+            <a:defRPr sz="4500"/>
+          </a:lvl3pPr>
+          <a:lvl4pPr marL="857250" indent="-285750" algn="ctr">
+            <a:defRPr sz="4500"/>
+          </a:lvl4pPr>
+          <a:lvl5pPr marL="1143000" indent="-285750" algn="ctr">
+            <a:defRPr sz="4500"/>
+          </a:lvl5pPr>
+          <a:lvl6pPr marL="1428750" indent="-285750" algn="ctr">
+            <a:defRPr sz="4500"/>
+          </a:lvl6pPr>
+          <a:lvl7pPr marL="1714500" indent="-285750" algn="ctr">
+            <a:defRPr sz="4500"/>
+          </a:lvl7pPr>
+          <a:lvl8pPr marL="2000250" indent="-285750" algn="ctr">
+            <a:defRPr sz="4500"/>
+          </a:lvl8pPr>
+          <a:lvl9pPr marL="2286000" indent="-285750" algn="ctr">
+            <a:defRPr sz="4500"/>
+          </a:lvl9pPr>
+        </a:lstStyle>
+        <a:p>
+          <a:pPr lvl="0">
+            <a:lnSpc>
+              <a:spcPct val="100000"/>
+            </a:lnSpc>
+            <a:spcBef>
+              <a:spcPct val="0"/>
+            </a:spcBef>
+            <a:spcAft>
+              <a:spcPct val="35000"/>
+            </a:spcAft>
+          </a:pPr>
+          <a:r>
+            <a:rPr lang="en-US"/>
+            <a:t>4</a:t>
+          </a:r>
+        </a:p>
+      </dsp:txBody>
+      <dsp:txXfrm>
+        <a:off x="6548317" y="435134"/>
+        <a:ext cx="1305401" cy="1305401"/>
+      </dsp:txXfrm>
+    </dsp:sp>
+    <dsp:sp modelId="{934A234F-7CFF-453C-AA48-AEF51E232DE0}">
+      <dsp:nvSpPr>
+        <dsp:cNvPr id="17" name="矩形 16"/>
+        <dsp:cNvSpPr/>
+      </dsp:nvSpPr>
+      <dsp:spPr bwMode="white">
+        <a:xfrm>
+          <a:off x="6253515" y="4351266"/>
+          <a:ext cx="1895005" cy="72"/>
+        </a:xfrm>
+        <a:prstGeom prst="rect">
+          <a:avLst/>
+        </a:prstGeom>
+      </dsp:spPr>
+      <dsp:style>
+        <a:lnRef idx="1">
+          <a:schemeClr val="accent2"/>
+        </a:lnRef>
+        <a:fillRef idx="2">
+          <a:schemeClr val="accent2"/>
+        </a:fillRef>
+        <a:effectRef idx="1">
+          <a:scrgbClr r="0" g="0" b="0"/>
+        </a:effectRef>
+        <a:fontRef idx="minor">
+          <a:schemeClr val="dk1"/>
+        </a:fontRef>
+      </dsp:style>
+      <dsp:txXfrm>
+        <a:off x="6253515" y="4351266"/>
+        <a:ext cx="1895005" cy="72"/>
+      </dsp:txXfrm>
+    </dsp:sp>
+    <dsp:sp modelId="{6FC82E2C-DAC1-488A-B3E5-0F0A44750633}">
+      <dsp:nvSpPr>
+        <dsp:cNvPr id="19" name="矩形 18"/>
+        <dsp:cNvSpPr/>
+      </dsp:nvSpPr>
+      <dsp:spPr bwMode="white">
+        <a:xfrm>
+          <a:off x="8338020" y="0"/>
+          <a:ext cx="1895005" cy="4351338"/>
+        </a:xfrm>
+        <a:prstGeom prst="rect">
+          <a:avLst/>
+        </a:prstGeom>
+      </dsp:spPr>
+      <dsp:style>
+        <a:lnRef idx="1">
+          <a:schemeClr val="accent2">
+            <a:alpha val="90000"/>
+            <a:tint val="40000"/>
+          </a:schemeClr>
+        </a:lnRef>
+        <a:fillRef idx="1">
+          <a:schemeClr val="accent2">
+            <a:alpha val="90000"/>
+            <a:tint val="40000"/>
+          </a:schemeClr>
+        </a:fillRef>
+        <a:effectRef idx="0">
+          <a:scrgbClr r="0" g="0" b="0"/>
+        </a:effectRef>
+        <a:fontRef idx="minor"/>
+      </dsp:style>
+      <dsp:txXfrm>
+        <a:off x="8338020" y="0"/>
+        <a:ext cx="1895005" cy="4351338"/>
+      </dsp:txXfrm>
+    </dsp:sp>
+    <dsp:sp modelId="{4A3A52F5-EA14-460B-A33D-BCBBF3F7BCB0}">
+      <dsp:nvSpPr>
+        <dsp:cNvPr id="20" name="椭圆 19"/>
+        <dsp:cNvSpPr/>
+      </dsp:nvSpPr>
+      <dsp:spPr bwMode="white">
+        <a:xfrm>
+          <a:off x="8632822" y="435134"/>
+          <a:ext cx="1305401" cy="1305401"/>
+        </a:xfrm>
+        <a:prstGeom prst="ellipse">
+          <a:avLst/>
+        </a:prstGeom>
+      </dsp:spPr>
+      <dsp:style>
+        <a:lnRef idx="1">
+          <a:schemeClr val="accent2"/>
+        </a:lnRef>
+        <a:fillRef idx="2">
+          <a:schemeClr val="accent2"/>
+        </a:fillRef>
+        <a:effectRef idx="1">
+          <a:scrgbClr r="0" g="0" b="0"/>
+        </a:effectRef>
+        <a:fontRef idx="minor">
+          <a:schemeClr val="dk1"/>
+        </a:fontRef>
+      </dsp:style>
+      <dsp:txBody>
+        <a:bodyPr lIns="101774" tIns="12700" rIns="101774" bIns="12700" anchor="ctr"/>
+        <a:lstStyle>
+          <a:lvl1pPr algn="ctr">
+            <a:defRPr sz="5800"/>
+          </a:lvl1pPr>
+          <a:lvl2pPr marL="285750" indent="-285750" algn="ctr">
+            <a:defRPr sz="4500"/>
+          </a:lvl2pPr>
+          <a:lvl3pPr marL="571500" indent="-285750" algn="ctr">
+            <a:defRPr sz="4500"/>
+          </a:lvl3pPr>
+          <a:lvl4pPr marL="857250" indent="-285750" algn="ctr">
+            <a:defRPr sz="4500"/>
+          </a:lvl4pPr>
+          <a:lvl5pPr marL="1143000" indent="-285750" algn="ctr">
+            <a:defRPr sz="4500"/>
+          </a:lvl5pPr>
+          <a:lvl6pPr marL="1428750" indent="-285750" algn="ctr">
+            <a:defRPr sz="4500"/>
+          </a:lvl6pPr>
+          <a:lvl7pPr marL="1714500" indent="-285750" algn="ctr">
+            <a:defRPr sz="4500"/>
+          </a:lvl7pPr>
+          <a:lvl8pPr marL="2000250" indent="-285750" algn="ctr">
+            <a:defRPr sz="4500"/>
+          </a:lvl8pPr>
+          <a:lvl9pPr marL="2286000" indent="-285750" algn="ctr">
+            <a:defRPr sz="4500"/>
+          </a:lvl9pPr>
+        </a:lstStyle>
+        <a:p>
+          <a:pPr lvl="0">
+            <a:lnSpc>
+              <a:spcPct val="100000"/>
+            </a:lnSpc>
+            <a:spcBef>
+              <a:spcPct val="0"/>
+            </a:spcBef>
+            <a:spcAft>
+              <a:spcPct val="35000"/>
+            </a:spcAft>
+          </a:pPr>
+          <a:r>
+            <a:rPr lang="en-US"/>
+            <a:t>5</a:t>
+          </a:r>
+        </a:p>
+      </dsp:txBody>
+      <dsp:txXfrm>
+        <a:off x="8632822" y="435134"/>
+        <a:ext cx="1305401" cy="1305401"/>
+      </dsp:txXfrm>
+    </dsp:sp>
+    <dsp:sp modelId="{D0467B6C-01B2-4D7E-8B0B-F129C5C8729F}">
+      <dsp:nvSpPr>
+        <dsp:cNvPr id="21" name="矩形 20"/>
+        <dsp:cNvSpPr/>
+      </dsp:nvSpPr>
+      <dsp:spPr bwMode="white">
+        <a:xfrm>
+          <a:off x="8338020" y="4351266"/>
+          <a:ext cx="1895005" cy="72"/>
+        </a:xfrm>
+        <a:prstGeom prst="rect">
+          <a:avLst/>
+        </a:prstGeom>
+      </dsp:spPr>
+      <dsp:style>
+        <a:lnRef idx="1">
+          <a:schemeClr val="accent2"/>
+        </a:lnRef>
+        <a:fillRef idx="2">
+          <a:schemeClr val="accent2"/>
+        </a:fillRef>
+        <a:effectRef idx="1">
+          <a:scrgbClr r="0" g="0" b="0"/>
+        </a:effectRef>
+        <a:fontRef idx="minor">
+          <a:schemeClr val="dk1"/>
+        </a:fontRef>
+      </dsp:style>
+      <dsp:txXfrm>
+        <a:off x="8338020" y="4351266"/>
+        <a:ext cx="1895005" cy="72"/>
+      </dsp:txXfrm>
+    </dsp:sp>
+    <dsp:sp modelId="{A01541F0-2832-4FE1-81B3-50E8A9EB3B57}">
+      <dsp:nvSpPr>
+        <dsp:cNvPr id="6" name="矩形 5"/>
+        <dsp:cNvSpPr/>
+      </dsp:nvSpPr>
+      <dsp:spPr bwMode="white">
+        <a:xfrm>
+          <a:off x="0" y="1653508"/>
+          <a:ext cx="1895005" cy="2610803"/>
+        </a:xfrm>
+        <a:prstGeom prst="rect">
+          <a:avLst/>
+        </a:prstGeom>
+        <a:noFill/>
+        <a:ln>
+          <a:noFill/>
         </a:ln>
-        <a:effectLst/>
       </dsp:spPr>
       <dsp:style>
         <a:lnRef idx="1">
@@ -2743,14 +2191,40 @@
         <a:fontRef idx="minor"/>
       </dsp:style>
       <dsp:txBody>
-        <a:bodyPr spcFirstLastPara="0" vert="horz" wrap="square" lIns="147641" tIns="330200" rIns="147641" bIns="330200" numCol="1" spcCol="1270" anchor="t" anchorCtr="0">
-          <a:noAutofit/>
-        </a:bodyPr>
-        <a:lstStyle/>
+        <a:bodyPr lIns="147741" tIns="330200" rIns="147741" bIns="330200" anchor="t"/>
+        <a:lstStyle>
+          <a:lvl1pPr algn="l">
+            <a:defRPr sz="1800"/>
+          </a:lvl1pPr>
+          <a:lvl2pPr marL="114300" indent="-114300" algn="l">
+            <a:defRPr sz="1400"/>
+          </a:lvl2pPr>
+          <a:lvl3pPr marL="228600" indent="-114300" algn="l">
+            <a:defRPr sz="1400"/>
+          </a:lvl3pPr>
+          <a:lvl4pPr marL="342900" indent="-114300" algn="l">
+            <a:defRPr sz="1400"/>
+          </a:lvl4pPr>
+          <a:lvl5pPr marL="457200" indent="-114300" algn="l">
+            <a:defRPr sz="1400"/>
+          </a:lvl5pPr>
+          <a:lvl6pPr marL="571500" indent="-114300" algn="l">
+            <a:defRPr sz="1400"/>
+          </a:lvl6pPr>
+          <a:lvl7pPr marL="685800" indent="-114300" algn="l">
+            <a:defRPr sz="1400"/>
+          </a:lvl7pPr>
+          <a:lvl8pPr marL="800100" indent="-114300" algn="l">
+            <a:defRPr sz="1400"/>
+          </a:lvl8pPr>
+          <a:lvl9pPr marL="914400" indent="-114300" algn="l">
+            <a:defRPr sz="1400"/>
+          </a:lvl9pPr>
+        </a:lstStyle>
         <a:p>
-          <a:pPr marL="0" lvl="0" indent="0" algn="l" defTabSz="488950">
+          <a:pPr lvl="0">
             <a:lnSpc>
-              <a:spcPct val="90000"/>
+              <a:spcPct val="100000"/>
             </a:lnSpc>
             <a:spcBef>
               <a:spcPct val="0"/>
@@ -2758,246 +2232,44 @@
             <a:spcAft>
               <a:spcPct val="35000"/>
             </a:spcAft>
-            <a:buNone/>
           </a:pPr>
           <a:r>
-            <a:rPr lang="zh-CN" sz="1100" kern="1200"/>
+            <a:rPr lang="zh-CN">
+              <a:solidFill>
+                <a:schemeClr val="dk1"/>
+              </a:solidFill>
+            </a:rPr>
             <a:t>①有 个模块由其他公司提供，但是没有交付，我们也无能为力；</a:t>
           </a:r>
-          <a:endParaRPr lang="en-US" sz="1100" kern="1200"/>
+          <a:endParaRPr lang="en-US">
+            <a:solidFill>
+              <a:schemeClr val="dk1"/>
+            </a:solidFill>
+          </a:endParaRPr>
         </a:p>
       </dsp:txBody>
       <dsp:txXfrm>
-        <a:off x="3497" y="1857525"/>
-        <a:ext cx="1893709" cy="1590715"/>
+        <a:off x="0" y="1653508"/>
+        <a:ext cx="1895005" cy="2610803"/>
       </dsp:txXfrm>
     </dsp:sp>
-    <dsp:sp modelId="{F553EF73-2994-4BFC-8B6D-3CC54E34C390}">
+    <dsp:sp modelId="{84609682-3DD7-4807-819D-3A0627254B73}">
       <dsp:nvSpPr>
-        <dsp:cNvPr id="0" name=""/>
+        <dsp:cNvPr id="10" name="矩形 9"/>
         <dsp:cNvSpPr/>
       </dsp:nvSpPr>
-      <dsp:spPr>
+      <dsp:spPr bwMode="white">
         <a:xfrm>
-          <a:off x="552673" y="1115191"/>
-          <a:ext cx="795357" cy="795357"/>
-        </a:xfrm>
-        <a:prstGeom prst="ellipse">
-          <a:avLst/>
-        </a:prstGeom>
-        <a:gradFill rotWithShape="0">
-          <a:gsLst>
-            <a:gs pos="0">
-              <a:schemeClr val="accent2">
-                <a:hueOff val="0"/>
-                <a:satOff val="0"/>
-                <a:lumOff val="0"/>
-                <a:alphaOff val="0"/>
-                <a:lumMod val="110000"/>
-                <a:satMod val="105000"/>
-                <a:tint val="67000"/>
-              </a:schemeClr>
-            </a:gs>
-            <a:gs pos="50000">
-              <a:schemeClr val="accent2">
-                <a:hueOff val="0"/>
-                <a:satOff val="0"/>
-                <a:lumOff val="0"/>
-                <a:alphaOff val="0"/>
-                <a:lumMod val="105000"/>
-                <a:satMod val="103000"/>
-                <a:tint val="73000"/>
-              </a:schemeClr>
-            </a:gs>
-            <a:gs pos="100000">
-              <a:schemeClr val="accent2">
-                <a:hueOff val="0"/>
-                <a:satOff val="0"/>
-                <a:lumOff val="0"/>
-                <a:alphaOff val="0"/>
-                <a:lumMod val="105000"/>
-                <a:satMod val="109000"/>
-                <a:tint val="81000"/>
-              </a:schemeClr>
-            </a:gs>
-          </a:gsLst>
-          <a:lin ang="5400000" scaled="0"/>
-        </a:gradFill>
-        <a:ln w="6350" cap="flat" cmpd="sng" algn="ctr">
-          <a:solidFill>
-            <a:schemeClr val="accent2">
-              <a:hueOff val="0"/>
-              <a:satOff val="0"/>
-              <a:lumOff val="0"/>
-              <a:alphaOff val="0"/>
-            </a:schemeClr>
-          </a:solidFill>
-          <a:prstDash val="solid"/>
-          <a:miter lim="800000"/>
-        </a:ln>
-        <a:effectLst/>
-      </dsp:spPr>
-      <dsp:style>
-        <a:lnRef idx="1">
-          <a:scrgbClr r="0" g="0" b="0"/>
-        </a:lnRef>
-        <a:fillRef idx="2">
-          <a:scrgbClr r="0" g="0" b="0"/>
-        </a:fillRef>
-        <a:effectRef idx="1">
-          <a:scrgbClr r="0" g="0" b="0"/>
-        </a:effectRef>
-        <a:fontRef idx="minor">
-          <a:schemeClr val="dk1"/>
-        </a:fontRef>
-      </dsp:style>
-      <dsp:txBody>
-        <a:bodyPr spcFirstLastPara="0" vert="horz" wrap="square" lIns="62009" tIns="12700" rIns="62009" bIns="12700" numCol="1" spcCol="1270" anchor="ctr" anchorCtr="0">
-          <a:noAutofit/>
-        </a:bodyPr>
-        <a:lstStyle/>
-        <a:p>
-          <a:pPr marL="0" lvl="0" indent="0" algn="ctr" defTabSz="1689100">
-            <a:lnSpc>
-              <a:spcPct val="90000"/>
-            </a:lnSpc>
-            <a:spcBef>
-              <a:spcPct val="0"/>
-            </a:spcBef>
-            <a:spcAft>
-              <a:spcPct val="35000"/>
-            </a:spcAft>
-            <a:buNone/>
-          </a:pPr>
-          <a:r>
-            <a:rPr lang="en-US" sz="3800" kern="1200"/>
-            <a:t>1</a:t>
-          </a:r>
-        </a:p>
-      </dsp:txBody>
-      <dsp:txXfrm>
-        <a:off x="669150" y="1231668"/>
-        <a:ext cx="562403" cy="562403"/>
-      </dsp:txXfrm>
-    </dsp:sp>
-    <dsp:sp modelId="{075F4793-1F07-459B-84C7-864430D3B41E}">
-      <dsp:nvSpPr>
-        <dsp:cNvPr id="0" name=""/>
-        <dsp:cNvSpPr/>
-      </dsp:nvSpPr>
-      <dsp:spPr>
-        <a:xfrm>
-          <a:off x="3497" y="3501193"/>
-          <a:ext cx="1893709" cy="72"/>
+          <a:off x="2084505" y="1653508"/>
+          <a:ext cx="1895005" cy="2610803"/>
         </a:xfrm>
         <a:prstGeom prst="rect">
           <a:avLst/>
         </a:prstGeom>
-        <a:gradFill rotWithShape="0">
-          <a:gsLst>
-            <a:gs pos="0">
-              <a:schemeClr val="accent2">
-                <a:hueOff val="0"/>
-                <a:satOff val="0"/>
-                <a:lumOff val="0"/>
-                <a:alphaOff val="0"/>
-                <a:lumMod val="110000"/>
-                <a:satMod val="105000"/>
-                <a:tint val="67000"/>
-              </a:schemeClr>
-            </a:gs>
-            <a:gs pos="50000">
-              <a:schemeClr val="accent2">
-                <a:hueOff val="0"/>
-                <a:satOff val="0"/>
-                <a:lumOff val="0"/>
-                <a:alphaOff val="0"/>
-                <a:lumMod val="105000"/>
-                <a:satMod val="103000"/>
-                <a:tint val="73000"/>
-              </a:schemeClr>
-            </a:gs>
-            <a:gs pos="100000">
-              <a:schemeClr val="accent2">
-                <a:hueOff val="0"/>
-                <a:satOff val="0"/>
-                <a:lumOff val="0"/>
-                <a:alphaOff val="0"/>
-                <a:lumMod val="105000"/>
-                <a:satMod val="109000"/>
-                <a:tint val="81000"/>
-              </a:schemeClr>
-            </a:gs>
-          </a:gsLst>
-          <a:lin ang="5400000" scaled="0"/>
-        </a:gradFill>
-        <a:ln w="6350" cap="flat" cmpd="sng" algn="ctr">
-          <a:solidFill>
-            <a:schemeClr val="accent2">
-              <a:hueOff val="0"/>
-              <a:satOff val="0"/>
-              <a:lumOff val="0"/>
-              <a:alphaOff val="0"/>
-            </a:schemeClr>
-          </a:solidFill>
-          <a:prstDash val="solid"/>
-          <a:miter lim="800000"/>
+        <a:noFill/>
+        <a:ln>
+          <a:noFill/>
         </a:ln>
-        <a:effectLst/>
-      </dsp:spPr>
-      <dsp:style>
-        <a:lnRef idx="1">
-          <a:scrgbClr r="0" g="0" b="0"/>
-        </a:lnRef>
-        <a:fillRef idx="2">
-          <a:scrgbClr r="0" g="0" b="0"/>
-        </a:fillRef>
-        <a:effectRef idx="1">
-          <a:scrgbClr r="0" g="0" b="0"/>
-        </a:effectRef>
-        <a:fontRef idx="minor">
-          <a:schemeClr val="dk1"/>
-        </a:fontRef>
-      </dsp:style>
-    </dsp:sp>
-    <dsp:sp modelId="{5CEF349B-89D7-4F83-BC13-01C636C3A8D1}">
-      <dsp:nvSpPr>
-        <dsp:cNvPr id="0" name=""/>
-        <dsp:cNvSpPr/>
-      </dsp:nvSpPr>
-      <dsp:spPr>
-        <a:xfrm>
-          <a:off x="2086577" y="850072"/>
-          <a:ext cx="1893709" cy="2651192"/>
-        </a:xfrm>
-        <a:prstGeom prst="rect">
-          <a:avLst/>
-        </a:prstGeom>
-        <a:solidFill>
-          <a:schemeClr val="accent2">
-            <a:alpha val="90000"/>
-            <a:tint val="40000"/>
-            <a:hueOff val="0"/>
-            <a:satOff val="0"/>
-            <a:lumOff val="0"/>
-            <a:alphaOff val="0"/>
-          </a:schemeClr>
-        </a:solidFill>
-        <a:ln w="6350" cap="flat" cmpd="sng" algn="ctr">
-          <a:solidFill>
-            <a:schemeClr val="accent2">
-              <a:alpha val="90000"/>
-              <a:tint val="40000"/>
-              <a:hueOff val="0"/>
-              <a:satOff val="0"/>
-              <a:lumOff val="0"/>
-              <a:alphaOff val="0"/>
-            </a:schemeClr>
-          </a:solidFill>
-          <a:prstDash val="solid"/>
-          <a:miter lim="800000"/>
-        </a:ln>
-        <a:effectLst/>
       </dsp:spPr>
       <dsp:style>
         <a:lnRef idx="1">
@@ -3012,14 +2284,40 @@
         <a:fontRef idx="minor"/>
       </dsp:style>
       <dsp:txBody>
-        <a:bodyPr spcFirstLastPara="0" vert="horz" wrap="square" lIns="147641" tIns="330200" rIns="147641" bIns="330200" numCol="1" spcCol="1270" anchor="t" anchorCtr="0">
-          <a:noAutofit/>
-        </a:bodyPr>
-        <a:lstStyle/>
+        <a:bodyPr lIns="147741" tIns="330200" rIns="147741" bIns="330200" anchor="t"/>
+        <a:lstStyle>
+          <a:lvl1pPr algn="l">
+            <a:defRPr sz="1800"/>
+          </a:lvl1pPr>
+          <a:lvl2pPr marL="114300" indent="-114300" algn="l">
+            <a:defRPr sz="1400"/>
+          </a:lvl2pPr>
+          <a:lvl3pPr marL="228600" indent="-114300" algn="l">
+            <a:defRPr sz="1400"/>
+          </a:lvl3pPr>
+          <a:lvl4pPr marL="342900" indent="-114300" algn="l">
+            <a:defRPr sz="1400"/>
+          </a:lvl4pPr>
+          <a:lvl5pPr marL="457200" indent="-114300" algn="l">
+            <a:defRPr sz="1400"/>
+          </a:lvl5pPr>
+          <a:lvl6pPr marL="571500" indent="-114300" algn="l">
+            <a:defRPr sz="1400"/>
+          </a:lvl6pPr>
+          <a:lvl7pPr marL="685800" indent="-114300" algn="l">
+            <a:defRPr sz="1400"/>
+          </a:lvl7pPr>
+          <a:lvl8pPr marL="800100" indent="-114300" algn="l">
+            <a:defRPr sz="1400"/>
+          </a:lvl8pPr>
+          <a:lvl9pPr marL="914400" indent="-114300" algn="l">
+            <a:defRPr sz="1400"/>
+          </a:lvl9pPr>
+        </a:lstStyle>
         <a:p>
-          <a:pPr marL="0" lvl="0" indent="0" algn="l" defTabSz="488950">
+          <a:pPr lvl="0">
             <a:lnSpc>
-              <a:spcPct val="90000"/>
+              <a:spcPct val="100000"/>
             </a:lnSpc>
             <a:spcBef>
               <a:spcPct val="0"/>
@@ -3027,246 +2325,44 @@
             <a:spcAft>
               <a:spcPct val="35000"/>
             </a:spcAft>
-            <a:buNone/>
           </a:pPr>
           <a:r>
-            <a:rPr lang="zh-CN" sz="1100" kern="1200"/>
+            <a:rPr lang="zh-CN">
+              <a:solidFill>
+                <a:schemeClr val="dk1"/>
+              </a:solidFill>
+            </a:rPr>
             <a:t>②哦，这个平台的开发难 度远超预期，我们也没有办法，只有延长开发时间；</a:t>
           </a:r>
-          <a:endParaRPr lang="en-US" sz="1100" kern="1200"/>
+          <a:endParaRPr lang="en-US">
+            <a:solidFill>
+              <a:schemeClr val="dk1"/>
+            </a:solidFill>
+          </a:endParaRPr>
         </a:p>
       </dsp:txBody>
       <dsp:txXfrm>
-        <a:off x="2086577" y="1857525"/>
-        <a:ext cx="1893709" cy="1590715"/>
+        <a:off x="2084505" y="1653508"/>
+        <a:ext cx="1895005" cy="2610803"/>
       </dsp:txXfrm>
     </dsp:sp>
-    <dsp:sp modelId="{10DE1E3A-8945-4DC5-88AD-CBD59DB5CA8B}">
+    <dsp:sp modelId="{C222F099-35AF-4298-BE2D-D68A754F7D04}">
       <dsp:nvSpPr>
-        <dsp:cNvPr id="0" name=""/>
+        <dsp:cNvPr id="14" name="矩形 13"/>
         <dsp:cNvSpPr/>
       </dsp:nvSpPr>
-      <dsp:spPr>
+      <dsp:spPr bwMode="white">
         <a:xfrm>
-          <a:off x="2635753" y="1115191"/>
-          <a:ext cx="795357" cy="795357"/>
-        </a:xfrm>
-        <a:prstGeom prst="ellipse">
-          <a:avLst/>
-        </a:prstGeom>
-        <a:gradFill rotWithShape="0">
-          <a:gsLst>
-            <a:gs pos="0">
-              <a:schemeClr val="accent2">
-                <a:hueOff val="0"/>
-                <a:satOff val="0"/>
-                <a:lumOff val="0"/>
-                <a:alphaOff val="0"/>
-                <a:lumMod val="110000"/>
-                <a:satMod val="105000"/>
-                <a:tint val="67000"/>
-              </a:schemeClr>
-            </a:gs>
-            <a:gs pos="50000">
-              <a:schemeClr val="accent2">
-                <a:hueOff val="0"/>
-                <a:satOff val="0"/>
-                <a:lumOff val="0"/>
-                <a:alphaOff val="0"/>
-                <a:lumMod val="105000"/>
-                <a:satMod val="103000"/>
-                <a:tint val="73000"/>
-              </a:schemeClr>
-            </a:gs>
-            <a:gs pos="100000">
-              <a:schemeClr val="accent2">
-                <a:hueOff val="0"/>
-                <a:satOff val="0"/>
-                <a:lumOff val="0"/>
-                <a:alphaOff val="0"/>
-                <a:lumMod val="105000"/>
-                <a:satMod val="109000"/>
-                <a:tint val="81000"/>
-              </a:schemeClr>
-            </a:gs>
-          </a:gsLst>
-          <a:lin ang="5400000" scaled="0"/>
-        </a:gradFill>
-        <a:ln w="6350" cap="flat" cmpd="sng" algn="ctr">
-          <a:solidFill>
-            <a:schemeClr val="accent2">
-              <a:hueOff val="0"/>
-              <a:satOff val="0"/>
-              <a:lumOff val="0"/>
-              <a:alphaOff val="0"/>
-            </a:schemeClr>
-          </a:solidFill>
-          <a:prstDash val="solid"/>
-          <a:miter lim="800000"/>
-        </a:ln>
-        <a:effectLst/>
-      </dsp:spPr>
-      <dsp:style>
-        <a:lnRef idx="1">
-          <a:scrgbClr r="0" g="0" b="0"/>
-        </a:lnRef>
-        <a:fillRef idx="2">
-          <a:scrgbClr r="0" g="0" b="0"/>
-        </a:fillRef>
-        <a:effectRef idx="1">
-          <a:scrgbClr r="0" g="0" b="0"/>
-        </a:effectRef>
-        <a:fontRef idx="minor">
-          <a:schemeClr val="dk1"/>
-        </a:fontRef>
-      </dsp:style>
-      <dsp:txBody>
-        <a:bodyPr spcFirstLastPara="0" vert="horz" wrap="square" lIns="62009" tIns="12700" rIns="62009" bIns="12700" numCol="1" spcCol="1270" anchor="ctr" anchorCtr="0">
-          <a:noAutofit/>
-        </a:bodyPr>
-        <a:lstStyle/>
-        <a:p>
-          <a:pPr marL="0" lvl="0" indent="0" algn="ctr" defTabSz="1689100">
-            <a:lnSpc>
-              <a:spcPct val="90000"/>
-            </a:lnSpc>
-            <a:spcBef>
-              <a:spcPct val="0"/>
-            </a:spcBef>
-            <a:spcAft>
-              <a:spcPct val="35000"/>
-            </a:spcAft>
-            <a:buNone/>
-          </a:pPr>
-          <a:r>
-            <a:rPr lang="en-US" sz="3800" kern="1200"/>
-            <a:t>2</a:t>
-          </a:r>
-        </a:p>
-      </dsp:txBody>
-      <dsp:txXfrm>
-        <a:off x="2752230" y="1231668"/>
-        <a:ext cx="562403" cy="562403"/>
-      </dsp:txXfrm>
-    </dsp:sp>
-    <dsp:sp modelId="{7C6EE781-5EBE-4667-9A3C-7725612F57E7}">
-      <dsp:nvSpPr>
-        <dsp:cNvPr id="0" name=""/>
-        <dsp:cNvSpPr/>
-      </dsp:nvSpPr>
-      <dsp:spPr>
-        <a:xfrm>
-          <a:off x="2086577" y="3501193"/>
-          <a:ext cx="1893709" cy="72"/>
+          <a:off x="4169010" y="1653508"/>
+          <a:ext cx="1895005" cy="2610803"/>
         </a:xfrm>
         <a:prstGeom prst="rect">
           <a:avLst/>
         </a:prstGeom>
-        <a:gradFill rotWithShape="0">
-          <a:gsLst>
-            <a:gs pos="0">
-              <a:schemeClr val="accent2">
-                <a:hueOff val="0"/>
-                <a:satOff val="0"/>
-                <a:lumOff val="0"/>
-                <a:alphaOff val="0"/>
-                <a:lumMod val="110000"/>
-                <a:satMod val="105000"/>
-                <a:tint val="67000"/>
-              </a:schemeClr>
-            </a:gs>
-            <a:gs pos="50000">
-              <a:schemeClr val="accent2">
-                <a:hueOff val="0"/>
-                <a:satOff val="0"/>
-                <a:lumOff val="0"/>
-                <a:alphaOff val="0"/>
-                <a:lumMod val="105000"/>
-                <a:satMod val="103000"/>
-                <a:tint val="73000"/>
-              </a:schemeClr>
-            </a:gs>
-            <a:gs pos="100000">
-              <a:schemeClr val="accent2">
-                <a:hueOff val="0"/>
-                <a:satOff val="0"/>
-                <a:lumOff val="0"/>
-                <a:alphaOff val="0"/>
-                <a:lumMod val="105000"/>
-                <a:satMod val="109000"/>
-                <a:tint val="81000"/>
-              </a:schemeClr>
-            </a:gs>
-          </a:gsLst>
-          <a:lin ang="5400000" scaled="0"/>
-        </a:gradFill>
-        <a:ln w="6350" cap="flat" cmpd="sng" algn="ctr">
-          <a:solidFill>
-            <a:schemeClr val="accent2">
-              <a:hueOff val="0"/>
-              <a:satOff val="0"/>
-              <a:lumOff val="0"/>
-              <a:alphaOff val="0"/>
-            </a:schemeClr>
-          </a:solidFill>
-          <a:prstDash val="solid"/>
-          <a:miter lim="800000"/>
+        <a:noFill/>
+        <a:ln>
+          <a:noFill/>
         </a:ln>
-        <a:effectLst/>
-      </dsp:spPr>
-      <dsp:style>
-        <a:lnRef idx="1">
-          <a:scrgbClr r="0" g="0" b="0"/>
-        </a:lnRef>
-        <a:fillRef idx="2">
-          <a:scrgbClr r="0" g="0" b="0"/>
-        </a:fillRef>
-        <a:effectRef idx="1">
-          <a:scrgbClr r="0" g="0" b="0"/>
-        </a:effectRef>
-        <a:fontRef idx="minor">
-          <a:schemeClr val="dk1"/>
-        </a:fontRef>
-      </dsp:style>
-    </dsp:sp>
-    <dsp:sp modelId="{D27F21C9-AB92-4366-81A9-32988F462417}">
-      <dsp:nvSpPr>
-        <dsp:cNvPr id="0" name=""/>
-        <dsp:cNvSpPr/>
-      </dsp:nvSpPr>
-      <dsp:spPr>
-        <a:xfrm>
-          <a:off x="4169657" y="850072"/>
-          <a:ext cx="1893709" cy="2651192"/>
-        </a:xfrm>
-        <a:prstGeom prst="rect">
-          <a:avLst/>
-        </a:prstGeom>
-        <a:solidFill>
-          <a:schemeClr val="accent2">
-            <a:alpha val="90000"/>
-            <a:tint val="40000"/>
-            <a:hueOff val="0"/>
-            <a:satOff val="0"/>
-            <a:lumOff val="0"/>
-            <a:alphaOff val="0"/>
-          </a:schemeClr>
-        </a:solidFill>
-        <a:ln w="6350" cap="flat" cmpd="sng" algn="ctr">
-          <a:solidFill>
-            <a:schemeClr val="accent2">
-              <a:alpha val="90000"/>
-              <a:tint val="40000"/>
-              <a:hueOff val="0"/>
-              <a:satOff val="0"/>
-              <a:lumOff val="0"/>
-              <a:alphaOff val="0"/>
-            </a:schemeClr>
-          </a:solidFill>
-          <a:prstDash val="solid"/>
-          <a:miter lim="800000"/>
-        </a:ln>
-        <a:effectLst/>
       </dsp:spPr>
       <dsp:style>
         <a:lnRef idx="1">
@@ -3281,14 +2377,40 @@
         <a:fontRef idx="minor"/>
       </dsp:style>
       <dsp:txBody>
-        <a:bodyPr spcFirstLastPara="0" vert="horz" wrap="square" lIns="147641" tIns="330200" rIns="147641" bIns="330200" numCol="1" spcCol="1270" anchor="t" anchorCtr="0">
-          <a:noAutofit/>
-        </a:bodyPr>
-        <a:lstStyle/>
+        <a:bodyPr lIns="147741" tIns="330200" rIns="147741" bIns="330200" anchor="t"/>
+        <a:lstStyle>
+          <a:lvl1pPr algn="l">
+            <a:defRPr sz="1800"/>
+          </a:lvl1pPr>
+          <a:lvl2pPr marL="114300" indent="-114300" algn="l">
+            <a:defRPr sz="1400"/>
+          </a:lvl2pPr>
+          <a:lvl3pPr marL="228600" indent="-114300" algn="l">
+            <a:defRPr sz="1400"/>
+          </a:lvl3pPr>
+          <a:lvl4pPr marL="342900" indent="-114300" algn="l">
+            <a:defRPr sz="1400"/>
+          </a:lvl4pPr>
+          <a:lvl5pPr marL="457200" indent="-114300" algn="l">
+            <a:defRPr sz="1400"/>
+          </a:lvl5pPr>
+          <a:lvl6pPr marL="571500" indent="-114300" algn="l">
+            <a:defRPr sz="1400"/>
+          </a:lvl6pPr>
+          <a:lvl7pPr marL="685800" indent="-114300" algn="l">
+            <a:defRPr sz="1400"/>
+          </a:lvl7pPr>
+          <a:lvl8pPr marL="800100" indent="-114300" algn="l">
+            <a:defRPr sz="1400"/>
+          </a:lvl8pPr>
+          <a:lvl9pPr marL="914400" indent="-114300" algn="l">
+            <a:defRPr sz="1400"/>
+          </a:lvl9pPr>
+        </a:lstStyle>
         <a:p>
-          <a:pPr marL="0" lvl="0" indent="0" algn="l" defTabSz="488950">
+          <a:pPr lvl="0">
             <a:lnSpc>
-              <a:spcPct val="90000"/>
+              <a:spcPct val="100000"/>
             </a:lnSpc>
             <a:spcBef>
               <a:spcPct val="0"/>
@@ -3296,246 +2418,44 @@
             <a:spcAft>
               <a:spcPct val="35000"/>
             </a:spcAft>
-            <a:buNone/>
           </a:pPr>
           <a:r>
-            <a:rPr lang="zh-CN" sz="1100" kern="1200"/>
+            <a:rPr lang="zh-CN">
+              <a:solidFill>
+                <a:schemeClr val="dk1"/>
+              </a:solidFill>
+            </a:rPr>
             <a:t>③程序重新选择架构之后，突然 出现了许多问题，我们只好延长开发时间；</a:t>
           </a:r>
-          <a:endParaRPr lang="en-US" sz="1100" kern="1200"/>
+          <a:endParaRPr lang="en-US">
+            <a:solidFill>
+              <a:schemeClr val="dk1"/>
+            </a:solidFill>
+          </a:endParaRPr>
         </a:p>
       </dsp:txBody>
       <dsp:txXfrm>
-        <a:off x="4169657" y="1857525"/>
-        <a:ext cx="1893709" cy="1590715"/>
+        <a:off x="4169010" y="1653508"/>
+        <a:ext cx="1895005" cy="2610803"/>
       </dsp:txXfrm>
     </dsp:sp>
-    <dsp:sp modelId="{48724E40-318F-4AE7-AA0C-683A4C5715FD}">
+    <dsp:sp modelId="{ECB0C299-BED4-4997-87CE-676B54D63BAE}">
       <dsp:nvSpPr>
-        <dsp:cNvPr id="0" name=""/>
+        <dsp:cNvPr id="18" name="矩形 17"/>
         <dsp:cNvSpPr/>
       </dsp:nvSpPr>
-      <dsp:spPr>
+      <dsp:spPr bwMode="white">
         <a:xfrm>
-          <a:off x="4718833" y="1115191"/>
-          <a:ext cx="795357" cy="795357"/>
-        </a:xfrm>
-        <a:prstGeom prst="ellipse">
-          <a:avLst/>
-        </a:prstGeom>
-        <a:gradFill rotWithShape="0">
-          <a:gsLst>
-            <a:gs pos="0">
-              <a:schemeClr val="accent2">
-                <a:hueOff val="0"/>
-                <a:satOff val="0"/>
-                <a:lumOff val="0"/>
-                <a:alphaOff val="0"/>
-                <a:lumMod val="110000"/>
-                <a:satMod val="105000"/>
-                <a:tint val="67000"/>
-              </a:schemeClr>
-            </a:gs>
-            <a:gs pos="50000">
-              <a:schemeClr val="accent2">
-                <a:hueOff val="0"/>
-                <a:satOff val="0"/>
-                <a:lumOff val="0"/>
-                <a:alphaOff val="0"/>
-                <a:lumMod val="105000"/>
-                <a:satMod val="103000"/>
-                <a:tint val="73000"/>
-              </a:schemeClr>
-            </a:gs>
-            <a:gs pos="100000">
-              <a:schemeClr val="accent2">
-                <a:hueOff val="0"/>
-                <a:satOff val="0"/>
-                <a:lumOff val="0"/>
-                <a:alphaOff val="0"/>
-                <a:lumMod val="105000"/>
-                <a:satMod val="109000"/>
-                <a:tint val="81000"/>
-              </a:schemeClr>
-            </a:gs>
-          </a:gsLst>
-          <a:lin ang="5400000" scaled="0"/>
-        </a:gradFill>
-        <a:ln w="6350" cap="flat" cmpd="sng" algn="ctr">
-          <a:solidFill>
-            <a:schemeClr val="accent2">
-              <a:hueOff val="0"/>
-              <a:satOff val="0"/>
-              <a:lumOff val="0"/>
-              <a:alphaOff val="0"/>
-            </a:schemeClr>
-          </a:solidFill>
-          <a:prstDash val="solid"/>
-          <a:miter lim="800000"/>
-        </a:ln>
-        <a:effectLst/>
-      </dsp:spPr>
-      <dsp:style>
-        <a:lnRef idx="1">
-          <a:scrgbClr r="0" g="0" b="0"/>
-        </a:lnRef>
-        <a:fillRef idx="2">
-          <a:scrgbClr r="0" g="0" b="0"/>
-        </a:fillRef>
-        <a:effectRef idx="1">
-          <a:scrgbClr r="0" g="0" b="0"/>
-        </a:effectRef>
-        <a:fontRef idx="minor">
-          <a:schemeClr val="dk1"/>
-        </a:fontRef>
-      </dsp:style>
-      <dsp:txBody>
-        <a:bodyPr spcFirstLastPara="0" vert="horz" wrap="square" lIns="62009" tIns="12700" rIns="62009" bIns="12700" numCol="1" spcCol="1270" anchor="ctr" anchorCtr="0">
-          <a:noAutofit/>
-        </a:bodyPr>
-        <a:lstStyle/>
-        <a:p>
-          <a:pPr marL="0" lvl="0" indent="0" algn="ctr" defTabSz="1689100">
-            <a:lnSpc>
-              <a:spcPct val="90000"/>
-            </a:lnSpc>
-            <a:spcBef>
-              <a:spcPct val="0"/>
-            </a:spcBef>
-            <a:spcAft>
-              <a:spcPct val="35000"/>
-            </a:spcAft>
-            <a:buNone/>
-          </a:pPr>
-          <a:r>
-            <a:rPr lang="en-US" sz="3800" kern="1200"/>
-            <a:t>3</a:t>
-          </a:r>
-        </a:p>
-      </dsp:txBody>
-      <dsp:txXfrm>
-        <a:off x="4835310" y="1231668"/>
-        <a:ext cx="562403" cy="562403"/>
-      </dsp:txXfrm>
-    </dsp:sp>
-    <dsp:sp modelId="{AED0B5CB-0669-48E5-BEEC-8C00007DF797}">
-      <dsp:nvSpPr>
-        <dsp:cNvPr id="0" name=""/>
-        <dsp:cNvSpPr/>
-      </dsp:nvSpPr>
-      <dsp:spPr>
-        <a:xfrm>
-          <a:off x="4169657" y="3501193"/>
-          <a:ext cx="1893709" cy="72"/>
+          <a:off x="6253515" y="1653508"/>
+          <a:ext cx="1895005" cy="2610803"/>
         </a:xfrm>
         <a:prstGeom prst="rect">
           <a:avLst/>
         </a:prstGeom>
-        <a:gradFill rotWithShape="0">
-          <a:gsLst>
-            <a:gs pos="0">
-              <a:schemeClr val="accent2">
-                <a:hueOff val="0"/>
-                <a:satOff val="0"/>
-                <a:lumOff val="0"/>
-                <a:alphaOff val="0"/>
-                <a:lumMod val="110000"/>
-                <a:satMod val="105000"/>
-                <a:tint val="67000"/>
-              </a:schemeClr>
-            </a:gs>
-            <a:gs pos="50000">
-              <a:schemeClr val="accent2">
-                <a:hueOff val="0"/>
-                <a:satOff val="0"/>
-                <a:lumOff val="0"/>
-                <a:alphaOff val="0"/>
-                <a:lumMod val="105000"/>
-                <a:satMod val="103000"/>
-                <a:tint val="73000"/>
-              </a:schemeClr>
-            </a:gs>
-            <a:gs pos="100000">
-              <a:schemeClr val="accent2">
-                <a:hueOff val="0"/>
-                <a:satOff val="0"/>
-                <a:lumOff val="0"/>
-                <a:alphaOff val="0"/>
-                <a:lumMod val="105000"/>
-                <a:satMod val="109000"/>
-                <a:tint val="81000"/>
-              </a:schemeClr>
-            </a:gs>
-          </a:gsLst>
-          <a:lin ang="5400000" scaled="0"/>
-        </a:gradFill>
-        <a:ln w="6350" cap="flat" cmpd="sng" algn="ctr">
-          <a:solidFill>
-            <a:schemeClr val="accent2">
-              <a:hueOff val="0"/>
-              <a:satOff val="0"/>
-              <a:lumOff val="0"/>
-              <a:alphaOff val="0"/>
-            </a:schemeClr>
-          </a:solidFill>
-          <a:prstDash val="solid"/>
-          <a:miter lim="800000"/>
+        <a:noFill/>
+        <a:ln>
+          <a:noFill/>
         </a:ln>
-        <a:effectLst/>
-      </dsp:spPr>
-      <dsp:style>
-        <a:lnRef idx="1">
-          <a:scrgbClr r="0" g="0" b="0"/>
-        </a:lnRef>
-        <a:fillRef idx="2">
-          <a:scrgbClr r="0" g="0" b="0"/>
-        </a:fillRef>
-        <a:effectRef idx="1">
-          <a:scrgbClr r="0" g="0" b="0"/>
-        </a:effectRef>
-        <a:fontRef idx="minor">
-          <a:schemeClr val="dk1"/>
-        </a:fontRef>
-      </dsp:style>
-    </dsp:sp>
-    <dsp:sp modelId="{4F15DF7D-A377-4429-8C7A-01DBD92C7747}">
-      <dsp:nvSpPr>
-        <dsp:cNvPr id="0" name=""/>
-        <dsp:cNvSpPr/>
-      </dsp:nvSpPr>
-      <dsp:spPr>
-        <a:xfrm>
-          <a:off x="6252738" y="850072"/>
-          <a:ext cx="1893709" cy="2651192"/>
-        </a:xfrm>
-        <a:prstGeom prst="rect">
-          <a:avLst/>
-        </a:prstGeom>
-        <a:solidFill>
-          <a:schemeClr val="accent2">
-            <a:alpha val="90000"/>
-            <a:tint val="40000"/>
-            <a:hueOff val="0"/>
-            <a:satOff val="0"/>
-            <a:lumOff val="0"/>
-            <a:alphaOff val="0"/>
-          </a:schemeClr>
-        </a:solidFill>
-        <a:ln w="6350" cap="flat" cmpd="sng" algn="ctr">
-          <a:solidFill>
-            <a:schemeClr val="accent2">
-              <a:alpha val="90000"/>
-              <a:tint val="40000"/>
-              <a:hueOff val="0"/>
-              <a:satOff val="0"/>
-              <a:lumOff val="0"/>
-              <a:alphaOff val="0"/>
-            </a:schemeClr>
-          </a:solidFill>
-          <a:prstDash val="solid"/>
-          <a:miter lim="800000"/>
-        </a:ln>
-        <a:effectLst/>
       </dsp:spPr>
       <dsp:style>
         <a:lnRef idx="1">
@@ -3550,14 +2470,40 @@
         <a:fontRef idx="minor"/>
       </dsp:style>
       <dsp:txBody>
-        <a:bodyPr spcFirstLastPara="0" vert="horz" wrap="square" lIns="147641" tIns="330200" rIns="147641" bIns="330200" numCol="1" spcCol="1270" anchor="t" anchorCtr="0">
-          <a:noAutofit/>
-        </a:bodyPr>
-        <a:lstStyle/>
+        <a:bodyPr lIns="147741" tIns="330200" rIns="147741" bIns="330200" anchor="t"/>
+        <a:lstStyle>
+          <a:lvl1pPr algn="l">
+            <a:defRPr sz="1800"/>
+          </a:lvl1pPr>
+          <a:lvl2pPr marL="114300" indent="-114300" algn="l">
+            <a:defRPr sz="1400"/>
+          </a:lvl2pPr>
+          <a:lvl3pPr marL="228600" indent="-114300" algn="l">
+            <a:defRPr sz="1400"/>
+          </a:lvl3pPr>
+          <a:lvl4pPr marL="342900" indent="-114300" algn="l">
+            <a:defRPr sz="1400"/>
+          </a:lvl4pPr>
+          <a:lvl5pPr marL="457200" indent="-114300" algn="l">
+            <a:defRPr sz="1400"/>
+          </a:lvl5pPr>
+          <a:lvl6pPr marL="571500" indent="-114300" algn="l">
+            <a:defRPr sz="1400"/>
+          </a:lvl6pPr>
+          <a:lvl7pPr marL="685800" indent="-114300" algn="l">
+            <a:defRPr sz="1400"/>
+          </a:lvl7pPr>
+          <a:lvl8pPr marL="800100" indent="-114300" algn="l">
+            <a:defRPr sz="1400"/>
+          </a:lvl8pPr>
+          <a:lvl9pPr marL="914400" indent="-114300" algn="l">
+            <a:defRPr sz="1400"/>
+          </a:lvl9pPr>
+        </a:lstStyle>
         <a:p>
-          <a:pPr marL="0" lvl="0" indent="0" algn="l" defTabSz="488950">
+          <a:pPr lvl="0">
             <a:lnSpc>
-              <a:spcPct val="90000"/>
+              <a:spcPct val="100000"/>
             </a:lnSpc>
             <a:spcBef>
               <a:spcPct val="0"/>
@@ -3565,246 +2511,44 @@
             <a:spcAft>
               <a:spcPct val="35000"/>
             </a:spcAft>
-            <a:buNone/>
           </a:pPr>
           <a:r>
-            <a:rPr lang="zh-CN" sz="1100" kern="1200"/>
+            <a:rPr lang="zh-CN">
+              <a:solidFill>
+                <a:schemeClr val="dk1"/>
+              </a:solidFill>
+            </a:rPr>
             <a:t>④项目组有个成员离职了，他负责的模块 别人都不懂，只好重新招人培养，并推迟交付日期；</a:t>
           </a:r>
-          <a:endParaRPr lang="en-US" sz="1100" kern="1200"/>
+          <a:endParaRPr lang="en-US">
+            <a:solidFill>
+              <a:schemeClr val="dk1"/>
+            </a:solidFill>
+          </a:endParaRPr>
         </a:p>
       </dsp:txBody>
       <dsp:txXfrm>
-        <a:off x="6252738" y="1857525"/>
-        <a:ext cx="1893709" cy="1590715"/>
+        <a:off x="6253515" y="1653508"/>
+        <a:ext cx="1895005" cy="2610803"/>
       </dsp:txXfrm>
     </dsp:sp>
-    <dsp:sp modelId="{DFAE1B6A-7037-4C51-BD64-1204E7C9B5FF}">
+    <dsp:sp modelId="{A58C12E5-1361-4E9F-8656-9235BFEB9647}">
       <dsp:nvSpPr>
-        <dsp:cNvPr id="0" name=""/>
+        <dsp:cNvPr id="22" name="矩形 21"/>
         <dsp:cNvSpPr/>
       </dsp:nvSpPr>
-      <dsp:spPr>
+      <dsp:spPr bwMode="white">
         <a:xfrm>
-          <a:off x="6801913" y="1115191"/>
-          <a:ext cx="795357" cy="795357"/>
-        </a:xfrm>
-        <a:prstGeom prst="ellipse">
-          <a:avLst/>
-        </a:prstGeom>
-        <a:gradFill rotWithShape="0">
-          <a:gsLst>
-            <a:gs pos="0">
-              <a:schemeClr val="accent2">
-                <a:hueOff val="0"/>
-                <a:satOff val="0"/>
-                <a:lumOff val="0"/>
-                <a:alphaOff val="0"/>
-                <a:lumMod val="110000"/>
-                <a:satMod val="105000"/>
-                <a:tint val="67000"/>
-              </a:schemeClr>
-            </a:gs>
-            <a:gs pos="50000">
-              <a:schemeClr val="accent2">
-                <a:hueOff val="0"/>
-                <a:satOff val="0"/>
-                <a:lumOff val="0"/>
-                <a:alphaOff val="0"/>
-                <a:lumMod val="105000"/>
-                <a:satMod val="103000"/>
-                <a:tint val="73000"/>
-              </a:schemeClr>
-            </a:gs>
-            <a:gs pos="100000">
-              <a:schemeClr val="accent2">
-                <a:hueOff val="0"/>
-                <a:satOff val="0"/>
-                <a:lumOff val="0"/>
-                <a:alphaOff val="0"/>
-                <a:lumMod val="105000"/>
-                <a:satMod val="109000"/>
-                <a:tint val="81000"/>
-              </a:schemeClr>
-            </a:gs>
-          </a:gsLst>
-          <a:lin ang="5400000" scaled="0"/>
-        </a:gradFill>
-        <a:ln w="6350" cap="flat" cmpd="sng" algn="ctr">
-          <a:solidFill>
-            <a:schemeClr val="accent2">
-              <a:hueOff val="0"/>
-              <a:satOff val="0"/>
-              <a:lumOff val="0"/>
-              <a:alphaOff val="0"/>
-            </a:schemeClr>
-          </a:solidFill>
-          <a:prstDash val="solid"/>
-          <a:miter lim="800000"/>
-        </a:ln>
-        <a:effectLst/>
-      </dsp:spPr>
-      <dsp:style>
-        <a:lnRef idx="1">
-          <a:scrgbClr r="0" g="0" b="0"/>
-        </a:lnRef>
-        <a:fillRef idx="2">
-          <a:scrgbClr r="0" g="0" b="0"/>
-        </a:fillRef>
-        <a:effectRef idx="1">
-          <a:scrgbClr r="0" g="0" b="0"/>
-        </a:effectRef>
-        <a:fontRef idx="minor">
-          <a:schemeClr val="dk1"/>
-        </a:fontRef>
-      </dsp:style>
-      <dsp:txBody>
-        <a:bodyPr spcFirstLastPara="0" vert="horz" wrap="square" lIns="62009" tIns="12700" rIns="62009" bIns="12700" numCol="1" spcCol="1270" anchor="ctr" anchorCtr="0">
-          <a:noAutofit/>
-        </a:bodyPr>
-        <a:lstStyle/>
-        <a:p>
-          <a:pPr marL="0" lvl="0" indent="0" algn="ctr" defTabSz="1689100">
-            <a:lnSpc>
-              <a:spcPct val="90000"/>
-            </a:lnSpc>
-            <a:spcBef>
-              <a:spcPct val="0"/>
-            </a:spcBef>
-            <a:spcAft>
-              <a:spcPct val="35000"/>
-            </a:spcAft>
-            <a:buNone/>
-          </a:pPr>
-          <a:r>
-            <a:rPr lang="en-US" sz="3800" kern="1200"/>
-            <a:t>4</a:t>
-          </a:r>
-        </a:p>
-      </dsp:txBody>
-      <dsp:txXfrm>
-        <a:off x="6918390" y="1231668"/>
-        <a:ext cx="562403" cy="562403"/>
-      </dsp:txXfrm>
-    </dsp:sp>
-    <dsp:sp modelId="{934A234F-7CFF-453C-AA48-AEF51E232DE0}">
-      <dsp:nvSpPr>
-        <dsp:cNvPr id="0" name=""/>
-        <dsp:cNvSpPr/>
-      </dsp:nvSpPr>
-      <dsp:spPr>
-        <a:xfrm>
-          <a:off x="6252738" y="3501193"/>
-          <a:ext cx="1893709" cy="72"/>
+          <a:off x="8338020" y="1653508"/>
+          <a:ext cx="1895005" cy="2610803"/>
         </a:xfrm>
         <a:prstGeom prst="rect">
           <a:avLst/>
         </a:prstGeom>
-        <a:gradFill rotWithShape="0">
-          <a:gsLst>
-            <a:gs pos="0">
-              <a:schemeClr val="accent2">
-                <a:hueOff val="0"/>
-                <a:satOff val="0"/>
-                <a:lumOff val="0"/>
-                <a:alphaOff val="0"/>
-                <a:lumMod val="110000"/>
-                <a:satMod val="105000"/>
-                <a:tint val="67000"/>
-              </a:schemeClr>
-            </a:gs>
-            <a:gs pos="50000">
-              <a:schemeClr val="accent2">
-                <a:hueOff val="0"/>
-                <a:satOff val="0"/>
-                <a:lumOff val="0"/>
-                <a:alphaOff val="0"/>
-                <a:lumMod val="105000"/>
-                <a:satMod val="103000"/>
-                <a:tint val="73000"/>
-              </a:schemeClr>
-            </a:gs>
-            <a:gs pos="100000">
-              <a:schemeClr val="accent2">
-                <a:hueOff val="0"/>
-                <a:satOff val="0"/>
-                <a:lumOff val="0"/>
-                <a:alphaOff val="0"/>
-                <a:lumMod val="105000"/>
-                <a:satMod val="109000"/>
-                <a:tint val="81000"/>
-              </a:schemeClr>
-            </a:gs>
-          </a:gsLst>
-          <a:lin ang="5400000" scaled="0"/>
-        </a:gradFill>
-        <a:ln w="6350" cap="flat" cmpd="sng" algn="ctr">
-          <a:solidFill>
-            <a:schemeClr val="accent2">
-              <a:hueOff val="0"/>
-              <a:satOff val="0"/>
-              <a:lumOff val="0"/>
-              <a:alphaOff val="0"/>
-            </a:schemeClr>
-          </a:solidFill>
-          <a:prstDash val="solid"/>
-          <a:miter lim="800000"/>
+        <a:noFill/>
+        <a:ln>
+          <a:noFill/>
         </a:ln>
-        <a:effectLst/>
-      </dsp:spPr>
-      <dsp:style>
-        <a:lnRef idx="1">
-          <a:scrgbClr r="0" g="0" b="0"/>
-        </a:lnRef>
-        <a:fillRef idx="2">
-          <a:scrgbClr r="0" g="0" b="0"/>
-        </a:fillRef>
-        <a:effectRef idx="1">
-          <a:scrgbClr r="0" g="0" b="0"/>
-        </a:effectRef>
-        <a:fontRef idx="minor">
-          <a:schemeClr val="dk1"/>
-        </a:fontRef>
-      </dsp:style>
-    </dsp:sp>
-    <dsp:sp modelId="{6FC82E2C-DAC1-488A-B3E5-0F0A44750633}">
-      <dsp:nvSpPr>
-        <dsp:cNvPr id="0" name=""/>
-        <dsp:cNvSpPr/>
-      </dsp:nvSpPr>
-      <dsp:spPr>
-        <a:xfrm>
-          <a:off x="8335818" y="850072"/>
-          <a:ext cx="1893709" cy="2651192"/>
-        </a:xfrm>
-        <a:prstGeom prst="rect">
-          <a:avLst/>
-        </a:prstGeom>
-        <a:solidFill>
-          <a:schemeClr val="accent2">
-            <a:alpha val="90000"/>
-            <a:tint val="40000"/>
-            <a:hueOff val="0"/>
-            <a:satOff val="0"/>
-            <a:lumOff val="0"/>
-            <a:alphaOff val="0"/>
-          </a:schemeClr>
-        </a:solidFill>
-        <a:ln w="6350" cap="flat" cmpd="sng" algn="ctr">
-          <a:solidFill>
-            <a:schemeClr val="accent2">
-              <a:alpha val="90000"/>
-              <a:tint val="40000"/>
-              <a:hueOff val="0"/>
-              <a:satOff val="0"/>
-              <a:lumOff val="0"/>
-              <a:alphaOff val="0"/>
-            </a:schemeClr>
-          </a:solidFill>
-          <a:prstDash val="solid"/>
-          <a:miter lim="800000"/>
-        </a:ln>
-        <a:effectLst/>
       </dsp:spPr>
       <dsp:style>
         <a:lnRef idx="1">
@@ -3819,14 +2563,40 @@
         <a:fontRef idx="minor"/>
       </dsp:style>
       <dsp:txBody>
-        <a:bodyPr spcFirstLastPara="0" vert="horz" wrap="square" lIns="147641" tIns="330200" rIns="147641" bIns="330200" numCol="1" spcCol="1270" anchor="t" anchorCtr="0">
-          <a:noAutofit/>
-        </a:bodyPr>
-        <a:lstStyle/>
+        <a:bodyPr lIns="147741" tIns="330200" rIns="147741" bIns="330200" anchor="t"/>
+        <a:lstStyle>
+          <a:lvl1pPr algn="l">
+            <a:defRPr sz="1800"/>
+          </a:lvl1pPr>
+          <a:lvl2pPr marL="114300" indent="-114300" algn="l">
+            <a:defRPr sz="1400"/>
+          </a:lvl2pPr>
+          <a:lvl3pPr marL="228600" indent="-114300" algn="l">
+            <a:defRPr sz="1400"/>
+          </a:lvl3pPr>
+          <a:lvl4pPr marL="342900" indent="-114300" algn="l">
+            <a:defRPr sz="1400"/>
+          </a:lvl4pPr>
+          <a:lvl5pPr marL="457200" indent="-114300" algn="l">
+            <a:defRPr sz="1400"/>
+          </a:lvl5pPr>
+          <a:lvl6pPr marL="571500" indent="-114300" algn="l">
+            <a:defRPr sz="1400"/>
+          </a:lvl6pPr>
+          <a:lvl7pPr marL="685800" indent="-114300" algn="l">
+            <a:defRPr sz="1400"/>
+          </a:lvl7pPr>
+          <a:lvl8pPr marL="800100" indent="-114300" algn="l">
+            <a:defRPr sz="1400"/>
+          </a:lvl8pPr>
+          <a:lvl9pPr marL="914400" indent="-114300" algn="l">
+            <a:defRPr sz="1400"/>
+          </a:lvl9pPr>
+        </a:lstStyle>
         <a:p>
-          <a:pPr marL="0" lvl="0" indent="0" algn="l" defTabSz="488950">
+          <a:pPr lvl="0">
             <a:lnSpc>
-              <a:spcPct val="90000"/>
+              <a:spcPct val="100000"/>
             </a:lnSpc>
             <a:spcBef>
               <a:spcPct val="0"/>
@@ -3834,207 +2604,26 @@
             <a:spcAft>
               <a:spcPct val="35000"/>
             </a:spcAft>
-            <a:buNone/>
           </a:pPr>
           <a:r>
-            <a:rPr lang="zh-CN" sz="1100" kern="1200"/>
+            <a:rPr lang="zh-CN">
+              <a:solidFill>
+                <a:schemeClr val="dk1"/>
+              </a:solidFill>
+            </a:rPr>
             <a:t>⑤服务器突发故障，所有源代码 都丢失了，也找不到完整的备份，只好大大推迟交付日期</a:t>
           </a:r>
-          <a:endParaRPr lang="en-US" sz="1100" kern="1200"/>
+          <a:endParaRPr lang="en-US">
+            <a:solidFill>
+              <a:schemeClr val="dk1"/>
+            </a:solidFill>
+          </a:endParaRPr>
         </a:p>
       </dsp:txBody>
       <dsp:txXfrm>
-        <a:off x="8335818" y="1857525"/>
-        <a:ext cx="1893709" cy="1590715"/>
+        <a:off x="8338020" y="1653508"/>
+        <a:ext cx="1895005" cy="2610803"/>
       </dsp:txXfrm>
-    </dsp:sp>
-    <dsp:sp modelId="{4A3A52F5-EA14-460B-A33D-BCBBF3F7BCB0}">
-      <dsp:nvSpPr>
-        <dsp:cNvPr id="0" name=""/>
-        <dsp:cNvSpPr/>
-      </dsp:nvSpPr>
-      <dsp:spPr>
-        <a:xfrm>
-          <a:off x="8884993" y="1115191"/>
-          <a:ext cx="795357" cy="795357"/>
-        </a:xfrm>
-        <a:prstGeom prst="ellipse">
-          <a:avLst/>
-        </a:prstGeom>
-        <a:gradFill rotWithShape="0">
-          <a:gsLst>
-            <a:gs pos="0">
-              <a:schemeClr val="accent2">
-                <a:hueOff val="0"/>
-                <a:satOff val="0"/>
-                <a:lumOff val="0"/>
-                <a:alphaOff val="0"/>
-                <a:lumMod val="110000"/>
-                <a:satMod val="105000"/>
-                <a:tint val="67000"/>
-              </a:schemeClr>
-            </a:gs>
-            <a:gs pos="50000">
-              <a:schemeClr val="accent2">
-                <a:hueOff val="0"/>
-                <a:satOff val="0"/>
-                <a:lumOff val="0"/>
-                <a:alphaOff val="0"/>
-                <a:lumMod val="105000"/>
-                <a:satMod val="103000"/>
-                <a:tint val="73000"/>
-              </a:schemeClr>
-            </a:gs>
-            <a:gs pos="100000">
-              <a:schemeClr val="accent2">
-                <a:hueOff val="0"/>
-                <a:satOff val="0"/>
-                <a:lumOff val="0"/>
-                <a:alphaOff val="0"/>
-                <a:lumMod val="105000"/>
-                <a:satMod val="109000"/>
-                <a:tint val="81000"/>
-              </a:schemeClr>
-            </a:gs>
-          </a:gsLst>
-          <a:lin ang="5400000" scaled="0"/>
-        </a:gradFill>
-        <a:ln w="6350" cap="flat" cmpd="sng" algn="ctr">
-          <a:solidFill>
-            <a:schemeClr val="accent2">
-              <a:hueOff val="0"/>
-              <a:satOff val="0"/>
-              <a:lumOff val="0"/>
-              <a:alphaOff val="0"/>
-            </a:schemeClr>
-          </a:solidFill>
-          <a:prstDash val="solid"/>
-          <a:miter lim="800000"/>
-        </a:ln>
-        <a:effectLst/>
-      </dsp:spPr>
-      <dsp:style>
-        <a:lnRef idx="1">
-          <a:scrgbClr r="0" g="0" b="0"/>
-        </a:lnRef>
-        <a:fillRef idx="2">
-          <a:scrgbClr r="0" g="0" b="0"/>
-        </a:fillRef>
-        <a:effectRef idx="1">
-          <a:scrgbClr r="0" g="0" b="0"/>
-        </a:effectRef>
-        <a:fontRef idx="minor">
-          <a:schemeClr val="dk1"/>
-        </a:fontRef>
-      </dsp:style>
-      <dsp:txBody>
-        <a:bodyPr spcFirstLastPara="0" vert="horz" wrap="square" lIns="62009" tIns="12700" rIns="62009" bIns="12700" numCol="1" spcCol="1270" anchor="ctr" anchorCtr="0">
-          <a:noAutofit/>
-        </a:bodyPr>
-        <a:lstStyle/>
-        <a:p>
-          <a:pPr marL="0" lvl="0" indent="0" algn="ctr" defTabSz="1689100">
-            <a:lnSpc>
-              <a:spcPct val="90000"/>
-            </a:lnSpc>
-            <a:spcBef>
-              <a:spcPct val="0"/>
-            </a:spcBef>
-            <a:spcAft>
-              <a:spcPct val="35000"/>
-            </a:spcAft>
-            <a:buNone/>
-          </a:pPr>
-          <a:r>
-            <a:rPr lang="en-US" sz="3800" kern="1200"/>
-            <a:t>5</a:t>
-          </a:r>
-        </a:p>
-      </dsp:txBody>
-      <dsp:txXfrm>
-        <a:off x="9001470" y="1231668"/>
-        <a:ext cx="562403" cy="562403"/>
-      </dsp:txXfrm>
-    </dsp:sp>
-    <dsp:sp modelId="{D0467B6C-01B2-4D7E-8B0B-F129C5C8729F}">
-      <dsp:nvSpPr>
-        <dsp:cNvPr id="0" name=""/>
-        <dsp:cNvSpPr/>
-      </dsp:nvSpPr>
-      <dsp:spPr>
-        <a:xfrm>
-          <a:off x="8335818" y="3501193"/>
-          <a:ext cx="1893709" cy="72"/>
-        </a:xfrm>
-        <a:prstGeom prst="rect">
-          <a:avLst/>
-        </a:prstGeom>
-        <a:gradFill rotWithShape="0">
-          <a:gsLst>
-            <a:gs pos="0">
-              <a:schemeClr val="accent2">
-                <a:hueOff val="0"/>
-                <a:satOff val="0"/>
-                <a:lumOff val="0"/>
-                <a:alphaOff val="0"/>
-                <a:lumMod val="110000"/>
-                <a:satMod val="105000"/>
-                <a:tint val="67000"/>
-              </a:schemeClr>
-            </a:gs>
-            <a:gs pos="50000">
-              <a:schemeClr val="accent2">
-                <a:hueOff val="0"/>
-                <a:satOff val="0"/>
-                <a:lumOff val="0"/>
-                <a:alphaOff val="0"/>
-                <a:lumMod val="105000"/>
-                <a:satMod val="103000"/>
-                <a:tint val="73000"/>
-              </a:schemeClr>
-            </a:gs>
-            <a:gs pos="100000">
-              <a:schemeClr val="accent2">
-                <a:hueOff val="0"/>
-                <a:satOff val="0"/>
-                <a:lumOff val="0"/>
-                <a:alphaOff val="0"/>
-                <a:lumMod val="105000"/>
-                <a:satMod val="109000"/>
-                <a:tint val="81000"/>
-              </a:schemeClr>
-            </a:gs>
-          </a:gsLst>
-          <a:lin ang="5400000" scaled="0"/>
-        </a:gradFill>
-        <a:ln w="6350" cap="flat" cmpd="sng" algn="ctr">
-          <a:solidFill>
-            <a:schemeClr val="accent2">
-              <a:hueOff val="0"/>
-              <a:satOff val="0"/>
-              <a:lumOff val="0"/>
-              <a:alphaOff val="0"/>
-            </a:schemeClr>
-          </a:solidFill>
-          <a:prstDash val="solid"/>
-          <a:miter lim="800000"/>
-        </a:ln>
-        <a:effectLst/>
-      </dsp:spPr>
-      <dsp:style>
-        <a:lnRef idx="1">
-          <a:scrgbClr r="0" g="0" b="0"/>
-        </a:lnRef>
-        <a:fillRef idx="2">
-          <a:scrgbClr r="0" g="0" b="0"/>
-        </a:fillRef>
-        <a:effectRef idx="1">
-          <a:scrgbClr r="0" g="0" b="0"/>
-        </a:effectRef>
-        <a:fontRef idx="minor">
-          <a:schemeClr val="dk1"/>
-        </a:fontRef>
-      </dsp:style>
     </dsp:sp>
   </dsp:spTree>
 </dsp:drawing>
@@ -4069,37 +2658,40 @@
         <dgm:pt modelId="31">
           <dgm:prSet phldr="1"/>
         </dgm:pt>
-        <dgm:pt modelId="101" type="sibTrans" cxnId="4">
+        <dgm:pt modelId="101" cxnId="4" type="sibTrans">
           <dgm:prSet phldrT="1"/>
           <dgm:t>
             <a:bodyPr/>
             <a:lstStyle/>
             <a:p>
               <a:r>
+                <a:rPr/>
                 <a:t>1</a:t>
               </a:r>
             </a:p>
           </dgm:t>
         </dgm:pt>
-        <dgm:pt modelId="201" type="sibTrans" cxnId="5">
+        <dgm:pt modelId="201" cxnId="5" type="sibTrans">
           <dgm:prSet phldrT="2"/>
           <dgm:t>
             <a:bodyPr/>
             <a:lstStyle/>
             <a:p>
               <a:r>
+                <a:rPr/>
                 <a:t>2</a:t>
               </a:r>
             </a:p>
           </dgm:t>
         </dgm:pt>
-        <dgm:pt modelId="301" type="sibTrans" cxnId="6">
+        <dgm:pt modelId="301" cxnId="6" type="sibTrans">
           <dgm:prSet phldrT="3"/>
           <dgm:t>
             <a:bodyPr/>
             <a:lstStyle/>
             <a:p>
               <a:r>
+                <a:rPr/>
                 <a:t>3</a:t>
               </a:r>
             </a:p>
@@ -4236,8 +2828,8 @@
             </dgm:varLst>
             <dgm:presOf axis="self" ptType="sibTrans"/>
             <dgm:alg type="tx">
+              <dgm:param type="txAnchorHorzCh" val="ctr"/>
               <dgm:param type="txAnchorVert" val="mid"/>
-              <dgm:param type="txAnchorHorzCh" val="ctr"/>
             </dgm:alg>
             <dgm:shape xmlns:r="http://schemas.openxmlformats.org/officeDocument/2006/relationships" type="ellipse" r:blip="">
               <dgm:adjLst/>
@@ -4303,17 +2895,6 @@
       </dgm:forEach>
     </dgm:forEach>
   </dgm:layoutNode>
-  <dgm:extLst>
-    <a:ext uri="{4F341089-5ED1-44EC-B178-C955D00A3D55}">
-      <dgm1611:autoBuNodeInfoLst xmlns:dgm1611="http://schemas.microsoft.com/office/drawing/2016/11/diagram">
-        <dgm1611:autoBuNodeInfo lvl="1" ptType="sibTrans">
-          <dgm1611:buPr prefix="" leadZeros="0">
-            <a:buAutoNum type="arabicParenBoth"/>
-          </dgm1611:buPr>
-        </dgm1611:autoBuNodeInfo>
-      </dgm1611:autoBuNodeInfoLst>
-    </a:ext>
-  </dgm:extLst>
 </dgm:layoutDef>
 </file>
 
@@ -4328,76 +2909,61 @@
     <a:camera prst="orthographicFront"/>
     <a:lightRig rig="threePt" dir="t"/>
   </dgm:scene3d>
-  <dgm:styleLbl name="node0">
+  <dgm:styleLbl name="alignAcc1">
     <dgm:scene3d>
       <a:camera prst="orthographicFront"/>
-      <a:lightRig rig="flat" dir="t"/>
+      <a:lightRig rig="threePt" dir="t"/>
     </dgm:scene3d>
-    <dgm:sp3d prstMaterial="dkEdge">
-      <a:bevelT w="8200" h="38100"/>
-    </dgm:sp3d>
     <dgm:txPr/>
     <dgm:style>
-      <a:lnRef idx="0">
+      <a:lnRef idx="1">
         <a:scrgbClr r="0" g="0" b="0"/>
       </a:lnRef>
-      <a:fillRef idx="2">
+      <a:fillRef idx="1">
+        <a:scrgbClr r="0" g="0" b="0"/>
+      </a:fillRef>
+      <a:effectRef idx="0">
+        <a:scrgbClr r="0" g="0" b="0"/>
+      </a:effectRef>
+      <a:fontRef idx="minor"/>
+    </dgm:style>
+  </dgm:styleLbl>
+  <dgm:styleLbl name="alignAccFollowNode1">
+    <dgm:scene3d>
+      <a:camera prst="orthographicFront"/>
+      <a:lightRig rig="threePt" dir="t"/>
+    </dgm:scene3d>
+    <dgm:txPr/>
+    <dgm:style>
+      <a:lnRef idx="1">
+        <a:scrgbClr r="0" g="0" b="0"/>
+      </a:lnRef>
+      <a:fillRef idx="1">
+        <a:scrgbClr r="0" g="0" b="0"/>
+      </a:fillRef>
+      <a:effectRef idx="0">
+        <a:scrgbClr r="0" g="0" b="0"/>
+      </a:effectRef>
+      <a:fontRef idx="minor"/>
+    </dgm:style>
+  </dgm:styleLbl>
+  <dgm:styleLbl name="alignImgPlace1">
+    <dgm:scene3d>
+      <a:camera prst="orthographicFront"/>
+      <a:lightRig rig="threePt" dir="t"/>
+    </dgm:scene3d>
+    <dgm:txPr/>
+    <dgm:style>
+      <a:lnRef idx="1">
+        <a:scrgbClr r="0" g="0" b="0"/>
+      </a:lnRef>
+      <a:fillRef idx="1">
         <a:scrgbClr r="0" g="0" b="0"/>
       </a:fillRef>
       <a:effectRef idx="1">
         <a:scrgbClr r="0" g="0" b="0"/>
       </a:effectRef>
-      <a:fontRef idx="minor">
-        <a:schemeClr val="dk1"/>
-      </a:fontRef>
-    </dgm:style>
-  </dgm:styleLbl>
-  <dgm:styleLbl name="lnNode1">
-    <dgm:scene3d>
-      <a:camera prst="orthographicFront"/>
-      <a:lightRig rig="flat" dir="t"/>
-    </dgm:scene3d>
-    <dgm:sp3d prstMaterial="dkEdge">
-      <a:bevelT w="8200" h="38100"/>
-    </dgm:sp3d>
-    <dgm:txPr/>
-    <dgm:style>
-      <a:lnRef idx="1">
-        <a:scrgbClr r="0" g="0" b="0"/>
-      </a:lnRef>
-      <a:fillRef idx="2">
-        <a:scrgbClr r="0" g="0" b="0"/>
-      </a:fillRef>
-      <a:effectRef idx="0">
-        <a:scrgbClr r="0" g="0" b="0"/>
-      </a:effectRef>
-      <a:fontRef idx="minor">
-        <a:schemeClr val="dk1"/>
-      </a:fontRef>
-    </dgm:style>
-  </dgm:styleLbl>
-  <dgm:styleLbl name="vennNode1">
-    <dgm:scene3d>
-      <a:camera prst="orthographicFront"/>
-      <a:lightRig rig="flat" dir="t"/>
-    </dgm:scene3d>
-    <dgm:sp3d prstMaterial="dkEdge">
-      <a:bevelT w="8200" h="38100"/>
-    </dgm:sp3d>
-    <dgm:txPr/>
-    <dgm:style>
-      <a:lnRef idx="0">
-        <a:scrgbClr r="0" g="0" b="0"/>
-      </a:lnRef>
-      <a:fillRef idx="2">
-        <a:scrgbClr r="0" g="0" b="0"/>
-      </a:fillRef>
-      <a:effectRef idx="0">
-        <a:scrgbClr r="0" g="0" b="0"/>
-      </a:effectRef>
-      <a:fontRef idx="minor">
-        <a:schemeClr val="tx1"/>
-      </a:fontRef>
+      <a:fontRef idx="minor"/>
     </dgm:style>
   </dgm:styleLbl>
   <dgm:styleLbl name="alignNode1">
@@ -4405,7 +2971,6 @@
       <a:camera prst="orthographicFront"/>
       <a:lightRig rig="threePt" dir="t"/>
     </dgm:scene3d>
-    <dgm:sp3d/>
     <dgm:txPr/>
     <dgm:style>
       <a:lnRef idx="1">
@@ -4420,268 +2985,6 @@
       <a:fontRef idx="minor">
         <a:schemeClr val="dk1"/>
       </a:fontRef>
-    </dgm:style>
-  </dgm:styleLbl>
-  <dgm:styleLbl name="node1">
-    <dgm:scene3d>
-      <a:camera prst="orthographicFront"/>
-      <a:lightRig rig="flat" dir="t"/>
-    </dgm:scene3d>
-    <dgm:sp3d prstMaterial="dkEdge">
-      <a:bevelT w="8200" h="38100"/>
-    </dgm:sp3d>
-    <dgm:txPr/>
-    <dgm:style>
-      <a:lnRef idx="0">
-        <a:scrgbClr r="0" g="0" b="0"/>
-      </a:lnRef>
-      <a:fillRef idx="2">
-        <a:scrgbClr r="0" g="0" b="0"/>
-      </a:fillRef>
-      <a:effectRef idx="1">
-        <a:scrgbClr r="0" g="0" b="0"/>
-      </a:effectRef>
-      <a:fontRef idx="minor">
-        <a:schemeClr val="dk1"/>
-      </a:fontRef>
-    </dgm:style>
-  </dgm:styleLbl>
-  <dgm:styleLbl name="node2">
-    <dgm:scene3d>
-      <a:camera prst="orthographicFront"/>
-      <a:lightRig rig="flat" dir="t"/>
-    </dgm:scene3d>
-    <dgm:sp3d prstMaterial="dkEdge">
-      <a:bevelT w="8200" h="38100"/>
-    </dgm:sp3d>
-    <dgm:txPr/>
-    <dgm:style>
-      <a:lnRef idx="0">
-        <a:scrgbClr r="0" g="0" b="0"/>
-      </a:lnRef>
-      <a:fillRef idx="2">
-        <a:scrgbClr r="0" g="0" b="0"/>
-      </a:fillRef>
-      <a:effectRef idx="1">
-        <a:scrgbClr r="0" g="0" b="0"/>
-      </a:effectRef>
-      <a:fontRef idx="minor">
-        <a:schemeClr val="dk1"/>
-      </a:fontRef>
-    </dgm:style>
-  </dgm:styleLbl>
-  <dgm:styleLbl name="node3">
-    <dgm:scene3d>
-      <a:camera prst="orthographicFront"/>
-      <a:lightRig rig="flat" dir="t"/>
-    </dgm:scene3d>
-    <dgm:sp3d prstMaterial="dkEdge">
-      <a:bevelT w="8200" h="38100"/>
-    </dgm:sp3d>
-    <dgm:txPr/>
-    <dgm:style>
-      <a:lnRef idx="0">
-        <a:scrgbClr r="0" g="0" b="0"/>
-      </a:lnRef>
-      <a:fillRef idx="2">
-        <a:scrgbClr r="0" g="0" b="0"/>
-      </a:fillRef>
-      <a:effectRef idx="1">
-        <a:scrgbClr r="0" g="0" b="0"/>
-      </a:effectRef>
-      <a:fontRef idx="minor">
-        <a:schemeClr val="dk1"/>
-      </a:fontRef>
-    </dgm:style>
-  </dgm:styleLbl>
-  <dgm:styleLbl name="node4">
-    <dgm:scene3d>
-      <a:camera prst="orthographicFront"/>
-      <a:lightRig rig="flat" dir="t"/>
-    </dgm:scene3d>
-    <dgm:sp3d prstMaterial="dkEdge">
-      <a:bevelT w="8200" h="38100"/>
-    </dgm:sp3d>
-    <dgm:txPr/>
-    <dgm:style>
-      <a:lnRef idx="0">
-        <a:scrgbClr r="0" g="0" b="0"/>
-      </a:lnRef>
-      <a:fillRef idx="2">
-        <a:scrgbClr r="0" g="0" b="0"/>
-      </a:fillRef>
-      <a:effectRef idx="1">
-        <a:scrgbClr r="0" g="0" b="0"/>
-      </a:effectRef>
-      <a:fontRef idx="minor">
-        <a:schemeClr val="dk1"/>
-      </a:fontRef>
-    </dgm:style>
-  </dgm:styleLbl>
-  <dgm:styleLbl name="fgImgPlace1">
-    <dgm:scene3d>
-      <a:camera prst="orthographicFront"/>
-      <a:lightRig rig="threePt" dir="t"/>
-    </dgm:scene3d>
-    <dgm:sp3d/>
-    <dgm:txPr/>
-    <dgm:style>
-      <a:lnRef idx="1">
-        <a:scrgbClr r="0" g="0" b="0"/>
-      </a:lnRef>
-      <a:fillRef idx="1">
-        <a:scrgbClr r="0" g="0" b="0"/>
-      </a:fillRef>
-      <a:effectRef idx="1">
-        <a:scrgbClr r="0" g="0" b="0"/>
-      </a:effectRef>
-      <a:fontRef idx="minor"/>
-    </dgm:style>
-  </dgm:styleLbl>
-  <dgm:styleLbl name="alignImgPlace1">
-    <dgm:scene3d>
-      <a:camera prst="orthographicFront"/>
-      <a:lightRig rig="threePt" dir="t"/>
-    </dgm:scene3d>
-    <dgm:sp3d/>
-    <dgm:txPr/>
-    <dgm:style>
-      <a:lnRef idx="1">
-        <a:scrgbClr r="0" g="0" b="0"/>
-      </a:lnRef>
-      <a:fillRef idx="1">
-        <a:scrgbClr r="0" g="0" b="0"/>
-      </a:fillRef>
-      <a:effectRef idx="1">
-        <a:scrgbClr r="0" g="0" b="0"/>
-      </a:effectRef>
-      <a:fontRef idx="minor"/>
-    </dgm:style>
-  </dgm:styleLbl>
-  <dgm:styleLbl name="bgImgPlace1">
-    <dgm:scene3d>
-      <a:camera prst="orthographicFront"/>
-      <a:lightRig rig="threePt" dir="t"/>
-    </dgm:scene3d>
-    <dgm:sp3d/>
-    <dgm:txPr/>
-    <dgm:style>
-      <a:lnRef idx="1">
-        <a:scrgbClr r="0" g="0" b="0"/>
-      </a:lnRef>
-      <a:fillRef idx="1">
-        <a:scrgbClr r="0" g="0" b="0"/>
-      </a:fillRef>
-      <a:effectRef idx="1">
-        <a:scrgbClr r="0" g="0" b="0"/>
-      </a:effectRef>
-      <a:fontRef idx="minor"/>
-    </dgm:style>
-  </dgm:styleLbl>
-  <dgm:styleLbl name="sibTrans2D1">
-    <dgm:scene3d>
-      <a:camera prst="orthographicFront"/>
-      <a:lightRig rig="threePt" dir="t"/>
-    </dgm:scene3d>
-    <dgm:sp3d/>
-    <dgm:txPr/>
-    <dgm:style>
-      <a:lnRef idx="0">
-        <a:scrgbClr r="0" g="0" b="0"/>
-      </a:lnRef>
-      <a:fillRef idx="2">
-        <a:scrgbClr r="0" g="0" b="0"/>
-      </a:fillRef>
-      <a:effectRef idx="1">
-        <a:scrgbClr r="0" g="0" b="0"/>
-      </a:effectRef>
-      <a:fontRef idx="minor">
-        <a:schemeClr val="dk1"/>
-      </a:fontRef>
-    </dgm:style>
-  </dgm:styleLbl>
-  <dgm:styleLbl name="fgSibTrans2D1">
-    <dgm:scene3d>
-      <a:camera prst="orthographicFront"/>
-      <a:lightRig rig="threePt" dir="t"/>
-    </dgm:scene3d>
-    <dgm:sp3d/>
-    <dgm:txPr/>
-    <dgm:style>
-      <a:lnRef idx="0">
-        <a:scrgbClr r="0" g="0" b="0"/>
-      </a:lnRef>
-      <a:fillRef idx="2">
-        <a:scrgbClr r="0" g="0" b="0"/>
-      </a:fillRef>
-      <a:effectRef idx="1">
-        <a:scrgbClr r="0" g="0" b="0"/>
-      </a:effectRef>
-      <a:fontRef idx="minor">
-        <a:schemeClr val="dk1"/>
-      </a:fontRef>
-    </dgm:style>
-  </dgm:styleLbl>
-  <dgm:styleLbl name="bgSibTrans2D1">
-    <dgm:scene3d>
-      <a:camera prst="orthographicFront"/>
-      <a:lightRig rig="threePt" dir="t"/>
-    </dgm:scene3d>
-    <dgm:sp3d/>
-    <dgm:txPr/>
-    <dgm:style>
-      <a:lnRef idx="0">
-        <a:scrgbClr r="0" g="0" b="0"/>
-      </a:lnRef>
-      <a:fillRef idx="2">
-        <a:scrgbClr r="0" g="0" b="0"/>
-      </a:fillRef>
-      <a:effectRef idx="1">
-        <a:scrgbClr r="0" g="0" b="0"/>
-      </a:effectRef>
-      <a:fontRef idx="minor">
-        <a:schemeClr val="dk1"/>
-      </a:fontRef>
-    </dgm:style>
-  </dgm:styleLbl>
-  <dgm:styleLbl name="sibTrans1D1">
-    <dgm:scene3d>
-      <a:camera prst="orthographicFront"/>
-      <a:lightRig rig="threePt" dir="t"/>
-    </dgm:scene3d>
-    <dgm:sp3d/>
-    <dgm:txPr/>
-    <dgm:style>
-      <a:lnRef idx="1">
-        <a:scrgbClr r="0" g="0" b="0"/>
-      </a:lnRef>
-      <a:fillRef idx="0">
-        <a:scrgbClr r="0" g="0" b="0"/>
-      </a:fillRef>
-      <a:effectRef idx="0">
-        <a:scrgbClr r="0" g="0" b="0"/>
-      </a:effectRef>
-      <a:fontRef idx="minor"/>
-    </dgm:style>
-  </dgm:styleLbl>
-  <dgm:styleLbl name="callout">
-    <dgm:scene3d>
-      <a:camera prst="orthographicFront"/>
-      <a:lightRig rig="threePt" dir="t"/>
-    </dgm:scene3d>
-    <dgm:sp3d/>
-    <dgm:txPr/>
-    <dgm:style>
-      <a:lnRef idx="1">
-        <a:scrgbClr r="0" g="0" b="0"/>
-      </a:lnRef>
-      <a:fillRef idx="2">
-        <a:scrgbClr r="0" g="0" b="0"/>
-      </a:fillRef>
-      <a:effectRef idx="1">
-        <a:scrgbClr r="0" g="0" b="0"/>
-      </a:effectRef>
-      <a:fontRef idx="minor"/>
     </dgm:style>
   </dgm:styleLbl>
   <dgm:styleLbl name="asst0">
@@ -4804,180 +3107,11 @@
       </a:fontRef>
     </dgm:style>
   </dgm:styleLbl>
-  <dgm:styleLbl name="parChTrans2D1">
+  <dgm:styleLbl name="bgAcc1">
     <dgm:scene3d>
       <a:camera prst="orthographicFront"/>
       <a:lightRig rig="threePt" dir="t"/>
     </dgm:scene3d>
-    <dgm:sp3d/>
-    <dgm:txPr/>
-    <dgm:style>
-      <a:lnRef idx="1">
-        <a:scrgbClr r="0" g="0" b="0"/>
-      </a:lnRef>
-      <a:fillRef idx="2">
-        <a:scrgbClr r="0" g="0" b="0"/>
-      </a:fillRef>
-      <a:effectRef idx="1">
-        <a:scrgbClr r="0" g="0" b="0"/>
-      </a:effectRef>
-      <a:fontRef idx="minor">
-        <a:schemeClr val="dk1"/>
-      </a:fontRef>
-    </dgm:style>
-  </dgm:styleLbl>
-  <dgm:styleLbl name="parChTrans2D2">
-    <dgm:scene3d>
-      <a:camera prst="orthographicFront"/>
-      <a:lightRig rig="threePt" dir="t"/>
-    </dgm:scene3d>
-    <dgm:sp3d/>
-    <dgm:txPr/>
-    <dgm:style>
-      <a:lnRef idx="1">
-        <a:scrgbClr r="0" g="0" b="0"/>
-      </a:lnRef>
-      <a:fillRef idx="2">
-        <a:scrgbClr r="0" g="0" b="0"/>
-      </a:fillRef>
-      <a:effectRef idx="1">
-        <a:scrgbClr r="0" g="0" b="0"/>
-      </a:effectRef>
-      <a:fontRef idx="minor">
-        <a:schemeClr val="dk1"/>
-      </a:fontRef>
-    </dgm:style>
-  </dgm:styleLbl>
-  <dgm:styleLbl name="parChTrans2D3">
-    <dgm:scene3d>
-      <a:camera prst="orthographicFront"/>
-      <a:lightRig rig="threePt" dir="t"/>
-    </dgm:scene3d>
-    <dgm:sp3d/>
-    <dgm:txPr/>
-    <dgm:style>
-      <a:lnRef idx="1">
-        <a:scrgbClr r="0" g="0" b="0"/>
-      </a:lnRef>
-      <a:fillRef idx="2">
-        <a:scrgbClr r="0" g="0" b="0"/>
-      </a:fillRef>
-      <a:effectRef idx="1">
-        <a:scrgbClr r="0" g="0" b="0"/>
-      </a:effectRef>
-      <a:fontRef idx="minor">
-        <a:schemeClr val="dk1"/>
-      </a:fontRef>
-    </dgm:style>
-  </dgm:styleLbl>
-  <dgm:styleLbl name="parChTrans2D4">
-    <dgm:scene3d>
-      <a:camera prst="orthographicFront"/>
-      <a:lightRig rig="threePt" dir="t"/>
-    </dgm:scene3d>
-    <dgm:sp3d/>
-    <dgm:txPr/>
-    <dgm:style>
-      <a:lnRef idx="1">
-        <a:scrgbClr r="0" g="0" b="0"/>
-      </a:lnRef>
-      <a:fillRef idx="2">
-        <a:scrgbClr r="0" g="0" b="0"/>
-      </a:fillRef>
-      <a:effectRef idx="1">
-        <a:scrgbClr r="0" g="0" b="0"/>
-      </a:effectRef>
-      <a:fontRef idx="minor">
-        <a:schemeClr val="dk1"/>
-      </a:fontRef>
-    </dgm:style>
-  </dgm:styleLbl>
-  <dgm:styleLbl name="parChTrans1D1">
-    <dgm:scene3d>
-      <a:camera prst="orthographicFront"/>
-      <a:lightRig rig="threePt" dir="t"/>
-    </dgm:scene3d>
-    <dgm:sp3d/>
-    <dgm:txPr/>
-    <dgm:style>
-      <a:lnRef idx="2">
-        <a:scrgbClr r="0" g="0" b="0"/>
-      </a:lnRef>
-      <a:fillRef idx="0">
-        <a:scrgbClr r="0" g="0" b="0"/>
-      </a:fillRef>
-      <a:effectRef idx="0">
-        <a:scrgbClr r="0" g="0" b="0"/>
-      </a:effectRef>
-      <a:fontRef idx="minor"/>
-    </dgm:style>
-  </dgm:styleLbl>
-  <dgm:styleLbl name="parChTrans1D2">
-    <dgm:scene3d>
-      <a:camera prst="orthographicFront"/>
-      <a:lightRig rig="threePt" dir="t"/>
-    </dgm:scene3d>
-    <dgm:sp3d/>
-    <dgm:txPr/>
-    <dgm:style>
-      <a:lnRef idx="2">
-        <a:scrgbClr r="0" g="0" b="0"/>
-      </a:lnRef>
-      <a:fillRef idx="0">
-        <a:scrgbClr r="0" g="0" b="0"/>
-      </a:fillRef>
-      <a:effectRef idx="0">
-        <a:scrgbClr r="0" g="0" b="0"/>
-      </a:effectRef>
-      <a:fontRef idx="minor"/>
-    </dgm:style>
-  </dgm:styleLbl>
-  <dgm:styleLbl name="parChTrans1D3">
-    <dgm:scene3d>
-      <a:camera prst="orthographicFront"/>
-      <a:lightRig rig="threePt" dir="t"/>
-    </dgm:scene3d>
-    <dgm:sp3d/>
-    <dgm:txPr/>
-    <dgm:style>
-      <a:lnRef idx="2">
-        <a:scrgbClr r="0" g="0" b="0"/>
-      </a:lnRef>
-      <a:fillRef idx="0">
-        <a:scrgbClr r="0" g="0" b="0"/>
-      </a:fillRef>
-      <a:effectRef idx="0">
-        <a:scrgbClr r="0" g="0" b="0"/>
-      </a:effectRef>
-      <a:fontRef idx="minor"/>
-    </dgm:style>
-  </dgm:styleLbl>
-  <dgm:styleLbl name="parChTrans1D4">
-    <dgm:scene3d>
-      <a:camera prst="orthographicFront"/>
-      <a:lightRig rig="threePt" dir="t"/>
-    </dgm:scene3d>
-    <dgm:sp3d/>
-    <dgm:txPr/>
-    <dgm:style>
-      <a:lnRef idx="2">
-        <a:scrgbClr r="0" g="0" b="0"/>
-      </a:lnRef>
-      <a:fillRef idx="0">
-        <a:scrgbClr r="0" g="0" b="0"/>
-      </a:fillRef>
-      <a:effectRef idx="0">
-        <a:scrgbClr r="0" g="0" b="0"/>
-      </a:effectRef>
-      <a:fontRef idx="minor"/>
-    </dgm:style>
-  </dgm:styleLbl>
-  <dgm:styleLbl name="fgAcc1">
-    <dgm:scene3d>
-      <a:camera prst="orthographicFront"/>
-      <a:lightRig rig="threePt" dir="t"/>
-    </dgm:scene3d>
-    <dgm:sp3d/>
     <dgm:txPr/>
     <dgm:style>
       <a:lnRef idx="1">
@@ -4992,12 +3126,11 @@
       <a:fontRef idx="minor"/>
     </dgm:style>
   </dgm:styleLbl>
-  <dgm:styleLbl name="conFgAcc1">
+  <dgm:styleLbl name="bgAccFollowNode1">
     <dgm:scene3d>
       <a:camera prst="orthographicFront"/>
       <a:lightRig rig="threePt" dir="t"/>
     </dgm:scene3d>
-    <dgm:sp3d/>
     <dgm:txPr/>
     <dgm:style>
       <a:lnRef idx="1">
@@ -5012,12 +3145,89 @@
       <a:fontRef idx="minor"/>
     </dgm:style>
   </dgm:styleLbl>
-  <dgm:styleLbl name="alignAcc1">
+  <dgm:styleLbl name="bgImgPlace1">
     <dgm:scene3d>
       <a:camera prst="orthographicFront"/>
       <a:lightRig rig="threePt" dir="t"/>
     </dgm:scene3d>
-    <dgm:sp3d/>
+    <dgm:txPr/>
+    <dgm:style>
+      <a:lnRef idx="1">
+        <a:scrgbClr r="0" g="0" b="0"/>
+      </a:lnRef>
+      <a:fillRef idx="1">
+        <a:scrgbClr r="0" g="0" b="0"/>
+      </a:fillRef>
+      <a:effectRef idx="1">
+        <a:scrgbClr r="0" g="0" b="0"/>
+      </a:effectRef>
+      <a:fontRef idx="minor"/>
+    </dgm:style>
+  </dgm:styleLbl>
+  <dgm:styleLbl name="bgShp">
+    <dgm:scene3d>
+      <a:camera prst="orthographicFront"/>
+      <a:lightRig rig="threePt" dir="t"/>
+    </dgm:scene3d>
+    <dgm:txPr/>
+    <dgm:style>
+      <a:lnRef idx="0">
+        <a:scrgbClr r="0" g="0" b="0"/>
+      </a:lnRef>
+      <a:fillRef idx="1">
+        <a:scrgbClr r="0" g="0" b="0"/>
+      </a:fillRef>
+      <a:effectRef idx="1">
+        <a:scrgbClr r="0" g="0" b="0"/>
+      </a:effectRef>
+      <a:fontRef idx="minor"/>
+    </dgm:style>
+  </dgm:styleLbl>
+  <dgm:styleLbl name="bgSibTrans2D1">
+    <dgm:scene3d>
+      <a:camera prst="orthographicFront"/>
+      <a:lightRig rig="threePt" dir="t"/>
+    </dgm:scene3d>
+    <dgm:txPr/>
+    <dgm:style>
+      <a:lnRef idx="0">
+        <a:scrgbClr r="0" g="0" b="0"/>
+      </a:lnRef>
+      <a:fillRef idx="2">
+        <a:scrgbClr r="0" g="0" b="0"/>
+      </a:fillRef>
+      <a:effectRef idx="1">
+        <a:scrgbClr r="0" g="0" b="0"/>
+      </a:effectRef>
+      <a:fontRef idx="minor">
+        <a:schemeClr val="dk1"/>
+      </a:fontRef>
+    </dgm:style>
+  </dgm:styleLbl>
+  <dgm:styleLbl name="callout">
+    <dgm:scene3d>
+      <a:camera prst="orthographicFront"/>
+      <a:lightRig rig="threePt" dir="t"/>
+    </dgm:scene3d>
+    <dgm:txPr/>
+    <dgm:style>
+      <a:lnRef idx="1">
+        <a:scrgbClr r="0" g="0" b="0"/>
+      </a:lnRef>
+      <a:fillRef idx="2">
+        <a:scrgbClr r="0" g="0" b="0"/>
+      </a:fillRef>
+      <a:effectRef idx="1">
+        <a:scrgbClr r="0" g="0" b="0"/>
+      </a:effectRef>
+      <a:fontRef idx="minor"/>
+    </dgm:style>
+  </dgm:styleLbl>
+  <dgm:styleLbl name="conFgAcc1">
+    <dgm:scene3d>
+      <a:camera prst="orthographicFront"/>
+      <a:lightRig rig="threePt" dir="t"/>
+    </dgm:scene3d>
     <dgm:txPr/>
     <dgm:style>
       <a:lnRef idx="1">
@@ -5032,12 +3242,30 @@
       <a:fontRef idx="minor"/>
     </dgm:style>
   </dgm:styleLbl>
-  <dgm:styleLbl name="trAlignAcc1">
+  <dgm:styleLbl name="dkBgShp">
     <dgm:scene3d>
       <a:camera prst="orthographicFront"/>
       <a:lightRig rig="threePt" dir="t"/>
     </dgm:scene3d>
-    <dgm:sp3d/>
+    <dgm:txPr/>
+    <dgm:style>
+      <a:lnRef idx="0">
+        <a:scrgbClr r="0" g="0" b="0"/>
+      </a:lnRef>
+      <a:fillRef idx="1">
+        <a:scrgbClr r="0" g="0" b="0"/>
+      </a:fillRef>
+      <a:effectRef idx="1">
+        <a:scrgbClr r="0" g="0" b="0"/>
+      </a:effectRef>
+      <a:fontRef idx="minor"/>
+    </dgm:style>
+  </dgm:styleLbl>
+  <dgm:styleLbl name="fgAcc0">
+    <dgm:scene3d>
+      <a:camera prst="orthographicFront"/>
+      <a:lightRig rig="threePt" dir="t"/>
+    </dgm:scene3d>
     <dgm:txPr/>
     <dgm:style>
       <a:lnRef idx="1">
@@ -5052,12 +3280,11 @@
       <a:fontRef idx="minor"/>
     </dgm:style>
   </dgm:styleLbl>
-  <dgm:styleLbl name="bgAcc1">
+  <dgm:styleLbl name="fgAcc1">
     <dgm:scene3d>
       <a:camera prst="orthographicFront"/>
       <a:lightRig rig="threePt" dir="t"/>
     </dgm:scene3d>
-    <dgm:sp3d/>
     <dgm:txPr/>
     <dgm:style>
       <a:lnRef idx="1">
@@ -5072,32 +3299,11 @@
       <a:fontRef idx="minor"/>
     </dgm:style>
   </dgm:styleLbl>
-  <dgm:styleLbl name="solidFgAcc1">
+  <dgm:styleLbl name="fgAcc2">
     <dgm:scene3d>
       <a:camera prst="orthographicFront"/>
       <a:lightRig rig="threePt" dir="t"/>
     </dgm:scene3d>
-    <dgm:sp3d/>
-    <dgm:txPr/>
-    <dgm:style>
-      <a:lnRef idx="1">
-        <a:scrgbClr r="0" g="0" b="0"/>
-      </a:lnRef>
-      <a:fillRef idx="2">
-        <a:scrgbClr r="0" g="0" b="0"/>
-      </a:fillRef>
-      <a:effectRef idx="0">
-        <a:scrgbClr r="0" g="0" b="0"/>
-      </a:effectRef>
-      <a:fontRef idx="minor"/>
-    </dgm:style>
-  </dgm:styleLbl>
-  <dgm:styleLbl name="solidAlignAcc1">
-    <dgm:scene3d>
-      <a:camera prst="orthographicFront"/>
-      <a:lightRig rig="threePt" dir="t"/>
-    </dgm:scene3d>
-    <dgm:sp3d/>
     <dgm:txPr/>
     <dgm:style>
       <a:lnRef idx="1">
@@ -5112,12 +3318,30 @@
       <a:fontRef idx="minor"/>
     </dgm:style>
   </dgm:styleLbl>
-  <dgm:styleLbl name="solidBgAcc1">
+  <dgm:styleLbl name="fgAcc3">
     <dgm:scene3d>
       <a:camera prst="orthographicFront"/>
       <a:lightRig rig="threePt" dir="t"/>
     </dgm:scene3d>
-    <dgm:sp3d/>
+    <dgm:txPr/>
+    <dgm:style>
+      <a:lnRef idx="1">
+        <a:scrgbClr r="0" g="0" b="0"/>
+      </a:lnRef>
+      <a:fillRef idx="1">
+        <a:scrgbClr r="0" g="0" b="0"/>
+      </a:fillRef>
+      <a:effectRef idx="0">
+        <a:scrgbClr r="0" g="0" b="0"/>
+      </a:effectRef>
+      <a:fontRef idx="minor"/>
+    </dgm:style>
+  </dgm:styleLbl>
+  <dgm:styleLbl name="fgAcc4">
+    <dgm:scene3d>
+      <a:camera prst="orthographicFront"/>
+      <a:lightRig rig="threePt" dir="t"/>
+    </dgm:scene3d>
     <dgm:txPr/>
     <dgm:style>
       <a:lnRef idx="1">
@@ -5137,7 +3361,6 @@
       <a:camera prst="orthographicFront"/>
       <a:lightRig rig="threePt" dir="t"/>
     </dgm:scene3d>
-    <dgm:sp3d/>
     <dgm:txPr/>
     <dgm:style>
       <a:lnRef idx="1">
@@ -5152,12 +3375,11 @@
       <a:fontRef idx="minor"/>
     </dgm:style>
   </dgm:styleLbl>
-  <dgm:styleLbl name="alignAccFollowNode1">
+  <dgm:styleLbl name="fgImgPlace1">
     <dgm:scene3d>
       <a:camera prst="orthographicFront"/>
       <a:lightRig rig="threePt" dir="t"/>
     </dgm:scene3d>
-    <dgm:sp3d/>
     <dgm:txPr/>
     <dgm:style>
       <a:lnRef idx="1">
@@ -5166,167 +3388,7 @@
       <a:fillRef idx="1">
         <a:scrgbClr r="0" g="0" b="0"/>
       </a:fillRef>
-      <a:effectRef idx="0">
-        <a:scrgbClr r="0" g="0" b="0"/>
-      </a:effectRef>
-      <a:fontRef idx="minor"/>
-    </dgm:style>
-  </dgm:styleLbl>
-  <dgm:styleLbl name="bgAccFollowNode1">
-    <dgm:scene3d>
-      <a:camera prst="orthographicFront"/>
-      <a:lightRig rig="threePt" dir="t"/>
-    </dgm:scene3d>
-    <dgm:sp3d/>
-    <dgm:txPr/>
-    <dgm:style>
-      <a:lnRef idx="1">
-        <a:scrgbClr r="0" g="0" b="0"/>
-      </a:lnRef>
-      <a:fillRef idx="1">
-        <a:scrgbClr r="0" g="0" b="0"/>
-      </a:fillRef>
-      <a:effectRef idx="0">
-        <a:scrgbClr r="0" g="0" b="0"/>
-      </a:effectRef>
-      <a:fontRef idx="minor"/>
-    </dgm:style>
-  </dgm:styleLbl>
-  <dgm:styleLbl name="fgAcc0">
-    <dgm:scene3d>
-      <a:camera prst="orthographicFront"/>
-      <a:lightRig rig="threePt" dir="t"/>
-    </dgm:scene3d>
-    <dgm:sp3d/>
-    <dgm:txPr/>
-    <dgm:style>
-      <a:lnRef idx="1">
-        <a:scrgbClr r="0" g="0" b="0"/>
-      </a:lnRef>
-      <a:fillRef idx="1">
-        <a:scrgbClr r="0" g="0" b="0"/>
-      </a:fillRef>
-      <a:effectRef idx="0">
-        <a:scrgbClr r="0" g="0" b="0"/>
-      </a:effectRef>
-      <a:fontRef idx="minor"/>
-    </dgm:style>
-  </dgm:styleLbl>
-  <dgm:styleLbl name="fgAcc2">
-    <dgm:scene3d>
-      <a:camera prst="orthographicFront"/>
-      <a:lightRig rig="threePt" dir="t"/>
-    </dgm:scene3d>
-    <dgm:sp3d/>
-    <dgm:txPr/>
-    <dgm:style>
-      <a:lnRef idx="1">
-        <a:scrgbClr r="0" g="0" b="0"/>
-      </a:lnRef>
-      <a:fillRef idx="1">
-        <a:scrgbClr r="0" g="0" b="0"/>
-      </a:fillRef>
-      <a:effectRef idx="0">
-        <a:scrgbClr r="0" g="0" b="0"/>
-      </a:effectRef>
-      <a:fontRef idx="minor"/>
-    </dgm:style>
-  </dgm:styleLbl>
-  <dgm:styleLbl name="fgAcc3">
-    <dgm:scene3d>
-      <a:camera prst="orthographicFront"/>
-      <a:lightRig rig="threePt" dir="t"/>
-    </dgm:scene3d>
-    <dgm:sp3d/>
-    <dgm:txPr/>
-    <dgm:style>
-      <a:lnRef idx="1">
-        <a:scrgbClr r="0" g="0" b="0"/>
-      </a:lnRef>
-      <a:fillRef idx="1">
-        <a:scrgbClr r="0" g="0" b="0"/>
-      </a:fillRef>
-      <a:effectRef idx="0">
-        <a:scrgbClr r="0" g="0" b="0"/>
-      </a:effectRef>
-      <a:fontRef idx="minor"/>
-    </dgm:style>
-  </dgm:styleLbl>
-  <dgm:styleLbl name="fgAcc4">
-    <dgm:scene3d>
-      <a:camera prst="orthographicFront"/>
-      <a:lightRig rig="threePt" dir="t"/>
-    </dgm:scene3d>
-    <dgm:sp3d/>
-    <dgm:txPr/>
-    <dgm:style>
-      <a:lnRef idx="1">
-        <a:scrgbClr r="0" g="0" b="0"/>
-      </a:lnRef>
-      <a:fillRef idx="1">
-        <a:scrgbClr r="0" g="0" b="0"/>
-      </a:fillRef>
-      <a:effectRef idx="0">
-        <a:scrgbClr r="0" g="0" b="0"/>
-      </a:effectRef>
-      <a:fontRef idx="minor"/>
-    </dgm:style>
-  </dgm:styleLbl>
-  <dgm:styleLbl name="bgShp">
-    <dgm:scene3d>
-      <a:camera prst="orthographicFront"/>
-      <a:lightRig rig="threePt" dir="t"/>
-    </dgm:scene3d>
-    <dgm:sp3d/>
-    <dgm:txPr/>
-    <dgm:style>
-      <a:lnRef idx="0">
-        <a:scrgbClr r="0" g="0" b="0"/>
-      </a:lnRef>
-      <a:fillRef idx="1">
-        <a:scrgbClr r="0" g="0" b="0"/>
-      </a:fillRef>
       <a:effectRef idx="1">
-        <a:scrgbClr r="0" g="0" b="0"/>
-      </a:effectRef>
-      <a:fontRef idx="minor"/>
-    </dgm:style>
-  </dgm:styleLbl>
-  <dgm:styleLbl name="dkBgShp">
-    <dgm:scene3d>
-      <a:camera prst="orthographicFront"/>
-      <a:lightRig rig="threePt" dir="t"/>
-    </dgm:scene3d>
-    <dgm:sp3d/>
-    <dgm:txPr/>
-    <dgm:style>
-      <a:lnRef idx="0">
-        <a:scrgbClr r="0" g="0" b="0"/>
-      </a:lnRef>
-      <a:fillRef idx="1">
-        <a:scrgbClr r="0" g="0" b="0"/>
-      </a:fillRef>
-      <a:effectRef idx="1">
-        <a:scrgbClr r="0" g="0" b="0"/>
-      </a:effectRef>
-      <a:fontRef idx="minor"/>
-    </dgm:style>
-  </dgm:styleLbl>
-  <dgm:styleLbl name="trBgShp">
-    <dgm:scene3d>
-      <a:camera prst="orthographicFront"/>
-      <a:lightRig rig="threePt" dir="t"/>
-    </dgm:scene3d>
-    <dgm:sp3d/>
-    <dgm:txPr/>
-    <dgm:style>
-      <a:lnRef idx="0">
-        <a:scrgbClr r="0" g="0" b="0"/>
-      </a:lnRef>
-      <a:fillRef idx="1">
-        <a:scrgbClr r="0" g="0" b="0"/>
-      </a:fillRef>
-      <a:effectRef idx="0">
         <a:scrgbClr r="0" g="0" b="0"/>
       </a:effectRef>
       <a:fontRef idx="minor"/>
@@ -5354,12 +3416,336 @@
       <a:fontRef idx="minor"/>
     </dgm:style>
   </dgm:styleLbl>
+  <dgm:styleLbl name="fgSibTrans2D1">
+    <dgm:scene3d>
+      <a:camera prst="orthographicFront"/>
+      <a:lightRig rig="threePt" dir="t"/>
+    </dgm:scene3d>
+    <dgm:txPr/>
+    <dgm:style>
+      <a:lnRef idx="0">
+        <a:scrgbClr r="0" g="0" b="0"/>
+      </a:lnRef>
+      <a:fillRef idx="2">
+        <a:scrgbClr r="0" g="0" b="0"/>
+      </a:fillRef>
+      <a:effectRef idx="1">
+        <a:scrgbClr r="0" g="0" b="0"/>
+      </a:effectRef>
+      <a:fontRef idx="minor">
+        <a:schemeClr val="dk1"/>
+      </a:fontRef>
+    </dgm:style>
+  </dgm:styleLbl>
+  <dgm:styleLbl name="lnNode1">
+    <dgm:scene3d>
+      <a:camera prst="orthographicFront"/>
+      <a:lightRig rig="flat" dir="t"/>
+    </dgm:scene3d>
+    <dgm:sp3d prstMaterial="dkEdge">
+      <a:bevelT w="8200" h="38100"/>
+    </dgm:sp3d>
+    <dgm:txPr/>
+    <dgm:style>
+      <a:lnRef idx="1">
+        <a:scrgbClr r="0" g="0" b="0"/>
+      </a:lnRef>
+      <a:fillRef idx="2">
+        <a:scrgbClr r="0" g="0" b="0"/>
+      </a:fillRef>
+      <a:effectRef idx="0">
+        <a:scrgbClr r="0" g="0" b="0"/>
+      </a:effectRef>
+      <a:fontRef idx="minor">
+        <a:schemeClr val="dk1"/>
+      </a:fontRef>
+    </dgm:style>
+  </dgm:styleLbl>
+  <dgm:styleLbl name="node0">
+    <dgm:scene3d>
+      <a:camera prst="orthographicFront"/>
+      <a:lightRig rig="flat" dir="t"/>
+    </dgm:scene3d>
+    <dgm:sp3d prstMaterial="dkEdge">
+      <a:bevelT w="8200" h="38100"/>
+    </dgm:sp3d>
+    <dgm:txPr/>
+    <dgm:style>
+      <a:lnRef idx="0">
+        <a:scrgbClr r="0" g="0" b="0"/>
+      </a:lnRef>
+      <a:fillRef idx="2">
+        <a:scrgbClr r="0" g="0" b="0"/>
+      </a:fillRef>
+      <a:effectRef idx="1">
+        <a:scrgbClr r="0" g="0" b="0"/>
+      </a:effectRef>
+      <a:fontRef idx="minor">
+        <a:schemeClr val="dk1"/>
+      </a:fontRef>
+    </dgm:style>
+  </dgm:styleLbl>
+  <dgm:styleLbl name="node1">
+    <dgm:scene3d>
+      <a:camera prst="orthographicFront"/>
+      <a:lightRig rig="flat" dir="t"/>
+    </dgm:scene3d>
+    <dgm:sp3d prstMaterial="dkEdge">
+      <a:bevelT w="8200" h="38100"/>
+    </dgm:sp3d>
+    <dgm:txPr/>
+    <dgm:style>
+      <a:lnRef idx="0">
+        <a:scrgbClr r="0" g="0" b="0"/>
+      </a:lnRef>
+      <a:fillRef idx="2">
+        <a:scrgbClr r="0" g="0" b="0"/>
+      </a:fillRef>
+      <a:effectRef idx="1">
+        <a:scrgbClr r="0" g="0" b="0"/>
+      </a:effectRef>
+      <a:fontRef idx="minor">
+        <a:schemeClr val="dk1"/>
+      </a:fontRef>
+    </dgm:style>
+  </dgm:styleLbl>
+  <dgm:styleLbl name="node2">
+    <dgm:scene3d>
+      <a:camera prst="orthographicFront"/>
+      <a:lightRig rig="flat" dir="t"/>
+    </dgm:scene3d>
+    <dgm:sp3d prstMaterial="dkEdge">
+      <a:bevelT w="8200" h="38100"/>
+    </dgm:sp3d>
+    <dgm:txPr/>
+    <dgm:style>
+      <a:lnRef idx="0">
+        <a:scrgbClr r="0" g="0" b="0"/>
+      </a:lnRef>
+      <a:fillRef idx="2">
+        <a:scrgbClr r="0" g="0" b="0"/>
+      </a:fillRef>
+      <a:effectRef idx="1">
+        <a:scrgbClr r="0" g="0" b="0"/>
+      </a:effectRef>
+      <a:fontRef idx="minor">
+        <a:schemeClr val="dk1"/>
+      </a:fontRef>
+    </dgm:style>
+  </dgm:styleLbl>
+  <dgm:styleLbl name="node3">
+    <dgm:scene3d>
+      <a:camera prst="orthographicFront"/>
+      <a:lightRig rig="flat" dir="t"/>
+    </dgm:scene3d>
+    <dgm:sp3d prstMaterial="dkEdge">
+      <a:bevelT w="8200" h="38100"/>
+    </dgm:sp3d>
+    <dgm:txPr/>
+    <dgm:style>
+      <a:lnRef idx="0">
+        <a:scrgbClr r="0" g="0" b="0"/>
+      </a:lnRef>
+      <a:fillRef idx="2">
+        <a:scrgbClr r="0" g="0" b="0"/>
+      </a:fillRef>
+      <a:effectRef idx="1">
+        <a:scrgbClr r="0" g="0" b="0"/>
+      </a:effectRef>
+      <a:fontRef idx="minor">
+        <a:schemeClr val="dk1"/>
+      </a:fontRef>
+    </dgm:style>
+  </dgm:styleLbl>
+  <dgm:styleLbl name="node4">
+    <dgm:scene3d>
+      <a:camera prst="orthographicFront"/>
+      <a:lightRig rig="flat" dir="t"/>
+    </dgm:scene3d>
+    <dgm:sp3d prstMaterial="dkEdge">
+      <a:bevelT w="8200" h="38100"/>
+    </dgm:sp3d>
+    <dgm:txPr/>
+    <dgm:style>
+      <a:lnRef idx="0">
+        <a:scrgbClr r="0" g="0" b="0"/>
+      </a:lnRef>
+      <a:fillRef idx="2">
+        <a:scrgbClr r="0" g="0" b="0"/>
+      </a:fillRef>
+      <a:effectRef idx="1">
+        <a:scrgbClr r="0" g="0" b="0"/>
+      </a:effectRef>
+      <a:fontRef idx="minor">
+        <a:schemeClr val="dk1"/>
+      </a:fontRef>
+    </dgm:style>
+  </dgm:styleLbl>
+  <dgm:styleLbl name="parChTrans1D1">
+    <dgm:scene3d>
+      <a:camera prst="orthographicFront"/>
+      <a:lightRig rig="threePt" dir="t"/>
+    </dgm:scene3d>
+    <dgm:txPr/>
+    <dgm:style>
+      <a:lnRef idx="2">
+        <a:scrgbClr r="0" g="0" b="0"/>
+      </a:lnRef>
+      <a:fillRef idx="0">
+        <a:scrgbClr r="0" g="0" b="0"/>
+      </a:fillRef>
+      <a:effectRef idx="0">
+        <a:scrgbClr r="0" g="0" b="0"/>
+      </a:effectRef>
+      <a:fontRef idx="minor"/>
+    </dgm:style>
+  </dgm:styleLbl>
+  <dgm:styleLbl name="parChTrans1D2">
+    <dgm:scene3d>
+      <a:camera prst="orthographicFront"/>
+      <a:lightRig rig="threePt" dir="t"/>
+    </dgm:scene3d>
+    <dgm:txPr/>
+    <dgm:style>
+      <a:lnRef idx="2">
+        <a:scrgbClr r="0" g="0" b="0"/>
+      </a:lnRef>
+      <a:fillRef idx="0">
+        <a:scrgbClr r="0" g="0" b="0"/>
+      </a:fillRef>
+      <a:effectRef idx="0">
+        <a:scrgbClr r="0" g="0" b="0"/>
+      </a:effectRef>
+      <a:fontRef idx="minor"/>
+    </dgm:style>
+  </dgm:styleLbl>
+  <dgm:styleLbl name="parChTrans1D3">
+    <dgm:scene3d>
+      <a:camera prst="orthographicFront"/>
+      <a:lightRig rig="threePt" dir="t"/>
+    </dgm:scene3d>
+    <dgm:txPr/>
+    <dgm:style>
+      <a:lnRef idx="2">
+        <a:scrgbClr r="0" g="0" b="0"/>
+      </a:lnRef>
+      <a:fillRef idx="0">
+        <a:scrgbClr r="0" g="0" b="0"/>
+      </a:fillRef>
+      <a:effectRef idx="0">
+        <a:scrgbClr r="0" g="0" b="0"/>
+      </a:effectRef>
+      <a:fontRef idx="minor"/>
+    </dgm:style>
+  </dgm:styleLbl>
+  <dgm:styleLbl name="parChTrans1D4">
+    <dgm:scene3d>
+      <a:camera prst="orthographicFront"/>
+      <a:lightRig rig="threePt" dir="t"/>
+    </dgm:scene3d>
+    <dgm:txPr/>
+    <dgm:style>
+      <a:lnRef idx="2">
+        <a:scrgbClr r="0" g="0" b="0"/>
+      </a:lnRef>
+      <a:fillRef idx="0">
+        <a:scrgbClr r="0" g="0" b="0"/>
+      </a:fillRef>
+      <a:effectRef idx="0">
+        <a:scrgbClr r="0" g="0" b="0"/>
+      </a:effectRef>
+      <a:fontRef idx="minor"/>
+    </dgm:style>
+  </dgm:styleLbl>
+  <dgm:styleLbl name="parChTrans2D1">
+    <dgm:scene3d>
+      <a:camera prst="orthographicFront"/>
+      <a:lightRig rig="threePt" dir="t"/>
+    </dgm:scene3d>
+    <dgm:txPr/>
+    <dgm:style>
+      <a:lnRef idx="1">
+        <a:scrgbClr r="0" g="0" b="0"/>
+      </a:lnRef>
+      <a:fillRef idx="2">
+        <a:scrgbClr r="0" g="0" b="0"/>
+      </a:fillRef>
+      <a:effectRef idx="1">
+        <a:scrgbClr r="0" g="0" b="0"/>
+      </a:effectRef>
+      <a:fontRef idx="minor">
+        <a:schemeClr val="dk1"/>
+      </a:fontRef>
+    </dgm:style>
+  </dgm:styleLbl>
+  <dgm:styleLbl name="parChTrans2D2">
+    <dgm:scene3d>
+      <a:camera prst="orthographicFront"/>
+      <a:lightRig rig="threePt" dir="t"/>
+    </dgm:scene3d>
+    <dgm:txPr/>
+    <dgm:style>
+      <a:lnRef idx="1">
+        <a:scrgbClr r="0" g="0" b="0"/>
+      </a:lnRef>
+      <a:fillRef idx="2">
+        <a:scrgbClr r="0" g="0" b="0"/>
+      </a:fillRef>
+      <a:effectRef idx="1">
+        <a:scrgbClr r="0" g="0" b="0"/>
+      </a:effectRef>
+      <a:fontRef idx="minor">
+        <a:schemeClr val="dk1"/>
+      </a:fontRef>
+    </dgm:style>
+  </dgm:styleLbl>
+  <dgm:styleLbl name="parChTrans2D3">
+    <dgm:scene3d>
+      <a:camera prst="orthographicFront"/>
+      <a:lightRig rig="threePt" dir="t"/>
+    </dgm:scene3d>
+    <dgm:txPr/>
+    <dgm:style>
+      <a:lnRef idx="1">
+        <a:scrgbClr r="0" g="0" b="0"/>
+      </a:lnRef>
+      <a:fillRef idx="2">
+        <a:scrgbClr r="0" g="0" b="0"/>
+      </a:fillRef>
+      <a:effectRef idx="1">
+        <a:scrgbClr r="0" g="0" b="0"/>
+      </a:effectRef>
+      <a:fontRef idx="minor">
+        <a:schemeClr val="dk1"/>
+      </a:fontRef>
+    </dgm:style>
+  </dgm:styleLbl>
+  <dgm:styleLbl name="parChTrans2D4">
+    <dgm:scene3d>
+      <a:camera prst="orthographicFront"/>
+      <a:lightRig rig="threePt" dir="t"/>
+    </dgm:scene3d>
+    <dgm:txPr/>
+    <dgm:style>
+      <a:lnRef idx="1">
+        <a:scrgbClr r="0" g="0" b="0"/>
+      </a:lnRef>
+      <a:fillRef idx="2">
+        <a:scrgbClr r="0" g="0" b="0"/>
+      </a:fillRef>
+      <a:effectRef idx="1">
+        <a:scrgbClr r="0" g="0" b="0"/>
+      </a:effectRef>
+      <a:fontRef idx="minor">
+        <a:schemeClr val="dk1"/>
+      </a:fontRef>
+    </dgm:style>
+  </dgm:styleLbl>
   <dgm:styleLbl name="revTx">
     <dgm:scene3d>
       <a:camera prst="orthographicFront"/>
       <a:lightRig rig="threePt" dir="t"/>
     </dgm:scene3d>
-    <dgm:sp3d/>
     <dgm:txPr/>
     <dgm:style>
       <a:lnRef idx="0">
@@ -5372,6 +3758,165 @@
         <a:scrgbClr r="0" g="0" b="0"/>
       </a:effectRef>
       <a:fontRef idx="minor"/>
+    </dgm:style>
+  </dgm:styleLbl>
+  <dgm:styleLbl name="sibTrans1D1">
+    <dgm:scene3d>
+      <a:camera prst="orthographicFront"/>
+      <a:lightRig rig="threePt" dir="t"/>
+    </dgm:scene3d>
+    <dgm:txPr/>
+    <dgm:style>
+      <a:lnRef idx="1">
+        <a:scrgbClr r="0" g="0" b="0"/>
+      </a:lnRef>
+      <a:fillRef idx="0">
+        <a:scrgbClr r="0" g="0" b="0"/>
+      </a:fillRef>
+      <a:effectRef idx="0">
+        <a:scrgbClr r="0" g="0" b="0"/>
+      </a:effectRef>
+      <a:fontRef idx="minor"/>
+    </dgm:style>
+  </dgm:styleLbl>
+  <dgm:styleLbl name="sibTrans2D1">
+    <dgm:scene3d>
+      <a:camera prst="orthographicFront"/>
+      <a:lightRig rig="threePt" dir="t"/>
+    </dgm:scene3d>
+    <dgm:txPr/>
+    <dgm:style>
+      <a:lnRef idx="0">
+        <a:scrgbClr r="0" g="0" b="0"/>
+      </a:lnRef>
+      <a:fillRef idx="2">
+        <a:scrgbClr r="0" g="0" b="0"/>
+      </a:fillRef>
+      <a:effectRef idx="1">
+        <a:scrgbClr r="0" g="0" b="0"/>
+      </a:effectRef>
+      <a:fontRef idx="minor">
+        <a:schemeClr val="dk1"/>
+      </a:fontRef>
+    </dgm:style>
+  </dgm:styleLbl>
+  <dgm:styleLbl name="solidAlignAcc1">
+    <dgm:scene3d>
+      <a:camera prst="orthographicFront"/>
+      <a:lightRig rig="threePt" dir="t"/>
+    </dgm:scene3d>
+    <dgm:txPr/>
+    <dgm:style>
+      <a:lnRef idx="1">
+        <a:scrgbClr r="0" g="0" b="0"/>
+      </a:lnRef>
+      <a:fillRef idx="1">
+        <a:scrgbClr r="0" g="0" b="0"/>
+      </a:fillRef>
+      <a:effectRef idx="0">
+        <a:scrgbClr r="0" g="0" b="0"/>
+      </a:effectRef>
+      <a:fontRef idx="minor"/>
+    </dgm:style>
+  </dgm:styleLbl>
+  <dgm:styleLbl name="solidBgAcc1">
+    <dgm:scene3d>
+      <a:camera prst="orthographicFront"/>
+      <a:lightRig rig="threePt" dir="t"/>
+    </dgm:scene3d>
+    <dgm:txPr/>
+    <dgm:style>
+      <a:lnRef idx="1">
+        <a:scrgbClr r="0" g="0" b="0"/>
+      </a:lnRef>
+      <a:fillRef idx="1">
+        <a:scrgbClr r="0" g="0" b="0"/>
+      </a:fillRef>
+      <a:effectRef idx="0">
+        <a:scrgbClr r="0" g="0" b="0"/>
+      </a:effectRef>
+      <a:fontRef idx="minor"/>
+    </dgm:style>
+  </dgm:styleLbl>
+  <dgm:styleLbl name="solidFgAcc1">
+    <dgm:scene3d>
+      <a:camera prst="orthographicFront"/>
+      <a:lightRig rig="threePt" dir="t"/>
+    </dgm:scene3d>
+    <dgm:txPr/>
+    <dgm:style>
+      <a:lnRef idx="1">
+        <a:scrgbClr r="0" g="0" b="0"/>
+      </a:lnRef>
+      <a:fillRef idx="2">
+        <a:scrgbClr r="0" g="0" b="0"/>
+      </a:fillRef>
+      <a:effectRef idx="0">
+        <a:scrgbClr r="0" g="0" b="0"/>
+      </a:effectRef>
+      <a:fontRef idx="minor"/>
+    </dgm:style>
+  </dgm:styleLbl>
+  <dgm:styleLbl name="trAlignAcc1">
+    <dgm:scene3d>
+      <a:camera prst="orthographicFront"/>
+      <a:lightRig rig="threePt" dir="t"/>
+    </dgm:scene3d>
+    <dgm:txPr/>
+    <dgm:style>
+      <a:lnRef idx="1">
+        <a:scrgbClr r="0" g="0" b="0"/>
+      </a:lnRef>
+      <a:fillRef idx="1">
+        <a:scrgbClr r="0" g="0" b="0"/>
+      </a:fillRef>
+      <a:effectRef idx="0">
+        <a:scrgbClr r="0" g="0" b="0"/>
+      </a:effectRef>
+      <a:fontRef idx="minor"/>
+    </dgm:style>
+  </dgm:styleLbl>
+  <dgm:styleLbl name="trBgShp">
+    <dgm:scene3d>
+      <a:camera prst="orthographicFront"/>
+      <a:lightRig rig="threePt" dir="t"/>
+    </dgm:scene3d>
+    <dgm:txPr/>
+    <dgm:style>
+      <a:lnRef idx="0">
+        <a:scrgbClr r="0" g="0" b="0"/>
+      </a:lnRef>
+      <a:fillRef idx="1">
+        <a:scrgbClr r="0" g="0" b="0"/>
+      </a:fillRef>
+      <a:effectRef idx="0">
+        <a:scrgbClr r="0" g="0" b="0"/>
+      </a:effectRef>
+      <a:fontRef idx="minor"/>
+    </dgm:style>
+  </dgm:styleLbl>
+  <dgm:styleLbl name="vennNode1">
+    <dgm:scene3d>
+      <a:camera prst="orthographicFront"/>
+      <a:lightRig rig="flat" dir="t"/>
+    </dgm:scene3d>
+    <dgm:sp3d prstMaterial="dkEdge">
+      <a:bevelT w="8200" h="38100"/>
+    </dgm:sp3d>
+    <dgm:txPr/>
+    <dgm:style>
+      <a:lnRef idx="0">
+        <a:scrgbClr r="0" g="0" b="0"/>
+      </a:lnRef>
+      <a:fillRef idx="2">
+        <a:scrgbClr r="0" g="0" b="0"/>
+      </a:fillRef>
+      <a:effectRef idx="0">
+        <a:scrgbClr r="0" g="0" b="0"/>
+      </a:effectRef>
+      <a:fontRef idx="minor">
+        <a:schemeClr val="tx1"/>
+      </a:fontRef>
     </dgm:style>
   </dgm:styleLbl>
 </dgm:styleDef>
@@ -5459,7 +4004,6 @@
           <a:p>
             <a:fld id="{D936C36B-0FF0-48C8-A5FE-A8F1A0E43C02}" type="datetimeFigureOut">
               <a:rPr lang="en-US" smtClean="0"/>
-              <a:t>9/4/2019</a:t>
             </a:fld>
             <a:endParaRPr lang="en-US"/>
           </a:p>
@@ -5526,6 +4070,7 @@
               <a:rPr lang="en-US"/>
               <a:t>Click to edit Master text styles</a:t>
             </a:r>
+            <a:endParaRPr lang="en-US"/>
           </a:p>
           <a:p>
             <a:pPr lvl="1"/>
@@ -5533,6 +4078,7 @@
               <a:rPr lang="en-US"/>
               <a:t>Second level</a:t>
             </a:r>
+            <a:endParaRPr lang="en-US"/>
           </a:p>
           <a:p>
             <a:pPr lvl="2"/>
@@ -5540,6 +4086,7 @@
               <a:rPr lang="en-US"/>
               <a:t>Third level</a:t>
             </a:r>
+            <a:endParaRPr lang="en-US"/>
           </a:p>
           <a:p>
             <a:pPr lvl="3"/>
@@ -5547,6 +4094,7 @@
               <a:rPr lang="en-US"/>
               <a:t>Fourth level</a:t>
             </a:r>
+            <a:endParaRPr lang="en-US"/>
           </a:p>
           <a:p>
             <a:pPr lvl="4"/>
@@ -5554,6 +4102,7 @@
               <a:rPr lang="en-US"/>
               <a:t>Fifth level</a:t>
             </a:r>
+            <a:endParaRPr lang="en-US"/>
           </a:p>
         </p:txBody>
       </p:sp>
@@ -5617,18 +4166,12 @@
           <a:p>
             <a:fld id="{6EB7EF2B-259C-44C7-8293-47B66B2B973A}" type="slidenum">
               <a:rPr lang="en-US" smtClean="0"/>
-              <a:t>‹#›</a:t>
             </a:fld>
             <a:endParaRPr lang="en-US"/>
           </a:p>
         </p:txBody>
       </p:sp>
     </p:spTree>
-    <p:extLst>
-      <p:ext uri="{BB962C8B-B14F-4D97-AF65-F5344CB8AC3E}">
-        <p14:creationId xmlns:p14="http://schemas.microsoft.com/office/powerpoint/2010/main" val="512966417"/>
-      </p:ext>
-    </p:extLst>
   </p:cSld>
   <p:clrMap bg1="lt1" tx1="dk1" bg2="lt2" tx2="dk2" accent1="accent1" accent2="accent2" accent3="accent3" accent4="accent4" accent5="accent5" accent6="accent6" hlink="hlink" folHlink="folHlink"/>
   <p:notesStyle>
@@ -5791,18 +4334,12 @@
           <a:p>
             <a:fld id="{6EB7EF2B-259C-44C7-8293-47B66B2B973A}" type="slidenum">
               <a:rPr lang="en-US" smtClean="0"/>
-              <a:t>10</a:t>
             </a:fld>
             <a:endParaRPr lang="en-US"/>
           </a:p>
         </p:txBody>
       </p:sp>
     </p:spTree>
-    <p:extLst>
-      <p:ext uri="{BB962C8B-B14F-4D97-AF65-F5344CB8AC3E}">
-        <p14:creationId xmlns:p14="http://schemas.microsoft.com/office/powerpoint/2010/main" val="1173196359"/>
-      </p:ext>
-    </p:extLst>
   </p:cSld>
   <p:clrMapOvr>
     <a:masterClrMapping/>
@@ -5863,18 +4400,21 @@
               <a:rPr lang="en-US" dirty="0"/>
               <a:t>Entry - is the standard expected of employees on entry into a role. This is often used when the new entrant must learn or be trained to be able to perform to the standards required within the role / job.</a:t>
             </a:r>
+            <a:endParaRPr lang="en-US" dirty="0"/>
           </a:p>
           <a:p>
             <a:r>
               <a:rPr lang="en-US" dirty="0"/>
               <a:t>Fully Effective - is level required of employees who are performing at the standard expected for their role / job.</a:t>
             </a:r>
+            <a:endParaRPr lang="en-US" dirty="0"/>
           </a:p>
           <a:p>
             <a:r>
               <a:rPr lang="en-US" dirty="0"/>
               <a:t>Stretch / Mastery - is typically displayed by employees who have mastered their job / role. These employees are often sought out by other employees and managers / supervisors to provide advice / assistance.</a:t>
             </a:r>
+            <a:endParaRPr lang="en-US" dirty="0"/>
           </a:p>
           <a:p>
             <a:endParaRPr lang="en-US" dirty="0"/>
@@ -5898,18 +4438,12 @@
           <a:p>
             <a:fld id="{6EB7EF2B-259C-44C7-8293-47B66B2B973A}" type="slidenum">
               <a:rPr lang="en-US" smtClean="0"/>
-              <a:t>17</a:t>
             </a:fld>
             <a:endParaRPr lang="en-US"/>
           </a:p>
         </p:txBody>
       </p:sp>
     </p:spTree>
-    <p:extLst>
-      <p:ext uri="{BB962C8B-B14F-4D97-AF65-F5344CB8AC3E}">
-        <p14:creationId xmlns:p14="http://schemas.microsoft.com/office/powerpoint/2010/main" val="51412415"/>
-      </p:ext>
-    </p:extLst>
   </p:cSld>
   <p:clrMapOvr>
     <a:masterClrMapping/>
@@ -5987,18 +4521,12 @@
           <a:p>
             <a:fld id="{6EB7EF2B-259C-44C7-8293-47B66B2B973A}" type="slidenum">
               <a:rPr lang="en-US" smtClean="0"/>
-              <a:t>21</a:t>
             </a:fld>
             <a:endParaRPr lang="en-US"/>
           </a:p>
         </p:txBody>
       </p:sp>
     </p:spTree>
-    <p:extLst>
-      <p:ext uri="{BB962C8B-B14F-4D97-AF65-F5344CB8AC3E}">
-        <p14:creationId xmlns:p14="http://schemas.microsoft.com/office/powerpoint/2010/main" val="1857520171"/>
-      </p:ext>
-    </p:extLst>
   </p:cSld>
   <p:clrMapOvr>
     <a:masterClrMapping/>
@@ -6075,6 +4603,7 @@
               <a:rPr lang="en-US" altLang="zh-CN" baseline="0" dirty="0"/>
               <a:t> </a:t>
             </a:r>
+            <a:endParaRPr lang="en-US" altLang="zh-CN" baseline="0" dirty="0"/>
           </a:p>
           <a:p>
             <a:r>
@@ -6127,18 +4656,12 @@
           <a:p>
             <a:fld id="{6EB7EF2B-259C-44C7-8293-47B66B2B973A}" type="slidenum">
               <a:rPr lang="en-US" smtClean="0"/>
-              <a:t>22</a:t>
             </a:fld>
             <a:endParaRPr lang="en-US"/>
           </a:p>
         </p:txBody>
       </p:sp>
     </p:spTree>
-    <p:extLst>
-      <p:ext uri="{BB962C8B-B14F-4D97-AF65-F5344CB8AC3E}">
-        <p14:creationId xmlns:p14="http://schemas.microsoft.com/office/powerpoint/2010/main" val="1491802545"/>
-      </p:ext>
-    </p:extLst>
   </p:cSld>
   <p:clrMapOvr>
     <a:masterClrMapping/>
@@ -6207,6 +4730,7 @@
               <a:rPr lang="en-US" altLang="zh-CN" baseline="0" dirty="0"/>
               <a:t>– why</a:t>
             </a:r>
+            <a:endParaRPr lang="en-US" altLang="zh-CN" baseline="0" dirty="0"/>
           </a:p>
           <a:p>
             <a:pPr marL="171450" indent="-171450">
@@ -6260,18 +4784,12 @@
           <a:p>
             <a:fld id="{6EB7EF2B-259C-44C7-8293-47B66B2B973A}" type="slidenum">
               <a:rPr lang="en-US" smtClean="0"/>
-              <a:t>23</a:t>
             </a:fld>
             <a:endParaRPr lang="en-US"/>
           </a:p>
         </p:txBody>
       </p:sp>
     </p:spTree>
-    <p:extLst>
-      <p:ext uri="{BB962C8B-B14F-4D97-AF65-F5344CB8AC3E}">
-        <p14:creationId xmlns:p14="http://schemas.microsoft.com/office/powerpoint/2010/main" val="2503365677"/>
-      </p:ext>
-    </p:extLst>
   </p:cSld>
   <p:clrMapOvr>
     <a:masterClrMapping/>
@@ -6349,18 +4867,12 @@
           <a:p>
             <a:fld id="{6EB7EF2B-259C-44C7-8293-47B66B2B973A}" type="slidenum">
               <a:rPr lang="en-US" smtClean="0"/>
-              <a:t>24</a:t>
             </a:fld>
             <a:endParaRPr lang="en-US"/>
           </a:p>
         </p:txBody>
       </p:sp>
     </p:spTree>
-    <p:extLst>
-      <p:ext uri="{BB962C8B-B14F-4D97-AF65-F5344CB8AC3E}">
-        <p14:creationId xmlns:p14="http://schemas.microsoft.com/office/powerpoint/2010/main" val="3036725552"/>
-      </p:ext>
-    </p:extLst>
   </p:cSld>
   <p:clrMapOvr>
     <a:masterClrMapping/>
@@ -6442,18 +4954,12 @@
           <a:p>
             <a:fld id="{6EB7EF2B-259C-44C7-8293-47B66B2B973A}" type="slidenum">
               <a:rPr lang="en-US" smtClean="0"/>
-              <a:t>25</a:t>
             </a:fld>
             <a:endParaRPr lang="en-US"/>
           </a:p>
         </p:txBody>
       </p:sp>
     </p:spTree>
-    <p:extLst>
-      <p:ext uri="{BB962C8B-B14F-4D97-AF65-F5344CB8AC3E}">
-        <p14:creationId xmlns:p14="http://schemas.microsoft.com/office/powerpoint/2010/main" val="4062555620"/>
-      </p:ext>
-    </p:extLst>
   </p:cSld>
   <p:clrMapOvr>
     <a:masterClrMapping/>
@@ -6539,18 +5045,12 @@
           <a:p>
             <a:fld id="{6EB7EF2B-259C-44C7-8293-47B66B2B973A}" type="slidenum">
               <a:rPr lang="en-US" smtClean="0"/>
-              <a:t>26</a:t>
             </a:fld>
             <a:endParaRPr lang="en-US"/>
           </a:p>
         </p:txBody>
       </p:sp>
     </p:spTree>
-    <p:extLst>
-      <p:ext uri="{BB962C8B-B14F-4D97-AF65-F5344CB8AC3E}">
-        <p14:creationId xmlns:p14="http://schemas.microsoft.com/office/powerpoint/2010/main" val="953800817"/>
-      </p:ext>
-    </p:extLst>
   </p:cSld>
   <p:clrMapOvr>
     <a:masterClrMapping/>
@@ -6623,18 +5123,12 @@
           <a:p>
             <a:fld id="{6EB7EF2B-259C-44C7-8293-47B66B2B973A}" type="slidenum">
               <a:rPr lang="en-US" smtClean="0"/>
-              <a:t>27</a:t>
             </a:fld>
             <a:endParaRPr lang="en-US"/>
           </a:p>
         </p:txBody>
       </p:sp>
     </p:spTree>
-    <p:extLst>
-      <p:ext uri="{BB962C8B-B14F-4D97-AF65-F5344CB8AC3E}">
-        <p14:creationId xmlns:p14="http://schemas.microsoft.com/office/powerpoint/2010/main" val="1060568496"/>
-      </p:ext>
-    </p:extLst>
   </p:cSld>
   <p:clrMapOvr>
     <a:masterClrMapping/>
@@ -6838,7 +5332,6 @@
           <a:p>
             <a:fld id="{48A87A34-81AB-432B-8DAE-1953F412C126}" type="datetimeFigureOut">
               <a:rPr lang="en-US" smtClean="0"/>
-              <a:t>9/4/2019</a:t>
             </a:fld>
             <a:endParaRPr lang="en-US" dirty="0"/>
           </a:p>
@@ -6880,18 +5373,12 @@
           <a:p>
             <a:fld id="{6D22F896-40B5-4ADD-8801-0D06FADFA095}" type="slidenum">
               <a:rPr lang="en-US" smtClean="0"/>
-              <a:t>‹#›</a:t>
             </a:fld>
             <a:endParaRPr lang="en-US" dirty="0"/>
           </a:p>
         </p:txBody>
       </p:sp>
     </p:spTree>
-    <p:extLst>
-      <p:ext uri="{BB962C8B-B14F-4D97-AF65-F5344CB8AC3E}">
-        <p14:creationId xmlns:p14="http://schemas.microsoft.com/office/powerpoint/2010/main" val="2229972439"/>
-      </p:ext>
-    </p:extLst>
   </p:cSld>
   <p:clrMapOvr>
     <a:masterClrMapping/>
@@ -7099,6 +5586,7 @@
               <a:rPr lang="en-US"/>
               <a:t>Edit Master text styles</a:t>
             </a:r>
+            <a:endParaRPr lang="en-US"/>
           </a:p>
         </p:txBody>
       </p:sp>
@@ -7119,8 +5607,6 @@
           <a:p>
             <a:fld id="{48A87A34-81AB-432B-8DAE-1953F412C126}" type="datetimeFigureOut">
               <a:rPr lang="en-US" smtClean="0"/>
-              <a:pPr/>
-              <a:t>9/4/2019</a:t>
             </a:fld>
             <a:endParaRPr lang="en-US" dirty="0"/>
           </a:p>
@@ -7162,19 +5648,12 @@
           <a:p>
             <a:fld id="{6D22F896-40B5-4ADD-8801-0D06FADFA095}" type="slidenum">
               <a:rPr lang="en-US" smtClean="0"/>
-              <a:pPr/>
-              <a:t>‹#›</a:t>
             </a:fld>
             <a:endParaRPr lang="en-US" dirty="0"/>
           </a:p>
         </p:txBody>
       </p:sp>
     </p:spTree>
-    <p:extLst>
-      <p:ext uri="{BB962C8B-B14F-4D97-AF65-F5344CB8AC3E}">
-        <p14:creationId xmlns:p14="http://schemas.microsoft.com/office/powerpoint/2010/main" val="1544689337"/>
-      </p:ext>
-    </p:extLst>
   </p:cSld>
   <p:clrMapOvr>
     <a:masterClrMapping/>
@@ -7293,6 +5772,7 @@
               <a:rPr lang="en-US"/>
               <a:t>Edit Master text styles</a:t>
             </a:r>
+            <a:endParaRPr lang="en-US"/>
           </a:p>
         </p:txBody>
       </p:sp>
@@ -7313,8 +5793,6 @@
           <a:p>
             <a:fld id="{48A87A34-81AB-432B-8DAE-1953F412C126}" type="datetimeFigureOut">
               <a:rPr lang="en-US" smtClean="0"/>
-              <a:pPr/>
-              <a:t>9/4/2019</a:t>
             </a:fld>
             <a:endParaRPr lang="en-US" dirty="0"/>
           </a:p>
@@ -7356,19 +5834,12 @@
           <a:p>
             <a:fld id="{6D22F896-40B5-4ADD-8801-0D06FADFA095}" type="slidenum">
               <a:rPr lang="en-US" smtClean="0"/>
-              <a:pPr/>
-              <a:t>‹#›</a:t>
             </a:fld>
             <a:endParaRPr lang="en-US" dirty="0"/>
           </a:p>
         </p:txBody>
       </p:sp>
     </p:spTree>
-    <p:extLst>
-      <p:ext uri="{BB962C8B-B14F-4D97-AF65-F5344CB8AC3E}">
-        <p14:creationId xmlns:p14="http://schemas.microsoft.com/office/powerpoint/2010/main" val="3267364330"/>
-      </p:ext>
-    </p:extLst>
   </p:cSld>
   <p:clrMapOvr>
     <a:masterClrMapping/>
@@ -7489,6 +5960,7 @@
               <a:rPr lang="en-US"/>
               <a:t>Edit Master text styles</a:t>
             </a:r>
+            <a:endParaRPr lang="en-US"/>
           </a:p>
         </p:txBody>
       </p:sp>
@@ -7556,6 +6028,7 @@
               <a:rPr lang="en-US"/>
               <a:t>Edit Master text styles</a:t>
             </a:r>
+            <a:endParaRPr lang="en-US"/>
           </a:p>
         </p:txBody>
       </p:sp>
@@ -7576,8 +6049,6 @@
           <a:p>
             <a:fld id="{48A87A34-81AB-432B-8DAE-1953F412C126}" type="datetimeFigureOut">
               <a:rPr lang="en-US" smtClean="0"/>
-              <a:pPr/>
-              <a:t>9/4/2019</a:t>
             </a:fld>
             <a:endParaRPr lang="en-US" dirty="0"/>
           </a:p>
@@ -7619,8 +6090,6 @@
           <a:p>
             <a:fld id="{6D22F896-40B5-4ADD-8801-0D06FADFA095}" type="slidenum">
               <a:rPr lang="en-US" smtClean="0"/>
-              <a:pPr/>
-              <a:t>‹#›</a:t>
             </a:fld>
             <a:endParaRPr lang="en-US" dirty="0"/>
           </a:p>
@@ -7739,6 +6208,12 @@
               </a:rPr>
               <a:t>“</a:t>
             </a:r>
+            <a:endParaRPr lang="en-US" sz="8000" dirty="0">
+              <a:solidFill>
+                <a:schemeClr val="tx1"/>
+              </a:solidFill>
+              <a:effectLst/>
+            </a:endParaRPr>
           </a:p>
         </p:txBody>
       </p:sp>
@@ -7855,15 +6330,16 @@
               </a:rPr>
               <a:t>”</a:t>
             </a:r>
+            <a:endParaRPr lang="en-US" sz="8000" dirty="0">
+              <a:solidFill>
+                <a:schemeClr val="tx1"/>
+              </a:solidFill>
+              <a:effectLst/>
+            </a:endParaRPr>
           </a:p>
         </p:txBody>
       </p:sp>
     </p:spTree>
-    <p:extLst>
-      <p:ext uri="{BB962C8B-B14F-4D97-AF65-F5344CB8AC3E}">
-        <p14:creationId xmlns:p14="http://schemas.microsoft.com/office/powerpoint/2010/main" val="455446974"/>
-      </p:ext>
-    </p:extLst>
   </p:cSld>
   <p:clrMapOvr>
     <a:masterClrMapping/>
@@ -7984,6 +6460,7 @@
               <a:rPr lang="en-US"/>
               <a:t>Edit Master text styles</a:t>
             </a:r>
+            <a:endParaRPr lang="en-US"/>
           </a:p>
         </p:txBody>
       </p:sp>
@@ -8004,8 +6481,6 @@
           <a:p>
             <a:fld id="{48A87A34-81AB-432B-8DAE-1953F412C126}" type="datetimeFigureOut">
               <a:rPr lang="en-US" smtClean="0"/>
-              <a:pPr/>
-              <a:t>9/4/2019</a:t>
             </a:fld>
             <a:endParaRPr lang="en-US" dirty="0"/>
           </a:p>
@@ -8047,19 +6522,12 @@
           <a:p>
             <a:fld id="{6D22F896-40B5-4ADD-8801-0D06FADFA095}" type="slidenum">
               <a:rPr lang="en-US" smtClean="0"/>
-              <a:pPr/>
-              <a:t>‹#›</a:t>
             </a:fld>
             <a:endParaRPr lang="en-US" dirty="0"/>
           </a:p>
         </p:txBody>
       </p:sp>
     </p:spTree>
-    <p:extLst>
-      <p:ext uri="{BB962C8B-B14F-4D97-AF65-F5344CB8AC3E}">
-        <p14:creationId xmlns:p14="http://schemas.microsoft.com/office/powerpoint/2010/main" val="2165055334"/>
-      </p:ext>
-    </p:extLst>
   </p:cSld>
   <p:clrMapOvr>
     <a:masterClrMapping/>
@@ -8203,6 +6671,7 @@
               <a:rPr lang="en-US"/>
               <a:t>Edit Master text styles</a:t>
             </a:r>
+            <a:endParaRPr lang="en-US"/>
           </a:p>
         </p:txBody>
       </p:sp>
@@ -8270,6 +6739,7 @@
               <a:rPr lang="en-US"/>
               <a:t>Edit Master text styles</a:t>
             </a:r>
+            <a:endParaRPr lang="en-US"/>
           </a:p>
         </p:txBody>
       </p:sp>
@@ -8334,6 +6804,7 @@
               <a:rPr lang="en-US"/>
               <a:t>Edit Master text styles</a:t>
             </a:r>
+            <a:endParaRPr lang="en-US"/>
           </a:p>
         </p:txBody>
       </p:sp>
@@ -8401,6 +6872,7 @@
               <a:rPr lang="en-US"/>
               <a:t>Edit Master text styles</a:t>
             </a:r>
+            <a:endParaRPr lang="en-US"/>
           </a:p>
         </p:txBody>
       </p:sp>
@@ -8465,6 +6937,7 @@
               <a:rPr lang="en-US"/>
               <a:t>Edit Master text styles</a:t>
             </a:r>
+            <a:endParaRPr lang="en-US"/>
           </a:p>
         </p:txBody>
       </p:sp>
@@ -8532,6 +7005,7 @@
               <a:rPr lang="en-US"/>
               <a:t>Edit Master text styles</a:t>
             </a:r>
+            <a:endParaRPr lang="en-US"/>
           </a:p>
         </p:txBody>
       </p:sp>
@@ -8552,8 +7026,6 @@
           <a:p>
             <a:fld id="{48A87A34-81AB-432B-8DAE-1953F412C126}" type="datetimeFigureOut">
               <a:rPr lang="en-US" smtClean="0"/>
-              <a:pPr/>
-              <a:t>9/4/2019</a:t>
             </a:fld>
             <a:endParaRPr lang="en-US" dirty="0"/>
           </a:p>
@@ -8595,19 +7067,12 @@
           <a:p>
             <a:fld id="{6D22F896-40B5-4ADD-8801-0D06FADFA095}" type="slidenum">
               <a:rPr lang="en-US" smtClean="0"/>
-              <a:pPr/>
-              <a:t>‹#›</a:t>
             </a:fld>
             <a:endParaRPr lang="en-US" dirty="0"/>
           </a:p>
         </p:txBody>
       </p:sp>
     </p:spTree>
-    <p:extLst>
-      <p:ext uri="{BB962C8B-B14F-4D97-AF65-F5344CB8AC3E}">
-        <p14:creationId xmlns:p14="http://schemas.microsoft.com/office/powerpoint/2010/main" val="1082035346"/>
-      </p:ext>
-    </p:extLst>
   </p:cSld>
   <p:clrMapOvr>
     <a:masterClrMapping/>
@@ -8747,6 +7212,7 @@
               <a:rPr lang="en-US"/>
               <a:t>Edit Master text styles</a:t>
             </a:r>
+            <a:endParaRPr lang="en-US"/>
           </a:p>
         </p:txBody>
       </p:sp>
@@ -8893,6 +7359,7 @@
               <a:rPr lang="en-US"/>
               <a:t>Edit Master text styles</a:t>
             </a:r>
+            <a:endParaRPr lang="en-US"/>
           </a:p>
         </p:txBody>
       </p:sp>
@@ -8983,6 +7450,7 @@
               <a:rPr lang="en-US"/>
               <a:t>Edit Master text styles</a:t>
             </a:r>
+            <a:endParaRPr lang="en-US"/>
           </a:p>
         </p:txBody>
       </p:sp>
@@ -9129,6 +7597,7 @@
               <a:rPr lang="en-US"/>
               <a:t>Edit Master text styles</a:t>
             </a:r>
+            <a:endParaRPr lang="en-US"/>
           </a:p>
         </p:txBody>
       </p:sp>
@@ -9219,6 +7688,7 @@
               <a:rPr lang="en-US"/>
               <a:t>Edit Master text styles</a:t>
             </a:r>
+            <a:endParaRPr lang="en-US"/>
           </a:p>
         </p:txBody>
       </p:sp>
@@ -9365,6 +7835,7 @@
               <a:rPr lang="en-US"/>
               <a:t>Edit Master text styles</a:t>
             </a:r>
+            <a:endParaRPr lang="en-US"/>
           </a:p>
         </p:txBody>
       </p:sp>
@@ -9385,8 +7856,6 @@
           <a:p>
             <a:fld id="{48A87A34-81AB-432B-8DAE-1953F412C126}" type="datetimeFigureOut">
               <a:rPr lang="en-US" smtClean="0"/>
-              <a:pPr/>
-              <a:t>9/4/2019</a:t>
             </a:fld>
             <a:endParaRPr lang="en-US" dirty="0"/>
           </a:p>
@@ -9428,19 +7897,12 @@
           <a:p>
             <a:fld id="{6D22F896-40B5-4ADD-8801-0D06FADFA095}" type="slidenum">
               <a:rPr lang="en-US" smtClean="0"/>
-              <a:pPr/>
-              <a:t>‹#›</a:t>
             </a:fld>
             <a:endParaRPr lang="en-US" dirty="0"/>
           </a:p>
         </p:txBody>
       </p:sp>
     </p:spTree>
-    <p:extLst>
-      <p:ext uri="{BB962C8B-B14F-4D97-AF65-F5344CB8AC3E}">
-        <p14:creationId xmlns:p14="http://schemas.microsoft.com/office/powerpoint/2010/main" val="1040305464"/>
-      </p:ext>
-    </p:extLst>
   </p:cSld>
   <p:clrMapOvr>
     <a:masterClrMapping/>
@@ -9508,6 +7970,7 @@
               <a:rPr lang="en-US"/>
               <a:t>Edit Master text styles</a:t>
             </a:r>
+            <a:endParaRPr lang="en-US"/>
           </a:p>
           <a:p>
             <a:pPr lvl="1"/>
@@ -9515,6 +7978,7 @@
               <a:rPr lang="en-US"/>
               <a:t>Second level</a:t>
             </a:r>
+            <a:endParaRPr lang="en-US"/>
           </a:p>
           <a:p>
             <a:pPr lvl="2"/>
@@ -9522,6 +7986,7 @@
               <a:rPr lang="en-US"/>
               <a:t>Third level</a:t>
             </a:r>
+            <a:endParaRPr lang="en-US"/>
           </a:p>
           <a:p>
             <a:pPr lvl="3"/>
@@ -9529,6 +7994,7 @@
               <a:rPr lang="en-US"/>
               <a:t>Fourth level</a:t>
             </a:r>
+            <a:endParaRPr lang="en-US"/>
           </a:p>
           <a:p>
             <a:pPr lvl="4"/>
@@ -9557,7 +8023,6 @@
           <a:p>
             <a:fld id="{48A87A34-81AB-432B-8DAE-1953F412C126}" type="datetimeFigureOut">
               <a:rPr lang="en-US" smtClean="0"/>
-              <a:t>9/4/2019</a:t>
             </a:fld>
             <a:endParaRPr lang="en-US" dirty="0"/>
           </a:p>
@@ -9599,18 +8064,12 @@
           <a:p>
             <a:fld id="{6D22F896-40B5-4ADD-8801-0D06FADFA095}" type="slidenum">
               <a:rPr lang="en-US" smtClean="0"/>
-              <a:t>‹#›</a:t>
             </a:fld>
             <a:endParaRPr lang="en-US" dirty="0"/>
           </a:p>
         </p:txBody>
       </p:sp>
     </p:spTree>
-    <p:extLst>
-      <p:ext uri="{BB962C8B-B14F-4D97-AF65-F5344CB8AC3E}">
-        <p14:creationId xmlns:p14="http://schemas.microsoft.com/office/powerpoint/2010/main" val="877443974"/>
-      </p:ext>
-    </p:extLst>
   </p:cSld>
   <p:clrMapOvr>
     <a:masterClrMapping/>
@@ -9688,6 +8147,7 @@
               <a:rPr lang="en-US"/>
               <a:t>Edit Master text styles</a:t>
             </a:r>
+            <a:endParaRPr lang="en-US"/>
           </a:p>
           <a:p>
             <a:pPr lvl="1"/>
@@ -9695,6 +8155,7 @@
               <a:rPr lang="en-US"/>
               <a:t>Second level</a:t>
             </a:r>
+            <a:endParaRPr lang="en-US"/>
           </a:p>
           <a:p>
             <a:pPr lvl="2"/>
@@ -9702,6 +8163,7 @@
               <a:rPr lang="en-US"/>
               <a:t>Third level</a:t>
             </a:r>
+            <a:endParaRPr lang="en-US"/>
           </a:p>
           <a:p>
             <a:pPr lvl="3"/>
@@ -9709,6 +8171,7 @@
               <a:rPr lang="en-US"/>
               <a:t>Fourth level</a:t>
             </a:r>
+            <a:endParaRPr lang="en-US"/>
           </a:p>
           <a:p>
             <a:pPr lvl="4"/>
@@ -9737,7 +8200,6 @@
           <a:p>
             <a:fld id="{48A87A34-81AB-432B-8DAE-1953F412C126}" type="datetimeFigureOut">
               <a:rPr lang="en-US" smtClean="0"/>
-              <a:t>9/4/2019</a:t>
             </a:fld>
             <a:endParaRPr lang="en-US" dirty="0"/>
           </a:p>
@@ -9779,18 +8241,12 @@
           <a:p>
             <a:fld id="{6D22F896-40B5-4ADD-8801-0D06FADFA095}" type="slidenum">
               <a:rPr lang="en-US" smtClean="0"/>
-              <a:t>‹#›</a:t>
             </a:fld>
             <a:endParaRPr lang="en-US" dirty="0"/>
           </a:p>
         </p:txBody>
       </p:sp>
     </p:spTree>
-    <p:extLst>
-      <p:ext uri="{BB962C8B-B14F-4D97-AF65-F5344CB8AC3E}">
-        <p14:creationId xmlns:p14="http://schemas.microsoft.com/office/powerpoint/2010/main" val="1653457965"/>
-      </p:ext>
-    </p:extLst>
   </p:cSld>
   <p:clrMapOvr>
     <a:masterClrMapping/>
@@ -9858,6 +8314,7 @@
               <a:rPr lang="en-US"/>
               <a:t>Edit Master text styles</a:t>
             </a:r>
+            <a:endParaRPr lang="en-US"/>
           </a:p>
           <a:p>
             <a:pPr lvl="1"/>
@@ -9865,6 +8322,7 @@
               <a:rPr lang="en-US"/>
               <a:t>Second level</a:t>
             </a:r>
+            <a:endParaRPr lang="en-US"/>
           </a:p>
           <a:p>
             <a:pPr lvl="2"/>
@@ -9872,6 +8330,7 @@
               <a:rPr lang="en-US"/>
               <a:t>Third level</a:t>
             </a:r>
+            <a:endParaRPr lang="en-US"/>
           </a:p>
           <a:p>
             <a:pPr lvl="3"/>
@@ -9879,6 +8338,7 @@
               <a:rPr lang="en-US"/>
               <a:t>Fourth level</a:t>
             </a:r>
+            <a:endParaRPr lang="en-US"/>
           </a:p>
           <a:p>
             <a:pPr lvl="4"/>
@@ -9907,7 +8367,6 @@
           <a:p>
             <a:fld id="{48A87A34-81AB-432B-8DAE-1953F412C126}" type="datetimeFigureOut">
               <a:rPr lang="en-US" smtClean="0"/>
-              <a:t>9/4/2019</a:t>
             </a:fld>
             <a:endParaRPr lang="en-US" dirty="0"/>
           </a:p>
@@ -9949,18 +8408,12 @@
           <a:p>
             <a:fld id="{6D22F896-40B5-4ADD-8801-0D06FADFA095}" type="slidenum">
               <a:rPr lang="en-US" smtClean="0"/>
-              <a:t>‹#›</a:t>
             </a:fld>
             <a:endParaRPr lang="en-US" dirty="0"/>
           </a:p>
         </p:txBody>
       </p:sp>
     </p:spTree>
-    <p:extLst>
-      <p:ext uri="{BB962C8B-B14F-4D97-AF65-F5344CB8AC3E}">
-        <p14:creationId xmlns:p14="http://schemas.microsoft.com/office/powerpoint/2010/main" val="1666780864"/>
-      </p:ext>
-    </p:extLst>
   </p:cSld>
   <p:clrMapOvr>
     <a:masterClrMapping/>
@@ -10164,7 +8617,6 @@
           <a:p>
             <a:fld id="{48A87A34-81AB-432B-8DAE-1953F412C126}" type="datetimeFigureOut">
               <a:rPr lang="en-US" smtClean="0"/>
-              <a:t>9/4/2019</a:t>
             </a:fld>
             <a:endParaRPr lang="en-US" dirty="0"/>
           </a:p>
@@ -10206,18 +8658,12 @@
           <a:p>
             <a:fld id="{6D22F896-40B5-4ADD-8801-0D06FADFA095}" type="slidenum">
               <a:rPr lang="en-US" smtClean="0"/>
-              <a:t>‹#›</a:t>
             </a:fld>
             <a:endParaRPr lang="en-US" dirty="0"/>
           </a:p>
         </p:txBody>
       </p:sp>
     </p:spTree>
-    <p:extLst>
-      <p:ext uri="{BB962C8B-B14F-4D97-AF65-F5344CB8AC3E}">
-        <p14:creationId xmlns:p14="http://schemas.microsoft.com/office/powerpoint/2010/main" val="2887289735"/>
-      </p:ext>
-    </p:extLst>
   </p:cSld>
   <p:clrMapOvr>
     <a:masterClrMapping/>
@@ -10290,6 +8736,7 @@
               <a:rPr lang="en-US"/>
               <a:t>Edit Master text styles</a:t>
             </a:r>
+            <a:endParaRPr lang="en-US"/>
           </a:p>
           <a:p>
             <a:pPr lvl="1"/>
@@ -10297,6 +8744,7 @@
               <a:rPr lang="en-US"/>
               <a:t>Second level</a:t>
             </a:r>
+            <a:endParaRPr lang="en-US"/>
           </a:p>
           <a:p>
             <a:pPr lvl="2"/>
@@ -10304,6 +8752,7 @@
               <a:rPr lang="en-US"/>
               <a:t>Third level</a:t>
             </a:r>
+            <a:endParaRPr lang="en-US"/>
           </a:p>
           <a:p>
             <a:pPr lvl="3"/>
@@ -10311,6 +8760,7 @@
               <a:rPr lang="en-US"/>
               <a:t>Fourth level</a:t>
             </a:r>
+            <a:endParaRPr lang="en-US"/>
           </a:p>
           <a:p>
             <a:pPr lvl="4"/>
@@ -10347,6 +8797,7 @@
               <a:rPr lang="en-US"/>
               <a:t>Edit Master text styles</a:t>
             </a:r>
+            <a:endParaRPr lang="en-US"/>
           </a:p>
           <a:p>
             <a:pPr lvl="1"/>
@@ -10354,6 +8805,7 @@
               <a:rPr lang="en-US"/>
               <a:t>Second level</a:t>
             </a:r>
+            <a:endParaRPr lang="en-US"/>
           </a:p>
           <a:p>
             <a:pPr lvl="2"/>
@@ -10361,6 +8813,7 @@
               <a:rPr lang="en-US"/>
               <a:t>Third level</a:t>
             </a:r>
+            <a:endParaRPr lang="en-US"/>
           </a:p>
           <a:p>
             <a:pPr lvl="3"/>
@@ -10368,6 +8821,7 @@
               <a:rPr lang="en-US"/>
               <a:t>Fourth level</a:t>
             </a:r>
+            <a:endParaRPr lang="en-US"/>
           </a:p>
           <a:p>
             <a:pPr lvl="4"/>
@@ -10396,7 +8850,6 @@
           <a:p>
             <a:fld id="{48A87A34-81AB-432B-8DAE-1953F412C126}" type="datetimeFigureOut">
               <a:rPr lang="en-US" smtClean="0"/>
-              <a:t>9/4/2019</a:t>
             </a:fld>
             <a:endParaRPr lang="en-US" dirty="0"/>
           </a:p>
@@ -10438,18 +8891,12 @@
           <a:p>
             <a:fld id="{6D22F896-40B5-4ADD-8801-0D06FADFA095}" type="slidenum">
               <a:rPr lang="en-US" smtClean="0"/>
-              <a:t>‹#›</a:t>
             </a:fld>
             <a:endParaRPr lang="en-US" dirty="0"/>
           </a:p>
         </p:txBody>
       </p:sp>
     </p:spTree>
-    <p:extLst>
-      <p:ext uri="{BB962C8B-B14F-4D97-AF65-F5344CB8AC3E}">
-        <p14:creationId xmlns:p14="http://schemas.microsoft.com/office/powerpoint/2010/main" val="2678627956"/>
-      </p:ext>
-    </p:extLst>
   </p:cSld>
   <p:clrMapOvr>
     <a:masterClrMapping/>
@@ -10591,6 +9038,7 @@
               <a:rPr lang="en-US"/>
               <a:t>Edit Master text styles</a:t>
             </a:r>
+            <a:endParaRPr lang="en-US"/>
           </a:p>
         </p:txBody>
       </p:sp>
@@ -10619,6 +9067,7 @@
               <a:rPr lang="en-US"/>
               <a:t>Edit Master text styles</a:t>
             </a:r>
+            <a:endParaRPr lang="en-US"/>
           </a:p>
           <a:p>
             <a:pPr lvl="1"/>
@@ -10626,6 +9075,7 @@
               <a:rPr lang="en-US"/>
               <a:t>Second level</a:t>
             </a:r>
+            <a:endParaRPr lang="en-US"/>
           </a:p>
           <a:p>
             <a:pPr lvl="2"/>
@@ -10633,6 +9083,7 @@
               <a:rPr lang="en-US"/>
               <a:t>Third level</a:t>
             </a:r>
+            <a:endParaRPr lang="en-US"/>
           </a:p>
           <a:p>
             <a:pPr lvl="3"/>
@@ -10640,6 +9091,7 @@
               <a:rPr lang="en-US"/>
               <a:t>Fourth level</a:t>
             </a:r>
+            <a:endParaRPr lang="en-US"/>
           </a:p>
           <a:p>
             <a:pPr lvl="4"/>
@@ -10712,6 +9164,7 @@
               <a:rPr lang="en-US"/>
               <a:t>Edit Master text styles</a:t>
             </a:r>
+            <a:endParaRPr lang="en-US"/>
           </a:p>
         </p:txBody>
       </p:sp>
@@ -10740,6 +9193,7 @@
               <a:rPr lang="en-US"/>
               <a:t>Edit Master text styles</a:t>
             </a:r>
+            <a:endParaRPr lang="en-US"/>
           </a:p>
           <a:p>
             <a:pPr lvl="1"/>
@@ -10747,6 +9201,7 @@
               <a:rPr lang="en-US"/>
               <a:t>Second level</a:t>
             </a:r>
+            <a:endParaRPr lang="en-US"/>
           </a:p>
           <a:p>
             <a:pPr lvl="2"/>
@@ -10754,6 +9209,7 @@
               <a:rPr lang="en-US"/>
               <a:t>Third level</a:t>
             </a:r>
+            <a:endParaRPr lang="en-US"/>
           </a:p>
           <a:p>
             <a:pPr lvl="3"/>
@@ -10761,6 +9217,7 @@
               <a:rPr lang="en-US"/>
               <a:t>Fourth level</a:t>
             </a:r>
+            <a:endParaRPr lang="en-US"/>
           </a:p>
           <a:p>
             <a:pPr lvl="4"/>
@@ -10789,7 +9246,6 @@
           <a:p>
             <a:fld id="{48A87A34-81AB-432B-8DAE-1953F412C126}" type="datetimeFigureOut">
               <a:rPr lang="en-US" smtClean="0"/>
-              <a:t>9/4/2019</a:t>
             </a:fld>
             <a:endParaRPr lang="en-US" dirty="0"/>
           </a:p>
@@ -10831,18 +9287,12 @@
           <a:p>
             <a:fld id="{6D22F896-40B5-4ADD-8801-0D06FADFA095}" type="slidenum">
               <a:rPr lang="en-US" smtClean="0"/>
-              <a:t>‹#›</a:t>
             </a:fld>
             <a:endParaRPr lang="en-US" dirty="0"/>
           </a:p>
         </p:txBody>
       </p:sp>
     </p:spTree>
-    <p:extLst>
-      <p:ext uri="{BB962C8B-B14F-4D97-AF65-F5344CB8AC3E}">
-        <p14:creationId xmlns:p14="http://schemas.microsoft.com/office/powerpoint/2010/main" val="302216305"/>
-      </p:ext>
-    </p:extLst>
   </p:cSld>
   <p:clrMapOvr>
     <a:masterClrMapping/>
@@ -10907,7 +9357,6 @@
           <a:p>
             <a:fld id="{48A87A34-81AB-432B-8DAE-1953F412C126}" type="datetimeFigureOut">
               <a:rPr lang="en-US" smtClean="0"/>
-              <a:t>9/4/2019</a:t>
             </a:fld>
             <a:endParaRPr lang="en-US" dirty="0"/>
           </a:p>
@@ -10949,18 +9398,12 @@
           <a:p>
             <a:fld id="{6D22F896-40B5-4ADD-8801-0D06FADFA095}" type="slidenum">
               <a:rPr lang="en-US" smtClean="0"/>
-              <a:t>‹#›</a:t>
             </a:fld>
             <a:endParaRPr lang="en-US" dirty="0"/>
           </a:p>
         </p:txBody>
       </p:sp>
     </p:spTree>
-    <p:extLst>
-      <p:ext uri="{BB962C8B-B14F-4D97-AF65-F5344CB8AC3E}">
-        <p14:creationId xmlns:p14="http://schemas.microsoft.com/office/powerpoint/2010/main" val="3005567828"/>
-      </p:ext>
-    </p:extLst>
   </p:cSld>
   <p:clrMapOvr>
     <a:masterClrMapping/>
@@ -11002,7 +9445,6 @@
           <a:p>
             <a:fld id="{48A87A34-81AB-432B-8DAE-1953F412C126}" type="datetimeFigureOut">
               <a:rPr lang="en-US" smtClean="0"/>
-              <a:t>9/4/2019</a:t>
             </a:fld>
             <a:endParaRPr lang="en-US" dirty="0"/>
           </a:p>
@@ -11044,18 +9486,12 @@
           <a:p>
             <a:fld id="{6D22F896-40B5-4ADD-8801-0D06FADFA095}" type="slidenum">
               <a:rPr lang="en-US" smtClean="0"/>
-              <a:t>‹#›</a:t>
             </a:fld>
             <a:endParaRPr lang="en-US" dirty="0"/>
           </a:p>
         </p:txBody>
       </p:sp>
     </p:spTree>
-    <p:extLst>
-      <p:ext uri="{BB962C8B-B14F-4D97-AF65-F5344CB8AC3E}">
-        <p14:creationId xmlns:p14="http://schemas.microsoft.com/office/powerpoint/2010/main" val="1561110249"/>
-      </p:ext>
-    </p:extLst>
   </p:cSld>
   <p:clrMapOvr>
     <a:masterClrMapping/>
@@ -11137,6 +9573,7 @@
               <a:rPr lang="en-US"/>
               <a:t>Edit Master text styles</a:t>
             </a:r>
+            <a:endParaRPr lang="en-US"/>
           </a:p>
           <a:p>
             <a:pPr lvl="1"/>
@@ -11144,6 +9581,7 @@
               <a:rPr lang="en-US"/>
               <a:t>Second level</a:t>
             </a:r>
+            <a:endParaRPr lang="en-US"/>
           </a:p>
           <a:p>
             <a:pPr lvl="2"/>
@@ -11151,6 +9589,7 @@
               <a:rPr lang="en-US"/>
               <a:t>Third level</a:t>
             </a:r>
+            <a:endParaRPr lang="en-US"/>
           </a:p>
           <a:p>
             <a:pPr lvl="3"/>
@@ -11158,6 +9597,7 @@
               <a:rPr lang="en-US"/>
               <a:t>Fourth level</a:t>
             </a:r>
+            <a:endParaRPr lang="en-US"/>
           </a:p>
           <a:p>
             <a:pPr lvl="4"/>
@@ -11255,6 +9695,7 @@
               <a:rPr lang="en-US"/>
               <a:t>Edit Master text styles</a:t>
             </a:r>
+            <a:endParaRPr lang="en-US"/>
           </a:p>
         </p:txBody>
       </p:sp>
@@ -11275,7 +9716,6 @@
           <a:p>
             <a:fld id="{48A87A34-81AB-432B-8DAE-1953F412C126}" type="datetimeFigureOut">
               <a:rPr lang="en-US" smtClean="0"/>
-              <a:t>9/4/2019</a:t>
             </a:fld>
             <a:endParaRPr lang="en-US" dirty="0"/>
           </a:p>
@@ -11317,18 +9757,12 @@
           <a:p>
             <a:fld id="{6D22F896-40B5-4ADD-8801-0D06FADFA095}" type="slidenum">
               <a:rPr lang="en-US" smtClean="0"/>
-              <a:t>‹#›</a:t>
             </a:fld>
             <a:endParaRPr lang="en-US" dirty="0"/>
           </a:p>
         </p:txBody>
       </p:sp>
     </p:spTree>
-    <p:extLst>
-      <p:ext uri="{BB962C8B-B14F-4D97-AF65-F5344CB8AC3E}">
-        <p14:creationId xmlns:p14="http://schemas.microsoft.com/office/powerpoint/2010/main" val="3676647067"/>
-      </p:ext>
-    </p:extLst>
   </p:cSld>
   <p:clrMapOvr>
     <a:masterClrMapping/>
@@ -11536,6 +9970,7 @@
               <a:rPr lang="en-US"/>
               <a:t>Edit Master text styles</a:t>
             </a:r>
+            <a:endParaRPr lang="en-US"/>
           </a:p>
         </p:txBody>
       </p:sp>
@@ -11556,7 +9991,6 @@
           <a:p>
             <a:fld id="{48A87A34-81AB-432B-8DAE-1953F412C126}" type="datetimeFigureOut">
               <a:rPr lang="en-US" smtClean="0"/>
-              <a:t>9/4/2019</a:t>
             </a:fld>
             <a:endParaRPr lang="en-US" dirty="0"/>
           </a:p>
@@ -11598,18 +10032,12 @@
           <a:p>
             <a:fld id="{6D22F896-40B5-4ADD-8801-0D06FADFA095}" type="slidenum">
               <a:rPr lang="en-US" smtClean="0"/>
-              <a:t>‹#›</a:t>
             </a:fld>
             <a:endParaRPr lang="en-US" dirty="0"/>
           </a:p>
         </p:txBody>
       </p:sp>
     </p:spTree>
-    <p:extLst>
-      <p:ext uri="{BB962C8B-B14F-4D97-AF65-F5344CB8AC3E}">
-        <p14:creationId xmlns:p14="http://schemas.microsoft.com/office/powerpoint/2010/main" val="2895025398"/>
-      </p:ext>
-    </p:extLst>
   </p:cSld>
   <p:clrMapOvr>
     <a:masterClrMapping/>
@@ -11623,7 +10051,7 @@
     <p:bg>
       <p:bgPr>
         <a:blipFill dpi="0" rotWithShape="1">
-          <a:blip r:embed="rId19">
+          <a:blip r:embed="rId18">
             <a:lum/>
           </a:blip>
           <a:srcRect/>
@@ -11711,6 +10139,7 @@
               <a:rPr lang="en-US"/>
               <a:t>Edit Master text styles</a:t>
             </a:r>
+            <a:endParaRPr lang="en-US"/>
           </a:p>
           <a:p>
             <a:pPr lvl="1"/>
@@ -11718,6 +10147,7 @@
               <a:rPr lang="en-US"/>
               <a:t>Second level</a:t>
             </a:r>
+            <a:endParaRPr lang="en-US"/>
           </a:p>
           <a:p>
             <a:pPr lvl="2"/>
@@ -11725,6 +10155,7 @@
               <a:rPr lang="en-US"/>
               <a:t>Third level</a:t>
             </a:r>
+            <a:endParaRPr lang="en-US"/>
           </a:p>
           <a:p>
             <a:pPr lvl="3"/>
@@ -11732,6 +10163,7 @@
               <a:rPr lang="en-US"/>
               <a:t>Fourth level</a:t>
             </a:r>
+            <a:endParaRPr lang="en-US"/>
           </a:p>
           <a:p>
             <a:pPr lvl="4"/>
@@ -11796,8 +10228,6 @@
           <a:p>
             <a:fld id="{48A87A34-81AB-432B-8DAE-1953F412C126}" type="datetimeFigureOut">
               <a:rPr lang="en-US" smtClean="0"/>
-              <a:pPr/>
-              <a:t>9/4/2019</a:t>
             </a:fld>
             <a:endParaRPr lang="en-US" dirty="0"/>
           </a:p>
@@ -11911,39 +10341,32 @@
           <a:p>
             <a:fld id="{6D22F896-40B5-4ADD-8801-0D06FADFA095}" type="slidenum">
               <a:rPr lang="en-US" smtClean="0"/>
-              <a:pPr/>
-              <a:t>‹#›</a:t>
             </a:fld>
             <a:endParaRPr lang="en-US" dirty="0"/>
           </a:p>
         </p:txBody>
       </p:sp>
     </p:spTree>
-    <p:extLst>
-      <p:ext uri="{BB962C8B-B14F-4D97-AF65-F5344CB8AC3E}">
-        <p14:creationId xmlns:p14="http://schemas.microsoft.com/office/powerpoint/2010/main" val="2889801359"/>
-      </p:ext>
-    </p:extLst>
   </p:cSld>
   <p:clrMap bg1="dk1" tx1="lt1" bg2="dk2" tx2="lt2" accent1="accent1" accent2="accent2" accent3="accent3" accent4="accent4" accent5="accent5" accent6="accent6" hlink="hlink" folHlink="folHlink"/>
   <p:sldLayoutIdLst>
-    <p:sldLayoutId id="2147483685" r:id="rId1"/>
-    <p:sldLayoutId id="2147483686" r:id="rId2"/>
-    <p:sldLayoutId id="2147483687" r:id="rId3"/>
-    <p:sldLayoutId id="2147483688" r:id="rId4"/>
-    <p:sldLayoutId id="2147483689" r:id="rId5"/>
-    <p:sldLayoutId id="2147483690" r:id="rId6"/>
-    <p:sldLayoutId id="2147483691" r:id="rId7"/>
-    <p:sldLayoutId id="2147483692" r:id="rId8"/>
-    <p:sldLayoutId id="2147483693" r:id="rId9"/>
-    <p:sldLayoutId id="2147483694" r:id="rId10"/>
-    <p:sldLayoutId id="2147483695" r:id="rId11"/>
-    <p:sldLayoutId id="2147483696" r:id="rId12"/>
-    <p:sldLayoutId id="2147483697" r:id="rId13"/>
-    <p:sldLayoutId id="2147483698" r:id="rId14"/>
-    <p:sldLayoutId id="2147483699" r:id="rId15"/>
-    <p:sldLayoutId id="2147483700" r:id="rId16"/>
-    <p:sldLayoutId id="2147483701" r:id="rId17"/>
+    <p:sldLayoutId id="2147483649" r:id="rId1"/>
+    <p:sldLayoutId id="2147483650" r:id="rId2"/>
+    <p:sldLayoutId id="2147483651" r:id="rId3"/>
+    <p:sldLayoutId id="2147483652" r:id="rId4"/>
+    <p:sldLayoutId id="2147483653" r:id="rId5"/>
+    <p:sldLayoutId id="2147483654" r:id="rId6"/>
+    <p:sldLayoutId id="2147483655" r:id="rId7"/>
+    <p:sldLayoutId id="2147483656" r:id="rId8"/>
+    <p:sldLayoutId id="2147483657" r:id="rId9"/>
+    <p:sldLayoutId id="2147483658" r:id="rId10"/>
+    <p:sldLayoutId id="2147483659" r:id="rId11"/>
+    <p:sldLayoutId id="2147483660" r:id="rId12"/>
+    <p:sldLayoutId id="2147483661" r:id="rId13"/>
+    <p:sldLayoutId id="2147483662" r:id="rId14"/>
+    <p:sldLayoutId id="2147483663" r:id="rId15"/>
+    <p:sldLayoutId id="2147483664" r:id="rId16"/>
+    <p:sldLayoutId id="2147483665" r:id="rId17"/>
   </p:sldLayoutIdLst>
   <p:txStyles>
     <p:titleStyle>
@@ -12506,7 +10929,7 @@
           </a:bodyPr>
           <a:lstStyle/>
           <a:p>
-            <a:pPr marL="118872" indent="0">
+            <a:pPr marL="118745" indent="0">
               <a:buNone/>
             </a:pPr>
             <a:r>
@@ -12516,7 +10939,7 @@
             <a:endParaRPr lang="en-US" altLang="zh-CN" dirty="0"/>
           </a:p>
           <a:p>
-            <a:pPr marL="118872" indent="0">
+            <a:pPr marL="118745" indent="0">
               <a:buNone/>
             </a:pPr>
             <a:r>
@@ -12530,7 +10953,7 @@
             <a:endParaRPr lang="en-US" altLang="zh-CN" dirty="0"/>
           </a:p>
           <a:p>
-            <a:pPr marL="118872" indent="0">
+            <a:pPr marL="118745" indent="0">
               <a:buNone/>
             </a:pPr>
             <a:r>
@@ -12544,7 +10967,7 @@
             <a:endParaRPr lang="en-US" altLang="zh-CN" dirty="0"/>
           </a:p>
           <a:p>
-            <a:pPr marL="118872" indent="0">
+            <a:pPr marL="118745" indent="0">
               <a:buNone/>
             </a:pPr>
             <a:r>
@@ -12558,7 +10981,7 @@
             <a:endParaRPr lang="en-US" altLang="zh-CN" dirty="0"/>
           </a:p>
           <a:p>
-            <a:pPr marL="118872" indent="0">
+            <a:pPr marL="118745" indent="0">
               <a:buNone/>
             </a:pPr>
             <a:r>
@@ -12572,7 +10995,7 @@
             <a:endParaRPr lang="en-US" altLang="zh-CN" dirty="0"/>
           </a:p>
           <a:p>
-            <a:pPr marL="118872" indent="0">
+            <a:pPr marL="118745" indent="0">
               <a:buNone/>
             </a:pPr>
             <a:r>
@@ -12586,7 +11009,7 @@
             <a:endParaRPr lang="en-US" altLang="zh-CN" dirty="0"/>
           </a:p>
           <a:p>
-            <a:pPr marL="118872" indent="0">
+            <a:pPr marL="118745" indent="0">
               <a:buNone/>
             </a:pPr>
             <a:r>
@@ -12600,13 +11023,13 @@
             <a:endParaRPr lang="en-US" altLang="zh-CN" dirty="0"/>
           </a:p>
           <a:p>
-            <a:pPr marL="118872" indent="0">
+            <a:pPr marL="118745" indent="0">
               <a:buNone/>
             </a:pPr>
             <a:endParaRPr lang="en-US" altLang="zh-CN" dirty="0"/>
           </a:p>
           <a:p>
-            <a:pPr marL="118872" indent="0">
+            <a:pPr marL="118745" indent="0">
               <a:buNone/>
             </a:pPr>
             <a:r>
@@ -12616,22 +11039,23 @@
             <a:endParaRPr lang="en-US" altLang="zh-CN" dirty="0"/>
           </a:p>
           <a:p>
-            <a:pPr marL="118872" indent="0">
+            <a:pPr marL="118745" indent="0">
               <a:buNone/>
             </a:pPr>
             <a:endParaRPr lang="en-US" altLang="zh-CN" dirty="0"/>
           </a:p>
           <a:p>
-            <a:pPr marL="118872" indent="0">
+            <a:pPr marL="118745" indent="0">
               <a:buNone/>
             </a:pPr>
             <a:r>
               <a:rPr lang="zh-CN" altLang="en-US" dirty="0"/>
               <a:t>思考：采访以前的软件工程团队，他们有上面的问题么？有的连代码都找不到了。那他们学到了什么软件工程呢？ </a:t>
             </a:r>
-          </a:p>
-          <a:p>
-            <a:pPr marL="118872" indent="0">
+            <a:endParaRPr lang="zh-CN" altLang="en-US" dirty="0"/>
+          </a:p>
+          <a:p>
+            <a:pPr marL="118745" indent="0">
               <a:buNone/>
             </a:pPr>
             <a:endParaRPr lang="en-US" dirty="0"/>
@@ -12639,11 +11063,6 @@
         </p:txBody>
       </p:sp>
     </p:spTree>
-    <p:extLst>
-      <p:ext uri="{BB962C8B-B14F-4D97-AF65-F5344CB8AC3E}">
-        <p14:creationId xmlns:p14="http://schemas.microsoft.com/office/powerpoint/2010/main" val="3019586189"/>
-      </p:ext>
-    </p:extLst>
   </p:cSld>
   <p:clrMapOvr>
     <a:masterClrMapping/>
@@ -12751,6 +11170,7 @@
               <a:rPr lang="en-US" dirty="0"/>
               <a:t>ntegrated</a:t>
             </a:r>
+            <a:endParaRPr lang="en-US" dirty="0"/>
           </a:p>
           <a:p>
             <a:pPr lvl="1"/>
@@ -12758,6 +11178,7 @@
               <a:rPr lang="en-US" dirty="0"/>
               <a:t>Defined by CMU Software Engineering Institute</a:t>
             </a:r>
+            <a:endParaRPr lang="en-US" dirty="0"/>
           </a:p>
           <a:p>
             <a:r>
@@ -13330,6 +11751,7 @@
               <a:rPr lang="en-US" dirty="0"/>
               <a:t>)</a:t>
             </a:r>
+            <a:endParaRPr lang="en-US" dirty="0"/>
           </a:p>
         </p:txBody>
       </p:sp>
@@ -13410,6 +11832,7 @@
               <a:rPr lang="en-US" dirty="0"/>
               <a:t>onal Software Process</a:t>
             </a:r>
+            <a:endParaRPr lang="en-US" dirty="0"/>
           </a:p>
           <a:p>
             <a:pPr lvl="1"/>
@@ -13425,6 +11848,7 @@
               <a:rPr lang="en-US" dirty="0"/>
               <a:t>Team Software Process, CMM</a:t>
             </a:r>
+            <a:endParaRPr lang="en-US" dirty="0"/>
           </a:p>
           <a:p>
             <a:pPr lvl="2"/>
@@ -13432,6 +11856,7 @@
               <a:rPr lang="en-US" dirty="0"/>
               <a:t>Team organization</a:t>
             </a:r>
+            <a:endParaRPr lang="en-US" dirty="0"/>
           </a:p>
           <a:p>
             <a:r>
@@ -13450,6 +11875,7 @@
               <a:rPr lang="en-US" dirty="0"/>
               <a:t> </a:t>
             </a:r>
+            <a:endParaRPr lang="en-US" dirty="0"/>
           </a:p>
           <a:p>
             <a:r>
@@ -13476,6 +11902,7 @@
               <a:rPr lang="en-US" dirty="0"/>
               <a:t>)</a:t>
             </a:r>
+            <a:endParaRPr lang="en-US" dirty="0"/>
           </a:p>
           <a:p>
             <a:pPr lvl="1"/>
@@ -13496,11 +11923,6 @@
         </p:txBody>
       </p:sp>
     </p:spTree>
-    <p:extLst>
-      <p:ext uri="{BB962C8B-B14F-4D97-AF65-F5344CB8AC3E}">
-        <p14:creationId xmlns:p14="http://schemas.microsoft.com/office/powerpoint/2010/main" val="1635746704"/>
-      </p:ext>
-    </p:extLst>
   </p:cSld>
   <p:clrMapOvr>
     <a:masterClrMapping/>
@@ -14223,6 +12645,7 @@
               <a:rPr lang="en-US" dirty="0"/>
               <a:t>)</a:t>
             </a:r>
+            <a:endParaRPr lang="en-US" dirty="0"/>
           </a:p>
         </p:txBody>
       </p:sp>
@@ -14259,6 +12682,7 @@
               <a:rPr lang="en-US" dirty="0"/>
               <a:t>Decision making, </a:t>
             </a:r>
+            <a:endParaRPr lang="en-US" dirty="0"/>
           </a:p>
           <a:p>
             <a:pPr lvl="1"/>
@@ -14270,6 +12694,7 @@
               <a:rPr lang="en-US" dirty="0"/>
               <a:t>Risk Tasking, </a:t>
             </a:r>
+            <a:endParaRPr lang="en-US" dirty="0"/>
           </a:p>
           <a:p>
             <a:pPr lvl="1"/>
@@ -14281,6 +12706,7 @@
               <a:rPr lang="en-US" altLang="zh-CN" dirty="0"/>
               <a:t>Value System,</a:t>
             </a:r>
+            <a:endParaRPr lang="en-US" altLang="zh-CN" dirty="0"/>
           </a:p>
           <a:p>
             <a:pPr lvl="1"/>
@@ -14292,6 +12718,7 @@
               <a:rPr lang="en-US" dirty="0"/>
               <a:t>Process</a:t>
             </a:r>
+            <a:endParaRPr lang="en-US" dirty="0"/>
           </a:p>
           <a:p>
             <a:r>
@@ -14327,11 +12754,6 @@
         </p:txBody>
       </p:sp>
     </p:spTree>
-    <p:extLst>
-      <p:ext uri="{BB962C8B-B14F-4D97-AF65-F5344CB8AC3E}">
-        <p14:creationId xmlns:p14="http://schemas.microsoft.com/office/powerpoint/2010/main" val="459747832"/>
-      </p:ext>
-    </p:extLst>
   </p:cSld>
   <p:clrMapOvr>
     <a:masterClrMapping/>
@@ -14850,6 +13272,7 @@
               <a:rPr lang="en-US" dirty="0"/>
               <a:t>Decision Making</a:t>
             </a:r>
+            <a:endParaRPr lang="en-US" dirty="0"/>
           </a:p>
         </p:txBody>
       </p:sp>
@@ -14882,6 +13305,7 @@
               <a:rPr lang="en-US" dirty="0"/>
               <a:t>Dictation</a:t>
             </a:r>
+            <a:endParaRPr lang="en-US" dirty="0"/>
           </a:p>
           <a:p>
             <a:pPr lvl="1"/>
@@ -14889,6 +13313,7 @@
               <a:rPr lang="en-US" dirty="0"/>
               <a:t>Great for the dictator; quick to make quick decisions</a:t>
             </a:r>
+            <a:endParaRPr lang="en-US" dirty="0"/>
           </a:p>
           <a:p>
             <a:r>
@@ -14903,6 +13328,7 @@
               <a:rPr lang="en-US" dirty="0"/>
               <a:t>Consulting</a:t>
             </a:r>
+            <a:endParaRPr lang="en-US" dirty="0"/>
           </a:p>
           <a:p>
             <a:pPr lvl="1"/>
@@ -14910,6 +13336,7 @@
               <a:rPr lang="en-US" dirty="0"/>
               <a:t>Get more info</a:t>
             </a:r>
+            <a:endParaRPr lang="en-US" dirty="0"/>
           </a:p>
           <a:p>
             <a:r>
@@ -14924,6 +13351,7 @@
               <a:rPr lang="en-US" dirty="0"/>
               <a:t>Democracy</a:t>
             </a:r>
+            <a:endParaRPr lang="en-US" dirty="0"/>
           </a:p>
           <a:p>
             <a:pPr lvl="1"/>
@@ -14931,6 +13359,7 @@
               <a:rPr lang="en-US" dirty="0"/>
               <a:t>Follow the crowd</a:t>
             </a:r>
+            <a:endParaRPr lang="en-US" dirty="0"/>
           </a:p>
           <a:p>
             <a:pPr lvl="1"/>
@@ -14938,6 +13367,7 @@
               <a:rPr lang="en-US" dirty="0"/>
               <a:t>Creating winner/losers</a:t>
             </a:r>
+            <a:endParaRPr lang="en-US" dirty="0"/>
           </a:p>
           <a:p>
             <a:r>
@@ -14952,6 +13382,7 @@
               <a:rPr lang="en-US" dirty="0"/>
               <a:t>Consensus</a:t>
             </a:r>
+            <a:endParaRPr lang="en-US" dirty="0"/>
           </a:p>
           <a:p>
             <a:pPr lvl="1"/>
@@ -14959,6 +13390,7 @@
               <a:rPr lang="en-US" dirty="0"/>
               <a:t>Great commitment, if a conclusion can be reached</a:t>
             </a:r>
+            <a:endParaRPr lang="en-US" dirty="0"/>
           </a:p>
           <a:p>
             <a:endParaRPr lang="en-US" dirty="0"/>
@@ -14966,11 +13398,6 @@
         </p:txBody>
       </p:sp>
     </p:spTree>
-    <p:extLst>
-      <p:ext uri="{BB962C8B-B14F-4D97-AF65-F5344CB8AC3E}">
-        <p14:creationId xmlns:p14="http://schemas.microsoft.com/office/powerpoint/2010/main" val="4191706059"/>
-      </p:ext>
-    </p:extLst>
   </p:cSld>
   <p:clrMapOvr>
     <a:masterClrMapping/>
@@ -15005,26 +13432,11 @@
       </p:grpSpPr>
       <p:sp useBgFill="1">
         <p:nvSpPr>
-          <p:cNvPr id="8" name="Rectangle 7">
-            <a:extLst>
-              <a:ext uri="{FF2B5EF4-FFF2-40B4-BE49-F238E27FC236}">
-                <a16:creationId xmlns:a16="http://schemas.microsoft.com/office/drawing/2014/main" id="{E47A690B-DE55-4274-B33B-C91FD647EB63}"/>
-              </a:ext>
-              <a:ext uri="{C183D7F6-B498-43B3-948B-1728B52AA6E4}">
-                <adec:decorative xmlns:adec="http://schemas.microsoft.com/office/drawing/2017/decorative" val="1"/>
-              </a:ext>
-            </a:extLst>
-          </p:cNvPr>
+          <p:cNvPr id="8" name="Rectangle 7"/>
           <p:cNvSpPr>
             <a:spLocks noGrp="1" noRot="1" noChangeAspect="1" noMove="1" noResize="1" noEditPoints="1" noAdjustHandles="1" noChangeArrowheads="1" noChangeShapeType="1" noTextEdit="1"/>
           </p:cNvSpPr>
-          <p:nvPr>
-            <p:extLst>
-              <p:ext uri="{386F3935-93C4-4BCD-93E2-E3B085C9AB24}">
-                <p16:designElem xmlns:p16="http://schemas.microsoft.com/office/powerpoint/2015/main" val="1"/>
-              </p:ext>
-            </p:extLst>
-          </p:nvPr>
+          <p:nvPr/>
         </p:nvSpPr>
         <p:spPr>
           <a:xfrm>
@@ -15065,26 +13477,11 @@
       </p:sp>
       <p:sp>
         <p:nvSpPr>
-          <p:cNvPr id="10" name="Rectangle 9">
-            <a:extLst>
-              <a:ext uri="{FF2B5EF4-FFF2-40B4-BE49-F238E27FC236}">
-                <a16:creationId xmlns:a16="http://schemas.microsoft.com/office/drawing/2014/main" id="{DC9CD390-6DB5-4AEA-8D13-BC6CEF344F9D}"/>
-              </a:ext>
-              <a:ext uri="{C183D7F6-B498-43B3-948B-1728B52AA6E4}">
-                <adec:decorative xmlns:adec="http://schemas.microsoft.com/office/drawing/2017/decorative" val="1"/>
-              </a:ext>
-            </a:extLst>
-          </p:cNvPr>
+          <p:cNvPr id="10" name="Rectangle 9"/>
           <p:cNvSpPr>
             <a:spLocks noGrp="1" noRot="1" noChangeAspect="1" noMove="1" noResize="1" noEditPoints="1" noAdjustHandles="1" noChangeArrowheads="1" noChangeShapeType="1" noTextEdit="1"/>
           </p:cNvSpPr>
-          <p:nvPr>
-            <p:extLst>
-              <p:ext uri="{386F3935-93C4-4BCD-93E2-E3B085C9AB24}">
-                <p16:designElem xmlns:p16="http://schemas.microsoft.com/office/powerpoint/2015/main" val="1"/>
-              </p:ext>
-            </p:extLst>
-          </p:nvPr>
+          <p:nvPr/>
         </p:nvSpPr>
         <p:spPr>
           <a:xfrm>
@@ -15130,13 +13527,7 @@
       </p:sp>
       <p:sp>
         <p:nvSpPr>
-          <p:cNvPr id="2" name="Title 1">
-            <a:extLst>
-              <a:ext uri="{FF2B5EF4-FFF2-40B4-BE49-F238E27FC236}">
-                <a16:creationId xmlns:a16="http://schemas.microsoft.com/office/drawing/2014/main" id="{75C789EB-8B05-4291-8E79-3D8ED33855E8}"/>
-              </a:ext>
-            </a:extLst>
-          </p:cNvPr>
+          <p:cNvPr id="2" name="Title 1"/>
           <p:cNvSpPr>
             <a:spLocks noGrp="1"/>
           </p:cNvSpPr>
@@ -15190,26 +13581,11 @@
       </p:sp>
       <p:sp>
         <p:nvSpPr>
-          <p:cNvPr id="12" name="Rectangle 11">
-            <a:extLst>
-              <a:ext uri="{FF2B5EF4-FFF2-40B4-BE49-F238E27FC236}">
-                <a16:creationId xmlns:a16="http://schemas.microsoft.com/office/drawing/2014/main" id="{11FA69C6-0A69-4994-9F32-C4497B8B4CBF}"/>
-              </a:ext>
-              <a:ext uri="{C183D7F6-B498-43B3-948B-1728B52AA6E4}">
-                <adec:decorative xmlns:adec="http://schemas.microsoft.com/office/drawing/2017/decorative" val="1"/>
-              </a:ext>
-            </a:extLst>
-          </p:cNvPr>
+          <p:cNvPr id="12" name="Rectangle 11"/>
           <p:cNvSpPr>
             <a:spLocks noGrp="1" noRot="1" noChangeAspect="1" noMove="1" noResize="1" noEditPoints="1" noAdjustHandles="1" noChangeArrowheads="1" noChangeShapeType="1" noTextEdit="1"/>
           </p:cNvSpPr>
-          <p:nvPr>
-            <p:extLst>
-              <p:ext uri="{386F3935-93C4-4BCD-93E2-E3B085C9AB24}">
-                <p16:designElem xmlns:p16="http://schemas.microsoft.com/office/powerpoint/2015/main" val="1"/>
-              </p:ext>
-            </p:extLst>
-          </p:nvPr>
+          <p:nvPr/>
         </p:nvSpPr>
         <p:spPr>
           <a:xfrm>
@@ -15255,13 +13631,7 @@
       </p:sp>
       <p:sp>
         <p:nvSpPr>
-          <p:cNvPr id="3" name="Content Placeholder 2">
-            <a:extLst>
-              <a:ext uri="{FF2B5EF4-FFF2-40B4-BE49-F238E27FC236}">
-                <a16:creationId xmlns:a16="http://schemas.microsoft.com/office/drawing/2014/main" id="{2D68D149-13E7-4407-AB4F-9FD920F56413}"/>
-              </a:ext>
-            </a:extLst>
-          </p:cNvPr>
+          <p:cNvPr id="3" name="Content Placeholder 2"/>
           <p:cNvSpPr>
             <a:spLocks noGrp="1"/>
           </p:cNvSpPr>
@@ -15294,6 +13664,14 @@
               </a:rPr>
               <a:t>Capability of software product to satisfy stated and implied needs under specified conditions. </a:t>
             </a:r>
+            <a:endParaRPr lang="en-US" altLang="zh-CN" sz="1800">
+              <a:solidFill>
+                <a:schemeClr val="tx1">
+                  <a:lumMod val="85000"/>
+                  <a:lumOff val="15000"/>
+                </a:schemeClr>
+              </a:solidFill>
+            </a:endParaRPr>
           </a:p>
           <a:p>
             <a:pPr lvl="1"/>
@@ -15319,6 +13697,14 @@
               </a:rPr>
               <a:t>The degree to which a software product meets established requirements; however, quality depends upon the degree to which those established requirements accurately represent stakeholder needs, wants, and expectations. </a:t>
             </a:r>
+            <a:endParaRPr lang="en-US" altLang="zh-CN" sz="1800">
+              <a:solidFill>
+                <a:schemeClr val="tx1">
+                  <a:lumMod val="85000"/>
+                  <a:lumOff val="15000"/>
+                </a:schemeClr>
+              </a:solidFill>
+            </a:endParaRPr>
           </a:p>
           <a:p>
             <a:pPr lvl="1"/>
@@ -15343,9 +13729,17 @@
               </a:rPr>
               <a:t>这两个定义都强调了软件要符合用户以及利益相关者的需求。</a:t>
             </a:r>
-          </a:p>
-          <a:p>
-            <a:pPr marL="118872" indent="0">
+            <a:endParaRPr lang="zh-CN" altLang="en-US" sz="1800">
+              <a:solidFill>
+                <a:schemeClr val="tx1">
+                  <a:lumMod val="85000"/>
+                  <a:lumOff val="15000"/>
+                </a:schemeClr>
+              </a:solidFill>
+            </a:endParaRPr>
+          </a:p>
+          <a:p>
+            <a:pPr marL="118745" indent="0">
               <a:buNone/>
             </a:pPr>
             <a:endParaRPr lang="en-US" sz="1800">
@@ -15360,11 +13754,6 @@
         </p:txBody>
       </p:sp>
     </p:spTree>
-    <p:extLst>
-      <p:ext uri="{BB962C8B-B14F-4D97-AF65-F5344CB8AC3E}">
-        <p14:creationId xmlns:p14="http://schemas.microsoft.com/office/powerpoint/2010/main" val="960325337"/>
-      </p:ext>
-    </p:extLst>
   </p:cSld>
   <p:clrMapOvr>
     <a:overrideClrMapping bg1="lt1" tx1="dk1" bg2="lt2" tx2="dk2" accent1="accent1" accent2="accent2" accent3="accent3" accent4="accent4" accent5="accent5" accent6="accent6" hlink="hlink" folHlink="folHlink"/>
@@ -15489,11 +13878,6 @@
         </p:txBody>
       </p:sp>
     </p:spTree>
-    <p:extLst>
-      <p:ext uri="{BB962C8B-B14F-4D97-AF65-F5344CB8AC3E}">
-        <p14:creationId xmlns:p14="http://schemas.microsoft.com/office/powerpoint/2010/main" val="1815560686"/>
-      </p:ext>
-    </p:extLst>
   </p:cSld>
   <p:clrMapOvr>
     <a:masterClrMapping/>
@@ -15576,7 +13960,7 @@
           <p:nvPr/>
         </p:nvPicPr>
         <p:blipFill>
-          <a:blip r:embed="rId3" cstate="print"/>
+          <a:blip r:embed="rId1" cstate="print"/>
           <a:srcRect l="645" r="2562" b="7561"/>
           <a:stretch>
             <a:fillRect/>
@@ -15611,9 +13995,7 @@
       <p:grpSp>
         <p:nvGrpSpPr>
           <p:cNvPr id="2" name="Group 40"/>
-          <p:cNvGrpSpPr>
-            <a:grpSpLocks/>
-          </p:cNvGrpSpPr>
+          <p:cNvGrpSpPr/>
           <p:nvPr/>
         </p:nvGrpSpPr>
         <p:grpSpPr bwMode="auto">
@@ -15633,7 +14015,7 @@
             <p:nvPr/>
           </p:nvPicPr>
           <p:blipFill>
-            <a:blip r:embed="rId4" cstate="print"/>
+            <a:blip r:embed="rId2" cstate="print"/>
             <a:srcRect/>
             <a:stretch>
               <a:fillRect/>
@@ -15676,8 +14058,6 @@
             <a:ln w="9525">
               <a:noFill/>
               <a:miter lim="800000"/>
-              <a:headEnd/>
-              <a:tailEnd/>
             </a:ln>
             <a:effectLst/>
           </p:spPr>
@@ -15704,7 +14084,7 @@
                     </a:outerShdw>
                   </a:effectLst>
                   <a:latin typeface="Segoe Semibold"/>
-                  <a:cs typeface="Arial" pitchFamily="34" charset="0"/>
+                  <a:cs typeface="Arial" panose="020B0604020202020204" pitchFamily="34" charset="0"/>
                 </a:rPr>
                 <a:t>Work</a:t>
               </a:r>
@@ -15716,7 +14096,7 @@
                     </a:outerShdw>
                   </a:effectLst>
                   <a:latin typeface="Segoe Semibold"/>
-                  <a:cs typeface="Arial" pitchFamily="34" charset="0"/>
+                  <a:cs typeface="Arial" panose="020B0604020202020204" pitchFamily="34" charset="0"/>
                 </a:rPr>
               </a:br>
               <a:r>
@@ -15727,10 +14107,19 @@
                     </a:outerShdw>
                   </a:effectLst>
                   <a:latin typeface="Segoe Semibold"/>
-                  <a:cs typeface="Arial" pitchFamily="34" charset="0"/>
+                  <a:cs typeface="Arial" panose="020B0604020202020204" pitchFamily="34" charset="0"/>
                 </a:rPr>
                 <a:t>completed</a:t>
               </a:r>
+              <a:endParaRPr lang="en-US">
+                <a:effectLst>
+                  <a:outerShdw blurRad="38100" dist="38100" dir="2700000" algn="tl">
+                    <a:srgbClr val="000000"/>
+                  </a:outerShdw>
+                </a:effectLst>
+                <a:latin typeface="Segoe Semibold"/>
+                <a:cs typeface="Arial" panose="020B0604020202020204" pitchFamily="34" charset="0"/>
+              </a:endParaRPr>
             </a:p>
           </p:txBody>
         </p:sp>
@@ -15738,9 +14127,7 @@
       <p:grpSp>
         <p:nvGrpSpPr>
           <p:cNvPr id="3" name="Group 39"/>
-          <p:cNvGrpSpPr>
-            <a:grpSpLocks/>
-          </p:cNvGrpSpPr>
+          <p:cNvGrpSpPr/>
           <p:nvPr/>
         </p:nvGrpSpPr>
         <p:grpSpPr bwMode="auto">
@@ -15760,7 +14147,7 @@
             <p:nvPr/>
           </p:nvPicPr>
           <p:blipFill>
-            <a:blip r:embed="rId5" cstate="print"/>
+            <a:blip r:embed="rId3" cstate="print"/>
             <a:srcRect/>
             <a:stretch>
               <a:fillRect/>
@@ -15803,8 +14190,6 @@
             <a:ln w="9525">
               <a:noFill/>
               <a:miter lim="800000"/>
-              <a:headEnd/>
-              <a:tailEnd/>
             </a:ln>
             <a:effectLst/>
           </p:spPr>
@@ -15844,16 +14229,18 @@
                 </a:rPr>
                 <a:t> planned</a:t>
               </a:r>
+              <a:endParaRPr lang="en-US">
+                <a:effectLst>
+                  <a:outerShdw blurRad="38100" dist="38100" dir="2700000" algn="tl">
+                    <a:srgbClr val="000000"/>
+                  </a:outerShdw>
+                </a:effectLst>
+              </a:endParaRPr>
             </a:p>
           </p:txBody>
         </p:sp>
       </p:grpSp>
     </p:spTree>
-    <p:extLst>
-      <p:ext uri="{BB962C8B-B14F-4D97-AF65-F5344CB8AC3E}">
-        <p14:creationId xmlns:p14="http://schemas.microsoft.com/office/powerpoint/2010/main" val="3620935438"/>
-      </p:ext>
-    </p:extLst>
   </p:cSld>
   <p:clrMapOvr>
     <a:masterClrMapping/>
@@ -16055,7 +14442,7 @@
           <p:nvPr/>
         </p:nvPicPr>
         <p:blipFill>
-          <a:blip r:embed="rId3" cstate="print"/>
+          <a:blip r:embed="rId1" cstate="print"/>
           <a:srcRect l="169" t="552" r="4880" b="10860"/>
           <a:stretch>
             <a:fillRect/>
@@ -16090,9 +14477,7 @@
       <p:grpSp>
         <p:nvGrpSpPr>
           <p:cNvPr id="2" name="Group 59"/>
-          <p:cNvGrpSpPr>
-            <a:grpSpLocks/>
-          </p:cNvGrpSpPr>
+          <p:cNvGrpSpPr/>
           <p:nvPr/>
         </p:nvGrpSpPr>
         <p:grpSpPr bwMode="auto">
@@ -16112,7 +14497,7 @@
             <p:nvPr/>
           </p:nvPicPr>
           <p:blipFill>
-            <a:blip r:embed="rId4" cstate="print"/>
+            <a:blip r:embed="rId2" cstate="print"/>
             <a:srcRect/>
             <a:stretch>
               <a:fillRect/>
@@ -16155,8 +14540,6 @@
             <a:ln w="9525" algn="ctr">
               <a:noFill/>
               <a:miter lim="800000"/>
-              <a:headEnd/>
-              <a:tailEnd/>
             </a:ln>
             <a:effectLst/>
           </p:spPr>
@@ -16180,16 +14563,19 @@
                 </a:rPr>
                 <a:t>Bulge in work in process (i.e. in testing) indicates inadequate resources or inadequate incoming quality</a:t>
               </a:r>
+              <a:endParaRPr lang="en-US" sz="1600">
+                <a:effectLst>
+                  <a:outerShdw blurRad="38100" dist="38100" dir="2700000" algn="tl">
+                    <a:srgbClr val="000000"/>
+                  </a:outerShdw>
+                </a:effectLst>
+                <a:latin typeface="Segoe Semibold"/>
+              </a:endParaRPr>
             </a:p>
           </p:txBody>
         </p:sp>
       </p:grpSp>
     </p:spTree>
-    <p:extLst>
-      <p:ext uri="{BB962C8B-B14F-4D97-AF65-F5344CB8AC3E}">
-        <p14:creationId xmlns:p14="http://schemas.microsoft.com/office/powerpoint/2010/main" val="2417494197"/>
-      </p:ext>
-    </p:extLst>
   </p:cSld>
   <p:clrMapOvr>
     <a:masterClrMapping/>
@@ -16310,7 +14696,7 @@
           <p:nvPr/>
         </p:nvPicPr>
         <p:blipFill>
-          <a:blip r:embed="rId3" cstate="print"/>
+          <a:blip r:embed="rId1" cstate="print"/>
           <a:srcRect b="6262"/>
           <a:stretch>
             <a:fillRect/>
@@ -16379,15 +14765,14 @@
               <a:rPr lang="en-US" sz="4400" dirty="0"/>
               <a:t>Underestimating</a:t>
             </a:r>
+            <a:endParaRPr lang="en-US" sz="4400" dirty="0"/>
           </a:p>
         </p:txBody>
       </p:sp>
       <p:grpSp>
         <p:nvGrpSpPr>
           <p:cNvPr id="2" name="Group 35"/>
-          <p:cNvGrpSpPr>
-            <a:grpSpLocks/>
-          </p:cNvGrpSpPr>
+          <p:cNvGrpSpPr/>
           <p:nvPr/>
         </p:nvGrpSpPr>
         <p:grpSpPr bwMode="auto">
@@ -16407,7 +14792,7 @@
             <p:nvPr/>
           </p:nvPicPr>
           <p:blipFill>
-            <a:blip r:embed="rId4" cstate="print"/>
+            <a:blip r:embed="rId2" cstate="print"/>
             <a:srcRect/>
             <a:stretch>
               <a:fillRect/>
@@ -16450,8 +14835,6 @@
             <a:ln w="9525">
               <a:noFill/>
               <a:miter lim="800000"/>
-              <a:headEnd/>
-              <a:tailEnd/>
             </a:ln>
             <a:effectLst/>
           </p:spPr>
@@ -16523,6 +14906,14 @@
                 </a:rPr>
                 <a:t>but not enough cuts</a:t>
               </a:r>
+              <a:endParaRPr lang="en-US">
+                <a:effectLst>
+                  <a:outerShdw blurRad="38100" dist="38100" dir="2700000" algn="tl">
+                    <a:srgbClr val="000000"/>
+                  </a:outerShdw>
+                </a:effectLst>
+                <a:latin typeface="Segoe Semibold"/>
+              </a:endParaRPr>
             </a:p>
           </p:txBody>
         </p:sp>
@@ -16530,9 +14921,7 @@
       <p:grpSp>
         <p:nvGrpSpPr>
           <p:cNvPr id="3" name="Group 34"/>
-          <p:cNvGrpSpPr>
-            <a:grpSpLocks/>
-          </p:cNvGrpSpPr>
+          <p:cNvGrpSpPr/>
           <p:nvPr/>
         </p:nvGrpSpPr>
         <p:grpSpPr bwMode="auto">
@@ -16552,7 +14941,7 @@
             <p:nvPr/>
           </p:nvPicPr>
           <p:blipFill>
-            <a:blip r:embed="rId5" cstate="print"/>
+            <a:blip r:embed="rId3" cstate="print"/>
             <a:srcRect/>
             <a:stretch>
               <a:fillRect/>
@@ -16595,8 +14984,6 @@
             <a:ln w="9525">
               <a:noFill/>
               <a:miter lim="800000"/>
-              <a:headEnd/>
-              <a:tailEnd/>
             </a:ln>
           </p:spPr>
           <p:txBody>
@@ -16611,16 +14998,14 @@
                 </a:rPr>
                 <a:t>Steady rates of progress, but slope too shallow</a:t>
               </a:r>
+              <a:endParaRPr lang="en-US">
+                <a:latin typeface="Segoe Semibold"/>
+              </a:endParaRPr>
             </a:p>
           </p:txBody>
         </p:sp>
       </p:grpSp>
     </p:spTree>
-    <p:extLst>
-      <p:ext uri="{BB962C8B-B14F-4D97-AF65-F5344CB8AC3E}">
-        <p14:creationId xmlns:p14="http://schemas.microsoft.com/office/powerpoint/2010/main" val="2574932862"/>
-      </p:ext>
-    </p:extLst>
   </p:cSld>
   <p:clrMapOvr>
     <a:masterClrMapping/>
@@ -16785,7 +15170,7 @@
           <p:nvPr/>
         </p:nvPicPr>
         <p:blipFill>
-          <a:blip r:embed="rId3" cstate="print"/>
+          <a:blip r:embed="rId1" cstate="print"/>
           <a:srcRect b="2727"/>
           <a:stretch>
             <a:fillRect/>
@@ -16846,15 +15231,14 @@
               <a:rPr lang="en-US" sz="4400" dirty="0"/>
               <a:t>Inadequate Bug Allotment</a:t>
             </a:r>
+            <a:endParaRPr lang="en-US" sz="4400" dirty="0"/>
           </a:p>
         </p:txBody>
       </p:sp>
       <p:grpSp>
         <p:nvGrpSpPr>
           <p:cNvPr id="2" name="Group 13"/>
-          <p:cNvGrpSpPr>
-            <a:grpSpLocks/>
-          </p:cNvGrpSpPr>
+          <p:cNvGrpSpPr/>
           <p:nvPr/>
         </p:nvGrpSpPr>
         <p:grpSpPr bwMode="auto">
@@ -16874,7 +15258,7 @@
             <p:nvPr/>
           </p:nvPicPr>
           <p:blipFill>
-            <a:blip r:embed="rId4" cstate="print"/>
+            <a:blip r:embed="rId2" cstate="print"/>
             <a:srcRect/>
             <a:stretch>
               <a:fillRect/>
@@ -16917,8 +15301,6 @@
             <a:ln w="9525">
               <a:noFill/>
               <a:miter lim="800000"/>
-              <a:headEnd/>
-              <a:tailEnd/>
             </a:ln>
             <a:effectLst/>
           </p:spPr>
@@ -16969,16 +15351,19 @@
                 </a:rPr>
                 <a:t>at iteration start</a:t>
               </a:r>
+              <a:endParaRPr lang="en-US">
+                <a:effectLst>
+                  <a:outerShdw blurRad="38100" dist="38100" dir="2700000" algn="tl">
+                    <a:srgbClr val="000000"/>
+                  </a:outerShdw>
+                </a:effectLst>
+                <a:latin typeface="Segoe Semibold"/>
+              </a:endParaRPr>
             </a:p>
           </p:txBody>
         </p:sp>
       </p:grpSp>
     </p:spTree>
-    <p:extLst>
-      <p:ext uri="{BB962C8B-B14F-4D97-AF65-F5344CB8AC3E}">
-        <p14:creationId xmlns:p14="http://schemas.microsoft.com/office/powerpoint/2010/main" val="3327571046"/>
-      </p:ext>
-    </p:extLst>
   </p:cSld>
   <p:clrMapOvr>
     <a:masterClrMapping/>
@@ -17099,7 +15484,7 @@
           <p:nvPr/>
         </p:nvPicPr>
         <p:blipFill>
-          <a:blip r:embed="rId3" cstate="print"/>
+          <a:blip r:embed="rId1" cstate="print"/>
           <a:srcRect b="3668"/>
           <a:stretch>
             <a:fillRect/>
@@ -17162,15 +15547,14 @@
               <a:rPr lang="en-US" sz="4400" dirty="0"/>
               <a:t>Scope Creep</a:t>
             </a:r>
+            <a:endParaRPr lang="en-US" sz="4400" dirty="0"/>
           </a:p>
         </p:txBody>
       </p:sp>
       <p:grpSp>
         <p:nvGrpSpPr>
           <p:cNvPr id="2" name="Group 18"/>
-          <p:cNvGrpSpPr>
-            <a:grpSpLocks/>
-          </p:cNvGrpSpPr>
+          <p:cNvGrpSpPr/>
           <p:nvPr/>
         </p:nvGrpSpPr>
         <p:grpSpPr bwMode="auto">
@@ -17190,7 +15574,7 @@
             <p:nvPr/>
           </p:nvPicPr>
           <p:blipFill>
-            <a:blip r:embed="rId4" cstate="print"/>
+            <a:blip r:embed="rId2" cstate="print"/>
             <a:srcRect/>
             <a:stretch>
               <a:fillRect/>
@@ -17233,8 +15617,6 @@
             <a:ln w="9525">
               <a:noFill/>
               <a:miter lim="800000"/>
-              <a:headEnd/>
-              <a:tailEnd/>
             </a:ln>
             <a:effectLst/>
           </p:spPr>
@@ -17258,6 +15640,14 @@
                 </a:rPr>
                 <a:t>“Dark matter” emerging during iteration</a:t>
               </a:r>
+              <a:endParaRPr lang="en-US">
+                <a:effectLst>
+                  <a:outerShdw blurRad="38100" dist="38100" dir="2700000" algn="tl">
+                    <a:srgbClr val="000000"/>
+                  </a:outerShdw>
+                </a:effectLst>
+                <a:latin typeface="Segoe Semibold"/>
+              </a:endParaRPr>
             </a:p>
           </p:txBody>
         </p:sp>
@@ -17265,9 +15655,7 @@
       <p:grpSp>
         <p:nvGrpSpPr>
           <p:cNvPr id="3" name="Group 19"/>
-          <p:cNvGrpSpPr>
-            <a:grpSpLocks/>
-          </p:cNvGrpSpPr>
+          <p:cNvGrpSpPr/>
           <p:nvPr/>
         </p:nvGrpSpPr>
         <p:grpSpPr bwMode="auto">
@@ -17287,7 +15675,7 @@
             <p:nvPr/>
           </p:nvPicPr>
           <p:blipFill>
-            <a:blip r:embed="rId5" cstate="print"/>
+            <a:blip r:embed="rId3" cstate="print"/>
             <a:srcRect/>
             <a:stretch>
               <a:fillRect/>
@@ -17330,8 +15718,6 @@
             <a:ln w="9525">
               <a:noFill/>
               <a:miter lim="800000"/>
-              <a:headEnd/>
-              <a:tailEnd/>
             </a:ln>
             <a:effectLst/>
           </p:spPr>
@@ -17355,16 +15741,19 @@
                 </a:rPr>
                 <a:t>Planned work is squeezed out</a:t>
               </a:r>
+              <a:endParaRPr lang="en-US">
+                <a:effectLst>
+                  <a:outerShdw blurRad="38100" dist="38100" dir="2700000" algn="tl">
+                    <a:srgbClr val="000000"/>
+                  </a:outerShdw>
+                </a:effectLst>
+                <a:latin typeface="Segoe Semibold"/>
+              </a:endParaRPr>
             </a:p>
           </p:txBody>
         </p:sp>
       </p:grpSp>
     </p:spTree>
-    <p:extLst>
-      <p:ext uri="{BB962C8B-B14F-4D97-AF65-F5344CB8AC3E}">
-        <p14:creationId xmlns:p14="http://schemas.microsoft.com/office/powerpoint/2010/main" val="2310473041"/>
-      </p:ext>
-    </p:extLst>
   </p:cSld>
   <p:clrMapOvr>
     <a:masterClrMapping/>
@@ -17539,6 +15928,7 @@
               <a:rPr lang="en-US" dirty="0"/>
               <a:t>A real example</a:t>
             </a:r>
+            <a:endParaRPr lang="en-US" dirty="0"/>
           </a:p>
         </p:txBody>
       </p:sp>
@@ -17551,7 +15941,7 @@
           <p:nvPr/>
         </p:nvPicPr>
         <p:blipFill>
-          <a:blip r:embed="rId3" cstate="print"/>
+          <a:blip r:embed="rId1" cstate="print"/>
           <a:srcRect/>
           <a:stretch>
             <a:fillRect/>
@@ -17576,11 +15966,6 @@
         </p:spPr>
       </p:pic>
     </p:spTree>
-    <p:extLst>
-      <p:ext uri="{BB962C8B-B14F-4D97-AF65-F5344CB8AC3E}">
-        <p14:creationId xmlns:p14="http://schemas.microsoft.com/office/powerpoint/2010/main" val="1584657354"/>
-      </p:ext>
-    </p:extLst>
   </p:cSld>
   <p:clrMapOvr>
     <a:masterClrMapping/>
@@ -17607,13 +15992,7 @@
       </p:grpSpPr>
       <p:sp>
         <p:nvSpPr>
-          <p:cNvPr id="2" name="Title 1">
-            <a:extLst>
-              <a:ext uri="{FF2B5EF4-FFF2-40B4-BE49-F238E27FC236}">
-                <a16:creationId xmlns:a16="http://schemas.microsoft.com/office/drawing/2014/main" id="{2978B2DB-C6BE-44CD-975A-AB0CC247D9B6}"/>
-              </a:ext>
-            </a:extLst>
-          </p:cNvPr>
+          <p:cNvPr id="2" name="Title 1"/>
           <p:cNvSpPr>
             <a:spLocks noGrp="1"/>
           </p:cNvSpPr>
@@ -17636,13 +16015,7 @@
       </p:sp>
       <p:sp>
         <p:nvSpPr>
-          <p:cNvPr id="3" name="TextBox 2">
-            <a:extLst>
-              <a:ext uri="{FF2B5EF4-FFF2-40B4-BE49-F238E27FC236}">
-                <a16:creationId xmlns:a16="http://schemas.microsoft.com/office/drawing/2014/main" id="{748F9C23-0DAC-4B53-AF15-2D6EB4B2486E}"/>
-              </a:ext>
-            </a:extLst>
-          </p:cNvPr>
+          <p:cNvPr id="3" name="TextBox 2"/>
           <p:cNvSpPr txBox="1"/>
           <p:nvPr/>
         </p:nvSpPr>
@@ -17738,13 +16111,7 @@
       </p:sp>
       <p:sp>
         <p:nvSpPr>
-          <p:cNvPr id="4" name="TextBox 3">
-            <a:extLst>
-              <a:ext uri="{FF2B5EF4-FFF2-40B4-BE49-F238E27FC236}">
-                <a16:creationId xmlns:a16="http://schemas.microsoft.com/office/drawing/2014/main" id="{70F76D8C-BE15-4636-87E4-E45DB4EE8755}"/>
-              </a:ext>
-            </a:extLst>
-          </p:cNvPr>
+          <p:cNvPr id="4" name="TextBox 3"/>
           <p:cNvSpPr txBox="1"/>
           <p:nvPr/>
         </p:nvSpPr>
@@ -17841,6 +16208,7 @@
               <a:rPr lang="zh-CN" altLang="en-US" dirty="0"/>
               <a:t>学习新的技术：安装、试用新的开发工具，分析利弊。并和团队讨论是否立即采用这 些新工具。</a:t>
             </a:r>
+            <a:endParaRPr lang="zh-CN" altLang="en-US" dirty="0"/>
           </a:p>
           <a:p>
             <a:endParaRPr lang="en-US" dirty="0"/>
@@ -17848,11 +16216,6 @@
         </p:txBody>
       </p:sp>
     </p:spTree>
-    <p:extLst>
-      <p:ext uri="{BB962C8B-B14F-4D97-AF65-F5344CB8AC3E}">
-        <p14:creationId xmlns:p14="http://schemas.microsoft.com/office/powerpoint/2010/main" val="346548858"/>
-      </p:ext>
-    </p:extLst>
   </p:cSld>
   <p:clrMapOvr>
     <a:masterClrMapping/>
@@ -17879,13 +16242,7 @@
       </p:grpSpPr>
       <p:sp>
         <p:nvSpPr>
-          <p:cNvPr id="2" name="Title 1">
-            <a:extLst>
-              <a:ext uri="{FF2B5EF4-FFF2-40B4-BE49-F238E27FC236}">
-                <a16:creationId xmlns:a16="http://schemas.microsoft.com/office/drawing/2014/main" id="{499D8888-FAB4-458A-80F2-385D00C040D2}"/>
-              </a:ext>
-            </a:extLst>
-          </p:cNvPr>
+          <p:cNvPr id="2" name="Title 1"/>
           <p:cNvSpPr>
             <a:spLocks noGrp="1"/>
           </p:cNvSpPr>
@@ -17908,13 +16265,7 @@
       </p:sp>
       <p:sp>
         <p:nvSpPr>
-          <p:cNvPr id="3" name="Rectangle 2">
-            <a:extLst>
-              <a:ext uri="{FF2B5EF4-FFF2-40B4-BE49-F238E27FC236}">
-                <a16:creationId xmlns:a16="http://schemas.microsoft.com/office/drawing/2014/main" id="{E6A22111-0AE8-4C34-BC1B-79E0AB7742FA}"/>
-              </a:ext>
-            </a:extLst>
-          </p:cNvPr>
+          <p:cNvPr id="3" name="Rectangle 2"/>
           <p:cNvSpPr/>
           <p:nvPr/>
         </p:nvSpPr>
@@ -17973,6 +16324,7 @@
               <a:rPr lang="en-US" dirty="0"/>
               <a:t>。</a:t>
             </a:r>
+            <a:endParaRPr lang="en-US" dirty="0"/>
           </a:p>
           <a:p>
             <a:endParaRPr lang="en-US" dirty="0"/>
@@ -17989,6 +16341,7 @@
               <a:rPr lang="en-US" dirty="0"/>
               <a:t>？ </a:t>
             </a:r>
+            <a:endParaRPr lang="en-US" dirty="0"/>
           </a:p>
           <a:p>
             <a:pPr marL="342900" indent="-342900">
@@ -18002,6 +16355,7 @@
               <a:rPr lang="en-US" dirty="0"/>
               <a:t>？ </a:t>
             </a:r>
+            <a:endParaRPr lang="en-US" dirty="0"/>
           </a:p>
           <a:p>
             <a:pPr marL="342900" indent="-342900">
@@ -18015,6 +16369,7 @@
               <a:rPr lang="en-US" dirty="0"/>
               <a:t>？</a:t>
             </a:r>
+            <a:endParaRPr lang="en-US" dirty="0"/>
           </a:p>
           <a:p>
             <a:pPr marL="342900" indent="-342900">
@@ -18061,6 +16416,7 @@
               <a:rPr lang="zh-CN" altLang="en-US" dirty="0"/>
               <a:t>、软件效能的参数， 等等。正因为流程和结果是明确定义的、可量化的，所以很多测试工作可以自动化。</a:t>
             </a:r>
+            <a:endParaRPr lang="zh-CN" altLang="en-US" dirty="0"/>
           </a:p>
           <a:p>
             <a:pPr marL="342900" indent="-342900">
@@ -18078,6 +16434,7 @@
               <a:rPr lang="zh-CN" altLang="en-US" dirty="0"/>
               <a:t>）： 软件团队为了让软件达到事先定义的质量标准而进 行的所有活动，包括测试工作。</a:t>
             </a:r>
+            <a:endParaRPr lang="zh-CN" altLang="en-US" dirty="0"/>
           </a:p>
           <a:p>
             <a:pPr marL="342900" indent="-342900">
@@ -18088,11 +16445,6 @@
         </p:txBody>
       </p:sp>
     </p:spTree>
-    <p:extLst>
-      <p:ext uri="{BB962C8B-B14F-4D97-AF65-F5344CB8AC3E}">
-        <p14:creationId xmlns:p14="http://schemas.microsoft.com/office/powerpoint/2010/main" val="4118284303"/>
-      </p:ext>
-    </p:extLst>
   </p:cSld>
   <p:clrMapOvr>
     <a:masterClrMapping/>
@@ -18138,18 +16490,6 @@
               <a:rPr lang="zh-CN" altLang="en-US" dirty="0"/>
               <a:t>和测试相关的误解 </a:t>
             </a:r>
-            <a:r>
-              <a:rPr lang="en-US" altLang="zh-CN" dirty="0"/>
-              <a:t>– </a:t>
-            </a:r>
-            <a:r>
-              <a:rPr lang="zh-CN" altLang="en-US" dirty="0"/>
-              <a:t>教材 </a:t>
-            </a:r>
-            <a:r>
-              <a:rPr lang="en-US" altLang="zh-CN" dirty="0"/>
-              <a:t>P312</a:t>
-            </a:r>
             <a:endParaRPr lang="en-US" dirty="0"/>
           </a:p>
         </p:txBody>
@@ -18157,9 +16497,7 @@
       <p:sp>
         <p:nvSpPr>
           <p:cNvPr id="5" name="Content Placeholder 2"/>
-          <p:cNvSpPr txBox="1">
-            <a:spLocks/>
-          </p:cNvSpPr>
+          <p:cNvSpPr txBox="1"/>
           <p:nvPr/>
         </p:nvSpPr>
         <p:spPr>
@@ -18174,7 +16512,7 @@
         <p:txBody>
           <a:bodyPr/>
           <a:lstStyle>
-            <a:lvl1pPr marL="438912" indent="-320040" algn="l" rtl="0" eaLnBrk="1" latinLnBrk="0" hangingPunct="1">
+            <a:lvl1pPr marL="438785" indent="-320040" algn="l" rtl="0" eaLnBrk="1" latinLnBrk="0" hangingPunct="1">
               <a:spcBef>
                 <a:spcPts val="0"/>
               </a:spcBef>
@@ -18182,7 +16520,7 @@
                 <a:schemeClr val="accent1"/>
               </a:buClr>
               <a:buSzPct val="80000"/>
-              <a:buFont typeface="Wingdings 2"/>
+              <a:buFont typeface="Wingdings 2" panose="05020102010507070707"/>
               <a:buChar char=""/>
               <a:defRPr kumimoji="0" sz="3200" kern="1200">
                 <a:solidFill>
@@ -18201,7 +16539,7 @@
                 <a:schemeClr val="accent2"/>
               </a:buClr>
               <a:buSzPct val="90000"/>
-              <a:buFont typeface="Wingdings"/>
+              <a:buFont typeface="Wingdings" panose="05000000000000000000"/>
               <a:buChar char=""/>
               <a:defRPr kumimoji="0" sz="2800" kern="1200">
                 <a:solidFill>
@@ -18212,14 +16550,14 @@
                 <a:cs typeface="+mn-cs"/>
               </a:defRPr>
             </a:lvl2pPr>
-            <a:lvl3pPr marL="996696" indent="-228600" algn="l" rtl="0" eaLnBrk="1" latinLnBrk="0" hangingPunct="1">
+            <a:lvl3pPr marL="996950" indent="-228600" algn="l" rtl="0" eaLnBrk="1" latinLnBrk="0" hangingPunct="1">
               <a:spcBef>
                 <a:spcPct val="20000"/>
               </a:spcBef>
               <a:buClr>
                 <a:schemeClr val="accent3"/>
               </a:buClr>
-              <a:buFont typeface="Arial"/>
+              <a:buFont typeface="Arial" panose="020B0604020202020204"/>
               <a:buChar char="▪"/>
               <a:defRPr kumimoji="0" sz="2400" kern="1200">
                 <a:solidFill>
@@ -18230,14 +16568,14 @@
                 <a:cs typeface="+mn-cs"/>
               </a:defRPr>
             </a:lvl3pPr>
-            <a:lvl4pPr marL="1216152" indent="-182880" algn="l" rtl="0" eaLnBrk="1" latinLnBrk="0" hangingPunct="1">
+            <a:lvl4pPr marL="1216025" indent="-182880" algn="l" rtl="0" eaLnBrk="1" latinLnBrk="0" hangingPunct="1">
               <a:spcBef>
                 <a:spcPct val="20000"/>
               </a:spcBef>
               <a:buClr>
                 <a:schemeClr val="accent4"/>
               </a:buClr>
-              <a:buFont typeface="Arial"/>
+              <a:buFont typeface="Arial" panose="020B0604020202020204"/>
               <a:buChar char="▪"/>
               <a:defRPr kumimoji="0" sz="2000" kern="1200">
                 <a:solidFill>
@@ -18248,14 +16586,14 @@
                 <a:cs typeface="+mn-cs"/>
               </a:defRPr>
             </a:lvl4pPr>
-            <a:lvl5pPr marL="1426464" indent="-182880" algn="l" rtl="0" eaLnBrk="1" latinLnBrk="0" hangingPunct="1">
+            <a:lvl5pPr marL="1426210" indent="-182880" algn="l" rtl="0" eaLnBrk="1" latinLnBrk="0" hangingPunct="1">
               <a:spcBef>
                 <a:spcPct val="20000"/>
               </a:spcBef>
               <a:buClr>
                 <a:schemeClr val="accent5"/>
               </a:buClr>
-              <a:buFont typeface="Wingdings 3"/>
+              <a:buFont typeface="Wingdings 3" panose="05040102010807070707"/>
               <a:buChar char=""/>
               <a:defRPr kumimoji="0" lang="en-US" sz="2000" kern="1200" smtClean="0">
                 <a:solidFill>
@@ -18266,7 +16604,7 @@
                 <a:cs typeface="+mn-cs"/>
               </a:defRPr>
             </a:lvl5pPr>
-            <a:lvl6pPr marL="1627632" indent="-182880" algn="l" rtl="0" eaLnBrk="1" latinLnBrk="0" hangingPunct="1">
+            <a:lvl6pPr marL="1627505" indent="-182880" algn="l" rtl="0" eaLnBrk="1" latinLnBrk="0" hangingPunct="1">
               <a:spcBef>
                 <a:spcPct val="20000"/>
               </a:spcBef>
@@ -18274,7 +16612,7 @@
                 <a:schemeClr val="accent6"/>
               </a:buClr>
               <a:buSzPct val="100000"/>
-              <a:buFont typeface="Wingdings 2"/>
+              <a:buFont typeface="Wingdings 2" panose="05020102010507070707"/>
               <a:buChar char=""/>
               <a:defRPr kumimoji="0" sz="2000" kern="1200">
                 <a:solidFill>
@@ -18293,7 +16631,7 @@
                 <a:schemeClr val="accent1"/>
               </a:buClr>
               <a:buSzPct val="100000"/>
-              <a:buFont typeface="Wingdings 2"/>
+              <a:buFont typeface="Wingdings 2" panose="05020102010507070707"/>
               <a:buChar char=""/>
               <a:defRPr kumimoji="0" sz="1800" kern="1200">
                 <a:solidFill>
@@ -18304,14 +16642,14 @@
                 <a:cs typeface="+mn-cs"/>
               </a:defRPr>
             </a:lvl7pPr>
-            <a:lvl8pPr marL="2029968" indent="-182880" algn="l" rtl="0" eaLnBrk="1" latinLnBrk="0" hangingPunct="1">
+            <a:lvl8pPr marL="2030095" indent="-182880" algn="l" rtl="0" eaLnBrk="1" latinLnBrk="0" hangingPunct="1">
               <a:spcBef>
                 <a:spcPct val="20000"/>
               </a:spcBef>
               <a:buClr>
                 <a:schemeClr val="accent2"/>
               </a:buClr>
-              <a:buFont typeface="Wingdings 2" pitchFamily="18" charset="2"/>
+              <a:buFont typeface="Wingdings 2" panose="05020102010507070707" pitchFamily="18" charset="2"/>
               <a:buChar char=""/>
               <a:defRPr kumimoji="0" sz="1800" kern="1200">
                 <a:solidFill>
@@ -18322,14 +16660,14 @@
                 <a:cs typeface="+mn-cs"/>
               </a:defRPr>
             </a:lvl8pPr>
-            <a:lvl9pPr marL="2231136" indent="-182880" algn="l" rtl="0" eaLnBrk="1" latinLnBrk="0" hangingPunct="1">
+            <a:lvl9pPr marL="2231390" indent="-182880" algn="l" rtl="0" eaLnBrk="1" latinLnBrk="0" hangingPunct="1">
               <a:spcBef>
                 <a:spcPct val="20000"/>
               </a:spcBef>
               <a:buClr>
                 <a:schemeClr val="accent3"/>
               </a:buClr>
-              <a:buFont typeface="Wingdings 2" pitchFamily="18" charset="2"/>
+              <a:buFont typeface="Wingdings 2" panose="05020102010507070707" pitchFamily="18" charset="2"/>
               <a:buChar char=""/>
               <a:defRPr kumimoji="0" sz="1800" kern="1200" baseline="0">
                 <a:solidFill>
@@ -18340,7 +16678,6 @@
                 <a:cs typeface="+mn-cs"/>
               </a:defRPr>
             </a:lvl9pPr>
-            <a:extLst/>
           </a:lstStyle>
           <a:p>
             <a:r>
@@ -18388,20 +16725,6 @@
             <a:endParaRPr lang="en-US" altLang="zh-CN" sz="2000" dirty="0"/>
           </a:p>
           <a:p>
-            <a:pPr lvl="1"/>
-            <a:r>
-              <a:rPr lang="en-US" altLang="zh-CN" sz="2000" dirty="0">
-                <a:hlinkClick r:id="rId2"/>
-              </a:rPr>
-              <a:t>http://v.youku.com/v_show/id_XMzQ3NTUxOTU2.html</a:t>
-            </a:r>
-            <a:endParaRPr lang="en-US" altLang="zh-CN" sz="2000" dirty="0"/>
-          </a:p>
-          <a:p>
-            <a:pPr lvl="1"/>
-            <a:endParaRPr lang="en-US" altLang="zh-CN" sz="2000" dirty="0"/>
-          </a:p>
-          <a:p>
             <a:r>
               <a:rPr lang="zh-CN" altLang="en-US" sz="2400" dirty="0"/>
               <a:t>画地为牢的分工</a:t>
@@ -18434,11 +16757,6 @@
         </p:txBody>
       </p:sp>
     </p:spTree>
-    <p:extLst>
-      <p:ext uri="{BB962C8B-B14F-4D97-AF65-F5344CB8AC3E}">
-        <p14:creationId xmlns:p14="http://schemas.microsoft.com/office/powerpoint/2010/main" val="855595760"/>
-      </p:ext>
-    </p:extLst>
   </p:cSld>
   <p:clrMapOvr>
     <a:masterClrMapping/>
@@ -18465,13 +16783,7 @@
       </p:grpSpPr>
       <p:sp>
         <p:nvSpPr>
-          <p:cNvPr id="2" name="Title 1">
-            <a:extLst>
-              <a:ext uri="{FF2B5EF4-FFF2-40B4-BE49-F238E27FC236}">
-                <a16:creationId xmlns:a16="http://schemas.microsoft.com/office/drawing/2014/main" id="{A5797B4E-6FC6-40D1-9CF6-BB5AE3C2FF4C}"/>
-              </a:ext>
-            </a:extLst>
-          </p:cNvPr>
+          <p:cNvPr id="2" name="Title 1"/>
           <p:cNvSpPr>
             <a:spLocks noGrp="1"/>
           </p:cNvSpPr>
@@ -18494,13 +16806,7 @@
       </p:sp>
       <p:sp>
         <p:nvSpPr>
-          <p:cNvPr id="3" name="Content Placeholder 2">
-            <a:extLst>
-              <a:ext uri="{FF2B5EF4-FFF2-40B4-BE49-F238E27FC236}">
-                <a16:creationId xmlns:a16="http://schemas.microsoft.com/office/drawing/2014/main" id="{D694459C-45E7-46EA-A95A-042DD96652D6}"/>
-              </a:ext>
-            </a:extLst>
-          </p:cNvPr>
+          <p:cNvPr id="3" name="Content Placeholder 2"/>
           <p:cNvSpPr>
             <a:spLocks noGrp="1"/>
           </p:cNvSpPr>
@@ -18517,6 +16823,7 @@
               <a:rPr lang="zh-CN" altLang="en-US" dirty="0"/>
               <a:t>在本书中，我们知道：</a:t>
             </a:r>
+            <a:endParaRPr lang="zh-CN" altLang="en-US" dirty="0"/>
           </a:p>
           <a:p>
             <a:pPr lvl="1"/>
@@ -18540,6 +16847,7 @@
               <a:rPr lang="zh-CN" altLang="en-US" dirty="0"/>
               <a:t>软件工程</a:t>
             </a:r>
+            <a:endParaRPr lang="zh-CN" altLang="en-US" dirty="0"/>
           </a:p>
           <a:p>
             <a:r>
@@ -18590,6 +16898,7 @@
               <a:rPr lang="zh-CN" altLang="en-US" baseline="-25000" dirty="0"/>
               <a:t>质量</a:t>
             </a:r>
+            <a:endParaRPr lang="zh-CN" altLang="en-US" baseline="-25000" dirty="0"/>
           </a:p>
           <a:p>
             <a:endParaRPr lang="en-US" dirty="0"/>
@@ -18597,11 +16906,6 @@
         </p:txBody>
       </p:sp>
     </p:spTree>
-    <p:extLst>
-      <p:ext uri="{BB962C8B-B14F-4D97-AF65-F5344CB8AC3E}">
-        <p14:creationId xmlns:p14="http://schemas.microsoft.com/office/powerpoint/2010/main" val="203105963"/>
-      </p:ext>
-    </p:extLst>
   </p:cSld>
   <p:clrMapOvr>
     <a:masterClrMapping/>
@@ -18628,13 +16932,7 @@
       </p:grpSpPr>
       <p:sp>
         <p:nvSpPr>
-          <p:cNvPr id="2" name="Title 1">
-            <a:extLst>
-              <a:ext uri="{FF2B5EF4-FFF2-40B4-BE49-F238E27FC236}">
-                <a16:creationId xmlns:a16="http://schemas.microsoft.com/office/drawing/2014/main" id="{BACF6B7B-E333-4EB6-996E-E6AF9531748F}"/>
-              </a:ext>
-            </a:extLst>
-          </p:cNvPr>
+          <p:cNvPr id="2" name="Title 1"/>
           <p:cNvSpPr>
             <a:spLocks noGrp="1"/>
           </p:cNvSpPr>
@@ -18657,13 +16955,7 @@
       </p:sp>
       <p:sp>
         <p:nvSpPr>
-          <p:cNvPr id="3" name="Rectangle 2">
-            <a:extLst>
-              <a:ext uri="{FF2B5EF4-FFF2-40B4-BE49-F238E27FC236}">
-                <a16:creationId xmlns:a16="http://schemas.microsoft.com/office/drawing/2014/main" id="{010EFF0E-0F66-436B-B477-1773326F825C}"/>
-              </a:ext>
-            </a:extLst>
-          </p:cNvPr>
+          <p:cNvPr id="3" name="Rectangle 2"/>
           <p:cNvSpPr/>
           <p:nvPr/>
         </p:nvSpPr>
@@ -18712,6 +17004,7 @@
               <a:rPr lang="en-US" sz="2400" dirty="0"/>
               <a:t>：</a:t>
             </a:r>
+            <a:endParaRPr lang="en-US" sz="2400" dirty="0"/>
           </a:p>
           <a:p>
             <a:pPr marL="285750" indent="-285750">
@@ -18742,6 +17035,7 @@
               <a:rPr lang="en-US" sz="2400" dirty="0"/>
               <a:t>。</a:t>
             </a:r>
+            <a:endParaRPr lang="en-US" sz="2400" dirty="0"/>
           </a:p>
           <a:p>
             <a:pPr marL="285750" indent="-285750">
@@ -18772,6 +17066,7 @@
               <a:rPr lang="en-US" sz="2400" dirty="0"/>
               <a:t>。</a:t>
             </a:r>
+            <a:endParaRPr lang="en-US" sz="2400" dirty="0"/>
           </a:p>
           <a:p>
             <a:pPr marL="285750" indent="-285750">
@@ -18786,6 +17081,7 @@
               <a:rPr lang="en-US" sz="2400" dirty="0"/>
               <a:t>。</a:t>
             </a:r>
+            <a:endParaRPr lang="en-US" sz="2400" dirty="0"/>
           </a:p>
           <a:p>
             <a:pPr marL="285750" indent="-285750">
@@ -18808,6 +17104,7 @@
               <a:rPr lang="en-US" sz="2400" dirty="0"/>
               <a:t>。  </a:t>
             </a:r>
+            <a:endParaRPr lang="en-US" sz="2400" dirty="0"/>
           </a:p>
           <a:p>
             <a:pPr marL="285750" indent="-285750">
@@ -18838,15 +17135,11 @@
               <a:rPr lang="en-US" sz="2400" dirty="0"/>
               <a:t>……</a:t>
             </a:r>
+            <a:endParaRPr lang="en-US" sz="2400" dirty="0"/>
           </a:p>
         </p:txBody>
       </p:sp>
     </p:spTree>
-    <p:extLst>
-      <p:ext uri="{BB962C8B-B14F-4D97-AF65-F5344CB8AC3E}">
-        <p14:creationId xmlns:p14="http://schemas.microsoft.com/office/powerpoint/2010/main" val="2787191295"/>
-      </p:ext>
-    </p:extLst>
   </p:cSld>
   <p:clrMapOvr>
     <a:masterClrMapping/>
@@ -18873,13 +17166,7 @@
       </p:grpSpPr>
       <p:sp>
         <p:nvSpPr>
-          <p:cNvPr id="2" name="Title 1">
-            <a:extLst>
-              <a:ext uri="{FF2B5EF4-FFF2-40B4-BE49-F238E27FC236}">
-                <a16:creationId xmlns:a16="http://schemas.microsoft.com/office/drawing/2014/main" id="{0460539A-825E-4F57-B66C-B4D02019EA99}"/>
-              </a:ext>
-            </a:extLst>
-          </p:cNvPr>
+          <p:cNvPr id="2" name="Title 1"/>
           <p:cNvSpPr>
             <a:spLocks noGrp="1"/>
           </p:cNvSpPr>
@@ -18902,13 +17189,7 @@
       </p:sp>
       <p:sp>
         <p:nvSpPr>
-          <p:cNvPr id="3" name="TextBox 2">
-            <a:extLst>
-              <a:ext uri="{FF2B5EF4-FFF2-40B4-BE49-F238E27FC236}">
-                <a16:creationId xmlns:a16="http://schemas.microsoft.com/office/drawing/2014/main" id="{75E38640-ED9D-418D-82BD-68A08D295924}"/>
-              </a:ext>
-            </a:extLst>
-          </p:cNvPr>
+          <p:cNvPr id="3" name="TextBox 2"/>
           <p:cNvSpPr txBox="1"/>
           <p:nvPr/>
         </p:nvSpPr>
@@ -18934,7 +17215,7 @@
             </a:r>
             <a:r>
               <a:rPr lang="en-US" altLang="zh-CN" dirty="0">
-                <a:hlinkClick r:id="rId2"/>
+                <a:hlinkClick r:id="rId1"/>
               </a:rPr>
               <a:t>http://www.cnblogs.com/xinz/p/3857368.html</a:t>
             </a:r>
@@ -18947,11 +17228,6 @@
         </p:txBody>
       </p:sp>
     </p:spTree>
-    <p:extLst>
-      <p:ext uri="{BB962C8B-B14F-4D97-AF65-F5344CB8AC3E}">
-        <p14:creationId xmlns:p14="http://schemas.microsoft.com/office/powerpoint/2010/main" val="644457787"/>
-      </p:ext>
-    </p:extLst>
   </p:cSld>
   <p:clrMapOvr>
     <a:masterClrMapping/>
@@ -18978,13 +17254,7 @@
       </p:grpSpPr>
       <p:sp>
         <p:nvSpPr>
-          <p:cNvPr id="2" name="Title 1">
-            <a:extLst>
-              <a:ext uri="{FF2B5EF4-FFF2-40B4-BE49-F238E27FC236}">
-                <a16:creationId xmlns:a16="http://schemas.microsoft.com/office/drawing/2014/main" id="{A237A3B6-10D0-4FA7-8B78-9DF91DE112BE}"/>
-              </a:ext>
-            </a:extLst>
-          </p:cNvPr>
+          <p:cNvPr id="2" name="Title 1"/>
           <p:cNvSpPr>
             <a:spLocks noGrp="1"/>
           </p:cNvSpPr>
@@ -19007,13 +17277,7 @@
       </p:sp>
       <p:sp>
         <p:nvSpPr>
-          <p:cNvPr id="3" name="Rectangle 2">
-            <a:extLst>
-              <a:ext uri="{FF2B5EF4-FFF2-40B4-BE49-F238E27FC236}">
-                <a16:creationId xmlns:a16="http://schemas.microsoft.com/office/drawing/2014/main" id="{397AB9B0-1AE6-4271-AA7A-921FD50C3DE8}"/>
-              </a:ext>
-            </a:extLst>
-          </p:cNvPr>
+          <p:cNvPr id="3" name="Rectangle 2"/>
           <p:cNvSpPr/>
           <p:nvPr/>
         </p:nvSpPr>
@@ -19064,6 +17328,7 @@
               <a:rPr lang="en-US" dirty="0"/>
               <a:t>”：</a:t>
             </a:r>
+            <a:endParaRPr lang="en-US" dirty="0"/>
           </a:p>
           <a:p>
             <a:r>
@@ -19142,15 +17407,11 @@
               <a:rPr lang="en-US" dirty="0"/>
               <a:t>。 </a:t>
             </a:r>
+            <a:endParaRPr lang="en-US" dirty="0"/>
           </a:p>
         </p:txBody>
       </p:sp>
     </p:spTree>
-    <p:extLst>
-      <p:ext uri="{BB962C8B-B14F-4D97-AF65-F5344CB8AC3E}">
-        <p14:creationId xmlns:p14="http://schemas.microsoft.com/office/powerpoint/2010/main" val="1101824339"/>
-      </p:ext>
-    </p:extLst>
   </p:cSld>
   <p:clrMapOvr>
     <a:masterClrMapping/>
@@ -19177,13 +17438,7 @@
       </p:grpSpPr>
       <p:sp>
         <p:nvSpPr>
-          <p:cNvPr id="2" name="Title 1">
-            <a:extLst>
-              <a:ext uri="{FF2B5EF4-FFF2-40B4-BE49-F238E27FC236}">
-                <a16:creationId xmlns:a16="http://schemas.microsoft.com/office/drawing/2014/main" id="{6196BBCF-D597-4EB3-ADA6-12E7B647833A}"/>
-              </a:ext>
-            </a:extLst>
-          </p:cNvPr>
+          <p:cNvPr id="2" name="Title 1"/>
           <p:cNvSpPr>
             <a:spLocks noGrp="1"/>
           </p:cNvSpPr>
@@ -19206,13 +17461,7 @@
       </p:sp>
       <p:sp>
         <p:nvSpPr>
-          <p:cNvPr id="3" name="Rectangle 2">
-            <a:extLst>
-              <a:ext uri="{FF2B5EF4-FFF2-40B4-BE49-F238E27FC236}">
-                <a16:creationId xmlns:a16="http://schemas.microsoft.com/office/drawing/2014/main" id="{A069E756-950A-4BE8-B0A1-AEC5F7261758}"/>
-              </a:ext>
-            </a:extLst>
-          </p:cNvPr>
+          <p:cNvPr id="3" name="Rectangle 2"/>
           <p:cNvSpPr/>
           <p:nvPr/>
         </p:nvSpPr>
@@ -19239,6 +17488,7 @@
               <a:rPr lang="en-US" sz="1600" dirty="0"/>
               <a:t>：	</a:t>
             </a:r>
+            <a:endParaRPr lang="en-US" sz="1600" dirty="0"/>
           </a:p>
           <a:p>
             <a:r>
@@ -19289,6 +17539,7 @@
               <a:rPr lang="en-US" sz="1600" dirty="0"/>
               <a:t>？	</a:t>
             </a:r>
+            <a:endParaRPr lang="en-US" sz="1600" dirty="0"/>
           </a:p>
           <a:p>
             <a:r>
@@ -19319,6 +17570,7 @@
               <a:rPr lang="en-US" sz="1600" dirty="0"/>
               <a:t>。 </a:t>
             </a:r>
+            <a:endParaRPr lang="en-US" sz="1600" dirty="0"/>
           </a:p>
           <a:p>
             <a:pPr marL="342900" indent="-342900">
@@ -19374,20 +17626,14 @@
       </p:sp>
       <p:pic>
         <p:nvPicPr>
-          <p:cNvPr id="4" name="Picture 3">
-            <a:extLst>
-              <a:ext uri="{FF2B5EF4-FFF2-40B4-BE49-F238E27FC236}">
-                <a16:creationId xmlns:a16="http://schemas.microsoft.com/office/drawing/2014/main" id="{F25FD6C3-D603-4D0E-8D80-FA28D57D496E}"/>
-              </a:ext>
-            </a:extLst>
-          </p:cNvPr>
+          <p:cNvPr id="4" name="Picture 3"/>
           <p:cNvPicPr>
             <a:picLocks noChangeAspect="1"/>
           </p:cNvPicPr>
           <p:nvPr/>
         </p:nvPicPr>
         <p:blipFill>
-          <a:blip r:embed="rId2"/>
+          <a:blip r:embed="rId1"/>
           <a:stretch>
             <a:fillRect/>
           </a:stretch>
@@ -19403,11 +17649,6 @@
         </p:spPr>
       </p:pic>
     </p:spTree>
-    <p:extLst>
-      <p:ext uri="{BB962C8B-B14F-4D97-AF65-F5344CB8AC3E}">
-        <p14:creationId xmlns:p14="http://schemas.microsoft.com/office/powerpoint/2010/main" val="3157467698"/>
-      </p:ext>
-    </p:extLst>
   </p:cSld>
   <p:clrMapOvr>
     <a:masterClrMapping/>
@@ -19434,13 +17675,7 @@
       </p:grpSpPr>
       <p:sp>
         <p:nvSpPr>
-          <p:cNvPr id="2" name="Title 1">
-            <a:extLst>
-              <a:ext uri="{FF2B5EF4-FFF2-40B4-BE49-F238E27FC236}">
-                <a16:creationId xmlns:a16="http://schemas.microsoft.com/office/drawing/2014/main" id="{736BCFA2-56D0-4A83-9417-4E72101680CE}"/>
-              </a:ext>
-            </a:extLst>
-          </p:cNvPr>
+          <p:cNvPr id="2" name="Title 1"/>
           <p:cNvSpPr>
             <a:spLocks noGrp="1"/>
           </p:cNvSpPr>
@@ -19463,13 +17698,7 @@
       </p:sp>
       <p:sp>
         <p:nvSpPr>
-          <p:cNvPr id="3" name="Rectangle 2">
-            <a:extLst>
-              <a:ext uri="{FF2B5EF4-FFF2-40B4-BE49-F238E27FC236}">
-                <a16:creationId xmlns:a16="http://schemas.microsoft.com/office/drawing/2014/main" id="{3D40BC5F-469A-4A34-874A-5DEB547301B0}"/>
-              </a:ext>
-            </a:extLst>
-          </p:cNvPr>
+          <p:cNvPr id="3" name="Rectangle 2"/>
           <p:cNvSpPr/>
           <p:nvPr/>
         </p:nvSpPr>
@@ -19572,6 +17801,7 @@
               <a:rPr lang="en-US" dirty="0"/>
               <a:t>”。 </a:t>
             </a:r>
+            <a:endParaRPr lang="en-US" dirty="0"/>
           </a:p>
           <a:p>
             <a:endParaRPr lang="en-US" dirty="0"/>
@@ -19601,6 +17831,7 @@
               <a:rPr lang="en-US" dirty="0"/>
               <a:t>。	</a:t>
             </a:r>
+            <a:endParaRPr lang="en-US" dirty="0"/>
           </a:p>
           <a:p>
             <a:endParaRPr lang="en-US" dirty="0"/>
@@ -19626,15 +17857,11 @@
               <a:rPr lang="en-US" dirty="0"/>
               <a:t>。 </a:t>
             </a:r>
+            <a:endParaRPr lang="en-US" dirty="0"/>
           </a:p>
         </p:txBody>
       </p:sp>
     </p:spTree>
-    <p:extLst>
-      <p:ext uri="{BB962C8B-B14F-4D97-AF65-F5344CB8AC3E}">
-        <p14:creationId xmlns:p14="http://schemas.microsoft.com/office/powerpoint/2010/main" val="2709888784"/>
-      </p:ext>
-    </p:extLst>
   </p:cSld>
   <p:clrMapOvr>
     <a:masterClrMapping/>
@@ -19661,13 +17888,7 @@
       </p:grpSpPr>
       <p:sp>
         <p:nvSpPr>
-          <p:cNvPr id="2" name="Title 1">
-            <a:extLst>
-              <a:ext uri="{FF2B5EF4-FFF2-40B4-BE49-F238E27FC236}">
-                <a16:creationId xmlns:a16="http://schemas.microsoft.com/office/drawing/2014/main" id="{5F7D260E-D0B1-44D5-BE5C-3E4D9AC1DCF8}"/>
-              </a:ext>
-            </a:extLst>
-          </p:cNvPr>
+          <p:cNvPr id="2" name="Title 1"/>
           <p:cNvSpPr>
             <a:spLocks noGrp="1"/>
           </p:cNvSpPr>
@@ -19690,13 +17911,7 @@
       </p:sp>
       <p:sp>
         <p:nvSpPr>
-          <p:cNvPr id="3" name="Rectangle 2">
-            <a:extLst>
-              <a:ext uri="{FF2B5EF4-FFF2-40B4-BE49-F238E27FC236}">
-                <a16:creationId xmlns:a16="http://schemas.microsoft.com/office/drawing/2014/main" id="{56732DA4-A750-4659-92AE-4E3E74EC3080}"/>
-              </a:ext>
-            </a:extLst>
-          </p:cNvPr>
+          <p:cNvPr id="3" name="Rectangle 2"/>
           <p:cNvSpPr/>
           <p:nvPr/>
         </p:nvSpPr>
@@ -19727,6 +17942,7 @@
               <a:rPr lang="en-US" dirty="0"/>
               <a:t>！</a:t>
             </a:r>
+            <a:endParaRPr lang="en-US" dirty="0"/>
           </a:p>
           <a:p>
             <a:r>
@@ -19753,6 +17969,7 @@
               <a:rPr lang="en-US" dirty="0"/>
               <a:t>。</a:t>
             </a:r>
+            <a:endParaRPr lang="en-US" dirty="0"/>
           </a:p>
           <a:p>
             <a:endParaRPr lang="en-US" dirty="0"/>
@@ -19766,6 +17983,7 @@
               <a:rPr lang="en-US" dirty="0"/>
               <a:t>：	</a:t>
             </a:r>
+            <a:endParaRPr lang="en-US" dirty="0"/>
           </a:p>
           <a:p>
             <a:r>
@@ -19796,6 +18014,7 @@
               <a:rPr lang="en-US" dirty="0"/>
               <a:t>） </a:t>
             </a:r>
+            <a:endParaRPr lang="en-US" dirty="0"/>
           </a:p>
           <a:p>
             <a:endParaRPr lang="en-US" dirty="0"/>
@@ -19809,6 +18028,7 @@
               <a:rPr lang="en-US" dirty="0"/>
               <a:t>：	 </a:t>
             </a:r>
+            <a:endParaRPr lang="en-US" dirty="0"/>
           </a:p>
           <a:p>
             <a:r>
@@ -19877,21 +18097,18 @@
               <a:rPr lang="en-US" dirty="0"/>
               <a:t>）</a:t>
             </a:r>
+            <a:endParaRPr lang="en-US" dirty="0"/>
           </a:p>
           <a:p>
             <a:r>
               <a:rPr lang="en-US" dirty="0"/>
               <a:t> </a:t>
             </a:r>
+            <a:endParaRPr lang="en-US" dirty="0"/>
           </a:p>
         </p:txBody>
       </p:sp>
     </p:spTree>
-    <p:extLst>
-      <p:ext uri="{BB962C8B-B14F-4D97-AF65-F5344CB8AC3E}">
-        <p14:creationId xmlns:p14="http://schemas.microsoft.com/office/powerpoint/2010/main" val="1937573180"/>
-      </p:ext>
-    </p:extLst>
   </p:cSld>
   <p:clrMapOvr>
     <a:masterClrMapping/>
@@ -19961,11 +18178,6 @@
         </p:txBody>
       </p:sp>
     </p:spTree>
-    <p:extLst>
-      <p:ext uri="{BB962C8B-B14F-4D97-AF65-F5344CB8AC3E}">
-        <p14:creationId xmlns:p14="http://schemas.microsoft.com/office/powerpoint/2010/main" val="2535163443"/>
-      </p:ext>
-    </p:extLst>
   </p:cSld>
   <p:clrMapOvr>
     <a:masterClrMapping/>
@@ -19992,13 +18204,7 @@
       </p:grpSpPr>
       <p:sp>
         <p:nvSpPr>
-          <p:cNvPr id="2" name="Title 1">
-            <a:extLst>
-              <a:ext uri="{FF2B5EF4-FFF2-40B4-BE49-F238E27FC236}">
-                <a16:creationId xmlns:a16="http://schemas.microsoft.com/office/drawing/2014/main" id="{F054C5AE-4D8C-417D-9AB5-FEC556944A90}"/>
-              </a:ext>
-            </a:extLst>
-          </p:cNvPr>
+          <p:cNvPr id="2" name="Title 1"/>
           <p:cNvSpPr>
             <a:spLocks noGrp="1"/>
           </p:cNvSpPr>
@@ -20021,13 +18227,7 @@
       </p:sp>
       <p:sp>
         <p:nvSpPr>
-          <p:cNvPr id="3" name="Content Placeholder 2">
-            <a:extLst>
-              <a:ext uri="{FF2B5EF4-FFF2-40B4-BE49-F238E27FC236}">
-                <a16:creationId xmlns:a16="http://schemas.microsoft.com/office/drawing/2014/main" id="{A566EDF2-11ED-4F9B-A98E-1CAA103D0918}"/>
-              </a:ext>
-            </a:extLst>
-          </p:cNvPr>
+          <p:cNvPr id="3" name="Content Placeholder 2"/>
           <p:cNvSpPr>
             <a:spLocks noGrp="1"/>
           </p:cNvSpPr>
@@ -20195,6 +18395,7 @@
               <a:rPr lang="zh-CN" altLang="en-US" dirty="0"/>
               <a:t>。</a:t>
             </a:r>
+            <a:endParaRPr lang="zh-CN" altLang="en-US" dirty="0"/>
           </a:p>
           <a:p>
             <a:pPr>
@@ -20207,11 +18408,6 @@
         </p:txBody>
       </p:sp>
     </p:spTree>
-    <p:extLst>
-      <p:ext uri="{BB962C8B-B14F-4D97-AF65-F5344CB8AC3E}">
-        <p14:creationId xmlns:p14="http://schemas.microsoft.com/office/powerpoint/2010/main" val="4287330810"/>
-      </p:ext>
-    </p:extLst>
   </p:cSld>
   <p:clrMapOvr>
     <a:masterClrMapping/>
@@ -20274,7 +18470,7 @@
           <a:bodyPr/>
           <a:lstStyle/>
           <a:p>
-            <a:pPr marL="118872" indent="0">
+            <a:pPr marL="118745" indent="0">
               <a:buNone/>
             </a:pPr>
             <a:r>
@@ -20321,11 +18517,6 @@
         </p:txBody>
       </p:sp>
     </p:spTree>
-    <p:extLst>
-      <p:ext uri="{BB962C8B-B14F-4D97-AF65-F5344CB8AC3E}">
-        <p14:creationId xmlns:p14="http://schemas.microsoft.com/office/powerpoint/2010/main" val="2583180043"/>
-      </p:ext>
-    </p:extLst>
   </p:cSld>
   <p:clrMapOvr>
     <a:masterClrMapping/>
@@ -20388,7 +18579,7 @@
           <a:bodyPr/>
           <a:lstStyle/>
           <a:p>
-            <a:pPr marL="118872" indent="0">
+            <a:pPr marL="118745" indent="0">
               <a:buNone/>
             </a:pPr>
             <a:r>
@@ -20422,11 +18613,6 @@
         </p:txBody>
       </p:sp>
     </p:spTree>
-    <p:extLst>
-      <p:ext uri="{BB962C8B-B14F-4D97-AF65-F5344CB8AC3E}">
-        <p14:creationId xmlns:p14="http://schemas.microsoft.com/office/powerpoint/2010/main" val="1562985331"/>
-      </p:ext>
-    </p:extLst>
   </p:cSld>
   <p:clrMapOvr>
     <a:masterClrMapping/>
@@ -20440,7 +18626,7 @@
     <p:bg>
       <p:bgPr>
         <a:blipFill dpi="0" rotWithShape="1">
-          <a:blip r:embed="rId2">
+          <a:blip r:embed="rId1">
             <a:lum/>
           </a:blip>
           <a:srcRect/>
@@ -20521,23 +18707,12 @@
       </p:sp>
       <p:graphicFrame>
         <p:nvGraphicFramePr>
-          <p:cNvPr id="5" name="Content Placeholder 2">
-            <a:extLst>
-              <a:ext uri="{FF2B5EF4-FFF2-40B4-BE49-F238E27FC236}">
-                <a16:creationId xmlns:a16="http://schemas.microsoft.com/office/drawing/2014/main" id="{72520377-F72D-4AC9-8120-D1579DF72510}"/>
-              </a:ext>
-            </a:extLst>
-          </p:cNvPr>
+          <p:cNvPr id="5" name="Content Placeholder 2"/>
           <p:cNvGraphicFramePr>
             <a:graphicFrameLocks noGrp="1"/>
           </p:cNvGraphicFramePr>
           <p:nvPr>
             <p:ph idx="1"/>
-            <p:extLst>
-              <p:ext uri="{D42A27DB-BD31-4B8C-83A1-F6EECF244321}">
-                <p14:modId xmlns:p14="http://schemas.microsoft.com/office/powerpoint/2010/main" val="3802123882"/>
-              </p:ext>
-            </p:extLst>
           </p:nvPr>
         </p:nvGraphicFramePr>
         <p:xfrm>
@@ -20546,16 +18721,11 @@
         </p:xfrm>
         <a:graphic>
           <a:graphicData uri="http://schemas.openxmlformats.org/drawingml/2006/diagram">
-            <dgm:relIds xmlns:dgm="http://schemas.openxmlformats.org/drawingml/2006/diagram" xmlns:r="http://schemas.openxmlformats.org/officeDocument/2006/relationships" r:dm="rId3" r:lo="rId4" r:qs="rId5" r:cs="rId6"/>
+            <dgm:relIds xmlns:dgm="http://schemas.openxmlformats.org/drawingml/2006/diagram" xmlns:r="http://schemas.openxmlformats.org/officeDocument/2006/relationships" r:dm="rId2" r:lo="rId3" r:qs="rId4" r:cs="rId5"/>
           </a:graphicData>
         </a:graphic>
       </p:graphicFrame>
     </p:spTree>
-    <p:extLst>
-      <p:ext uri="{BB962C8B-B14F-4D97-AF65-F5344CB8AC3E}">
-        <p14:creationId xmlns:p14="http://schemas.microsoft.com/office/powerpoint/2010/main" val="723054989"/>
-      </p:ext>
-    </p:extLst>
   </p:cSld>
   <p:clrMapOvr>
     <a:masterClrMapping/>
@@ -20673,11 +18843,6 @@
         </p:txBody>
       </p:sp>
     </p:spTree>
-    <p:extLst>
-      <p:ext uri="{BB962C8B-B14F-4D97-AF65-F5344CB8AC3E}">
-        <p14:creationId xmlns:p14="http://schemas.microsoft.com/office/powerpoint/2010/main" val="2205629958"/>
-      </p:ext>
-    </p:extLst>
   </p:cSld>
   <p:clrMapOvr>
     <a:masterClrMapping/>
@@ -20750,16 +18915,17 @@
           <a:bodyPr/>
           <a:lstStyle/>
           <a:p>
-            <a:pPr marL="118872" indent="0">
+            <a:pPr marL="118745" indent="0">
               <a:buNone/>
             </a:pPr>
             <a:r>
               <a:rPr lang="zh-CN" altLang="en-US" dirty="0"/>
               <a:t>成本包括时间和金钱等，例如团队眼看完不成预定任务，只好花钱请第三方帮助完成 工作，从而付出巨大成本，影响团队的业绩。</a:t>
             </a:r>
-          </a:p>
-          <a:p>
-            <a:pPr marL="118872" indent="0">
+            <a:endParaRPr lang="zh-CN" altLang="en-US" dirty="0"/>
+          </a:p>
+          <a:p>
+            <a:pPr marL="118745" indent="0">
               <a:buNone/>
             </a:pPr>
             <a:r>
@@ -20771,11 +18937,6 @@
         </p:txBody>
       </p:sp>
     </p:spTree>
-    <p:extLst>
-      <p:ext uri="{BB962C8B-B14F-4D97-AF65-F5344CB8AC3E}">
-        <p14:creationId xmlns:p14="http://schemas.microsoft.com/office/powerpoint/2010/main" val="2538655983"/>
-      </p:ext>
-    </p:extLst>
   </p:cSld>
   <p:clrMapOvr>
     <a:masterClrMapping/>
@@ -20974,11 +19135,9 @@
       </a:bgFillStyleLst>
     </a:fmtScheme>
   </a:themeElements>
-  <a:objectDefaults/>
-  <a:extraClrSchemeLst/>
   <a:extLst>
     <a:ext uri="{05A4C25C-085E-4340-85A3-A5531E510DB2}">
-      <thm15:themeFamily xmlns:thm15="http://schemas.microsoft.com/office/thememl/2012/main" name="Depth" id="{7BEAFC2A-325C-49C4-AC08-2B765DA903F9}" vid="{1735E755-43E6-43AA-ABA2-C989ECC79AF5}"/>
+      <thm15:themeFamily xmlns:thm15="http://schemas.microsoft.com/office/thememl/2012/main" name="Office Theme" id="{62F939B6-93AF-4DB8-9C6B-D6C7DFDC589F}" vid="{4A3C46E8-61CC-4603-A589-7422A47A8E4A}"/>
     </a:ext>
   </a:extLst>
 </a:theme>
@@ -21264,8 +19423,11 @@
       </a:bgFillStyleLst>
     </a:fmtScheme>
   </a:themeElements>
-  <a:objectDefaults/>
-  <a:extraClrSchemeLst/>
+  <a:extLst>
+    <a:ext uri="{05A4C25C-085E-4340-85A3-A5531E510DB2}">
+      <thm15:themeFamily xmlns:thm15="http://schemas.microsoft.com/office/thememl/2012/main" name="Office Theme" id="{62F939B6-93AF-4DB8-9C6B-D6C7DFDC589F}" vid="{4A3C46E8-61CC-4603-A589-7422A47A8E4A}"/>
+    </a:ext>
+  </a:extLst>
 </a:theme>
 </file>
 
@@ -21400,33 +19562,18 @@
 
 <file path=customXml/itemProps1.xml><?xml version="1.0" encoding="utf-8"?>
 <ds:datastoreItem xmlns:ds="http://schemas.openxmlformats.org/officeDocument/2006/customXml" ds:itemID="{5E60DA82-F298-4C61-A5B5-247E3F9E524D}">
-  <ds:schemaRefs>
-    <ds:schemaRef ds:uri="http://schemas.microsoft.com/sharepoint/v3/contenttype/forms"/>
-  </ds:schemaRefs>
+  <ds:schemaRefs/>
 </ds:datastoreItem>
 </file>
 
 <file path=customXml/itemProps2.xml><?xml version="1.0" encoding="utf-8"?>
 <ds:datastoreItem xmlns:ds="http://schemas.openxmlformats.org/officeDocument/2006/customXml" ds:itemID="{B140E8CF-1284-42B5-AE63-5DAA305DEF64}">
-  <ds:schemaRefs>
-    <ds:schemaRef ds:uri="http://schemas.microsoft.com/office/2006/metadata/contentType"/>
-    <ds:schemaRef ds:uri="http://schemas.microsoft.com/office/2006/metadata/properties/metaAttributes"/>
-    <ds:schemaRef ds:uri="http://www.w3.org/2001/XMLSchema"/>
-    <ds:schemaRef ds:uri="http://schemas.microsoft.com/office/2006/metadata/properties"/>
-    <ds:schemaRef ds:uri="http://schemas.openxmlformats.org/package/2006/metadata/core-properties"/>
-    <ds:schemaRef ds:uri="http://purl.org/dc/elements/1.1/"/>
-    <ds:schemaRef ds:uri="http://purl.org/dc/terms/"/>
-    <ds:schemaRef ds:uri="http://schemas.microsoft.com/internal/obd"/>
-    <ds:schemaRef ds:uri="http://schemas.microsoft.com/office/infopath/2007/PartnerControls"/>
-  </ds:schemaRefs>
+  <ds:schemaRefs/>
 </ds:datastoreItem>
 </file>
 
 <file path=customXml/itemProps3.xml><?xml version="1.0" encoding="utf-8"?>
 <ds:datastoreItem xmlns:ds="http://schemas.openxmlformats.org/officeDocument/2006/customXml" ds:itemID="{9AC1766B-B3F5-4F42-8D20-7E7B2DE9B786}">
-  <ds:schemaRefs>
-    <ds:schemaRef ds:uri="http://schemas.microsoft.com/office/2006/metadata/properties"/>
-    <ds:schemaRef ds:uri="http://schemas.microsoft.com/office/infopath/2007/PartnerControls"/>
-  </ds:schemaRefs>
+  <ds:schemaRefs/>
 </ds:datastoreItem>
 </file>